--- a/powerpoints/Data_Science_Werkcollege8.pptx
+++ b/powerpoints/Data_Science_Werkcollege8.pptx
@@ -15,6 +15,10 @@
     <p:sldId id="263" r:id="rId15"/>
     <p:sldId id="264" r:id="rId16"/>
     <p:sldId id="265" r:id="rId17"/>
+    <p:sldId id="266" r:id="rId18"/>
+    <p:sldId id="267" r:id="rId19"/>
+    <p:sldId id="268" r:id="rId20"/>
+    <p:sldId id="269" r:id="rId21"/>
   </p:sldIdLst>
   <p:sldSz cx="12191695" cy="6858000" type="screen4x3"/>
   <p:notesSz cx="6858000" cy="9144000"/>
@@ -542,6 +546,328 @@
 </p:notes>
 </file>
 
+<file path=ppt/notesSlides/notesSlide10.xml><?xml version="1.0" encoding="utf-8"?>
+<p:notes xmlns:a="http://schemas.openxmlformats.org/drawingml/2006/main" xmlns:p="http://schemas.openxmlformats.org/presentationml/2006/main" xmlns:r="http://schemas.openxmlformats.org/officeDocument/2006/relationships">
+  <p:cSld>
+    <p:spTree>
+      <p:nvGrpSpPr>
+        <p:cNvPr id="1" name=""/>
+        <p:cNvGrpSpPr/>
+        <p:nvPr/>
+      </p:nvGrpSpPr>
+      <p:grpSpPr>
+        <a:xfrm>
+          <a:off x="0" y="0"/>
+          <a:ext cx="0" cy="0"/>
+          <a:chOff x="0" y="0"/>
+          <a:chExt cx="0" cy="0"/>
+        </a:xfrm>
+      </p:grpSpPr>
+      <p:sp>
+        <p:nvSpPr>
+          <p:cNvPr id="2" name="Slide Image Placeholder 1"/>
+          <p:cNvSpPr>
+            <a:spLocks noGrp="1"/>
+          </p:cNvSpPr>
+          <p:nvPr>
+            <p:ph type="sldImg" idx="2"/>
+          </p:nvPr>
+        </p:nvSpPr>
+        <p:spPr/>
+      </p:sp>
+      <p:sp>
+        <p:nvSpPr>
+          <p:cNvPr id="3" name="Notes Placeholder 2"/>
+          <p:cNvSpPr>
+            <a:spLocks noGrp="1"/>
+          </p:cNvSpPr>
+          <p:nvPr>
+            <p:ph type="body" idx="3" sz="quarter"/>
+          </p:nvPr>
+        </p:nvSpPr>
+        <p:spPr/>
+        <p:txBody>
+          <a:bodyPr/>
+          <a:lstStyle/>
+          <a:p>
+            <a:r>
+              <a:t>Dit is de grafiek die het dichtst bij 'wat moet ik veranderen' komt. Per actiesoort: wat leverde die jou op, en wat leverde die de rest op?</a:t>
+            </a:r>
+          </a:p>
+          <a:p/>
+          <a:p>
+            <a:r>
+              <a:t>Let op de n= achter elk getal, en maak daar een punt van. In dit voorbeeld verliest de grote raise 84 chips per hand terwijl de klas er 175 mee wint — maar over zeven handen. Dat is geen conclusie, dat is een aanwijzing waar je verder moet kijken.</a:t>
+            </a:r>
+          </a:p>
+          <a:p/>
+          <a:p>
+            <a:r>
+              <a:t>Wie hier een echt verschil ziet bij een actie die hij vaak doet, heeft zijn verandering voor Deel 4 gevonden.</a:t>
+            </a:r>
+          </a:p>
+        </p:txBody>
+      </p:sp>
+      <p:sp>
+        <p:nvSpPr>
+          <p:cNvPr id="4" name="Slide Number Placeholder 3"/>
+          <p:cNvSpPr>
+            <a:spLocks noGrp="1"/>
+          </p:cNvSpPr>
+          <p:nvPr>
+            <p:ph type="sldNum" idx="5" sz="quarter"/>
+          </p:nvPr>
+        </p:nvSpPr>
+        <p:spPr/>
+      </p:sp>
+    </p:spTree>
+  </p:cSld>
+  <p:clrMapOvr>
+    <a:masterClrMapping/>
+  </p:clrMapOvr>
+</p:notes>
+</file>
+
+<file path=ppt/notesSlides/notesSlide11.xml><?xml version="1.0" encoding="utf-8"?>
+<p:notes xmlns:a="http://schemas.openxmlformats.org/drawingml/2006/main" xmlns:p="http://schemas.openxmlformats.org/presentationml/2006/main" xmlns:r="http://schemas.openxmlformats.org/officeDocument/2006/relationships">
+  <p:cSld>
+    <p:spTree>
+      <p:nvGrpSpPr>
+        <p:cNvPr id="1" name=""/>
+        <p:cNvGrpSpPr/>
+        <p:nvPr/>
+      </p:nvGrpSpPr>
+      <p:grpSpPr>
+        <a:xfrm>
+          <a:off x="0" y="0"/>
+          <a:ext cx="0" cy="0"/>
+          <a:chOff x="0" y="0"/>
+          <a:chExt cx="0" cy="0"/>
+        </a:xfrm>
+      </p:grpSpPr>
+      <p:sp>
+        <p:nvSpPr>
+          <p:cNvPr id="2" name="Slide Image Placeholder 1"/>
+          <p:cNvSpPr>
+            <a:spLocks noGrp="1"/>
+          </p:cNvSpPr>
+          <p:nvPr>
+            <p:ph type="sldImg" idx="2"/>
+          </p:nvPr>
+        </p:nvSpPr>
+        <p:spPr/>
+      </p:sp>
+      <p:sp>
+        <p:nvSpPr>
+          <p:cNvPr id="3" name="Notes Placeholder 2"/>
+          <p:cNvSpPr>
+            <a:spLocks noGrp="1"/>
+          </p:cNvSpPr>
+          <p:nvPr>
+            <p:ph type="body" idx="3" sz="quarter"/>
+          </p:nvPr>
+        </p:nvSpPr>
+        <p:spPr/>
+        <p:txBody>
+          <a:bodyPr/>
+          <a:lstStyle/>
+          <a:p>
+            <a:r>
+              <a:t>Een gemiddelde verstopt hoe vaak iets voorkwam. Hier staat de optelsom: welke handen hebben jou over het hele toernooi het meeste gekost, en welke het meeste opgeleverd.</a:t>
+            </a:r>
+          </a:p>
+          <a:p/>
+          <a:p>
+            <a:r>
+              <a:t>In dit voorbeeld is K-10 de duurste hand (-1.010 chips over 10 handen) en A-K de beste (+2.000 over 9).</a:t>
+            </a:r>
+          </a:p>
+          <a:p/>
+          <a:p>
+            <a:r>
+              <a:t>De vraag die ze zichzelf moeten stellen: speel ik die duurste hand eigenlijk wel bewust, of valt hij per ongeluk binnen een van mijn drempels?</a:t>
+            </a:r>
+          </a:p>
+        </p:txBody>
+      </p:sp>
+      <p:sp>
+        <p:nvSpPr>
+          <p:cNvPr id="4" name="Slide Number Placeholder 3"/>
+          <p:cNvSpPr>
+            <a:spLocks noGrp="1"/>
+          </p:cNvSpPr>
+          <p:nvPr>
+            <p:ph type="sldNum" idx="5" sz="quarter"/>
+          </p:nvPr>
+        </p:nvSpPr>
+        <p:spPr/>
+      </p:sp>
+    </p:spTree>
+  </p:cSld>
+  <p:clrMapOvr>
+    <a:masterClrMapping/>
+  </p:clrMapOvr>
+</p:notes>
+</file>
+
+<file path=ppt/notesSlides/notesSlide12.xml><?xml version="1.0" encoding="utf-8"?>
+<p:notes xmlns:a="http://schemas.openxmlformats.org/drawingml/2006/main" xmlns:p="http://schemas.openxmlformats.org/presentationml/2006/main" xmlns:r="http://schemas.openxmlformats.org/officeDocument/2006/relationships">
+  <p:cSld>
+    <p:spTree>
+      <p:nvGrpSpPr>
+        <p:cNvPr id="1" name=""/>
+        <p:cNvGrpSpPr/>
+        <p:nvPr/>
+      </p:nvGrpSpPr>
+      <p:grpSpPr>
+        <a:xfrm>
+          <a:off x="0" y="0"/>
+          <a:ext cx="0" cy="0"/>
+          <a:chOff x="0" y="0"/>
+          <a:chExt cx="0" cy="0"/>
+        </a:xfrm>
+      </p:grpSpPr>
+      <p:sp>
+        <p:nvSpPr>
+          <p:cNvPr id="2" name="Slide Image Placeholder 1"/>
+          <p:cNvSpPr>
+            <a:spLocks noGrp="1"/>
+          </p:cNvSpPr>
+          <p:nvPr>
+            <p:ph type="sldImg" idx="2"/>
+          </p:nvPr>
+        </p:nvSpPr>
+        <p:spPr/>
+      </p:sp>
+      <p:sp>
+        <p:nvSpPr>
+          <p:cNvPr id="3" name="Notes Placeholder 2"/>
+          <p:cNvSpPr>
+            <a:spLocks noGrp="1"/>
+          </p:cNvSpPr>
+          <p:nvPr>
+            <p:ph type="body" idx="3" sz="quarter"/>
+          </p:nvPr>
+        </p:nvSpPr>
+        <p:spPr/>
+        <p:txBody>
+          <a:bodyPr/>
+          <a:lstStyle/>
+          <a:p>
+            <a:r>
+              <a:t>De beste bot haalde gemiddeld 1.690 chips, met een standaarddeviatie van 1.067. De nummer twee zit op 1.666.</a:t>
+            </a:r>
+          </a:p>
+          <a:p/>
+          <a:p>
+            <a:r>
+              <a:t>Het verschil tussen nummer 1 en nummer 2 is kleiner dan de spreiding binnen één bot. Laat dat even staan.</a:t>
+            </a:r>
+          </a:p>
+          <a:p/>
+          <a:p>
+            <a:r>
+              <a:t>Daarom loopt de bonus over twee toernooien, en daarom is 'ik ben gezakt van plek 3 naar plek 9' geen bewijs dat je bot slechter is geworden.</a:t>
+            </a:r>
+          </a:p>
+        </p:txBody>
+      </p:sp>
+      <p:sp>
+        <p:nvSpPr>
+          <p:cNvPr id="4" name="Slide Number Placeholder 3"/>
+          <p:cNvSpPr>
+            <a:spLocks noGrp="1"/>
+          </p:cNvSpPr>
+          <p:nvPr>
+            <p:ph type="sldNum" idx="5" sz="quarter"/>
+          </p:nvPr>
+        </p:nvSpPr>
+        <p:spPr/>
+      </p:sp>
+    </p:spTree>
+  </p:cSld>
+  <p:clrMapOvr>
+    <a:masterClrMapping/>
+  </p:clrMapOvr>
+</p:notes>
+</file>
+
+<file path=ppt/notesSlides/notesSlide13.xml><?xml version="1.0" encoding="utf-8"?>
+<p:notes xmlns:a="http://schemas.openxmlformats.org/drawingml/2006/main" xmlns:p="http://schemas.openxmlformats.org/presentationml/2006/main" xmlns:r="http://schemas.openxmlformats.org/officeDocument/2006/relationships">
+  <p:cSld>
+    <p:spTree>
+      <p:nvGrpSpPr>
+        <p:cNvPr id="1" name=""/>
+        <p:cNvGrpSpPr/>
+        <p:nvPr/>
+      </p:nvGrpSpPr>
+      <p:grpSpPr>
+        <a:xfrm>
+          <a:off x="0" y="0"/>
+          <a:ext cx="0" cy="0"/>
+          <a:chOff x="0" y="0"/>
+          <a:chExt cx="0" cy="0"/>
+        </a:xfrm>
+      </p:grpSpPr>
+      <p:sp>
+        <p:nvSpPr>
+          <p:cNvPr id="2" name="Slide Image Placeholder 1"/>
+          <p:cNvSpPr>
+            <a:spLocks noGrp="1"/>
+          </p:cNvSpPr>
+          <p:nvPr>
+            <p:ph type="sldImg" idx="2"/>
+          </p:nvPr>
+        </p:nvSpPr>
+        <p:spPr/>
+      </p:sp>
+      <p:sp>
+        <p:nvSpPr>
+          <p:cNvPr id="3" name="Notes Placeholder 2"/>
+          <p:cNvSpPr>
+            <a:spLocks noGrp="1"/>
+          </p:cNvSpPr>
+          <p:nvPr>
+            <p:ph type="body" idx="3" sz="quarter"/>
+          </p:nvPr>
+        </p:nvSpPr>
+        <p:spPr/>
+        <p:txBody>
+          <a:bodyPr/>
+          <a:lstStyle/>
+          <a:p>
+            <a:r>
+              <a:t>Sluit hiermee af, en wijs vooruit: donderdagochtend draait de oefenronde. Dan weten ze binnen een dag of hun verandering iets deed.</a:t>
+            </a:r>
+          </a:p>
+          <a:p/>
+          <a:p>
+            <a:r>
+              <a:t>Dat is de hele cyclus die dit vak wil laten zien: meten, concluderen, aanpassen, opnieuw meten. Niet één keer een analyse maken en hopen.</a:t>
+            </a:r>
+          </a:p>
+        </p:txBody>
+      </p:sp>
+      <p:sp>
+        <p:nvSpPr>
+          <p:cNvPr id="4" name="Slide Number Placeholder 3"/>
+          <p:cNvSpPr>
+            <a:spLocks noGrp="1"/>
+          </p:cNvSpPr>
+          <p:nvPr>
+            <p:ph type="sldNum" idx="5" sz="quarter"/>
+          </p:nvPr>
+        </p:nvSpPr>
+        <p:spPr/>
+      </p:sp>
+    </p:spTree>
+  </p:cSld>
+  <p:clrMapOvr>
+    <a:masterClrMapping/>
+  </p:clrMapOvr>
+</p:notes>
+</file>
+
 <file path=ppt/notesSlides/notesSlide2.xml><?xml version="1.0" encoding="utf-8"?>
 <p:notes xmlns:a="http://schemas.openxmlformats.org/drawingml/2006/main" xmlns:p="http://schemas.openxmlformats.org/presentationml/2006/main" xmlns:r="http://schemas.openxmlformats.org/officeDocument/2006/relationships">
   <p:cSld>
@@ -587,19 +913,13 @@
           <a:lstStyle/>
           <a:p>
             <a:r>
-              <a:t>Fold 65.9%, call 21.0%, raise 12.0%.</a:t>
+              <a:t>Kort ophalen, niet opnieuw uitleggen. Ze hebben dit vorige week gedaan; het punt is dat ze zien dat het nu ergens voor dient.</a:t>
             </a:r>
           </a:p>
           <a:p/>
           <a:p>
             <a:r>
-              <a:t>Vraag het eerst aan de zaal voor je het laat zien: hoeveel procent denken jullie? De meesten schatten veel te laag.</a:t>
-            </a:r>
-          </a:p>
-          <a:p/>
-          <a:p>
-            <a:r>
-              <a:t>En dan de vervolgvraag die de hele middag draagt: als twee op de drie beslissingen een fold is, wat betekent dat voor jouw bot? Agressie is goedkoop tegen een tafel die wegloopt.</a:t>
+              <a:t>De kleurkeuze mag je hardop verantwoorden: ik heb het groen-rood van onze eigen huisstijl door een kleurenblindheidstest gehaald en het zakte — de twee liggen voor protanopie te dicht bij elkaar. Vandaar blauw. Dat is precies het soort controle dat zij in Deel 6 hebben geleerd.</a:t>
             </a:r>
           </a:p>
         </p:txBody>
@@ -669,13 +989,19 @@
           <a:lstStyle/>
           <a:p>
             <a:r>
-              <a:t>De mediaan ligt op 72,3%. De bot die hier oranje is, zit op 75,6%.</a:t>
+              <a:t>Fold 65.9%, call 21.0%, raise 12.0%.</a:t>
             </a:r>
           </a:p>
           <a:p/>
           <a:p>
             <a:r>
-              <a:t>Laat ze zichzelf opzoeken — dat is de opdracht in 3.2. Wie boven de 80% zit doet nauwelijks mee; wie onder de 20% zit betaalt overal aan mee.</a:t>
+              <a:t>Vraag het eerst aan de zaal voor je het laat zien: hoeveel procent denken jullie? De meesten schatten veel te laag.</a:t>
+            </a:r>
+          </a:p>
+          <a:p/>
+          <a:p>
+            <a:r>
+              <a:t>En dan de vervolgvraag die de hele middag draagt: als twee op de drie beslissingen een fold is, wat betekent dat voor jouw bot? Agressie is goedkoop tegen een tafel die wegloopt.</a:t>
             </a:r>
           </a:p>
         </p:txBody>
@@ -745,19 +1071,13 @@
           <a:lstStyle/>
           <a:p>
             <a:r>
-              <a:t>Dit is de statistiek die ik er zelf bij heb gezocht, en de uitkomst verraste me: een correlatie van +0,45 tussen fold-percentage en eindstand. In dít veld deden de tightere bots het beter.</a:t>
+              <a:t>De mediaan ligt op 72,3%. De bot die hier oranje is, zit op 75,6%.</a:t>
             </a:r>
           </a:p>
           <a:p/>
           <a:p>
             <a:r>
-              <a:t>Belangrijk om erbij te zeggen: dat is geen algemene pokerwaarheid. Het zegt iets over dit veld — er zitten een paar bots in die alles callen, en die verliezen langzaam hun chips aan iedereen. Tegen een tafel vol tighte bots zou de lijn andersom kunnen lopen.</a:t>
-            </a:r>
-          </a:p>
-          <a:p/>
-          <a:p>
-            <a:r>
-              <a:t>Goede vraag voor de zaal: is dit oorzaak of gevolg?</a:t>
+              <a:t>Laat ze zichzelf opzoeken — dat is de opdracht in 3.2. Wie boven de 80% zit doet nauwelijks mee; wie onder de 20% zit betaalt overal aan mee.</a:t>
             </a:r>
           </a:p>
         </p:txBody>
@@ -827,19 +1147,19 @@
           <a:lstStyle/>
           <a:p>
             <a:r>
-              <a:t>Dit is mijn favoriete plaat van de middag. Niemand heeft zijn code gedeeld, en toch zie je precies waar de klas zijn grens legt.</a:t>
+              <a:t>Dit is de statistiek die ik er zelf bij heb gezocht, en de uitkomst verraste me: een correlatie van +0,45 tussen fold-percentage en eindstand. In dít veld deden de tightere bots het beter.</a:t>
             </a:r>
           </a:p>
           <a:p/>
           <a:p>
             <a:r>
-              <a:t>Let op het patroon: de diagonaal (paren) is licht, de linkerbovenhoek (aas, heer) is licht, en rechtsonder wordt alles weggegooid. Dat is de winkans-tabel uit Werkcollege 5 — maar dan afgeleid uit gedrag in plaats van uit een simulatie.</a:t>
+              <a:t>Belangrijk om erbij te zeggen: dat is geen algemene pokerwaarheid. Het zegt iets over dit veld — er zitten een paar bots in die alles callen, en die verliezen langzaam hun chips aan iedereen. Tegen een tafel vol tighte bots zou de lijn andersom kunnen lopen.</a:t>
             </a:r>
           </a:p>
           <a:p/>
           <a:p>
             <a:r>
-              <a:t>De kleur is één hue van licht naar donker, want dit is een oplopende schaal en geen set categorieën.</a:t>
+              <a:t>Goede vraag voor de zaal: is dit oorzaak of gevolg?</a:t>
             </a:r>
           </a:p>
         </p:txBody>
@@ -909,19 +1229,19 @@
           <a:lstStyle/>
           <a:p>
             <a:r>
-              <a:t>Nu twee kleuren om een nulpunt heen, want winst heeft een richting.</a:t>
+              <a:t>Dit is mijn favoriete plaat van de middag. Niemand heeft zijn code gedeeld, en toch zie je precies waar de klas zijn grens legt.</a:t>
             </a:r>
           </a:p>
           <a:p/>
           <a:p>
             <a:r>
-              <a:t>A-A staat ver boven de rest; de schaal is op het 92e percentiel afgekapt, anders zou al het andere wit worden. Dat is een keuze die je hardop moet maken en niet stilletjes.</a:t>
+              <a:t>Let op het patroon: de diagonaal (paren) is licht, de linkerbovenhoek (aas, heer) is licht, en rechtsonder wordt alles weggegooid. Dat is de winkans-tabel uit Werkcollege 5 — maar dan afgeleid uit gedrag in plaats van uit een simulatie.</a:t>
             </a:r>
           </a:p>
           <a:p/>
           <a:p>
             <a:r>
-              <a:t>De vraag die telt: leg deze plaat naast de vorige. Waar is een vakje donkergroen in déze, en donkergroen in die? Dan gooit de klas iets weg waar geld in zit.</a:t>
+              <a:t>De kleur is één hue van licht naar donker, want dit is een oplopende schaal en geen set categorieën.</a:t>
             </a:r>
           </a:p>
         </p:txBody>
@@ -991,13 +1311,19 @@
           <a:lstStyle/>
           <a:p>
             <a:r>
-              <a:t>Hier komen 3.3 en 3.4 samen, en dit is wat ik ze mee wil geven: data science levert zelden een antwoord, het levert een kandidaat.</a:t>
+              <a:t>Nu twee kleuren om een nulpunt heen, want winst heeft een richting.</a:t>
             </a:r>
           </a:p>
           <a:p/>
           <a:p>
             <a:r>
-              <a:t>Die tweede vraag is de eerlijke. Wie deze hand speelde was misschien juist de betere bot, en dan meet je de bot en niet de hand. Dat heet selectie-effect, en het is de reden dat je het op donderdag toetst in plaats van het te geloven.</a:t>
+              <a:t>A-A staat ver boven de rest; de schaal is op het 92e percentiel afgekapt, anders zou al het andere wit worden. Dat is een keuze die je hardop moet maken en niet stilletjes.</a:t>
+            </a:r>
+          </a:p>
+          <a:p/>
+          <a:p>
+            <a:r>
+              <a:t>De vraag die telt: leg deze plaat naast de vorige. Waar is een vakje donkergroen in déze, en donkergroen in die? Dan gooit de klas iets weg waar geld in zit.</a:t>
             </a:r>
           </a:p>
         </p:txBody>
@@ -1067,19 +1393,13 @@
           <a:lstStyle/>
           <a:p>
             <a:r>
-              <a:t>De beste bot haalde gemiddeld 1.690 chips, met een standaarddeviatie van 1.067. De nummer twee zit op 1.666.</a:t>
+              <a:t>Hier komen 3.3 en 3.4 samen, en dit is wat ik ze mee wil geven: data science levert zelden een antwoord, het levert een kandidaat.</a:t>
             </a:r>
           </a:p>
           <a:p/>
           <a:p>
             <a:r>
-              <a:t>Het verschil tussen nummer 1 en nummer 2 is kleiner dan de spreiding binnen één bot. Laat dat even staan.</a:t>
-            </a:r>
-          </a:p>
-          <a:p/>
-          <a:p>
-            <a:r>
-              <a:t>Daarom loopt de bonus over twee toernooien, en daarom is 'ik ben gezakt van plek 3 naar plek 9' geen bewijs dat je bot slechter is geworden.</a:t>
+              <a:t>Die tweede vraag is de eerlijke. Wie deze hand speelde was misschien juist de betere bot, en dan meet je de bot en niet de hand. Dat heet selectie-effect, en het is de reden dat je het op donderdag toetst in plaats van het te geloven.</a:t>
             </a:r>
           </a:p>
         </p:txBody>
@@ -1149,13 +1469,19 @@
           <a:lstStyle/>
           <a:p>
             <a:r>
-              <a:t>Sluit hiermee af, en wijs vooruit: donderdagochtend draait de oefenronde. Dan weten ze binnen een dag of hun verandering iets deed.</a:t>
+              <a:t>Hier staat Visual Maandag in één plaat: twintig grijze lijnen, twee uitgelicht, en een titel die iets beweert.</a:t>
             </a:r>
           </a:p>
           <a:p/>
           <a:p>
             <a:r>
-              <a:t>Dat is de hele cyclus die dit vak wil laten zien: meten, concluderen, aanpassen, opnieuw meten. Niet één keer een analyse maken en hopen.</a:t>
+              <a:t>Deze bot eindigde in zijn beste simulatie op 3.520 chips en in zijn slechtste op 0. Zelfde code, zelfde drempels, andere kaarten.</a:t>
+            </a:r>
+          </a:p>
+          <a:p/>
+          <a:p>
+            <a:r>
+              <a:t>Laat ze dit zelf maken voor hun eigen bot — het is één groupby en een plot, en het is de meest persoonlijke grafiek van de middag.</a:t>
             </a:r>
           </a:p>
         </p:txBody>
@@ -4377,6 +4703,550 @@
               </a:defRPr>
             </a:pPr>
             <a:r>
+              <a:t>JOUW EIGEN SPEL</a:t>
+            </a:r>
+          </a:p>
+          <a:p>
+            <a:pPr>
+              <a:spcBef>
+                <a:spcPts val="400"/>
+              </a:spcBef>
+              <a:defRPr sz="2400" b="1">
+                <a:solidFill>
+                  <a:srgbClr val="121E31"/>
+                </a:solidFill>
+              </a:defRPr>
+            </a:pPr>
+            <a:r>
+              <a:t>Dezelfde bot, twintig keer een ander verhaal</a:t>
+            </a:r>
+          </a:p>
+        </p:txBody>
+      </p:sp>
+      <p:pic>
+        <p:nvPicPr>
+          <p:cNvPr id="4" name="Picture 3" descr="wc8_stackverloop.png"/>
+          <p:cNvPicPr>
+            <a:picLocks noChangeAspect="1"/>
+          </p:cNvPicPr>
+          <p:nvPr/>
+        </p:nvPicPr>
+        <p:blipFill>
+          <a:blip r:embed="rId2"/>
+          <a:stretch>
+            <a:fillRect/>
+          </a:stretch>
+        </p:blipFill>
+        <p:spPr>
+          <a:xfrm>
+            <a:off x="1957224" y="1600200"/>
+            <a:ext cx="8277246" cy="4572000"/>
+          </a:xfrm>
+          <a:prstGeom prst="rect">
+            <a:avLst/>
+          </a:prstGeom>
+        </p:spPr>
+      </p:pic>
+    </p:spTree>
+  </p:cSld>
+  <p:clrMapOvr>
+    <a:masterClrMapping/>
+  </p:clrMapOvr>
+</p:sld>
+</file>
+
+<file path=ppt/slides/slide11.xml><?xml version="1.0" encoding="utf-8"?>
+<p:sld xmlns:a="http://schemas.openxmlformats.org/drawingml/2006/main" xmlns:p="http://schemas.openxmlformats.org/presentationml/2006/main" xmlns:r="http://schemas.openxmlformats.org/officeDocument/2006/relationships">
+  <p:cSld>
+    <p:spTree>
+      <p:nvGrpSpPr>
+        <p:cNvPr id="1" name=""/>
+        <p:cNvGrpSpPr/>
+        <p:nvPr/>
+      </p:nvGrpSpPr>
+      <p:grpSpPr/>
+      <p:sp>
+        <p:nvSpPr>
+          <p:cNvPr id="2" name="Rectangle 1"/>
+          <p:cNvSpPr/>
+          <p:nvPr/>
+        </p:nvSpPr>
+        <p:spPr>
+          <a:xfrm>
+            <a:off x="0" y="0"/>
+            <a:ext cx="12191695" cy="6858000"/>
+          </a:xfrm>
+          <a:prstGeom prst="rect">
+            <a:avLst/>
+          </a:prstGeom>
+          <a:solidFill>
+            <a:srgbClr val="F8F9FA"/>
+          </a:solidFill>
+          <a:ln>
+            <a:noFill/>
+          </a:ln>
+          <a:effectLst/>
+        </p:spPr>
+        <p:style>
+          <a:lnRef idx="1">
+            <a:schemeClr val="accent1"/>
+          </a:lnRef>
+          <a:fillRef idx="3">
+            <a:schemeClr val="accent1"/>
+          </a:fillRef>
+          <a:effectRef idx="2">
+            <a:schemeClr val="accent1"/>
+          </a:effectRef>
+          <a:fontRef idx="minor">
+            <a:schemeClr val="lt1"/>
+          </a:fontRef>
+        </p:style>
+        <p:txBody>
+          <a:bodyPr rtlCol="0" anchor="ctr"/>
+          <a:lstStyle/>
+          <a:p>
+            <a:pPr algn="ctr"/>
+          </a:p>
+        </p:txBody>
+      </p:sp>
+      <p:sp>
+        <p:nvSpPr>
+          <p:cNvPr id="3" name="TextBox 2"/>
+          <p:cNvSpPr txBox="1"/>
+          <p:nvPr/>
+        </p:nvSpPr>
+        <p:spPr>
+          <a:xfrm>
+            <a:off x="731520" y="384048"/>
+            <a:ext cx="10698480" cy="1005840"/>
+          </a:xfrm>
+          <a:prstGeom prst="rect">
+            <a:avLst/>
+          </a:prstGeom>
+          <a:noFill/>
+        </p:spPr>
+        <p:txBody>
+          <a:bodyPr wrap="square">
+            <a:spAutoFit/>
+          </a:bodyPr>
+          <a:lstStyle/>
+          <a:p>
+            <a:pPr>
+              <a:defRPr sz="1000" b="1">
+                <a:solidFill>
+                  <a:srgbClr val="1B4D3E"/>
+                </a:solidFill>
+              </a:defRPr>
+            </a:pPr>
+            <a:r>
+              <a:t>JOUW ACTIES</a:t>
+            </a:r>
+          </a:p>
+          <a:p>
+            <a:pPr>
+              <a:spcBef>
+                <a:spcPts val="400"/>
+              </a:spcBef>
+              <a:defRPr sz="2400" b="1">
+                <a:solidFill>
+                  <a:srgbClr val="121E31"/>
+                </a:solidFill>
+              </a:defRPr>
+            </a:pPr>
+            <a:r>
+              <a:t>Levert jouw raise meer op dan die van de klas?</a:t>
+            </a:r>
+          </a:p>
+        </p:txBody>
+      </p:sp>
+      <p:pic>
+        <p:nvPicPr>
+          <p:cNvPr id="4" name="Picture 3" descr="wc8_jij_tegenover_klas.png"/>
+          <p:cNvPicPr>
+            <a:picLocks noChangeAspect="1"/>
+          </p:cNvPicPr>
+          <p:nvPr/>
+        </p:nvPicPr>
+        <p:blipFill>
+          <a:blip r:embed="rId2"/>
+          <a:stretch>
+            <a:fillRect/>
+          </a:stretch>
+        </p:blipFill>
+        <p:spPr>
+          <a:xfrm>
+            <a:off x="1934404" y="1600200"/>
+            <a:ext cx="8322886" cy="4572000"/>
+          </a:xfrm>
+          <a:prstGeom prst="rect">
+            <a:avLst/>
+          </a:prstGeom>
+        </p:spPr>
+      </p:pic>
+    </p:spTree>
+  </p:cSld>
+  <p:clrMapOvr>
+    <a:masterClrMapping/>
+  </p:clrMapOvr>
+</p:sld>
+</file>
+
+<file path=ppt/slides/slide12.xml><?xml version="1.0" encoding="utf-8"?>
+<p:sld xmlns:a="http://schemas.openxmlformats.org/drawingml/2006/main" xmlns:p="http://schemas.openxmlformats.org/presentationml/2006/main" xmlns:r="http://schemas.openxmlformats.org/officeDocument/2006/relationships">
+  <p:cSld>
+    <p:spTree>
+      <p:nvGrpSpPr>
+        <p:cNvPr id="1" name=""/>
+        <p:cNvGrpSpPr/>
+        <p:nvPr/>
+      </p:nvGrpSpPr>
+      <p:grpSpPr/>
+      <p:sp>
+        <p:nvSpPr>
+          <p:cNvPr id="2" name="Rectangle 1"/>
+          <p:cNvSpPr/>
+          <p:nvPr/>
+        </p:nvSpPr>
+        <p:spPr>
+          <a:xfrm>
+            <a:off x="0" y="0"/>
+            <a:ext cx="12191695" cy="6858000"/>
+          </a:xfrm>
+          <a:prstGeom prst="rect">
+            <a:avLst/>
+          </a:prstGeom>
+          <a:solidFill>
+            <a:srgbClr val="F8F9FA"/>
+          </a:solidFill>
+          <a:ln>
+            <a:noFill/>
+          </a:ln>
+          <a:effectLst/>
+        </p:spPr>
+        <p:style>
+          <a:lnRef idx="1">
+            <a:schemeClr val="accent1"/>
+          </a:lnRef>
+          <a:fillRef idx="3">
+            <a:schemeClr val="accent1"/>
+          </a:fillRef>
+          <a:effectRef idx="2">
+            <a:schemeClr val="accent1"/>
+          </a:effectRef>
+          <a:fontRef idx="minor">
+            <a:schemeClr val="lt1"/>
+          </a:fontRef>
+        </p:style>
+        <p:txBody>
+          <a:bodyPr rtlCol="0" anchor="ctr"/>
+          <a:lstStyle/>
+          <a:p>
+            <a:pPr algn="ctr"/>
+          </a:p>
+        </p:txBody>
+      </p:sp>
+      <p:sp>
+        <p:nvSpPr>
+          <p:cNvPr id="3" name="TextBox 2"/>
+          <p:cNvSpPr txBox="1"/>
+          <p:nvPr/>
+        </p:nvSpPr>
+        <p:spPr>
+          <a:xfrm>
+            <a:off x="731520" y="384048"/>
+            <a:ext cx="10698480" cy="1005840"/>
+          </a:xfrm>
+          <a:prstGeom prst="rect">
+            <a:avLst/>
+          </a:prstGeom>
+          <a:noFill/>
+        </p:spPr>
+        <p:txBody>
+          <a:bodyPr wrap="square">
+            <a:spAutoFit/>
+          </a:bodyPr>
+          <a:lstStyle/>
+          <a:p>
+            <a:pPr>
+              <a:defRPr sz="1000" b="1">
+                <a:solidFill>
+                  <a:srgbClr val="1B4D3E"/>
+                </a:solidFill>
+              </a:defRPr>
+            </a:pPr>
+            <a:r>
+              <a:t>WAAR GING JE GELD HEEN?</a:t>
+            </a:r>
+          </a:p>
+          <a:p>
+            <a:pPr>
+              <a:spcBef>
+                <a:spcPts val="400"/>
+              </a:spcBef>
+              <a:defRPr sz="2400" b="1">
+                <a:solidFill>
+                  <a:srgbClr val="121E31"/>
+                </a:solidFill>
+              </a:defRPr>
+            </a:pPr>
+            <a:r>
+              <a:t>Niet het gemiddelde, maar het totaal</a:t>
+            </a:r>
+          </a:p>
+        </p:txBody>
+      </p:sp>
+      <p:pic>
+        <p:nvPicPr>
+          <p:cNvPr id="4" name="Picture 3" descr="wc8_totale_bijdrage.png"/>
+          <p:cNvPicPr>
+            <a:picLocks noChangeAspect="1"/>
+          </p:cNvPicPr>
+          <p:nvPr/>
+        </p:nvPicPr>
+        <p:blipFill>
+          <a:blip r:embed="rId2"/>
+          <a:stretch>
+            <a:fillRect/>
+          </a:stretch>
+        </p:blipFill>
+        <p:spPr>
+          <a:xfrm>
+            <a:off x="2261341" y="1600200"/>
+            <a:ext cx="7669013" cy="4572000"/>
+          </a:xfrm>
+          <a:prstGeom prst="rect">
+            <a:avLst/>
+          </a:prstGeom>
+        </p:spPr>
+      </p:pic>
+    </p:spTree>
+  </p:cSld>
+  <p:clrMapOvr>
+    <a:masterClrMapping/>
+  </p:clrMapOvr>
+</p:sld>
+</file>
+
+<file path=ppt/slides/slide13.xml><?xml version="1.0" encoding="utf-8"?>
+<p:sld xmlns:a="http://schemas.openxmlformats.org/drawingml/2006/main" xmlns:p="http://schemas.openxmlformats.org/presentationml/2006/main" xmlns:r="http://schemas.openxmlformats.org/officeDocument/2006/relationships">
+  <p:cSld>
+    <p:spTree>
+      <p:nvGrpSpPr>
+        <p:cNvPr id="1" name=""/>
+        <p:cNvGrpSpPr/>
+        <p:nvPr/>
+      </p:nvGrpSpPr>
+      <p:grpSpPr/>
+      <p:sp>
+        <p:nvSpPr>
+          <p:cNvPr id="2" name="Rectangle 1"/>
+          <p:cNvSpPr/>
+          <p:nvPr/>
+        </p:nvSpPr>
+        <p:spPr>
+          <a:xfrm>
+            <a:off x="0" y="0"/>
+            <a:ext cx="12191695" cy="6858000"/>
+          </a:xfrm>
+          <a:prstGeom prst="rect">
+            <a:avLst/>
+          </a:prstGeom>
+          <a:solidFill>
+            <a:srgbClr val="F8F9FA"/>
+          </a:solidFill>
+          <a:ln>
+            <a:noFill/>
+          </a:ln>
+          <a:effectLst/>
+        </p:spPr>
+        <p:style>
+          <a:lnRef idx="1">
+            <a:schemeClr val="accent1"/>
+          </a:lnRef>
+          <a:fillRef idx="3">
+            <a:schemeClr val="accent1"/>
+          </a:fillRef>
+          <a:effectRef idx="2">
+            <a:schemeClr val="accent1"/>
+          </a:effectRef>
+          <a:fontRef idx="minor">
+            <a:schemeClr val="lt1"/>
+          </a:fontRef>
+        </p:style>
+        <p:txBody>
+          <a:bodyPr rtlCol="0" anchor="ctr"/>
+          <a:lstStyle/>
+          <a:p>
+            <a:pPr algn="ctr"/>
+          </a:p>
+        </p:txBody>
+      </p:sp>
+      <p:sp>
+        <p:nvSpPr>
+          <p:cNvPr id="3" name="TextBox 2"/>
+          <p:cNvSpPr txBox="1"/>
+          <p:nvPr/>
+        </p:nvSpPr>
+        <p:spPr>
+          <a:xfrm>
+            <a:off x="731520" y="384048"/>
+            <a:ext cx="10698480" cy="1005840"/>
+          </a:xfrm>
+          <a:prstGeom prst="rect">
+            <a:avLst/>
+          </a:prstGeom>
+          <a:noFill/>
+        </p:spPr>
+        <p:txBody>
+          <a:bodyPr wrap="square">
+            <a:spAutoFit/>
+          </a:bodyPr>
+          <a:lstStyle/>
+          <a:p>
+            <a:pPr>
+              <a:defRPr sz="1000" b="1">
+                <a:solidFill>
+                  <a:srgbClr val="1B4D3E"/>
+                </a:solidFill>
+              </a:defRPr>
+            </a:pPr>
+            <a:r>
+              <a:t>3.5 · HOEVEEL IS TOEVAL?</a:t>
+            </a:r>
+          </a:p>
+          <a:p>
+            <a:pPr>
+              <a:spcBef>
+                <a:spcPts val="400"/>
+              </a:spcBef>
+              <a:defRPr sz="2400" b="1">
+                <a:solidFill>
+                  <a:srgbClr val="121E31"/>
+                </a:solidFill>
+              </a:defRPr>
+            </a:pPr>
+            <a:r>
+              <a:t>Hoe stevig is een plek in de top-5?</a:t>
+            </a:r>
+          </a:p>
+        </p:txBody>
+      </p:sp>
+      <p:pic>
+        <p:nvPicPr>
+          <p:cNvPr id="4" name="Picture 3" descr="wc8_spreiding.png"/>
+          <p:cNvPicPr>
+            <a:picLocks noChangeAspect="1"/>
+          </p:cNvPicPr>
+          <p:nvPr/>
+        </p:nvPicPr>
+        <p:blipFill>
+          <a:blip r:embed="rId2"/>
+          <a:stretch>
+            <a:fillRect/>
+          </a:stretch>
+        </p:blipFill>
+        <p:spPr>
+          <a:xfrm>
+            <a:off x="2064489" y="1600200"/>
+            <a:ext cx="8062717" cy="4572000"/>
+          </a:xfrm>
+          <a:prstGeom prst="rect">
+            <a:avLst/>
+          </a:prstGeom>
+        </p:spPr>
+      </p:pic>
+    </p:spTree>
+  </p:cSld>
+  <p:clrMapOvr>
+    <a:masterClrMapping/>
+  </p:clrMapOvr>
+</p:sld>
+</file>
+
+<file path=ppt/slides/slide14.xml><?xml version="1.0" encoding="utf-8"?>
+<p:sld xmlns:a="http://schemas.openxmlformats.org/drawingml/2006/main" xmlns:p="http://schemas.openxmlformats.org/presentationml/2006/main" xmlns:r="http://schemas.openxmlformats.org/officeDocument/2006/relationships">
+  <p:cSld>
+    <p:spTree>
+      <p:nvGrpSpPr>
+        <p:cNvPr id="1" name=""/>
+        <p:cNvGrpSpPr/>
+        <p:nvPr/>
+      </p:nvGrpSpPr>
+      <p:grpSpPr/>
+      <p:sp>
+        <p:nvSpPr>
+          <p:cNvPr id="2" name="Rectangle 1"/>
+          <p:cNvSpPr/>
+          <p:nvPr/>
+        </p:nvSpPr>
+        <p:spPr>
+          <a:xfrm>
+            <a:off x="0" y="0"/>
+            <a:ext cx="12191695" cy="6858000"/>
+          </a:xfrm>
+          <a:prstGeom prst="rect">
+            <a:avLst/>
+          </a:prstGeom>
+          <a:solidFill>
+            <a:srgbClr val="F8F9FA"/>
+          </a:solidFill>
+          <a:ln>
+            <a:noFill/>
+          </a:ln>
+          <a:effectLst/>
+        </p:spPr>
+        <p:style>
+          <a:lnRef idx="1">
+            <a:schemeClr val="accent1"/>
+          </a:lnRef>
+          <a:fillRef idx="3">
+            <a:schemeClr val="accent1"/>
+          </a:fillRef>
+          <a:effectRef idx="2">
+            <a:schemeClr val="accent1"/>
+          </a:effectRef>
+          <a:fontRef idx="minor">
+            <a:schemeClr val="lt1"/>
+          </a:fontRef>
+        </p:style>
+        <p:txBody>
+          <a:bodyPr rtlCol="0" anchor="ctr"/>
+          <a:lstStyle/>
+          <a:p>
+            <a:pPr algn="ctr"/>
+          </a:p>
+        </p:txBody>
+      </p:sp>
+      <p:sp>
+        <p:nvSpPr>
+          <p:cNvPr id="3" name="TextBox 2"/>
+          <p:cNvSpPr txBox="1"/>
+          <p:nvPr/>
+        </p:nvSpPr>
+        <p:spPr>
+          <a:xfrm>
+            <a:off x="731520" y="384048"/>
+            <a:ext cx="10698480" cy="1005840"/>
+          </a:xfrm>
+          <a:prstGeom prst="rect">
+            <a:avLst/>
+          </a:prstGeom>
+          <a:noFill/>
+        </p:spPr>
+        <p:txBody>
+          <a:bodyPr wrap="square">
+            <a:spAutoFit/>
+          </a:bodyPr>
+          <a:lstStyle/>
+          <a:p>
+            <a:pPr>
+              <a:defRPr sz="1000" b="1">
+                <a:solidFill>
+                  <a:srgbClr val="1B4D3E"/>
+                </a:solidFill>
+              </a:defRPr>
+            </a:pPr>
+            <a:r>
               <a:t>EN NU JIJ</a:t>
             </a:r>
           </a:p>
@@ -4936,7 +5806,7 @@
               </a:defRPr>
             </a:pPr>
             <a:r>
-              <a:t>3.2 · DE KLAS</a:t>
+              <a:t>TERUG NAAR VISUAL MAANDAG</a:t>
             </a:r>
           </a:p>
           <a:p>
@@ -4951,687 +5821,7 @@
               </a:defRPr>
             </a:pPr>
             <a:r>
-              <a:t>Twee op de drie beslissingen is een fold</a:t>
-            </a:r>
-          </a:p>
-        </p:txBody>
-      </p:sp>
-      <p:pic>
-        <p:nvPicPr>
-          <p:cNvPr id="4" name="Picture 3" descr="wc8_acties.png"/>
-          <p:cNvPicPr>
-            <a:picLocks noChangeAspect="1"/>
-          </p:cNvPicPr>
-          <p:nvPr/>
-        </p:nvPicPr>
-        <p:blipFill>
-          <a:blip r:embed="rId2"/>
-          <a:stretch>
-            <a:fillRect/>
-          </a:stretch>
-        </p:blipFill>
-        <p:spPr>
-          <a:xfrm>
-            <a:off x="901873" y="1600200"/>
-            <a:ext cx="10387949" cy="4572000"/>
-          </a:xfrm>
-          <a:prstGeom prst="rect">
-            <a:avLst/>
-          </a:prstGeom>
-        </p:spPr>
-      </p:pic>
-    </p:spTree>
-  </p:cSld>
-  <p:clrMapOvr>
-    <a:masterClrMapping/>
-  </p:clrMapOvr>
-</p:sld>
-</file>
-
-<file path=ppt/slides/slide4.xml><?xml version="1.0" encoding="utf-8"?>
-<p:sld xmlns:a="http://schemas.openxmlformats.org/drawingml/2006/main" xmlns:p="http://schemas.openxmlformats.org/presentationml/2006/main" xmlns:r="http://schemas.openxmlformats.org/officeDocument/2006/relationships">
-  <p:cSld>
-    <p:spTree>
-      <p:nvGrpSpPr>
-        <p:cNvPr id="1" name=""/>
-        <p:cNvGrpSpPr/>
-        <p:nvPr/>
-      </p:nvGrpSpPr>
-      <p:grpSpPr/>
-      <p:sp>
-        <p:nvSpPr>
-          <p:cNvPr id="2" name="Rectangle 1"/>
-          <p:cNvSpPr/>
-          <p:nvPr/>
-        </p:nvSpPr>
-        <p:spPr>
-          <a:xfrm>
-            <a:off x="0" y="0"/>
-            <a:ext cx="12191695" cy="6858000"/>
-          </a:xfrm>
-          <a:prstGeom prst="rect">
-            <a:avLst/>
-          </a:prstGeom>
-          <a:solidFill>
-            <a:srgbClr val="F8F9FA"/>
-          </a:solidFill>
-          <a:ln>
-            <a:noFill/>
-          </a:ln>
-          <a:effectLst/>
-        </p:spPr>
-        <p:style>
-          <a:lnRef idx="1">
-            <a:schemeClr val="accent1"/>
-          </a:lnRef>
-          <a:fillRef idx="3">
-            <a:schemeClr val="accent1"/>
-          </a:fillRef>
-          <a:effectRef idx="2">
-            <a:schemeClr val="accent1"/>
-          </a:effectRef>
-          <a:fontRef idx="minor">
-            <a:schemeClr val="lt1"/>
-          </a:fontRef>
-        </p:style>
-        <p:txBody>
-          <a:bodyPr rtlCol="0" anchor="ctr"/>
-          <a:lstStyle/>
-          <a:p>
-            <a:pPr algn="ctr"/>
-          </a:p>
-        </p:txBody>
-      </p:sp>
-      <p:sp>
-        <p:nvSpPr>
-          <p:cNvPr id="3" name="TextBox 2"/>
-          <p:cNvSpPr txBox="1"/>
-          <p:nvPr/>
-        </p:nvSpPr>
-        <p:spPr>
-          <a:xfrm>
-            <a:off x="731520" y="384048"/>
-            <a:ext cx="10698480" cy="1005840"/>
-          </a:xfrm>
-          <a:prstGeom prst="rect">
-            <a:avLst/>
-          </a:prstGeom>
-          <a:noFill/>
-        </p:spPr>
-        <p:txBody>
-          <a:bodyPr wrap="square">
-            <a:spAutoFit/>
-          </a:bodyPr>
-          <a:lstStyle/>
-          <a:p>
-            <a:pPr>
-              <a:defRPr sz="1000" b="1">
-                <a:solidFill>
-                  <a:srgbClr val="1B4D3E"/>
-                </a:solidFill>
-              </a:defRPr>
-            </a:pPr>
-            <a:r>
-              <a:t>3.2 · EN JIJ?</a:t>
-            </a:r>
-          </a:p>
-          <a:p>
-            <a:pPr>
-              <a:spcBef>
-                <a:spcPts val="400"/>
-              </a:spcBef>
-              <a:defRPr sz="2400" b="1">
-                <a:solidFill>
-                  <a:srgbClr val="121E31"/>
-                </a:solidFill>
-              </a:defRPr>
-            </a:pPr>
-            <a:r>
-              <a:t>Waar sta jij in die verdeling?</a:t>
-            </a:r>
-          </a:p>
-        </p:txBody>
-      </p:sp>
-      <p:pic>
-        <p:nvPicPr>
-          <p:cNvPr id="4" name="Picture 3" descr="wc8_foldverdeling.png"/>
-          <p:cNvPicPr>
-            <a:picLocks noChangeAspect="1"/>
-          </p:cNvPicPr>
-          <p:nvPr/>
-        </p:nvPicPr>
-        <p:blipFill>
-          <a:blip r:embed="rId2"/>
-          <a:stretch>
-            <a:fillRect/>
-          </a:stretch>
-        </p:blipFill>
-        <p:spPr>
-          <a:xfrm>
-            <a:off x="1848403" y="1600200"/>
-            <a:ext cx="8494889" cy="4572000"/>
-          </a:xfrm>
-          <a:prstGeom prst="rect">
-            <a:avLst/>
-          </a:prstGeom>
-        </p:spPr>
-      </p:pic>
-    </p:spTree>
-  </p:cSld>
-  <p:clrMapOvr>
-    <a:masterClrMapping/>
-  </p:clrMapOvr>
-</p:sld>
-</file>
-
-<file path=ppt/slides/slide5.xml><?xml version="1.0" encoding="utf-8"?>
-<p:sld xmlns:a="http://schemas.openxmlformats.org/drawingml/2006/main" xmlns:p="http://schemas.openxmlformats.org/presentationml/2006/main" xmlns:r="http://schemas.openxmlformats.org/officeDocument/2006/relationships">
-  <p:cSld>
-    <p:spTree>
-      <p:nvGrpSpPr>
-        <p:cNvPr id="1" name=""/>
-        <p:cNvGrpSpPr/>
-        <p:nvPr/>
-      </p:nvGrpSpPr>
-      <p:grpSpPr/>
-      <p:sp>
-        <p:nvSpPr>
-          <p:cNvPr id="2" name="Rectangle 1"/>
-          <p:cNvSpPr/>
-          <p:nvPr/>
-        </p:nvSpPr>
-        <p:spPr>
-          <a:xfrm>
-            <a:off x="0" y="0"/>
-            <a:ext cx="12191695" cy="6858000"/>
-          </a:xfrm>
-          <a:prstGeom prst="rect">
-            <a:avLst/>
-          </a:prstGeom>
-          <a:solidFill>
-            <a:srgbClr val="F8F9FA"/>
-          </a:solidFill>
-          <a:ln>
-            <a:noFill/>
-          </a:ln>
-          <a:effectLst/>
-        </p:spPr>
-        <p:style>
-          <a:lnRef idx="1">
-            <a:schemeClr val="accent1"/>
-          </a:lnRef>
-          <a:fillRef idx="3">
-            <a:schemeClr val="accent1"/>
-          </a:fillRef>
-          <a:effectRef idx="2">
-            <a:schemeClr val="accent1"/>
-          </a:effectRef>
-          <a:fontRef idx="minor">
-            <a:schemeClr val="lt1"/>
-          </a:fontRef>
-        </p:style>
-        <p:txBody>
-          <a:bodyPr rtlCol="0" anchor="ctr"/>
-          <a:lstStyle/>
-          <a:p>
-            <a:pPr algn="ctr"/>
-          </a:p>
-        </p:txBody>
-      </p:sp>
-      <p:sp>
-        <p:nvSpPr>
-          <p:cNvPr id="3" name="TextBox 2"/>
-          <p:cNvSpPr txBox="1"/>
-          <p:nvPr/>
-        </p:nvSpPr>
-        <p:spPr>
-          <a:xfrm>
-            <a:off x="731520" y="384048"/>
-            <a:ext cx="10698480" cy="1005840"/>
-          </a:xfrm>
-          <a:prstGeom prst="rect">
-            <a:avLst/>
-          </a:prstGeom>
-          <a:noFill/>
-        </p:spPr>
-        <p:txBody>
-          <a:bodyPr wrap="square">
-            <a:spAutoFit/>
-          </a:bodyPr>
-          <a:lstStyle/>
-          <a:p>
-            <a:pPr>
-              <a:defRPr sz="1000" b="1">
-                <a:solidFill>
-                  <a:srgbClr val="1B4D3E"/>
-                </a:solidFill>
-              </a:defRPr>
-            </a:pPr>
-            <a:r>
-              <a:t>DE VERRASSING</a:t>
-            </a:r>
-          </a:p>
-          <a:p>
-            <a:pPr>
-              <a:spcBef>
-                <a:spcPts val="400"/>
-              </a:spcBef>
-              <a:defRPr sz="2400" b="1">
-                <a:solidFill>
-                  <a:srgbClr val="121E31"/>
-                </a:solidFill>
-              </a:defRPr>
-            </a:pPr>
-            <a:r>
-              <a:t>Tight spelen wérkt hier   ·   r = +0,45</a:t>
-            </a:r>
-          </a:p>
-        </p:txBody>
-      </p:sp>
-      <p:pic>
-        <p:nvPicPr>
-          <p:cNvPr id="4" name="Picture 3" descr="wc8_fold_vs_eindstand.png"/>
-          <p:cNvPicPr>
-            <a:picLocks noChangeAspect="1"/>
-          </p:cNvPicPr>
-          <p:nvPr/>
-        </p:nvPicPr>
-        <p:blipFill>
-          <a:blip r:embed="rId2"/>
-          <a:stretch>
-            <a:fillRect/>
-          </a:stretch>
-        </p:blipFill>
-        <p:spPr>
-          <a:xfrm>
-            <a:off x="1999178" y="1600200"/>
-            <a:ext cx="8193338" cy="4572000"/>
-          </a:xfrm>
-          <a:prstGeom prst="rect">
-            <a:avLst/>
-          </a:prstGeom>
-        </p:spPr>
-      </p:pic>
-    </p:spTree>
-  </p:cSld>
-  <p:clrMapOvr>
-    <a:masterClrMapping/>
-  </p:clrMapOvr>
-</p:sld>
-</file>
-
-<file path=ppt/slides/slide6.xml><?xml version="1.0" encoding="utf-8"?>
-<p:sld xmlns:a="http://schemas.openxmlformats.org/drawingml/2006/main" xmlns:p="http://schemas.openxmlformats.org/presentationml/2006/main" xmlns:r="http://schemas.openxmlformats.org/officeDocument/2006/relationships">
-  <p:cSld>
-    <p:spTree>
-      <p:nvGrpSpPr>
-        <p:cNvPr id="1" name=""/>
-        <p:cNvGrpSpPr/>
-        <p:nvPr/>
-      </p:nvGrpSpPr>
-      <p:grpSpPr/>
-      <p:sp>
-        <p:nvSpPr>
-          <p:cNvPr id="2" name="Rectangle 1"/>
-          <p:cNvSpPr/>
-          <p:nvPr/>
-        </p:nvSpPr>
-        <p:spPr>
-          <a:xfrm>
-            <a:off x="0" y="0"/>
-            <a:ext cx="12191695" cy="6858000"/>
-          </a:xfrm>
-          <a:prstGeom prst="rect">
-            <a:avLst/>
-          </a:prstGeom>
-          <a:solidFill>
-            <a:srgbClr val="F8F9FA"/>
-          </a:solidFill>
-          <a:ln>
-            <a:noFill/>
-          </a:ln>
-          <a:effectLst/>
-        </p:spPr>
-        <p:style>
-          <a:lnRef idx="1">
-            <a:schemeClr val="accent1"/>
-          </a:lnRef>
-          <a:fillRef idx="3">
-            <a:schemeClr val="accent1"/>
-          </a:fillRef>
-          <a:effectRef idx="2">
-            <a:schemeClr val="accent1"/>
-          </a:effectRef>
-          <a:fontRef idx="minor">
-            <a:schemeClr val="lt1"/>
-          </a:fontRef>
-        </p:style>
-        <p:txBody>
-          <a:bodyPr rtlCol="0" anchor="ctr"/>
-          <a:lstStyle/>
-          <a:p>
-            <a:pPr algn="ctr"/>
-          </a:p>
-        </p:txBody>
-      </p:sp>
-      <p:sp>
-        <p:nvSpPr>
-          <p:cNvPr id="3" name="TextBox 2"/>
-          <p:cNvSpPr txBox="1"/>
-          <p:nvPr/>
-        </p:nvSpPr>
-        <p:spPr>
-          <a:xfrm>
-            <a:off x="731520" y="384048"/>
-            <a:ext cx="10698480" cy="1005840"/>
-          </a:xfrm>
-          <a:prstGeom prst="rect">
-            <a:avLst/>
-          </a:prstGeom>
-          <a:noFill/>
-        </p:spPr>
-        <p:txBody>
-          <a:bodyPr wrap="square">
-            <a:spAutoFit/>
-          </a:bodyPr>
-          <a:lstStyle/>
-          <a:p>
-            <a:pPr>
-              <a:defRPr sz="1000" b="1">
-                <a:solidFill>
-                  <a:srgbClr val="1B4D3E"/>
-                </a:solidFill>
-              </a:defRPr>
-            </a:pPr>
-            <a:r>
-              <a:t>3.3 · GEDRAG LEZEN</a:t>
-            </a:r>
-          </a:p>
-          <a:p>
-            <a:pPr>
-              <a:spcBef>
-                <a:spcPts val="400"/>
-              </a:spcBef>
-              <a:defRPr sz="2400" b="1">
-                <a:solidFill>
-                  <a:srgbClr val="121E31"/>
-                </a:solidFill>
-              </a:defRPr>
-            </a:pPr>
-            <a:r>
-              <a:t>De drempels van de klas, zonder één regel code te zien</a:t>
-            </a:r>
-          </a:p>
-        </p:txBody>
-      </p:sp>
-      <p:pic>
-        <p:nvPicPr>
-          <p:cNvPr id="4" name="Picture 3" descr="wc8_matrix_fold.png"/>
-          <p:cNvPicPr>
-            <a:picLocks noChangeAspect="1"/>
-          </p:cNvPicPr>
-          <p:nvPr/>
-        </p:nvPicPr>
-        <p:blipFill>
-          <a:blip r:embed="rId2"/>
-          <a:stretch>
-            <a:fillRect/>
-          </a:stretch>
-        </p:blipFill>
-        <p:spPr>
-          <a:xfrm>
-            <a:off x="2855625" y="1600200"/>
-            <a:ext cx="6480444" cy="4572000"/>
-          </a:xfrm>
-          <a:prstGeom prst="rect">
-            <a:avLst/>
-          </a:prstGeom>
-        </p:spPr>
-      </p:pic>
-    </p:spTree>
-  </p:cSld>
-  <p:clrMapOvr>
-    <a:masterClrMapping/>
-  </p:clrMapOvr>
-</p:sld>
-</file>
-
-<file path=ppt/slides/slide7.xml><?xml version="1.0" encoding="utf-8"?>
-<p:sld xmlns:a="http://schemas.openxmlformats.org/drawingml/2006/main" xmlns:p="http://schemas.openxmlformats.org/presentationml/2006/main" xmlns:r="http://schemas.openxmlformats.org/officeDocument/2006/relationships">
-  <p:cSld>
-    <p:spTree>
-      <p:nvGrpSpPr>
-        <p:cNvPr id="1" name=""/>
-        <p:cNvGrpSpPr/>
-        <p:nvPr/>
-      </p:nvGrpSpPr>
-      <p:grpSpPr/>
-      <p:sp>
-        <p:nvSpPr>
-          <p:cNvPr id="2" name="Rectangle 1"/>
-          <p:cNvSpPr/>
-          <p:nvPr/>
-        </p:nvSpPr>
-        <p:spPr>
-          <a:xfrm>
-            <a:off x="0" y="0"/>
-            <a:ext cx="12191695" cy="6858000"/>
-          </a:xfrm>
-          <a:prstGeom prst="rect">
-            <a:avLst/>
-          </a:prstGeom>
-          <a:solidFill>
-            <a:srgbClr val="F8F9FA"/>
-          </a:solidFill>
-          <a:ln>
-            <a:noFill/>
-          </a:ln>
-          <a:effectLst/>
-        </p:spPr>
-        <p:style>
-          <a:lnRef idx="1">
-            <a:schemeClr val="accent1"/>
-          </a:lnRef>
-          <a:fillRef idx="3">
-            <a:schemeClr val="accent1"/>
-          </a:fillRef>
-          <a:effectRef idx="2">
-            <a:schemeClr val="accent1"/>
-          </a:effectRef>
-          <a:fontRef idx="minor">
-            <a:schemeClr val="lt1"/>
-          </a:fontRef>
-        </p:style>
-        <p:txBody>
-          <a:bodyPr rtlCol="0" anchor="ctr"/>
-          <a:lstStyle/>
-          <a:p>
-            <a:pPr algn="ctr"/>
-          </a:p>
-        </p:txBody>
-      </p:sp>
-      <p:sp>
-        <p:nvSpPr>
-          <p:cNvPr id="3" name="TextBox 2"/>
-          <p:cNvSpPr txBox="1"/>
-          <p:nvPr/>
-        </p:nvSpPr>
-        <p:spPr>
-          <a:xfrm>
-            <a:off x="731520" y="384048"/>
-            <a:ext cx="10698480" cy="1005840"/>
-          </a:xfrm>
-          <a:prstGeom prst="rect">
-            <a:avLst/>
-          </a:prstGeom>
-          <a:noFill/>
-        </p:spPr>
-        <p:txBody>
-          <a:bodyPr wrap="square">
-            <a:spAutoFit/>
-          </a:bodyPr>
-          <a:lstStyle/>
-          <a:p>
-            <a:pPr>
-              <a:defRPr sz="1000" b="1">
-                <a:solidFill>
-                  <a:srgbClr val="1B4D3E"/>
-                </a:solidFill>
-              </a:defRPr>
-            </a:pPr>
-            <a:r>
-              <a:t>3.4 · EN WAT LEVERDE OP?</a:t>
-            </a:r>
-          </a:p>
-          <a:p>
-            <a:pPr>
-              <a:spcBef>
-                <a:spcPts val="400"/>
-              </a:spcBef>
-              <a:defRPr sz="2400" b="1">
-                <a:solidFill>
-                  <a:srgbClr val="121E31"/>
-                </a:solidFill>
-              </a:defRPr>
-            </a:pPr>
-            <a:r>
-              <a:t>Dezelfde 91 handen, nu op geld</a:t>
-            </a:r>
-          </a:p>
-        </p:txBody>
-      </p:sp>
-      <p:pic>
-        <p:nvPicPr>
-          <p:cNvPr id="4" name="Picture 3" descr="wc8_matrix_winst.png"/>
-          <p:cNvPicPr>
-            <a:picLocks noChangeAspect="1"/>
-          </p:cNvPicPr>
-          <p:nvPr/>
-        </p:nvPicPr>
-        <p:blipFill>
-          <a:blip r:embed="rId2"/>
-          <a:stretch>
-            <a:fillRect/>
-          </a:stretch>
-        </p:blipFill>
-        <p:spPr>
-          <a:xfrm>
-            <a:off x="3657698" y="1600200"/>
-            <a:ext cx="4876299" cy="4572000"/>
-          </a:xfrm>
-          <a:prstGeom prst="rect">
-            <a:avLst/>
-          </a:prstGeom>
-        </p:spPr>
-      </p:pic>
-    </p:spTree>
-  </p:cSld>
-  <p:clrMapOvr>
-    <a:masterClrMapping/>
-  </p:clrMapOvr>
-</p:sld>
-</file>
-
-<file path=ppt/slides/slide8.xml><?xml version="1.0" encoding="utf-8"?>
-<p:sld xmlns:a="http://schemas.openxmlformats.org/drawingml/2006/main" xmlns:p="http://schemas.openxmlformats.org/presentationml/2006/main" xmlns:r="http://schemas.openxmlformats.org/officeDocument/2006/relationships">
-  <p:cSld>
-    <p:spTree>
-      <p:nvGrpSpPr>
-        <p:cNvPr id="1" name=""/>
-        <p:cNvGrpSpPr/>
-        <p:nvPr/>
-      </p:nvGrpSpPr>
-      <p:grpSpPr/>
-      <p:sp>
-        <p:nvSpPr>
-          <p:cNvPr id="2" name="Rectangle 1"/>
-          <p:cNvSpPr/>
-          <p:nvPr/>
-        </p:nvSpPr>
-        <p:spPr>
-          <a:xfrm>
-            <a:off x="0" y="0"/>
-            <a:ext cx="12191695" cy="6858000"/>
-          </a:xfrm>
-          <a:prstGeom prst="rect">
-            <a:avLst/>
-          </a:prstGeom>
-          <a:solidFill>
-            <a:srgbClr val="F8F9FA"/>
-          </a:solidFill>
-          <a:ln>
-            <a:noFill/>
-          </a:ln>
-          <a:effectLst/>
-        </p:spPr>
-        <p:style>
-          <a:lnRef idx="1">
-            <a:schemeClr val="accent1"/>
-          </a:lnRef>
-          <a:fillRef idx="3">
-            <a:schemeClr val="accent1"/>
-          </a:fillRef>
-          <a:effectRef idx="2">
-            <a:schemeClr val="accent1"/>
-          </a:effectRef>
-          <a:fontRef idx="minor">
-            <a:schemeClr val="lt1"/>
-          </a:fontRef>
-        </p:style>
-        <p:txBody>
-          <a:bodyPr rtlCol="0" anchor="ctr"/>
-          <a:lstStyle/>
-          <a:p>
-            <a:pPr algn="ctr"/>
-          </a:p>
-        </p:txBody>
-      </p:sp>
-      <p:sp>
-        <p:nvSpPr>
-          <p:cNvPr id="3" name="TextBox 2"/>
-          <p:cNvSpPr txBox="1"/>
-          <p:nvPr/>
-        </p:nvSpPr>
-        <p:spPr>
-          <a:xfrm>
-            <a:off x="731520" y="384048"/>
-            <a:ext cx="10698480" cy="1005840"/>
-          </a:xfrm>
-          <a:prstGeom prst="rect">
-            <a:avLst/>
-          </a:prstGeom>
-          <a:noFill/>
-        </p:spPr>
-        <p:txBody>
-          <a:bodyPr wrap="square">
-            <a:spAutoFit/>
-          </a:bodyPr>
-          <a:lstStyle/>
-          <a:p>
-            <a:pPr>
-              <a:defRPr sz="1000" b="1">
-                <a:solidFill>
-                  <a:srgbClr val="1B4D3E"/>
-                </a:solidFill>
-              </a:defRPr>
-            </a:pPr>
-            <a:r>
-              <a:t>HET SNIJPUNT</a:t>
-            </a:r>
-          </a:p>
-          <a:p>
-            <a:pPr>
-              <a:spcBef>
-                <a:spcPts val="400"/>
-              </a:spcBef>
-              <a:defRPr sz="2400" b="1">
-                <a:solidFill>
-                  <a:srgbClr val="121E31"/>
-                </a:solidFill>
-              </a:defRPr>
-            </a:pPr>
-            <a:r>
-              <a:t>Weggegooid, en toch winstgevend</a:t>
+              <a:t>Vijf dingen die je vandaag meteen nodig hebt</a:t>
             </a:r>
           </a:p>
         </p:txBody>
@@ -5707,10 +5897,7 @@
           <a:lstStyle/>
           <a:p>
             <a:pPr>
-              <a:spcBef>
-                <a:spcPts val="400"/>
-              </a:spcBef>
-              <a:defRPr sz="1400" b="0">
+              <a:defRPr sz="1500" b="0">
                 <a:solidFill>
                   <a:srgbClr val="121E31"/>
                 </a:solidFill>
@@ -5718,15 +5905,15 @@
               </a:defRPr>
             </a:pPr>
             <a:r>
-              <a:t>2-2       97x gespeeld    64% gefold    gemiddeld +33 chips</a:t>
+              <a:t>1.  filteren        dertig bots in één plot is spaghetti</a:t>
             </a:r>
           </a:p>
           <a:p>
             <a:pPr>
               <a:spcBef>
-                <a:spcPts val="400"/>
+                <a:spcPts val="600"/>
               </a:spcBef>
-              <a:defRPr sz="1400" b="0">
+              <a:defRPr sz="1500" b="0">
                 <a:solidFill>
                   <a:srgbClr val="121E31"/>
                 </a:solidFill>
@@ -5734,31 +5921,31 @@
               </a:defRPr>
             </a:pPr>
             <a:r>
-              <a:t>Q-9      245x gespeeld    59% gefold    gemiddeld +16 chips</a:t>
+              <a:t>2.  uitlichten      jouw bot in kleur, de rest grijs</a:t>
             </a:r>
           </a:p>
           <a:p>
             <a:pPr>
               <a:spcBef>
-                <a:spcPts val="400"/>
+                <a:spcPts val="600"/>
               </a:spcBef>
-              <a:defRPr sz="1400" b="0">
-                <a:solidFill>
-                  <a:srgbClr val="121E31"/>
+              <a:defRPr sz="1500" b="1">
+                <a:solidFill>
+                  <a:srgbClr val="1B4D3E"/>
                 </a:solidFill>
                 <a:latin typeface="Consolas"/>
               </a:defRPr>
             </a:pPr>
             <a:r>
-              <a:t>K-7      283x gespeeld    56% gefold    gemiddeld +14 chips</a:t>
+              <a:t>3.  actietitel      beweer iets, benoem niet alleen</a:t>
             </a:r>
           </a:p>
           <a:p>
             <a:pPr>
               <a:spcBef>
-                <a:spcPts val="400"/>
+                <a:spcPts val="600"/>
               </a:spcBef>
-              <a:defRPr sz="1400" b="0">
+              <a:defRPr sz="1500" b="0">
                 <a:solidFill>
                   <a:srgbClr val="121E31"/>
                 </a:solidFill>
@@ -5766,15 +5953,15 @@
               </a:defRPr>
             </a:pPr>
             <a:r>
-              <a:t>K-3      223x gespeeld    63% gefold    gemiddeld +12 chips</a:t>
+              <a:t>4.  annoteren       waar gebeurt het? zet er een streep bij</a:t>
             </a:r>
           </a:p>
           <a:p>
             <a:pPr>
               <a:spcBef>
-                <a:spcPts val="400"/>
+                <a:spcPts val="600"/>
               </a:spcBef>
-              <a:defRPr sz="1400" b="0">
+              <a:defRPr sz="1500" b="0">
                 <a:solidFill>
                   <a:srgbClr val="121E31"/>
                 </a:solidFill>
@@ -5782,22 +5969,22 @@
               </a:defRPr>
             </a:pPr>
             <a:r>
-              <a:t>K-8      271x gespeeld    53% gefold    gemiddeld +8 chips</a:t>
+              <a:t>5.  contrast-check  leest je kleur ook voor de rest van de klas?</a:t>
             </a:r>
           </a:p>
           <a:p>
             <a:pPr>
               <a:spcBef>
-                <a:spcPts val="1800"/>
+                <a:spcPts val="2000"/>
               </a:spcBef>
-              <a:defRPr sz="1400" b="1">
-                <a:solidFill>
-                  <a:srgbClr val="1B4D3E"/>
+              <a:defRPr sz="1300" b="0">
+                <a:solidFill>
+                  <a:srgbClr val="505A64"/>
                 </a:solidFill>
               </a:defRPr>
             </a:pPr>
             <a:r>
-              <a:t>Deze handen worden vaker gefold dan gespeeld, maar leveren geld op wanneer er wél mee gespeeld wordt.</a:t>
+              <a:t>Alles wat hierna komt is daarop gebouwd. De kleurschalen lopen van blauw naar groen en niet van rood naar groen, omdat rood en groen voor een deel van je klasgenoten bijna dezelfde kleur zijn.</a:t>
             </a:r>
           </a:p>
           <a:p>
@@ -5805,14 +5992,14 @@
               <a:spcBef>
                 <a:spcPts val="1200"/>
               </a:spcBef>
-              <a:defRPr sz="1300" b="0">
-                <a:solidFill>
-                  <a:srgbClr val="505A64"/>
+              <a:defRPr sz="1400" b="1">
+                <a:solidFill>
+                  <a:srgbClr val="121E31"/>
                 </a:solidFill>
               </a:defRPr>
             </a:pPr>
             <a:r>
-              <a:t>Is dat een kans, of kijk je naar de handen die toevallig goed afliepen? Dat is precies de vraag die je met deze data niet helemaal kunt beslechten.</a:t>
+              <a:t>Dat is geen detail. Dat is Werkcollege 6, Deel 6 — nu op jullie eigen data.</a:t>
             </a:r>
           </a:p>
         </p:txBody>
@@ -5825,7 +6012,7 @@
 </p:sld>
 </file>
 
-<file path=ppt/slides/slide9.xml><?xml version="1.0" encoding="utf-8"?>
+<file path=ppt/slides/slide4.xml><?xml version="1.0" encoding="utf-8"?>
 <p:sld xmlns:a="http://schemas.openxmlformats.org/drawingml/2006/main" xmlns:p="http://schemas.openxmlformats.org/presentationml/2006/main" xmlns:r="http://schemas.openxmlformats.org/officeDocument/2006/relationships">
   <p:cSld>
     <p:spTree>
@@ -5909,7 +6096,7 @@
               </a:defRPr>
             </a:pPr>
             <a:r>
-              <a:t>3.5 · HOEVEEL IS TOEVAL?</a:t>
+              <a:t>3.2 · DE KLAS</a:t>
             </a:r>
           </a:p>
           <a:p>
@@ -5924,14 +6111,14 @@
               </a:defRPr>
             </a:pPr>
             <a:r>
-              <a:t>Dezelfde bot, twintig keer gespeeld</a:t>
+              <a:t>Twee op de drie beslissingen is een fold</a:t>
             </a:r>
           </a:p>
         </p:txBody>
       </p:sp>
       <p:pic>
         <p:nvPicPr>
-          <p:cNvPr id="4" name="Picture 3" descr="wc8_spreiding.png"/>
+          <p:cNvPr id="4" name="Picture 3" descr="wc8_acties.png"/>
           <p:cNvPicPr>
             <a:picLocks noChangeAspect="1"/>
           </p:cNvPicPr>
@@ -5945,14 +6132,851 @@
         </p:blipFill>
         <p:spPr>
           <a:xfrm>
-            <a:off x="2064489" y="1600200"/>
-            <a:ext cx="8062717" cy="4572000"/>
+            <a:off x="901873" y="1600200"/>
+            <a:ext cx="10387949" cy="4572000"/>
           </a:xfrm>
           <a:prstGeom prst="rect">
             <a:avLst/>
           </a:prstGeom>
         </p:spPr>
       </p:pic>
+    </p:spTree>
+  </p:cSld>
+  <p:clrMapOvr>
+    <a:masterClrMapping/>
+  </p:clrMapOvr>
+</p:sld>
+</file>
+
+<file path=ppt/slides/slide5.xml><?xml version="1.0" encoding="utf-8"?>
+<p:sld xmlns:a="http://schemas.openxmlformats.org/drawingml/2006/main" xmlns:p="http://schemas.openxmlformats.org/presentationml/2006/main" xmlns:r="http://schemas.openxmlformats.org/officeDocument/2006/relationships">
+  <p:cSld>
+    <p:spTree>
+      <p:nvGrpSpPr>
+        <p:cNvPr id="1" name=""/>
+        <p:cNvGrpSpPr/>
+        <p:nvPr/>
+      </p:nvGrpSpPr>
+      <p:grpSpPr/>
+      <p:sp>
+        <p:nvSpPr>
+          <p:cNvPr id="2" name="Rectangle 1"/>
+          <p:cNvSpPr/>
+          <p:nvPr/>
+        </p:nvSpPr>
+        <p:spPr>
+          <a:xfrm>
+            <a:off x="0" y="0"/>
+            <a:ext cx="12191695" cy="6858000"/>
+          </a:xfrm>
+          <a:prstGeom prst="rect">
+            <a:avLst/>
+          </a:prstGeom>
+          <a:solidFill>
+            <a:srgbClr val="F8F9FA"/>
+          </a:solidFill>
+          <a:ln>
+            <a:noFill/>
+          </a:ln>
+          <a:effectLst/>
+        </p:spPr>
+        <p:style>
+          <a:lnRef idx="1">
+            <a:schemeClr val="accent1"/>
+          </a:lnRef>
+          <a:fillRef idx="3">
+            <a:schemeClr val="accent1"/>
+          </a:fillRef>
+          <a:effectRef idx="2">
+            <a:schemeClr val="accent1"/>
+          </a:effectRef>
+          <a:fontRef idx="minor">
+            <a:schemeClr val="lt1"/>
+          </a:fontRef>
+        </p:style>
+        <p:txBody>
+          <a:bodyPr rtlCol="0" anchor="ctr"/>
+          <a:lstStyle/>
+          <a:p>
+            <a:pPr algn="ctr"/>
+          </a:p>
+        </p:txBody>
+      </p:sp>
+      <p:sp>
+        <p:nvSpPr>
+          <p:cNvPr id="3" name="TextBox 2"/>
+          <p:cNvSpPr txBox="1"/>
+          <p:nvPr/>
+        </p:nvSpPr>
+        <p:spPr>
+          <a:xfrm>
+            <a:off x="731520" y="384048"/>
+            <a:ext cx="10698480" cy="1005840"/>
+          </a:xfrm>
+          <a:prstGeom prst="rect">
+            <a:avLst/>
+          </a:prstGeom>
+          <a:noFill/>
+        </p:spPr>
+        <p:txBody>
+          <a:bodyPr wrap="square">
+            <a:spAutoFit/>
+          </a:bodyPr>
+          <a:lstStyle/>
+          <a:p>
+            <a:pPr>
+              <a:defRPr sz="1000" b="1">
+                <a:solidFill>
+                  <a:srgbClr val="1B4D3E"/>
+                </a:solidFill>
+              </a:defRPr>
+            </a:pPr>
+            <a:r>
+              <a:t>3.2 · EN JIJ?</a:t>
+            </a:r>
+          </a:p>
+          <a:p>
+            <a:pPr>
+              <a:spcBef>
+                <a:spcPts val="400"/>
+              </a:spcBef>
+              <a:defRPr sz="2400" b="1">
+                <a:solidFill>
+                  <a:srgbClr val="121E31"/>
+                </a:solidFill>
+              </a:defRPr>
+            </a:pPr>
+            <a:r>
+              <a:t>Waar sta jij in die verdeling?</a:t>
+            </a:r>
+          </a:p>
+        </p:txBody>
+      </p:sp>
+      <p:pic>
+        <p:nvPicPr>
+          <p:cNvPr id="4" name="Picture 3" descr="wc8_foldverdeling.png"/>
+          <p:cNvPicPr>
+            <a:picLocks noChangeAspect="1"/>
+          </p:cNvPicPr>
+          <p:nvPr/>
+        </p:nvPicPr>
+        <p:blipFill>
+          <a:blip r:embed="rId2"/>
+          <a:stretch>
+            <a:fillRect/>
+          </a:stretch>
+        </p:blipFill>
+        <p:spPr>
+          <a:xfrm>
+            <a:off x="1848403" y="1600200"/>
+            <a:ext cx="8494889" cy="4572000"/>
+          </a:xfrm>
+          <a:prstGeom prst="rect">
+            <a:avLst/>
+          </a:prstGeom>
+        </p:spPr>
+      </p:pic>
+    </p:spTree>
+  </p:cSld>
+  <p:clrMapOvr>
+    <a:masterClrMapping/>
+  </p:clrMapOvr>
+</p:sld>
+</file>
+
+<file path=ppt/slides/slide6.xml><?xml version="1.0" encoding="utf-8"?>
+<p:sld xmlns:a="http://schemas.openxmlformats.org/drawingml/2006/main" xmlns:p="http://schemas.openxmlformats.org/presentationml/2006/main" xmlns:r="http://schemas.openxmlformats.org/officeDocument/2006/relationships">
+  <p:cSld>
+    <p:spTree>
+      <p:nvGrpSpPr>
+        <p:cNvPr id="1" name=""/>
+        <p:cNvGrpSpPr/>
+        <p:nvPr/>
+      </p:nvGrpSpPr>
+      <p:grpSpPr/>
+      <p:sp>
+        <p:nvSpPr>
+          <p:cNvPr id="2" name="Rectangle 1"/>
+          <p:cNvSpPr/>
+          <p:nvPr/>
+        </p:nvSpPr>
+        <p:spPr>
+          <a:xfrm>
+            <a:off x="0" y="0"/>
+            <a:ext cx="12191695" cy="6858000"/>
+          </a:xfrm>
+          <a:prstGeom prst="rect">
+            <a:avLst/>
+          </a:prstGeom>
+          <a:solidFill>
+            <a:srgbClr val="F8F9FA"/>
+          </a:solidFill>
+          <a:ln>
+            <a:noFill/>
+          </a:ln>
+          <a:effectLst/>
+        </p:spPr>
+        <p:style>
+          <a:lnRef idx="1">
+            <a:schemeClr val="accent1"/>
+          </a:lnRef>
+          <a:fillRef idx="3">
+            <a:schemeClr val="accent1"/>
+          </a:fillRef>
+          <a:effectRef idx="2">
+            <a:schemeClr val="accent1"/>
+          </a:effectRef>
+          <a:fontRef idx="minor">
+            <a:schemeClr val="lt1"/>
+          </a:fontRef>
+        </p:style>
+        <p:txBody>
+          <a:bodyPr rtlCol="0" anchor="ctr"/>
+          <a:lstStyle/>
+          <a:p>
+            <a:pPr algn="ctr"/>
+          </a:p>
+        </p:txBody>
+      </p:sp>
+      <p:sp>
+        <p:nvSpPr>
+          <p:cNvPr id="3" name="TextBox 2"/>
+          <p:cNvSpPr txBox="1"/>
+          <p:nvPr/>
+        </p:nvSpPr>
+        <p:spPr>
+          <a:xfrm>
+            <a:off x="731520" y="384048"/>
+            <a:ext cx="10698480" cy="1005840"/>
+          </a:xfrm>
+          <a:prstGeom prst="rect">
+            <a:avLst/>
+          </a:prstGeom>
+          <a:noFill/>
+        </p:spPr>
+        <p:txBody>
+          <a:bodyPr wrap="square">
+            <a:spAutoFit/>
+          </a:bodyPr>
+          <a:lstStyle/>
+          <a:p>
+            <a:pPr>
+              <a:defRPr sz="1000" b="1">
+                <a:solidFill>
+                  <a:srgbClr val="1B4D3E"/>
+                </a:solidFill>
+              </a:defRPr>
+            </a:pPr>
+            <a:r>
+              <a:t>DE VERRASSING</a:t>
+            </a:r>
+          </a:p>
+          <a:p>
+            <a:pPr>
+              <a:spcBef>
+                <a:spcPts val="400"/>
+              </a:spcBef>
+              <a:defRPr sz="2400" b="1">
+                <a:solidFill>
+                  <a:srgbClr val="121E31"/>
+                </a:solidFill>
+              </a:defRPr>
+            </a:pPr>
+            <a:r>
+              <a:t>Tight spelen wérkt hier   ·   r = +0,45</a:t>
+            </a:r>
+          </a:p>
+        </p:txBody>
+      </p:sp>
+      <p:pic>
+        <p:nvPicPr>
+          <p:cNvPr id="4" name="Picture 3" descr="wc8_fold_vs_eindstand.png"/>
+          <p:cNvPicPr>
+            <a:picLocks noChangeAspect="1"/>
+          </p:cNvPicPr>
+          <p:nvPr/>
+        </p:nvPicPr>
+        <p:blipFill>
+          <a:blip r:embed="rId2"/>
+          <a:stretch>
+            <a:fillRect/>
+          </a:stretch>
+        </p:blipFill>
+        <p:spPr>
+          <a:xfrm>
+            <a:off x="1999178" y="1600200"/>
+            <a:ext cx="8193338" cy="4572000"/>
+          </a:xfrm>
+          <a:prstGeom prst="rect">
+            <a:avLst/>
+          </a:prstGeom>
+        </p:spPr>
+      </p:pic>
+    </p:spTree>
+  </p:cSld>
+  <p:clrMapOvr>
+    <a:masterClrMapping/>
+  </p:clrMapOvr>
+</p:sld>
+</file>
+
+<file path=ppt/slides/slide7.xml><?xml version="1.0" encoding="utf-8"?>
+<p:sld xmlns:a="http://schemas.openxmlformats.org/drawingml/2006/main" xmlns:p="http://schemas.openxmlformats.org/presentationml/2006/main" xmlns:r="http://schemas.openxmlformats.org/officeDocument/2006/relationships">
+  <p:cSld>
+    <p:spTree>
+      <p:nvGrpSpPr>
+        <p:cNvPr id="1" name=""/>
+        <p:cNvGrpSpPr/>
+        <p:nvPr/>
+      </p:nvGrpSpPr>
+      <p:grpSpPr/>
+      <p:sp>
+        <p:nvSpPr>
+          <p:cNvPr id="2" name="Rectangle 1"/>
+          <p:cNvSpPr/>
+          <p:nvPr/>
+        </p:nvSpPr>
+        <p:spPr>
+          <a:xfrm>
+            <a:off x="0" y="0"/>
+            <a:ext cx="12191695" cy="6858000"/>
+          </a:xfrm>
+          <a:prstGeom prst="rect">
+            <a:avLst/>
+          </a:prstGeom>
+          <a:solidFill>
+            <a:srgbClr val="F8F9FA"/>
+          </a:solidFill>
+          <a:ln>
+            <a:noFill/>
+          </a:ln>
+          <a:effectLst/>
+        </p:spPr>
+        <p:style>
+          <a:lnRef idx="1">
+            <a:schemeClr val="accent1"/>
+          </a:lnRef>
+          <a:fillRef idx="3">
+            <a:schemeClr val="accent1"/>
+          </a:fillRef>
+          <a:effectRef idx="2">
+            <a:schemeClr val="accent1"/>
+          </a:effectRef>
+          <a:fontRef idx="minor">
+            <a:schemeClr val="lt1"/>
+          </a:fontRef>
+        </p:style>
+        <p:txBody>
+          <a:bodyPr rtlCol="0" anchor="ctr"/>
+          <a:lstStyle/>
+          <a:p>
+            <a:pPr algn="ctr"/>
+          </a:p>
+        </p:txBody>
+      </p:sp>
+      <p:sp>
+        <p:nvSpPr>
+          <p:cNvPr id="3" name="TextBox 2"/>
+          <p:cNvSpPr txBox="1"/>
+          <p:nvPr/>
+        </p:nvSpPr>
+        <p:spPr>
+          <a:xfrm>
+            <a:off x="731520" y="384048"/>
+            <a:ext cx="10698480" cy="1005840"/>
+          </a:xfrm>
+          <a:prstGeom prst="rect">
+            <a:avLst/>
+          </a:prstGeom>
+          <a:noFill/>
+        </p:spPr>
+        <p:txBody>
+          <a:bodyPr wrap="square">
+            <a:spAutoFit/>
+          </a:bodyPr>
+          <a:lstStyle/>
+          <a:p>
+            <a:pPr>
+              <a:defRPr sz="1000" b="1">
+                <a:solidFill>
+                  <a:srgbClr val="1B4D3E"/>
+                </a:solidFill>
+              </a:defRPr>
+            </a:pPr>
+            <a:r>
+              <a:t>3.3 · GEDRAG LEZEN</a:t>
+            </a:r>
+          </a:p>
+          <a:p>
+            <a:pPr>
+              <a:spcBef>
+                <a:spcPts val="400"/>
+              </a:spcBef>
+              <a:defRPr sz="2400" b="1">
+                <a:solidFill>
+                  <a:srgbClr val="121E31"/>
+                </a:solidFill>
+              </a:defRPr>
+            </a:pPr>
+            <a:r>
+              <a:t>De drempels van de klas, zonder één regel code te zien</a:t>
+            </a:r>
+          </a:p>
+        </p:txBody>
+      </p:sp>
+      <p:pic>
+        <p:nvPicPr>
+          <p:cNvPr id="4" name="Picture 3" descr="wc8_matrix_fold.png"/>
+          <p:cNvPicPr>
+            <a:picLocks noChangeAspect="1"/>
+          </p:cNvPicPr>
+          <p:nvPr/>
+        </p:nvPicPr>
+        <p:blipFill>
+          <a:blip r:embed="rId2"/>
+          <a:stretch>
+            <a:fillRect/>
+          </a:stretch>
+        </p:blipFill>
+        <p:spPr>
+          <a:xfrm>
+            <a:off x="2855625" y="1600200"/>
+            <a:ext cx="6480444" cy="4572000"/>
+          </a:xfrm>
+          <a:prstGeom prst="rect">
+            <a:avLst/>
+          </a:prstGeom>
+        </p:spPr>
+      </p:pic>
+    </p:spTree>
+  </p:cSld>
+  <p:clrMapOvr>
+    <a:masterClrMapping/>
+  </p:clrMapOvr>
+</p:sld>
+</file>
+
+<file path=ppt/slides/slide8.xml><?xml version="1.0" encoding="utf-8"?>
+<p:sld xmlns:a="http://schemas.openxmlformats.org/drawingml/2006/main" xmlns:p="http://schemas.openxmlformats.org/presentationml/2006/main" xmlns:r="http://schemas.openxmlformats.org/officeDocument/2006/relationships">
+  <p:cSld>
+    <p:spTree>
+      <p:nvGrpSpPr>
+        <p:cNvPr id="1" name=""/>
+        <p:cNvGrpSpPr/>
+        <p:nvPr/>
+      </p:nvGrpSpPr>
+      <p:grpSpPr/>
+      <p:sp>
+        <p:nvSpPr>
+          <p:cNvPr id="2" name="Rectangle 1"/>
+          <p:cNvSpPr/>
+          <p:nvPr/>
+        </p:nvSpPr>
+        <p:spPr>
+          <a:xfrm>
+            <a:off x="0" y="0"/>
+            <a:ext cx="12191695" cy="6858000"/>
+          </a:xfrm>
+          <a:prstGeom prst="rect">
+            <a:avLst/>
+          </a:prstGeom>
+          <a:solidFill>
+            <a:srgbClr val="F8F9FA"/>
+          </a:solidFill>
+          <a:ln>
+            <a:noFill/>
+          </a:ln>
+          <a:effectLst/>
+        </p:spPr>
+        <p:style>
+          <a:lnRef idx="1">
+            <a:schemeClr val="accent1"/>
+          </a:lnRef>
+          <a:fillRef idx="3">
+            <a:schemeClr val="accent1"/>
+          </a:fillRef>
+          <a:effectRef idx="2">
+            <a:schemeClr val="accent1"/>
+          </a:effectRef>
+          <a:fontRef idx="minor">
+            <a:schemeClr val="lt1"/>
+          </a:fontRef>
+        </p:style>
+        <p:txBody>
+          <a:bodyPr rtlCol="0" anchor="ctr"/>
+          <a:lstStyle/>
+          <a:p>
+            <a:pPr algn="ctr"/>
+          </a:p>
+        </p:txBody>
+      </p:sp>
+      <p:sp>
+        <p:nvSpPr>
+          <p:cNvPr id="3" name="TextBox 2"/>
+          <p:cNvSpPr txBox="1"/>
+          <p:nvPr/>
+        </p:nvSpPr>
+        <p:spPr>
+          <a:xfrm>
+            <a:off x="731520" y="384048"/>
+            <a:ext cx="10698480" cy="1005840"/>
+          </a:xfrm>
+          <a:prstGeom prst="rect">
+            <a:avLst/>
+          </a:prstGeom>
+          <a:noFill/>
+        </p:spPr>
+        <p:txBody>
+          <a:bodyPr wrap="square">
+            <a:spAutoFit/>
+          </a:bodyPr>
+          <a:lstStyle/>
+          <a:p>
+            <a:pPr>
+              <a:defRPr sz="1000" b="1">
+                <a:solidFill>
+                  <a:srgbClr val="1B4D3E"/>
+                </a:solidFill>
+              </a:defRPr>
+            </a:pPr>
+            <a:r>
+              <a:t>3.4 · EN WAT LEVERDE OP?</a:t>
+            </a:r>
+          </a:p>
+          <a:p>
+            <a:pPr>
+              <a:spcBef>
+                <a:spcPts val="400"/>
+              </a:spcBef>
+              <a:defRPr sz="2400" b="1">
+                <a:solidFill>
+                  <a:srgbClr val="121E31"/>
+                </a:solidFill>
+              </a:defRPr>
+            </a:pPr>
+            <a:r>
+              <a:t>Dezelfde 91 handen, nu op geld</a:t>
+            </a:r>
+          </a:p>
+        </p:txBody>
+      </p:sp>
+      <p:pic>
+        <p:nvPicPr>
+          <p:cNvPr id="4" name="Picture 3" descr="wc8_matrix_winst.png"/>
+          <p:cNvPicPr>
+            <a:picLocks noChangeAspect="1"/>
+          </p:cNvPicPr>
+          <p:nvPr/>
+        </p:nvPicPr>
+        <p:blipFill>
+          <a:blip r:embed="rId2"/>
+          <a:stretch>
+            <a:fillRect/>
+          </a:stretch>
+        </p:blipFill>
+        <p:spPr>
+          <a:xfrm>
+            <a:off x="3657698" y="1600200"/>
+            <a:ext cx="4876299" cy="4572000"/>
+          </a:xfrm>
+          <a:prstGeom prst="rect">
+            <a:avLst/>
+          </a:prstGeom>
+        </p:spPr>
+      </p:pic>
+    </p:spTree>
+  </p:cSld>
+  <p:clrMapOvr>
+    <a:masterClrMapping/>
+  </p:clrMapOvr>
+</p:sld>
+</file>
+
+<file path=ppt/slides/slide9.xml><?xml version="1.0" encoding="utf-8"?>
+<p:sld xmlns:a="http://schemas.openxmlformats.org/drawingml/2006/main" xmlns:p="http://schemas.openxmlformats.org/presentationml/2006/main" xmlns:r="http://schemas.openxmlformats.org/officeDocument/2006/relationships">
+  <p:cSld>
+    <p:spTree>
+      <p:nvGrpSpPr>
+        <p:cNvPr id="1" name=""/>
+        <p:cNvGrpSpPr/>
+        <p:nvPr/>
+      </p:nvGrpSpPr>
+      <p:grpSpPr/>
+      <p:sp>
+        <p:nvSpPr>
+          <p:cNvPr id="2" name="Rectangle 1"/>
+          <p:cNvSpPr/>
+          <p:nvPr/>
+        </p:nvSpPr>
+        <p:spPr>
+          <a:xfrm>
+            <a:off x="0" y="0"/>
+            <a:ext cx="12191695" cy="6858000"/>
+          </a:xfrm>
+          <a:prstGeom prst="rect">
+            <a:avLst/>
+          </a:prstGeom>
+          <a:solidFill>
+            <a:srgbClr val="F8F9FA"/>
+          </a:solidFill>
+          <a:ln>
+            <a:noFill/>
+          </a:ln>
+          <a:effectLst/>
+        </p:spPr>
+        <p:style>
+          <a:lnRef idx="1">
+            <a:schemeClr val="accent1"/>
+          </a:lnRef>
+          <a:fillRef idx="3">
+            <a:schemeClr val="accent1"/>
+          </a:fillRef>
+          <a:effectRef idx="2">
+            <a:schemeClr val="accent1"/>
+          </a:effectRef>
+          <a:fontRef idx="minor">
+            <a:schemeClr val="lt1"/>
+          </a:fontRef>
+        </p:style>
+        <p:txBody>
+          <a:bodyPr rtlCol="0" anchor="ctr"/>
+          <a:lstStyle/>
+          <a:p>
+            <a:pPr algn="ctr"/>
+          </a:p>
+        </p:txBody>
+      </p:sp>
+      <p:sp>
+        <p:nvSpPr>
+          <p:cNvPr id="3" name="TextBox 2"/>
+          <p:cNvSpPr txBox="1"/>
+          <p:nvPr/>
+        </p:nvSpPr>
+        <p:spPr>
+          <a:xfrm>
+            <a:off x="731520" y="384048"/>
+            <a:ext cx="10698480" cy="1005840"/>
+          </a:xfrm>
+          <a:prstGeom prst="rect">
+            <a:avLst/>
+          </a:prstGeom>
+          <a:noFill/>
+        </p:spPr>
+        <p:txBody>
+          <a:bodyPr wrap="square">
+            <a:spAutoFit/>
+          </a:bodyPr>
+          <a:lstStyle/>
+          <a:p>
+            <a:pPr>
+              <a:defRPr sz="1000" b="1">
+                <a:solidFill>
+                  <a:srgbClr val="1B4D3E"/>
+                </a:solidFill>
+              </a:defRPr>
+            </a:pPr>
+            <a:r>
+              <a:t>HET SNIJPUNT</a:t>
+            </a:r>
+          </a:p>
+          <a:p>
+            <a:pPr>
+              <a:spcBef>
+                <a:spcPts val="400"/>
+              </a:spcBef>
+              <a:defRPr sz="2400" b="1">
+                <a:solidFill>
+                  <a:srgbClr val="121E31"/>
+                </a:solidFill>
+              </a:defRPr>
+            </a:pPr>
+            <a:r>
+              <a:t>Weggegooid, en toch winstgevend</a:t>
+            </a:r>
+          </a:p>
+        </p:txBody>
+      </p:sp>
+      <p:sp>
+        <p:nvSpPr>
+          <p:cNvPr id="4" name="Rounded Rectangle 3"/>
+          <p:cNvSpPr/>
+          <p:nvPr/>
+        </p:nvSpPr>
+        <p:spPr>
+          <a:xfrm>
+            <a:off x="731520" y="1600200"/>
+            <a:ext cx="10698480" cy="4480560"/>
+          </a:xfrm>
+          <a:prstGeom prst="roundRect">
+            <a:avLst>
+              <a:gd name="adj" fmla="val 3000"/>
+            </a:avLst>
+          </a:prstGeom>
+          <a:solidFill>
+            <a:srgbClr val="FFFFFF"/>
+          </a:solidFill>
+          <a:ln w="9525">
+            <a:solidFill>
+              <a:srgbClr val="DCE1E6"/>
+            </a:solidFill>
+          </a:ln>
+          <a:effectLst/>
+        </p:spPr>
+        <p:style>
+          <a:lnRef idx="1">
+            <a:schemeClr val="accent1"/>
+          </a:lnRef>
+          <a:fillRef idx="3">
+            <a:schemeClr val="accent1"/>
+          </a:fillRef>
+          <a:effectRef idx="2">
+            <a:schemeClr val="accent1"/>
+          </a:effectRef>
+          <a:fontRef idx="minor">
+            <a:schemeClr val="lt1"/>
+          </a:fontRef>
+        </p:style>
+        <p:txBody>
+          <a:bodyPr rtlCol="0" anchor="ctr"/>
+          <a:lstStyle/>
+          <a:p>
+            <a:pPr algn="ctr"/>
+          </a:p>
+        </p:txBody>
+      </p:sp>
+      <p:sp>
+        <p:nvSpPr>
+          <p:cNvPr id="5" name="TextBox 4"/>
+          <p:cNvSpPr txBox="1"/>
+          <p:nvPr/>
+        </p:nvSpPr>
+        <p:spPr>
+          <a:xfrm>
+            <a:off x="1143000" y="1920240"/>
+            <a:ext cx="9875520" cy="3840480"/>
+          </a:xfrm>
+          <a:prstGeom prst="rect">
+            <a:avLst/>
+          </a:prstGeom>
+          <a:noFill/>
+        </p:spPr>
+        <p:txBody>
+          <a:bodyPr wrap="square">
+            <a:spAutoFit/>
+          </a:bodyPr>
+          <a:lstStyle/>
+          <a:p>
+            <a:pPr>
+              <a:spcBef>
+                <a:spcPts val="400"/>
+              </a:spcBef>
+              <a:defRPr sz="1400" b="0">
+                <a:solidFill>
+                  <a:srgbClr val="121E31"/>
+                </a:solidFill>
+                <a:latin typeface="Consolas"/>
+              </a:defRPr>
+            </a:pPr>
+            <a:r>
+              <a:t>2-2       97x gespeeld    64% gefold    gemiddeld +33 chips</a:t>
+            </a:r>
+          </a:p>
+          <a:p>
+            <a:pPr>
+              <a:spcBef>
+                <a:spcPts val="400"/>
+              </a:spcBef>
+              <a:defRPr sz="1400" b="0">
+                <a:solidFill>
+                  <a:srgbClr val="121E31"/>
+                </a:solidFill>
+                <a:latin typeface="Consolas"/>
+              </a:defRPr>
+            </a:pPr>
+            <a:r>
+              <a:t>Q-9      245x gespeeld    59% gefold    gemiddeld +16 chips</a:t>
+            </a:r>
+          </a:p>
+          <a:p>
+            <a:pPr>
+              <a:spcBef>
+                <a:spcPts val="400"/>
+              </a:spcBef>
+              <a:defRPr sz="1400" b="0">
+                <a:solidFill>
+                  <a:srgbClr val="121E31"/>
+                </a:solidFill>
+                <a:latin typeface="Consolas"/>
+              </a:defRPr>
+            </a:pPr>
+            <a:r>
+              <a:t>K-7      283x gespeeld    56% gefold    gemiddeld +14 chips</a:t>
+            </a:r>
+          </a:p>
+          <a:p>
+            <a:pPr>
+              <a:spcBef>
+                <a:spcPts val="400"/>
+              </a:spcBef>
+              <a:defRPr sz="1400" b="0">
+                <a:solidFill>
+                  <a:srgbClr val="121E31"/>
+                </a:solidFill>
+                <a:latin typeface="Consolas"/>
+              </a:defRPr>
+            </a:pPr>
+            <a:r>
+              <a:t>K-3      223x gespeeld    63% gefold    gemiddeld +12 chips</a:t>
+            </a:r>
+          </a:p>
+          <a:p>
+            <a:pPr>
+              <a:spcBef>
+                <a:spcPts val="400"/>
+              </a:spcBef>
+              <a:defRPr sz="1400" b="0">
+                <a:solidFill>
+                  <a:srgbClr val="121E31"/>
+                </a:solidFill>
+                <a:latin typeface="Consolas"/>
+              </a:defRPr>
+            </a:pPr>
+            <a:r>
+              <a:t>K-8      271x gespeeld    53% gefold    gemiddeld +8 chips</a:t>
+            </a:r>
+          </a:p>
+          <a:p>
+            <a:pPr>
+              <a:spcBef>
+                <a:spcPts val="1800"/>
+              </a:spcBef>
+              <a:defRPr sz="1400" b="1">
+                <a:solidFill>
+                  <a:srgbClr val="1B4D3E"/>
+                </a:solidFill>
+              </a:defRPr>
+            </a:pPr>
+            <a:r>
+              <a:t>Deze handen worden vaker gefold dan gespeeld, maar leveren geld op wanneer er wél mee gespeeld wordt.</a:t>
+            </a:r>
+          </a:p>
+          <a:p>
+            <a:pPr>
+              <a:spcBef>
+                <a:spcPts val="1200"/>
+              </a:spcBef>
+              <a:defRPr sz="1300" b="0">
+                <a:solidFill>
+                  <a:srgbClr val="505A64"/>
+                </a:solidFill>
+              </a:defRPr>
+            </a:pPr>
+            <a:r>
+              <a:t>Is dat een kans, of kijk je naar de handen die toevallig goed afliepen? Dat is precies de vraag die je met deze data niet helemaal kunt beslechten.</a:t>
+            </a:r>
+          </a:p>
+        </p:txBody>
+      </p:sp>
     </p:spTree>
   </p:cSld>
   <p:clrMapOvr>

--- a/powerpoints/Data_Science_Werkcollege8.pptx
+++ b/powerpoints/Data_Science_Werkcollege8.pptx
@@ -19,6 +19,9 @@
     <p:sldId id="267" r:id="rId19"/>
     <p:sldId id="268" r:id="rId20"/>
     <p:sldId id="269" r:id="rId21"/>
+    <p:sldId id="270" r:id="rId22"/>
+    <p:sldId id="271" r:id="rId23"/>
+    <p:sldId id="272" r:id="rId24"/>
   </p:sldIdLst>
   <p:sldSz cx="12191695" cy="6858000" type="screen4x3"/>
   <p:notesSz cx="6858000" cy="9144000"/>
@@ -793,6 +796,252 @@
 </file>
 
 <file path=ppt/notesSlides/notesSlide13.xml><?xml version="1.0" encoding="utf-8"?>
+<p:notes xmlns:a="http://schemas.openxmlformats.org/drawingml/2006/main" xmlns:p="http://schemas.openxmlformats.org/presentationml/2006/main" xmlns:r="http://schemas.openxmlformats.org/officeDocument/2006/relationships">
+  <p:cSld>
+    <p:spTree>
+      <p:nvGrpSpPr>
+        <p:cNvPr id="1" name=""/>
+        <p:cNvGrpSpPr/>
+        <p:nvPr/>
+      </p:nvGrpSpPr>
+      <p:grpSpPr>
+        <a:xfrm>
+          <a:off x="0" y="0"/>
+          <a:ext cx="0" cy="0"/>
+          <a:chOff x="0" y="0"/>
+          <a:chExt cx="0" cy="0"/>
+        </a:xfrm>
+      </p:grpSpPr>
+      <p:sp>
+        <p:nvSpPr>
+          <p:cNvPr id="2" name="Slide Image Placeholder 1"/>
+          <p:cNvSpPr>
+            <a:spLocks noGrp="1"/>
+          </p:cNvSpPr>
+          <p:nvPr>
+            <p:ph type="sldImg" idx="2"/>
+          </p:nvPr>
+        </p:nvSpPr>
+        <p:spPr/>
+      </p:sp>
+      <p:sp>
+        <p:nvSpPr>
+          <p:cNvPr id="3" name="Notes Placeholder 2"/>
+          <p:cNvSpPr>
+            <a:spLocks noGrp="1"/>
+          </p:cNvSpPr>
+          <p:nvPr>
+            <p:ph type="body" idx="3" sz="quarter"/>
+          </p:nvPr>
+        </p:nvSpPr>
+        <p:spPr/>
+        <p:txBody>
+          <a:bodyPr/>
+          <a:lstStyle/>
+          <a:p>
+            <a:r>
+              <a:t>Dit is het antwoord op 'ik ben klaar, wat nu'. Drie sporen, en het middelste is het belangrijkste en het minst voor de hand liggende.</a:t>
+            </a:r>
+          </a:p>
+          <a:p/>
+          <a:p>
+            <a:r>
+              <a:t>Neem even de tijd voor die rode regel onderin. Het logboek heeft ÉÉN regel per hand, met alleen de eerste actie van die hand. Alles wat per ronde, per pot of per tegenstander speelt staat er dus niet in. Dat is geen omissie maar een ontwerpkeuze: een regel per beslissing zou het logboek vijf keer zo groot maken.</a:t>
+            </a:r>
+          </a:p>
+          <a:p/>
+          <a:p>
+            <a:r>
+              <a:t>Wie dáár iets over wil weten, moet zijn bot het zelf laten opschrijven. Dat is de volgende dia.</a:t>
+            </a:r>
+          </a:p>
+        </p:txBody>
+      </p:sp>
+      <p:sp>
+        <p:nvSpPr>
+          <p:cNvPr id="4" name="Slide Number Placeholder 3"/>
+          <p:cNvSpPr>
+            <a:spLocks noGrp="1"/>
+          </p:cNvSpPr>
+          <p:nvPr>
+            <p:ph type="sldNum" idx="5" sz="quarter"/>
+          </p:nvPr>
+        </p:nvSpPr>
+        <p:spPr/>
+      </p:sp>
+    </p:spTree>
+  </p:cSld>
+  <p:clrMapOvr>
+    <a:masterClrMapping/>
+  </p:clrMapOvr>
+</p:notes>
+</file>
+
+<file path=ppt/notesSlides/notesSlide14.xml><?xml version="1.0" encoding="utf-8"?>
+<p:notes xmlns:a="http://schemas.openxmlformats.org/drawingml/2006/main" xmlns:p="http://schemas.openxmlformats.org/presentationml/2006/main" xmlns:r="http://schemas.openxmlformats.org/officeDocument/2006/relationships">
+  <p:cSld>
+    <p:spTree>
+      <p:nvGrpSpPr>
+        <p:cNvPr id="1" name=""/>
+        <p:cNvGrpSpPr/>
+        <p:nvPr/>
+      </p:nvGrpSpPr>
+      <p:grpSpPr>
+        <a:xfrm>
+          <a:off x="0" y="0"/>
+          <a:ext cx="0" cy="0"/>
+          <a:chOff x="0" y="0"/>
+          <a:chExt cx="0" cy="0"/>
+        </a:xfrm>
+      </p:grpSpPr>
+      <p:sp>
+        <p:nvSpPr>
+          <p:cNvPr id="2" name="Slide Image Placeholder 1"/>
+          <p:cNvSpPr>
+            <a:spLocks noGrp="1"/>
+          </p:cNvSpPr>
+          <p:nvPr>
+            <p:ph type="sldImg" idx="2"/>
+          </p:nvPr>
+        </p:nvSpPr>
+        <p:spPr/>
+      </p:sp>
+      <p:sp>
+        <p:nvSpPr>
+          <p:cNvPr id="3" name="Notes Placeholder 2"/>
+          <p:cNvSpPr>
+            <a:spLocks noGrp="1"/>
+          </p:cNvSpPr>
+          <p:nvPr>
+            <p:ph type="body" idx="3" sz="quarter"/>
+          </p:nvPr>
+        </p:nvSpPr>
+        <p:spPr/>
+        <p:txBody>
+          <a:bodyPr/>
+          <a:lstStyle/>
+          <a:p>
+            <a:r>
+              <a:t>Dit is de meest waardevolle dia van het hele slot, en de makkelijkste om over te slaan.</a:t>
+            </a:r>
+          </a:p>
+          <a:p/>
+          <a:p>
+            <a:r>
+              <a:t>Het idee is simpel: je bot weet op het moment van beslissen alles — de ronde, de pot, zijn winkans, welke regel er vuurde. Die kennis gooit hij nu weg. Eén append per beslissing en je houdt hem vast.</a:t>
+            </a:r>
+          </a:p>
+          <a:p/>
+          <a:p>
+            <a:r>
+              <a:t>Koppel het aan de vijf-regelstructuur uit Werkcollege 7: door 'regel' mee te loggen kun je achteraf per regel uitrekenen wat hij opleverde. Dan weet je welke van je vijf regels het werk doet en welke er alleen maar staat.</a:t>
+            </a:r>
+          </a:p>
+        </p:txBody>
+      </p:sp>
+      <p:sp>
+        <p:nvSpPr>
+          <p:cNvPr id="4" name="Slide Number Placeholder 3"/>
+          <p:cNvSpPr>
+            <a:spLocks noGrp="1"/>
+          </p:cNvSpPr>
+          <p:nvPr>
+            <p:ph type="sldNum" idx="5" sz="quarter"/>
+          </p:nvPr>
+        </p:nvSpPr>
+        <p:spPr/>
+      </p:sp>
+    </p:spTree>
+  </p:cSld>
+  <p:clrMapOvr>
+    <a:masterClrMapping/>
+  </p:clrMapOvr>
+</p:notes>
+</file>
+
+<file path=ppt/notesSlides/notesSlide15.xml><?xml version="1.0" encoding="utf-8"?>
+<p:notes xmlns:a="http://schemas.openxmlformats.org/drawingml/2006/main" xmlns:p="http://schemas.openxmlformats.org/presentationml/2006/main" xmlns:r="http://schemas.openxmlformats.org/officeDocument/2006/relationships">
+  <p:cSld>
+    <p:spTree>
+      <p:nvGrpSpPr>
+        <p:cNvPr id="1" name=""/>
+        <p:cNvGrpSpPr/>
+        <p:nvPr/>
+      </p:nvGrpSpPr>
+      <p:grpSpPr>
+        <a:xfrm>
+          <a:off x="0" y="0"/>
+          <a:ext cx="0" cy="0"/>
+          <a:chOff x="0" y="0"/>
+          <a:chExt cx="0" cy="0"/>
+        </a:xfrm>
+      </p:grpSpPr>
+      <p:sp>
+        <p:nvSpPr>
+          <p:cNvPr id="2" name="Slide Image Placeholder 1"/>
+          <p:cNvSpPr>
+            <a:spLocks noGrp="1"/>
+          </p:cNvSpPr>
+          <p:nvPr>
+            <p:ph type="sldImg" idx="2"/>
+          </p:nvPr>
+        </p:nvSpPr>
+        <p:spPr/>
+      </p:sp>
+      <p:sp>
+        <p:nvSpPr>
+          <p:cNvPr id="3" name="Notes Placeholder 2"/>
+          <p:cNvSpPr>
+            <a:spLocks noGrp="1"/>
+          </p:cNvSpPr>
+          <p:nvPr>
+            <p:ph type="body" idx="3" sz="quarter"/>
+          </p:nvPr>
+        </p:nvSpPr>
+        <p:spPr/>
+        <p:txBody>
+          <a:bodyPr/>
+          <a:lstStyle/>
+          <a:p>
+            <a:r>
+              <a:t>Sluit hiermee af als er tijd over is. Het punt: ze denken dat ze alleen een percentage hebben, terwijl beschrijf_hand() ze de handsóórt geeft.</a:t>
+            </a:r>
+          </a:p>
+          <a:p/>
+          <a:p>
+            <a:r>
+              <a:t>Een regel als 'bij three of a kind of beter ga ik door, wat de winkans ook zegt' is voor sommigen begrijpelijker dan drempels, en het is een volwaardige strategie.</a:t>
+            </a:r>
+          </a:p>
+          <a:p/>
+          <a:p>
+            <a:r>
+              <a:t>vergelijk_handen is vooral nuttig om te begrijpen waarom je een hand verloor die je dacht te winnen — kickers.</a:t>
+            </a:r>
+          </a:p>
+        </p:txBody>
+      </p:sp>
+      <p:sp>
+        <p:nvSpPr>
+          <p:cNvPr id="4" name="Slide Number Placeholder 3"/>
+          <p:cNvSpPr>
+            <a:spLocks noGrp="1"/>
+          </p:cNvSpPr>
+          <p:nvPr>
+            <p:ph type="sldNum" idx="5" sz="quarter"/>
+          </p:nvPr>
+        </p:nvSpPr>
+        <p:spPr/>
+      </p:sp>
+    </p:spTree>
+  </p:cSld>
+  <p:clrMapOvr>
+    <a:masterClrMapping/>
+  </p:clrMapOvr>
+</p:notes>
+</file>
+
+<file path=ppt/notesSlides/notesSlide16.xml><?xml version="1.0" encoding="utf-8"?>
 <p:notes xmlns:a="http://schemas.openxmlformats.org/drawingml/2006/main" xmlns:p="http://schemas.openxmlformats.org/presentationml/2006/main" xmlns:r="http://schemas.openxmlformats.org/officeDocument/2006/relationships">
   <p:cSld>
     <p:spTree>
@@ -5164,6 +5413,780 @@
 </file>
 
 <file path=ppt/slides/slide14.xml><?xml version="1.0" encoding="utf-8"?>
+<p:sld xmlns:a="http://schemas.openxmlformats.org/drawingml/2006/main" xmlns:p="http://schemas.openxmlformats.org/presentationml/2006/main" xmlns:r="http://schemas.openxmlformats.org/officeDocument/2006/relationships">
+  <p:cSld>
+    <p:spTree>
+      <p:nvGrpSpPr>
+        <p:cNvPr id="1" name=""/>
+        <p:cNvGrpSpPr/>
+        <p:nvPr/>
+      </p:nvGrpSpPr>
+      <p:grpSpPr/>
+      <p:sp>
+        <p:nvSpPr>
+          <p:cNvPr id="2" name="Rectangle 1"/>
+          <p:cNvSpPr/>
+          <p:nvPr/>
+        </p:nvSpPr>
+        <p:spPr>
+          <a:xfrm>
+            <a:off x="0" y="0"/>
+            <a:ext cx="12191695" cy="6858000"/>
+          </a:xfrm>
+          <a:prstGeom prst="rect">
+            <a:avLst/>
+          </a:prstGeom>
+          <a:solidFill>
+            <a:srgbClr val="F8F9FA"/>
+          </a:solidFill>
+          <a:ln>
+            <a:noFill/>
+          </a:ln>
+          <a:effectLst/>
+        </p:spPr>
+        <p:style>
+          <a:lnRef idx="1">
+            <a:schemeClr val="accent1"/>
+          </a:lnRef>
+          <a:fillRef idx="3">
+            <a:schemeClr val="accent1"/>
+          </a:fillRef>
+          <a:effectRef idx="2">
+            <a:schemeClr val="accent1"/>
+          </a:effectRef>
+          <a:fontRef idx="minor">
+            <a:schemeClr val="lt1"/>
+          </a:fontRef>
+        </p:style>
+        <p:txBody>
+          <a:bodyPr rtlCol="0" anchor="ctr"/>
+          <a:lstStyle/>
+          <a:p>
+            <a:pPr algn="ctr"/>
+          </a:p>
+        </p:txBody>
+      </p:sp>
+      <p:sp>
+        <p:nvSpPr>
+          <p:cNvPr id="3" name="TextBox 2"/>
+          <p:cNvSpPr txBox="1"/>
+          <p:nvPr/>
+        </p:nvSpPr>
+        <p:spPr>
+          <a:xfrm>
+            <a:off x="731520" y="384048"/>
+            <a:ext cx="10698480" cy="1005840"/>
+          </a:xfrm>
+          <a:prstGeom prst="rect">
+            <a:avLst/>
+          </a:prstGeom>
+          <a:noFill/>
+        </p:spPr>
+        <p:txBody>
+          <a:bodyPr wrap="square">
+            <a:spAutoFit/>
+          </a:bodyPr>
+          <a:lstStyle/>
+          <a:p>
+            <a:pPr>
+              <a:defRPr sz="1000" b="1">
+                <a:solidFill>
+                  <a:srgbClr val="1B4D3E"/>
+                </a:solidFill>
+              </a:defRPr>
+            </a:pPr>
+            <a:r>
+              <a:t>EN DAARNA</a:t>
+            </a:r>
+          </a:p>
+          <a:p>
+            <a:pPr>
+              <a:spcBef>
+                <a:spcPts val="400"/>
+              </a:spcBef>
+              <a:defRPr sz="2400" b="1">
+                <a:solidFill>
+                  <a:srgbClr val="121E31"/>
+                </a:solidFill>
+              </a:defRPr>
+            </a:pPr>
+            <a:r>
+              <a:t>Waar kun je nog naar kijken?</a:t>
+            </a:r>
+          </a:p>
+        </p:txBody>
+      </p:sp>
+      <p:pic>
+        <p:nvPicPr>
+          <p:cNvPr id="4" name="Picture 3" descr="wc8_routes.png"/>
+          <p:cNvPicPr>
+            <a:picLocks noChangeAspect="1"/>
+          </p:cNvPicPr>
+          <p:nvPr/>
+        </p:nvPicPr>
+        <p:blipFill>
+          <a:blip r:embed="rId2"/>
+          <a:stretch>
+            <a:fillRect/>
+          </a:stretch>
+        </p:blipFill>
+        <p:spPr>
+          <a:xfrm>
+            <a:off x="1339756" y="1600200"/>
+            <a:ext cx="9512183" cy="4572000"/>
+          </a:xfrm>
+          <a:prstGeom prst="rect">
+            <a:avLst/>
+          </a:prstGeom>
+        </p:spPr>
+      </p:pic>
+    </p:spTree>
+  </p:cSld>
+  <p:clrMapOvr>
+    <a:masterClrMapping/>
+  </p:clrMapOvr>
+</p:sld>
+</file>
+
+<file path=ppt/slides/slide15.xml><?xml version="1.0" encoding="utf-8"?>
+<p:sld xmlns:a="http://schemas.openxmlformats.org/drawingml/2006/main" xmlns:p="http://schemas.openxmlformats.org/presentationml/2006/main" xmlns:r="http://schemas.openxmlformats.org/officeDocument/2006/relationships">
+  <p:cSld>
+    <p:spTree>
+      <p:nvGrpSpPr>
+        <p:cNvPr id="1" name=""/>
+        <p:cNvGrpSpPr/>
+        <p:nvPr/>
+      </p:nvGrpSpPr>
+      <p:grpSpPr/>
+      <p:sp>
+        <p:nvSpPr>
+          <p:cNvPr id="2" name="Rectangle 1"/>
+          <p:cNvSpPr/>
+          <p:nvPr/>
+        </p:nvSpPr>
+        <p:spPr>
+          <a:xfrm>
+            <a:off x="0" y="0"/>
+            <a:ext cx="12191695" cy="6858000"/>
+          </a:xfrm>
+          <a:prstGeom prst="rect">
+            <a:avLst/>
+          </a:prstGeom>
+          <a:solidFill>
+            <a:srgbClr val="F8F9FA"/>
+          </a:solidFill>
+          <a:ln>
+            <a:noFill/>
+          </a:ln>
+          <a:effectLst/>
+        </p:spPr>
+        <p:style>
+          <a:lnRef idx="1">
+            <a:schemeClr val="accent1"/>
+          </a:lnRef>
+          <a:fillRef idx="3">
+            <a:schemeClr val="accent1"/>
+          </a:fillRef>
+          <a:effectRef idx="2">
+            <a:schemeClr val="accent1"/>
+          </a:effectRef>
+          <a:fontRef idx="minor">
+            <a:schemeClr val="lt1"/>
+          </a:fontRef>
+        </p:style>
+        <p:txBody>
+          <a:bodyPr rtlCol="0" anchor="ctr"/>
+          <a:lstStyle/>
+          <a:p>
+            <a:pPr algn="ctr"/>
+          </a:p>
+        </p:txBody>
+      </p:sp>
+      <p:sp>
+        <p:nvSpPr>
+          <p:cNvPr id="3" name="TextBox 2"/>
+          <p:cNvSpPr txBox="1"/>
+          <p:nvPr/>
+        </p:nvSpPr>
+        <p:spPr>
+          <a:xfrm>
+            <a:off x="731520" y="384048"/>
+            <a:ext cx="10698480" cy="1005840"/>
+          </a:xfrm>
+          <a:prstGeom prst="rect">
+            <a:avLst/>
+          </a:prstGeom>
+          <a:noFill/>
+        </p:spPr>
+        <p:txBody>
+          <a:bodyPr wrap="square">
+            <a:spAutoFit/>
+          </a:bodyPr>
+          <a:lstStyle/>
+          <a:p>
+            <a:pPr>
+              <a:defRPr sz="1000" b="1">
+                <a:solidFill>
+                  <a:srgbClr val="1B4D3E"/>
+                </a:solidFill>
+              </a:defRPr>
+            </a:pPr>
+            <a:r>
+              <a:t>SPOOR 2</a:t>
+            </a:r>
+          </a:p>
+          <a:p>
+            <a:pPr>
+              <a:spcBef>
+                <a:spcPts val="400"/>
+              </a:spcBef>
+              <a:defRPr sz="2400" b="1">
+                <a:solidFill>
+                  <a:srgbClr val="121E31"/>
+                </a:solidFill>
+              </a:defRPr>
+            </a:pPr>
+            <a:r>
+              <a:t>Laat je bot opschrijven wat hij doet</a:t>
+            </a:r>
+          </a:p>
+        </p:txBody>
+      </p:sp>
+      <p:sp>
+        <p:nvSpPr>
+          <p:cNvPr id="4" name="Rounded Rectangle 3"/>
+          <p:cNvSpPr/>
+          <p:nvPr/>
+        </p:nvSpPr>
+        <p:spPr>
+          <a:xfrm>
+            <a:off x="731520" y="1600200"/>
+            <a:ext cx="10698480" cy="4480560"/>
+          </a:xfrm>
+          <a:prstGeom prst="roundRect">
+            <a:avLst>
+              <a:gd name="adj" fmla="val 3000"/>
+            </a:avLst>
+          </a:prstGeom>
+          <a:solidFill>
+            <a:srgbClr val="FFFFFF"/>
+          </a:solidFill>
+          <a:ln w="9525">
+            <a:solidFill>
+              <a:srgbClr val="DCE1E6"/>
+            </a:solidFill>
+          </a:ln>
+          <a:effectLst/>
+        </p:spPr>
+        <p:style>
+          <a:lnRef idx="1">
+            <a:schemeClr val="accent1"/>
+          </a:lnRef>
+          <a:fillRef idx="3">
+            <a:schemeClr val="accent1"/>
+          </a:fillRef>
+          <a:effectRef idx="2">
+            <a:schemeClr val="accent1"/>
+          </a:effectRef>
+          <a:fontRef idx="minor">
+            <a:schemeClr val="lt1"/>
+          </a:fontRef>
+        </p:style>
+        <p:txBody>
+          <a:bodyPr rtlCol="0" anchor="ctr"/>
+          <a:lstStyle/>
+          <a:p>
+            <a:pPr algn="ctr"/>
+          </a:p>
+        </p:txBody>
+      </p:sp>
+      <p:sp>
+        <p:nvSpPr>
+          <p:cNvPr id="5" name="TextBox 4"/>
+          <p:cNvSpPr txBox="1"/>
+          <p:nvPr/>
+        </p:nvSpPr>
+        <p:spPr>
+          <a:xfrm>
+            <a:off x="1143000" y="1920240"/>
+            <a:ext cx="9875520" cy="3840480"/>
+          </a:xfrm>
+          <a:prstGeom prst="rect">
+            <a:avLst/>
+          </a:prstGeom>
+          <a:noFill/>
+        </p:spPr>
+        <p:txBody>
+          <a:bodyPr wrap="square">
+            <a:spAutoFit/>
+          </a:bodyPr>
+          <a:lstStyle/>
+          <a:p>
+            <a:pPr>
+              <a:defRPr sz="1500" b="1">
+                <a:solidFill>
+                  <a:srgbClr val="121E31"/>
+                </a:solidFill>
+              </a:defRPr>
+            </a:pPr>
+            <a:r>
+              <a:t>Drie regels erbij, en je hebt data die niemand anders heeft:</a:t>
+            </a:r>
+          </a:p>
+          <a:p>
+            <a:pPr>
+              <a:spcBef>
+                <a:spcPts val="1400"/>
+              </a:spcBef>
+              <a:defRPr sz="1300" b="0">
+                <a:solidFill>
+                  <a:srgbClr val="121E31"/>
+                </a:solidFill>
+                <a:latin typeface="Consolas"/>
+              </a:defRPr>
+            </a:pPr>
+            <a:r>
+              <a:t>BESLISSINGEN = []</a:t>
+            </a:r>
+          </a:p>
+          <a:p>
+            <a:pPr>
+              <a:spcBef>
+                <a:spcPts val="200"/>
+              </a:spcBef>
+              <a:defRPr sz="1300" b="0">
+                <a:solidFill>
+                  <a:srgbClr val="121E31"/>
+                </a:solidFill>
+                <a:latin typeface="Consolas"/>
+              </a:defRPr>
+            </a:pPr>
+          </a:p>
+          <a:p>
+            <a:pPr>
+              <a:spcBef>
+                <a:spcPts val="200"/>
+              </a:spcBef>
+              <a:defRPr sz="1300" b="0">
+                <a:solidFill>
+                  <a:srgbClr val="505A64"/>
+                </a:solidFill>
+                <a:latin typeface="Consolas"/>
+              </a:defRPr>
+            </a:pPr>
+            <a:r>
+              <a:t>def kies_actie(hand, ..., ronde, pot, inzet_om_te_callen, ...):</a:t>
+            </a:r>
+          </a:p>
+          <a:p>
+            <a:pPr>
+              <a:spcBef>
+                <a:spcPts val="200"/>
+              </a:spcBef>
+              <a:defRPr sz="1300" b="0">
+                <a:solidFill>
+                  <a:srgbClr val="505A64"/>
+                </a:solidFill>
+                <a:latin typeface="Consolas"/>
+              </a:defRPr>
+            </a:pPr>
+            <a:r>
+              <a:t>    winkans = schat_winkans(...)</a:t>
+            </a:r>
+          </a:p>
+          <a:p>
+            <a:pPr>
+              <a:spcBef>
+                <a:spcPts val="200"/>
+              </a:spcBef>
+              <a:defRPr sz="1300" b="0">
+                <a:solidFill>
+                  <a:srgbClr val="505A64"/>
+                </a:solidFill>
+                <a:latin typeface="Consolas"/>
+              </a:defRPr>
+            </a:pPr>
+            <a:r>
+              <a:t>    ...</a:t>
+            </a:r>
+          </a:p>
+          <a:p>
+            <a:pPr>
+              <a:spcBef>
+                <a:spcPts val="200"/>
+              </a:spcBef>
+              <a:defRPr sz="1300" b="1">
+                <a:solidFill>
+                  <a:srgbClr val="1B4D3E"/>
+                </a:solidFill>
+                <a:latin typeface="Consolas"/>
+              </a:defRPr>
+            </a:pPr>
+            <a:r>
+              <a:t>    BESLISSINGEN.append({"ronde": ronde, "winkans": winkans,</a:t>
+            </a:r>
+          </a:p>
+          <a:p>
+            <a:pPr>
+              <a:spcBef>
+                <a:spcPts val="200"/>
+              </a:spcBef>
+              <a:defRPr sz="1300" b="1">
+                <a:solidFill>
+                  <a:srgbClr val="1B4D3E"/>
+                </a:solidFill>
+                <a:latin typeface="Consolas"/>
+              </a:defRPr>
+            </a:pPr>
+            <a:r>
+              <a:t>                         "pot": pot, "regel": "bluf", "actie": actie})</a:t>
+            </a:r>
+          </a:p>
+          <a:p>
+            <a:pPr>
+              <a:spcBef>
+                <a:spcPts val="200"/>
+              </a:spcBef>
+              <a:defRPr sz="1300" b="0">
+                <a:solidFill>
+                  <a:srgbClr val="505A64"/>
+                </a:solidFill>
+                <a:latin typeface="Consolas"/>
+              </a:defRPr>
+            </a:pPr>
+            <a:r>
+              <a:t>    return actie</a:t>
+            </a:r>
+          </a:p>
+          <a:p>
+            <a:pPr>
+              <a:spcBef>
+                <a:spcPts val="1600"/>
+              </a:spcBef>
+              <a:defRPr sz="1300" b="0">
+                <a:solidFill>
+                  <a:srgbClr val="121E31"/>
+                </a:solidFill>
+              </a:defRPr>
+            </a:pPr>
+            <a:r>
+              <a:t>Daarna speel_duel() draaien en pd.DataFrame(BESLISSINGEN) analyseren. Nu kun je wél zien wat je winkans per straat was, hoe vaak je bluf-regel vuurde, en welke van je vijf regels de beslissing nam.</a:t>
+            </a:r>
+          </a:p>
+          <a:p>
+            <a:pPr>
+              <a:spcBef>
+                <a:spcPts val="1000"/>
+              </a:spcBef>
+              <a:defRPr sz="1300" b="1">
+                <a:solidFill>
+                  <a:srgbClr val="B3261E"/>
+                </a:solidFill>
+              </a:defRPr>
+            </a:pPr>
+            <a:r>
+              <a:t>Let op: dit doe je LOKAAL. In je inzending hoort geen logboek — daar telt alleen wat kies_actie teruggeeft.</a:t>
+            </a:r>
+          </a:p>
+        </p:txBody>
+      </p:sp>
+    </p:spTree>
+  </p:cSld>
+  <p:clrMapOvr>
+    <a:masterClrMapping/>
+  </p:clrMapOvr>
+</p:sld>
+</file>
+
+<file path=ppt/slides/slide16.xml><?xml version="1.0" encoding="utf-8"?>
+<p:sld xmlns:a="http://schemas.openxmlformats.org/drawingml/2006/main" xmlns:p="http://schemas.openxmlformats.org/presentationml/2006/main" xmlns:r="http://schemas.openxmlformats.org/officeDocument/2006/relationships">
+  <p:cSld>
+    <p:spTree>
+      <p:nvGrpSpPr>
+        <p:cNvPr id="1" name=""/>
+        <p:cNvGrpSpPr/>
+        <p:nvPr/>
+      </p:nvGrpSpPr>
+      <p:grpSpPr/>
+      <p:sp>
+        <p:nvSpPr>
+          <p:cNvPr id="2" name="Rectangle 1"/>
+          <p:cNvSpPr/>
+          <p:nvPr/>
+        </p:nvSpPr>
+        <p:spPr>
+          <a:xfrm>
+            <a:off x="0" y="0"/>
+            <a:ext cx="12191695" cy="6858000"/>
+          </a:xfrm>
+          <a:prstGeom prst="rect">
+            <a:avLst/>
+          </a:prstGeom>
+          <a:solidFill>
+            <a:srgbClr val="F8F9FA"/>
+          </a:solidFill>
+          <a:ln>
+            <a:noFill/>
+          </a:ln>
+          <a:effectLst/>
+        </p:spPr>
+        <p:style>
+          <a:lnRef idx="1">
+            <a:schemeClr val="accent1"/>
+          </a:lnRef>
+          <a:fillRef idx="3">
+            <a:schemeClr val="accent1"/>
+          </a:fillRef>
+          <a:effectRef idx="2">
+            <a:schemeClr val="accent1"/>
+          </a:effectRef>
+          <a:fontRef idx="minor">
+            <a:schemeClr val="lt1"/>
+          </a:fontRef>
+        </p:style>
+        <p:txBody>
+          <a:bodyPr rtlCol="0" anchor="ctr"/>
+          <a:lstStyle/>
+          <a:p>
+            <a:pPr algn="ctr"/>
+          </a:p>
+        </p:txBody>
+      </p:sp>
+      <p:sp>
+        <p:nvSpPr>
+          <p:cNvPr id="3" name="TextBox 2"/>
+          <p:cNvSpPr txBox="1"/>
+          <p:nvPr/>
+        </p:nvSpPr>
+        <p:spPr>
+          <a:xfrm>
+            <a:off x="731520" y="384048"/>
+            <a:ext cx="10698480" cy="1005840"/>
+          </a:xfrm>
+          <a:prstGeom prst="rect">
+            <a:avLst/>
+          </a:prstGeom>
+          <a:noFill/>
+        </p:spPr>
+        <p:txBody>
+          <a:bodyPr wrap="square">
+            <a:spAutoFit/>
+          </a:bodyPr>
+          <a:lstStyle/>
+          <a:p>
+            <a:pPr>
+              <a:defRPr sz="1000" b="1">
+                <a:solidFill>
+                  <a:srgbClr val="1B4D3E"/>
+                </a:solidFill>
+              </a:defRPr>
+            </a:pPr>
+            <a:r>
+              <a:t>SPOOR 3</a:t>
+            </a:r>
+          </a:p>
+          <a:p>
+            <a:pPr>
+              <a:spcBef>
+                <a:spcPts val="400"/>
+              </a:spcBef>
+              <a:defRPr sz="2400" b="1">
+                <a:solidFill>
+                  <a:srgbClr val="121E31"/>
+                </a:solidFill>
+              </a:defRPr>
+            </a:pPr>
+            <a:r>
+              <a:t>Meer weten over je hand — dat kan gewoon</a:t>
+            </a:r>
+          </a:p>
+        </p:txBody>
+      </p:sp>
+      <p:sp>
+        <p:nvSpPr>
+          <p:cNvPr id="4" name="Rounded Rectangle 3"/>
+          <p:cNvSpPr/>
+          <p:nvPr/>
+        </p:nvSpPr>
+        <p:spPr>
+          <a:xfrm>
+            <a:off x="731520" y="1600200"/>
+            <a:ext cx="10698480" cy="4480560"/>
+          </a:xfrm>
+          <a:prstGeom prst="roundRect">
+            <a:avLst>
+              <a:gd name="adj" fmla="val 3000"/>
+            </a:avLst>
+          </a:prstGeom>
+          <a:solidFill>
+            <a:srgbClr val="FFFFFF"/>
+          </a:solidFill>
+          <a:ln w="9525">
+            <a:solidFill>
+              <a:srgbClr val="DCE1E6"/>
+            </a:solidFill>
+          </a:ln>
+          <a:effectLst/>
+        </p:spPr>
+        <p:style>
+          <a:lnRef idx="1">
+            <a:schemeClr val="accent1"/>
+          </a:lnRef>
+          <a:fillRef idx="3">
+            <a:schemeClr val="accent1"/>
+          </a:fillRef>
+          <a:effectRef idx="2">
+            <a:schemeClr val="accent1"/>
+          </a:effectRef>
+          <a:fontRef idx="minor">
+            <a:schemeClr val="lt1"/>
+          </a:fontRef>
+        </p:style>
+        <p:txBody>
+          <a:bodyPr rtlCol="0" anchor="ctr"/>
+          <a:lstStyle/>
+          <a:p>
+            <a:pPr algn="ctr"/>
+          </a:p>
+        </p:txBody>
+      </p:sp>
+      <p:sp>
+        <p:nvSpPr>
+          <p:cNvPr id="5" name="TextBox 4"/>
+          <p:cNvSpPr txBox="1"/>
+          <p:nvPr/>
+        </p:nvSpPr>
+        <p:spPr>
+          <a:xfrm>
+            <a:off x="1143000" y="1920240"/>
+            <a:ext cx="9875520" cy="3840480"/>
+          </a:xfrm>
+          <a:prstGeom prst="rect">
+            <a:avLst/>
+          </a:prstGeom>
+          <a:noFill/>
+        </p:spPr>
+        <p:txBody>
+          <a:bodyPr wrap="square">
+            <a:spAutoFit/>
+          </a:bodyPr>
+          <a:lstStyle/>
+          <a:p>
+            <a:pPr>
+              <a:defRPr sz="1400" b="1">
+                <a:solidFill>
+                  <a:srgbClr val="1B4D3E"/>
+                </a:solidFill>
+                <a:latin typeface="Consolas"/>
+              </a:defRPr>
+            </a:pPr>
+            <a:r>
+              <a:t>schat_winkans(hand_met_kleur, bord=bord, tegenstanders=n)</a:t>
+            </a:r>
+          </a:p>
+          <a:p>
+            <a:pPr>
+              <a:spcBef>
+                <a:spcPts val="600"/>
+              </a:spcBef>
+              <a:defRPr sz="1300" b="0">
+                <a:solidFill>
+                  <a:srgbClr val="121E31"/>
+                </a:solidFill>
+              </a:defRPr>
+            </a:pPr>
+            <a:r>
+              <a:t>De winkans verandert enorm met het bord en met het aantal tegenstanders. Dezelfde A-K: 38,5% preflop, 75,5% na de ene flop, 22,3% na de andere.</a:t>
+            </a:r>
+          </a:p>
+          <a:p>
+            <a:pPr>
+              <a:spcBef>
+                <a:spcPts val="1800"/>
+              </a:spcBef>
+              <a:defRPr sz="1400" b="1">
+                <a:solidFill>
+                  <a:srgbClr val="1B4D3E"/>
+                </a:solidFill>
+                <a:latin typeface="Consolas"/>
+              </a:defRPr>
+            </a:pPr>
+            <a:r>
+              <a:t>beschrijf_hand(hand_met_kleur, bord)</a:t>
+            </a:r>
+          </a:p>
+          <a:p>
+            <a:pPr>
+              <a:spcBef>
+                <a:spcPts val="600"/>
+              </a:spcBef>
+              <a:defRPr sz="1300" b="0">
+                <a:solidFill>
+                  <a:srgbClr val="121E31"/>
+                </a:solidFill>
+              </a:defRPr>
+            </a:pPr>
+            <a:r>
+              <a:t>Geeft terug wat je wérkelijk hebt: 'one pair', 'three of a kind', 'flush'. Daarmee kun je regels schrijven op handsóórt in plaats van op een percentage.</a:t>
+            </a:r>
+          </a:p>
+          <a:p>
+            <a:pPr>
+              <a:spcBef>
+                <a:spcPts val="1800"/>
+              </a:spcBef>
+              <a:defRPr sz="1400" b="1">
+                <a:solidFill>
+                  <a:srgbClr val="1B4D3E"/>
+                </a:solidFill>
+                <a:latin typeface="Consolas"/>
+              </a:defRPr>
+            </a:pPr>
+            <a:r>
+              <a:t>vergelijk_handen(jouw_hand, andere_hand, bord)</a:t>
+            </a:r>
+          </a:p>
+          <a:p>
+            <a:pPr>
+              <a:spcBef>
+                <a:spcPts val="600"/>
+              </a:spcBef>
+              <a:defRPr sz="1300" b="0">
+                <a:solidFill>
+                  <a:srgbClr val="121E31"/>
+                </a:solidFill>
+              </a:defRPr>
+            </a:pPr>
+            <a:r>
+              <a:t>Wie wint deze showdown? Zelfde evaluatie als het toernooi, dus inclusief kickers.</a:t>
+            </a:r>
+          </a:p>
+          <a:p>
+            <a:pPr>
+              <a:spcBef>
+                <a:spcPts val="1800"/>
+              </a:spcBef>
+              <a:defRPr sz="1300" b="1">
+                <a:solidFill>
+                  <a:srgbClr val="505A64"/>
+                </a:solidFill>
+              </a:defRPr>
+            </a:pPr>
+            <a:r>
+              <a:t>Alle drie staan in _hulpfuncties_week3.py. Je kent ze uit Werkcollege 5, en in week 5 heeft bijna niemand ze nog gebruikt.</a:t>
+            </a:r>
+          </a:p>
+        </p:txBody>
+      </p:sp>
+    </p:spTree>
+  </p:cSld>
+  <p:clrMapOvr>
+    <a:masterClrMapping/>
+  </p:clrMapOvr>
+</p:sld>
+</file>
+
+<file path=ppt/slides/slide17.xml><?xml version="1.0" encoding="utf-8"?>
 <p:sld xmlns:a="http://schemas.openxmlformats.org/drawingml/2006/main" xmlns:p="http://schemas.openxmlformats.org/presentationml/2006/main" xmlns:r="http://schemas.openxmlformats.org/officeDocument/2006/relationships">
   <p:cSld>
     <p:spTree>

--- a/powerpoints/Data_Science_Werkcollege8.pptx
+++ b/powerpoints/Data_Science_Werkcollege8.pptx
@@ -22,6 +22,7 @@
     <p:sldId id="270" r:id="rId22"/>
     <p:sldId id="271" r:id="rId23"/>
     <p:sldId id="272" r:id="rId24"/>
+    <p:sldId id="273" r:id="rId25"/>
   </p:sldIdLst>
   <p:sldSz cx="12191695" cy="6858000" type="screen4x3"/>
   <p:notesSz cx="6858000" cy="9144000"/>
@@ -922,19 +923,25 @@
           <a:lstStyle/>
           <a:p>
             <a:r>
-              <a:t>Dit is de meest waardevolle dia van het hele slot, en de makkelijkste om over te slaan.</a:t>
+              <a:t>Dit is de dia waar ik de meeste waarde van verwacht, want 'bedenk een analyse' is een opdracht waar de meesten op vastlopen.</a:t>
             </a:r>
           </a:p>
           <a:p/>
           <a:p>
             <a:r>
-              <a:t>Het idee is simpel: je bot weet op het moment van beslissen alles — de ronde, de pot, zijn winkans, welke regel er vuurde. Die kennis gooit hij nu weg. Eén append per beslissing en je houdt hem vast.</a:t>
+              <a:t>Het punt: je verzint niets. Je hebt in Werkcollege 7 vijf regels geschreven, en in elke regel staat een getal dat je op gevoel hebt gekozen — 150, STERK, MEEDOEN, ZWAK. Elk van die getallen is een hypothese. Stel over elk dezelfde twee vragen: hoe vaak vuurt deze regel, en wat levert hij op als hij vuurt?</a:t>
             </a:r>
           </a:p>
           <a:p/>
           <a:p>
             <a:r>
-              <a:t>Koppel het aan de vijf-regelstructuur uit Werkcollege 7: door 'regel' mee te loggen kun je achteraf per regel uitrekenen wat hij opleverde. Dan weet je welke van je vijf regels het werk doet en welke er alleen maar staat.</a:t>
+              <a:t>Loop ze samen langs en laat ze bij hun eigen bot kijken. Wie een regel heeft die nooit vuurt, heeft dode code — en dat is op zichzelf al een bevinding.</a:t>
+            </a:r>
+          </a:p>
+          <a:p/>
+          <a:p>
+            <a:r>
+              <a:t>De kleur rechts zegt waar het antwoord vandaan komt, en sluit aan op de vorige dia: blauw is het logboek, oranje moet je zelf laten opschrijven.</a:t>
             </a:r>
           </a:p>
         </p:txBody>
@@ -1004,19 +1011,19 @@
           <a:lstStyle/>
           <a:p>
             <a:r>
-              <a:t>Sluit hiermee af als er tijd over is. Het punt: ze denken dat ze alleen een percentage hebben, terwijl beschrijf_hand() ze de handsóórt geeft.</a:t>
+              <a:t>Dit is de meest waardevolle dia van het hele slot, en de makkelijkste om over te slaan.</a:t>
             </a:r>
           </a:p>
           <a:p/>
           <a:p>
             <a:r>
-              <a:t>Een regel als 'bij three of a kind of beter ga ik door, wat de winkans ook zegt' is voor sommigen begrijpelijker dan drempels, en het is een volwaardige strategie.</a:t>
+              <a:t>Het idee is simpel: je bot weet op het moment van beslissen alles — de ronde, de pot, zijn winkans, welke regel er vuurde. Die kennis gooit hij nu weg. Eén append per beslissing en je houdt hem vast.</a:t>
             </a:r>
           </a:p>
           <a:p/>
           <a:p>
             <a:r>
-              <a:t>vergelijk_handen is vooral nuttig om te begrijpen waarom je een hand verloor die je dacht te winnen — kickers.</a:t>
+              <a:t>Koppel het aan de vijf-regelstructuur uit Werkcollege 7: door 'regel' mee te loggen kun je achteraf per regel uitrekenen wat hij opleverde. Dan weet je welke van je vijf regels het werk doet en welke er alleen maar staat.</a:t>
             </a:r>
           </a:p>
         </p:txBody>
@@ -1086,6 +1093,88 @@
           <a:lstStyle/>
           <a:p>
             <a:r>
+              <a:t>Sluit hiermee af als er tijd over is. Het punt: ze denken dat ze alleen een percentage hebben, terwijl beschrijf_hand() ze de handsóórt geeft.</a:t>
+            </a:r>
+          </a:p>
+          <a:p/>
+          <a:p>
+            <a:r>
+              <a:t>Een regel als 'bij three of a kind of beter ga ik door, wat de winkans ook zegt' is voor sommigen begrijpelijker dan drempels, en het is een volwaardige strategie.</a:t>
+            </a:r>
+          </a:p>
+          <a:p/>
+          <a:p>
+            <a:r>
+              <a:t>vergelijk_handen is vooral nuttig om te begrijpen waarom je een hand verloor die je dacht te winnen — kickers.</a:t>
+            </a:r>
+          </a:p>
+        </p:txBody>
+      </p:sp>
+      <p:sp>
+        <p:nvSpPr>
+          <p:cNvPr id="4" name="Slide Number Placeholder 3"/>
+          <p:cNvSpPr>
+            <a:spLocks noGrp="1"/>
+          </p:cNvSpPr>
+          <p:nvPr>
+            <p:ph type="sldNum" idx="5" sz="quarter"/>
+          </p:nvPr>
+        </p:nvSpPr>
+        <p:spPr/>
+      </p:sp>
+    </p:spTree>
+  </p:cSld>
+  <p:clrMapOvr>
+    <a:masterClrMapping/>
+  </p:clrMapOvr>
+</p:notes>
+</file>
+
+<file path=ppt/notesSlides/notesSlide17.xml><?xml version="1.0" encoding="utf-8"?>
+<p:notes xmlns:a="http://schemas.openxmlformats.org/drawingml/2006/main" xmlns:p="http://schemas.openxmlformats.org/presentationml/2006/main" xmlns:r="http://schemas.openxmlformats.org/officeDocument/2006/relationships">
+  <p:cSld>
+    <p:spTree>
+      <p:nvGrpSpPr>
+        <p:cNvPr id="1" name=""/>
+        <p:cNvGrpSpPr/>
+        <p:nvPr/>
+      </p:nvGrpSpPr>
+      <p:grpSpPr>
+        <a:xfrm>
+          <a:off x="0" y="0"/>
+          <a:ext cx="0" cy="0"/>
+          <a:chOff x="0" y="0"/>
+          <a:chExt cx="0" cy="0"/>
+        </a:xfrm>
+      </p:grpSpPr>
+      <p:sp>
+        <p:nvSpPr>
+          <p:cNvPr id="2" name="Slide Image Placeholder 1"/>
+          <p:cNvSpPr>
+            <a:spLocks noGrp="1"/>
+          </p:cNvSpPr>
+          <p:nvPr>
+            <p:ph type="sldImg" idx="2"/>
+          </p:nvPr>
+        </p:nvSpPr>
+        <p:spPr/>
+      </p:sp>
+      <p:sp>
+        <p:nvSpPr>
+          <p:cNvPr id="3" name="Notes Placeholder 2"/>
+          <p:cNvSpPr>
+            <a:spLocks noGrp="1"/>
+          </p:cNvSpPr>
+          <p:nvPr>
+            <p:ph type="body" idx="3" sz="quarter"/>
+          </p:nvPr>
+        </p:nvSpPr>
+        <p:spPr/>
+        <p:txBody>
+          <a:bodyPr/>
+          <a:lstStyle/>
+          <a:p>
+            <a:r>
               <a:t>Sluit hiermee af, en wijs vooruit: donderdagochtend draait de oefenronde. Dan weten ze binnen een dag of hun verandering iets deed.</a:t>
             </a:r>
           </a:p>
@@ -1396,13 +1485,13 @@
           <a:lstStyle/>
           <a:p>
             <a:r>
-              <a:t>Dit is de statistiek die ik er zelf bij heb gezocht, en de uitkomst verraste me: een correlatie van +0,45 tussen fold-percentage en eindstand. In dít veld deden de tightere bots het beter.</a:t>
+              <a:t>Dit is de statistiek die ik er zelf bij heb gezocht, en de uitkomst verraste me: een correlatie van +0,45 tussen fold-percentage en eindstand. In dít veld deden de defensievere bots het beter.</a:t>
             </a:r>
           </a:p>
           <a:p/>
           <a:p>
             <a:r>
-              <a:t>Belangrijk om erbij te zeggen: dat is geen algemene pokerwaarheid. Het zegt iets over dit veld — er zitten een paar bots in die alles callen, en die verliezen langzaam hun chips aan iedereen. Tegen een tafel vol tighte bots zou de lijn andersom kunnen lopen.</a:t>
+              <a:t>Belangrijk om erbij te zeggen: dat is geen algemene pokerwaarheid. Het zegt iets over dit veld — er zitten een paar bots in die alles callen, en die verliezen langzaam hun chips aan iedereen. Tegen een tafel vol defensieve bots zou de lijn andersom kunnen lopen.</a:t>
             </a:r>
           </a:p>
           <a:p/>
@@ -5632,6 +5721,142 @@
               </a:defRPr>
             </a:pPr>
             <a:r>
+              <a:t>HOE VERZIN JE ZO'N VRAAG?</a:t>
+            </a:r>
+          </a:p>
+          <a:p>
+            <a:pPr>
+              <a:spcBef>
+                <a:spcPts val="400"/>
+              </a:spcBef>
+              <a:defRPr sz="2400" b="1">
+                <a:solidFill>
+                  <a:srgbClr val="121E31"/>
+                </a:solidFill>
+              </a:defRPr>
+            </a:pPr>
+            <a:r>
+              <a:t>Je leest hem af van je eigen bot</a:t>
+            </a:r>
+          </a:p>
+        </p:txBody>
+      </p:sp>
+      <p:pic>
+        <p:nvPicPr>
+          <p:cNvPr id="4" name="Picture 3" descr="wc8_regels.png"/>
+          <p:cNvPicPr>
+            <a:picLocks noChangeAspect="1"/>
+          </p:cNvPicPr>
+          <p:nvPr/>
+        </p:nvPicPr>
+        <p:blipFill>
+          <a:blip r:embed="rId2"/>
+          <a:stretch>
+            <a:fillRect/>
+          </a:stretch>
+        </p:blipFill>
+        <p:spPr>
+          <a:xfrm>
+            <a:off x="1660198" y="1600200"/>
+            <a:ext cx="8871299" cy="4572000"/>
+          </a:xfrm>
+          <a:prstGeom prst="rect">
+            <a:avLst/>
+          </a:prstGeom>
+        </p:spPr>
+      </p:pic>
+    </p:spTree>
+  </p:cSld>
+  <p:clrMapOvr>
+    <a:masterClrMapping/>
+  </p:clrMapOvr>
+</p:sld>
+</file>
+
+<file path=ppt/slides/slide16.xml><?xml version="1.0" encoding="utf-8"?>
+<p:sld xmlns:a="http://schemas.openxmlformats.org/drawingml/2006/main" xmlns:p="http://schemas.openxmlformats.org/presentationml/2006/main" xmlns:r="http://schemas.openxmlformats.org/officeDocument/2006/relationships">
+  <p:cSld>
+    <p:spTree>
+      <p:nvGrpSpPr>
+        <p:cNvPr id="1" name=""/>
+        <p:cNvGrpSpPr/>
+        <p:nvPr/>
+      </p:nvGrpSpPr>
+      <p:grpSpPr/>
+      <p:sp>
+        <p:nvSpPr>
+          <p:cNvPr id="2" name="Rectangle 1"/>
+          <p:cNvSpPr/>
+          <p:nvPr/>
+        </p:nvSpPr>
+        <p:spPr>
+          <a:xfrm>
+            <a:off x="0" y="0"/>
+            <a:ext cx="12191695" cy="6858000"/>
+          </a:xfrm>
+          <a:prstGeom prst="rect">
+            <a:avLst/>
+          </a:prstGeom>
+          <a:solidFill>
+            <a:srgbClr val="F8F9FA"/>
+          </a:solidFill>
+          <a:ln>
+            <a:noFill/>
+          </a:ln>
+          <a:effectLst/>
+        </p:spPr>
+        <p:style>
+          <a:lnRef idx="1">
+            <a:schemeClr val="accent1"/>
+          </a:lnRef>
+          <a:fillRef idx="3">
+            <a:schemeClr val="accent1"/>
+          </a:fillRef>
+          <a:effectRef idx="2">
+            <a:schemeClr val="accent1"/>
+          </a:effectRef>
+          <a:fontRef idx="minor">
+            <a:schemeClr val="lt1"/>
+          </a:fontRef>
+        </p:style>
+        <p:txBody>
+          <a:bodyPr rtlCol="0" anchor="ctr"/>
+          <a:lstStyle/>
+          <a:p>
+            <a:pPr algn="ctr"/>
+          </a:p>
+        </p:txBody>
+      </p:sp>
+      <p:sp>
+        <p:nvSpPr>
+          <p:cNvPr id="3" name="TextBox 2"/>
+          <p:cNvSpPr txBox="1"/>
+          <p:nvPr/>
+        </p:nvSpPr>
+        <p:spPr>
+          <a:xfrm>
+            <a:off x="731520" y="384048"/>
+            <a:ext cx="10698480" cy="1005840"/>
+          </a:xfrm>
+          <a:prstGeom prst="rect">
+            <a:avLst/>
+          </a:prstGeom>
+          <a:noFill/>
+        </p:spPr>
+        <p:txBody>
+          <a:bodyPr wrap="square">
+            <a:spAutoFit/>
+          </a:bodyPr>
+          <a:lstStyle/>
+          <a:p>
+            <a:pPr>
+              <a:defRPr sz="1000" b="1">
+                <a:solidFill>
+                  <a:srgbClr val="1B4D3E"/>
+                </a:solidFill>
+              </a:defRPr>
+            </a:pPr>
+            <a:r>
               <a:t>SPOOR 2</a:t>
             </a:r>
           </a:p>
@@ -5898,7 +6123,7 @@
 </p:sld>
 </file>
 
-<file path=ppt/slides/slide16.xml><?xml version="1.0" encoding="utf-8"?>
+<file path=ppt/slides/slide17.xml><?xml version="1.0" encoding="utf-8"?>
 <p:sld xmlns:a="http://schemas.openxmlformats.org/drawingml/2006/main" xmlns:p="http://schemas.openxmlformats.org/presentationml/2006/main" xmlns:r="http://schemas.openxmlformats.org/officeDocument/2006/relationships">
   <p:cSld>
     <p:spTree>
@@ -6186,7 +6411,7 @@
 </p:sld>
 </file>
 
-<file path=ppt/slides/slide17.xml><?xml version="1.0" encoding="utf-8"?>
+<file path=ppt/slides/slide18.xml><?xml version="1.0" encoding="utf-8"?>
 <p:sld xmlns:a="http://schemas.openxmlformats.org/drawingml/2006/main" xmlns:p="http://schemas.openxmlformats.org/presentationml/2006/main" xmlns:r="http://schemas.openxmlformats.org/officeDocument/2006/relationships">
   <p:cSld>
     <p:spTree>
@@ -7406,7 +7631,7 @@
               </a:defRPr>
             </a:pPr>
             <a:r>
-              <a:t>Tight spelen wérkt hier   ·   r = +0,45</a:t>
+              <a:t>Defensief spelen wérkt hier   ·   r = +0,45</a:t>
             </a:r>
           </a:p>
         </p:txBody>

--- a/powerpoints/Data_Science_Werkcollege8.pptx
+++ b/powerpoints/Data_Science_Werkcollege8.pptx
@@ -23,6 +23,7 @@
     <p:sldId id="271" r:id="rId23"/>
     <p:sldId id="272" r:id="rId24"/>
     <p:sldId id="273" r:id="rId25"/>
+    <p:sldId id="274" r:id="rId26"/>
   </p:sldIdLst>
   <p:sldSz cx="12191695" cy="6858000" type="screen4x3"/>
   <p:notesSz cx="6858000" cy="9144000"/>
@@ -519,13 +520,25 @@
           <a:lstStyle/>
           <a:p>
             <a:r>
-              <a:t>Begin hier, en laat even bezinken hoe groot dit is. Twintigduizend beslissingen van dertig bots.</a:t>
+              <a:t>Hiermee open je, want dit is wat iedereen wil weten.</a:t>
             </a:r>
           </a:p>
           <a:p/>
           <a:p>
             <a:r>
-              <a:t>De sprong die ze vandaag maken: tot nu toe was data iets wat ze kregen. Dit hebben ze zelf gegenereerd, door een bot te schrijven.</a:t>
+              <a:t>De ladder: 0,5 - 0,4 - 0,3 - 0,2 - 0,1 voor de eerste vijf, en verder niets. Twee toernooien die meetellen, dus maximaal 1,0 bonuspunt over de hele week. Eindigen twee bots op exact dezelfde winst, dan delen ze de plekken en krijgen ze allebei het gemiddelde van die punten — anders bepaalt een toevallige volgorde wie de hogere plek krijgt, en daar hang je geen bonuspunt aan op.</a:t>
+            </a:r>
+          </a:p>
+          <a:p/>
+          <a:p>
+            <a:r>
+              <a:t>LET OP: zolang de oranje regel er staat zijn dit verzonnen studentnummers uit een testtoernooi. Draai scripts/analyse_toernooi.py op de echte export en de dia klopt vanzelf — inclusief deze sprekersnotitie, want die getallen komen uit hetzelfde cijfers.json.</a:t>
+            </a:r>
+          </a:p>
+          <a:p/>
+          <a:p>
+            <a:r>
+              <a:t>Wie hier net buiten valt: dia 13 laat zien hoe dun dat verschil is.</a:t>
             </a:r>
           </a:p>
         </p:txBody>
@@ -595,19 +608,19 @@
           <a:lstStyle/>
           <a:p>
             <a:r>
-              <a:t>Dit is de grafiek die het dichtst bij 'wat moet ik veranderen' komt. Per actiesoort: wat leverde die jou op, en wat leverde die de rest op?</a:t>
+              <a:t>Hier staat Visual Maandag in één plaat: twintig grijze lijnen, twee uitgelicht, en een titel die iets beweert.</a:t>
             </a:r>
           </a:p>
           <a:p/>
           <a:p>
             <a:r>
-              <a:t>Let op de n= achter elk getal, en maak daar een punt van. In dit voorbeeld verliest de grote raise 84 chips per hand terwijl de klas er 175 mee wint — maar over zeven handen. Dat is geen conclusie, dat is een aanwijzing waar je verder moet kijken.</a:t>
+              <a:t>Deze bot eindigde in zijn beste simulatie op 3.520 chips en in zijn slechtste op 0. Zelfde code, zelfde drempels, andere kaarten.</a:t>
             </a:r>
           </a:p>
           <a:p/>
           <a:p>
             <a:r>
-              <a:t>Wie hier een echt verschil ziet bij een actie die hij vaak doet, heeft zijn verandering voor Deel 4 gevonden.</a:t>
+              <a:t>Laat ze dit zelf maken voor hun eigen bot — het is één groupby en een plot, en het is de meest persoonlijke grafiek van de middag.</a:t>
             </a:r>
           </a:p>
         </p:txBody>
@@ -677,19 +690,19 @@
           <a:lstStyle/>
           <a:p>
             <a:r>
-              <a:t>Een gemiddelde verstopt hoe vaak iets voorkwam. Hier staat de optelsom: welke handen hebben jou over het hele toernooi het meeste gekost, en welke het meeste opgeleverd.</a:t>
+              <a:t>Dit is de grafiek die het dichtst bij 'wat moet ik veranderen' komt. Per actiesoort: wat leverde die jou op, en wat leverde die de rest op?</a:t>
             </a:r>
           </a:p>
           <a:p/>
           <a:p>
             <a:r>
-              <a:t>In dit voorbeeld is K-10 de duurste hand (-1.010 chips over 10 handen) en A-K de beste (+2.000 over 9).</a:t>
+              <a:t>Let op de n= achter elk getal, en maak daar een punt van. In dit voorbeeld verliest de grote raise 84 chips per hand terwijl de klas er 175 mee wint — maar over zeven handen. Dat is geen conclusie, dat is een aanwijzing waar je verder moet kijken.</a:t>
             </a:r>
           </a:p>
           <a:p/>
           <a:p>
             <a:r>
-              <a:t>De vraag die ze zichzelf moeten stellen: speel ik die duurste hand eigenlijk wel bewust, of valt hij per ongeluk binnen een van mijn drempels?</a:t>
+              <a:t>Wie hier een echt verschil ziet bij een actie die hij vaak doet, heeft zijn verandering voor Deel 4 gevonden.</a:t>
             </a:r>
           </a:p>
         </p:txBody>
@@ -759,19 +772,19 @@
           <a:lstStyle/>
           <a:p>
             <a:r>
-              <a:t>De beste bot haalde gemiddeld 1.690 chips, met een standaarddeviatie van 1.067. De nummer twee zit op 1.666.</a:t>
+              <a:t>Een gemiddelde verstopt hoe vaak iets voorkwam. Hier staat de optelsom: welke handen hebben jou over het hele toernooi het meeste gekost, en welke het meeste opgeleverd.</a:t>
             </a:r>
           </a:p>
           <a:p/>
           <a:p>
             <a:r>
-              <a:t>Het verschil tussen nummer 1 en nummer 2 is kleiner dan de spreiding binnen één bot. Laat dat even staan.</a:t>
+              <a:t>In dit voorbeeld is K-10 de duurste hand (-1.010 chips over 10 handen) en A-K de beste (+2.000 over 9).</a:t>
             </a:r>
           </a:p>
           <a:p/>
           <a:p>
             <a:r>
-              <a:t>Daarom loopt de bonus over twee toernooien, en daarom is 'ik ben gezakt van plek 3 naar plek 9' geen bewijs dat je bot slechter is geworden.</a:t>
+              <a:t>De vraag die ze zichzelf moeten stellen: speel ik die duurste hand eigenlijk wel bewust, of valt hij per ongeluk binnen een van mijn drempels?</a:t>
             </a:r>
           </a:p>
         </p:txBody>
@@ -841,19 +854,19 @@
           <a:lstStyle/>
           <a:p>
             <a:r>
-              <a:t>Dit is het antwoord op 'ik ben klaar, wat nu'. Drie sporen, en het middelste is het belangrijkste en het minst voor de hand liggende.</a:t>
+              <a:t>De beste bot haalde gemiddeld 1.690 chips, met een standaarddeviatie van 1.067. De nummer twee zit op 1.666.</a:t>
             </a:r>
           </a:p>
           <a:p/>
           <a:p>
             <a:r>
-              <a:t>Neem even de tijd voor die rode regel onderin. Het logboek heeft ÉÉN regel per hand, met alleen de eerste actie van die hand. Alles wat per ronde, per pot of per tegenstander speelt staat er dus niet in. Dat is geen omissie maar een ontwerpkeuze: een regel per beslissing zou het logboek vijf keer zo groot maken.</a:t>
+              <a:t>Het verschil tussen nummer 1 en nummer 2 is kleiner dan de spreiding binnen één bot. Laat dat even staan.</a:t>
             </a:r>
           </a:p>
           <a:p/>
           <a:p>
             <a:r>
-              <a:t>Wie dáár iets over wil weten, moet zijn bot het zelf laten opschrijven. Dat is de volgende dia.</a:t>
+              <a:t>Daarom loopt de bonus over twee toernooien, en daarom is 'ik ben gezakt van plek 3 naar plek 9' geen bewijs dat je bot slechter is geworden.</a:t>
             </a:r>
           </a:p>
         </p:txBody>
@@ -923,25 +936,19 @@
           <a:lstStyle/>
           <a:p>
             <a:r>
-              <a:t>Dit is de dia waar ik de meeste waarde van verwacht, want 'bedenk een analyse' is een opdracht waar de meesten op vastlopen.</a:t>
+              <a:t>Dit is het antwoord op 'ik ben klaar, wat nu'. Drie sporen, en het middelste is het belangrijkste en het minst voor de hand liggende.</a:t>
             </a:r>
           </a:p>
           <a:p/>
           <a:p>
             <a:r>
-              <a:t>Het punt: je verzint niets. Je hebt in Werkcollege 7 vijf regels geschreven, en in elke regel staat een getal dat je op gevoel hebt gekozen — 150, STERK, MEEDOEN, ZWAK. Elk van die getallen is een hypothese. Stel over elk dezelfde twee vragen: hoe vaak vuurt deze regel, en wat levert hij op als hij vuurt?</a:t>
+              <a:t>Neem even de tijd voor die rode regel onderin. Het logboek heeft ÉÉN regel per hand, met alleen de eerste actie van die hand. Alles wat per ronde, per pot of per tegenstander speelt staat er dus niet in. Dat is geen omissie maar een ontwerpkeuze: een regel per beslissing zou het logboek vijf keer zo groot maken.</a:t>
             </a:r>
           </a:p>
           <a:p/>
           <a:p>
             <a:r>
-              <a:t>Loop ze samen langs en laat ze bij hun eigen bot kijken. Wie een regel heeft die nooit vuurt, heeft dode code — en dat is op zichzelf al een bevinding.</a:t>
-            </a:r>
-          </a:p>
-          <a:p/>
-          <a:p>
-            <a:r>
-              <a:t>De kleur rechts zegt waar het antwoord vandaan komt, en sluit aan op de vorige dia: blauw is het logboek, oranje moet je zelf laten opschrijven.</a:t>
+              <a:t>Wie dáár iets over wil weten, moet zijn bot het zelf laten opschrijven. Dat is de volgende dia.</a:t>
             </a:r>
           </a:p>
         </p:txBody>
@@ -1011,19 +1018,25 @@
           <a:lstStyle/>
           <a:p>
             <a:r>
-              <a:t>Dit is de meest waardevolle dia van het hele slot, en de makkelijkste om over te slaan.</a:t>
+              <a:t>Dit is de dia waar ik de meeste waarde van verwacht, want 'bedenk een analyse' is een opdracht waar de meesten op vastlopen.</a:t>
             </a:r>
           </a:p>
           <a:p/>
           <a:p>
             <a:r>
-              <a:t>Het idee is simpel: je bot weet op het moment van beslissen alles — de ronde, de pot, zijn winkans, welke regel er vuurde. Die kennis gooit hij nu weg. Eén append per beslissing en je houdt hem vast.</a:t>
+              <a:t>Het punt: je verzint niets. Je hebt in Werkcollege 7 vijf regels geschreven, en in elke regel staat een getal dat je op gevoel hebt gekozen — 150, STERK, MEEDOEN, ZWAK. Elk van die getallen is een hypothese. Stel over elk dezelfde twee vragen: hoe vaak vuurt deze regel, en wat levert hij op als hij vuurt?</a:t>
             </a:r>
           </a:p>
           <a:p/>
           <a:p>
             <a:r>
-              <a:t>Koppel het aan de vijf-regelstructuur uit Werkcollege 7: door 'regel' mee te loggen kun je achteraf per regel uitrekenen wat hij opleverde. Dan weet je welke van je vijf regels het werk doet en welke er alleen maar staat.</a:t>
+              <a:t>Loop ze samen langs en laat ze bij hun eigen bot kijken. Wie een regel heeft die nooit vuurt, heeft dode code — en dat is op zichzelf al een bevinding.</a:t>
+            </a:r>
+          </a:p>
+          <a:p/>
+          <a:p>
+            <a:r>
+              <a:t>De kleur rechts zegt waar het antwoord vandaan komt, en sluit aan op de vorige dia: blauw is het logboek, oranje moet je zelf laten opschrijven.</a:t>
             </a:r>
           </a:p>
         </p:txBody>
@@ -1093,19 +1106,19 @@
           <a:lstStyle/>
           <a:p>
             <a:r>
-              <a:t>Sluit hiermee af als er tijd over is. Het punt: ze denken dat ze alleen een percentage hebben, terwijl beschrijf_hand() ze de handsóórt geeft.</a:t>
+              <a:t>Dit is de meest waardevolle dia van het hele slot, en de makkelijkste om over te slaan.</a:t>
             </a:r>
           </a:p>
           <a:p/>
           <a:p>
             <a:r>
-              <a:t>Een regel als 'bij three of a kind of beter ga ik door, wat de winkans ook zegt' is voor sommigen begrijpelijker dan drempels, en het is een volwaardige strategie.</a:t>
+              <a:t>Het idee is simpel: je bot weet op het moment van beslissen alles — de ronde, de pot, zijn winkans, welke regel er vuurde. Die kennis gooit hij nu weg. Eén append per beslissing en je houdt hem vast.</a:t>
             </a:r>
           </a:p>
           <a:p/>
           <a:p>
             <a:r>
-              <a:t>vergelijk_handen is vooral nuttig om te begrijpen waarom je een hand verloor die je dacht te winnen — kickers.</a:t>
+              <a:t>Koppel het aan de vijf-regelstructuur uit Werkcollege 7: door 'regel' mee te loggen kun je achteraf per regel uitrekenen wat hij opleverde. Dan weet je welke van je vijf regels het werk doet en welke er alleen maar staat.</a:t>
             </a:r>
           </a:p>
         </p:txBody>
@@ -1175,6 +1188,88 @@
           <a:lstStyle/>
           <a:p>
             <a:r>
+              <a:t>Sluit hiermee af als er tijd over is. Het punt: ze denken dat ze alleen een percentage hebben, terwijl beschrijf_hand() ze de handsóórt geeft.</a:t>
+            </a:r>
+          </a:p>
+          <a:p/>
+          <a:p>
+            <a:r>
+              <a:t>Een regel als 'bij three of a kind of beter ga ik door, wat de winkans ook zegt' is voor sommigen begrijpelijker dan drempels, en het is een volwaardige strategie.</a:t>
+            </a:r>
+          </a:p>
+          <a:p/>
+          <a:p>
+            <a:r>
+              <a:t>vergelijk_handen is vooral nuttig om te begrijpen waarom je een hand verloor die je dacht te winnen — kickers.</a:t>
+            </a:r>
+          </a:p>
+        </p:txBody>
+      </p:sp>
+      <p:sp>
+        <p:nvSpPr>
+          <p:cNvPr id="4" name="Slide Number Placeholder 3"/>
+          <p:cNvSpPr>
+            <a:spLocks noGrp="1"/>
+          </p:cNvSpPr>
+          <p:nvPr>
+            <p:ph type="sldNum" idx="5" sz="quarter"/>
+          </p:nvPr>
+        </p:nvSpPr>
+        <p:spPr/>
+      </p:sp>
+    </p:spTree>
+  </p:cSld>
+  <p:clrMapOvr>
+    <a:masterClrMapping/>
+  </p:clrMapOvr>
+</p:notes>
+</file>
+
+<file path=ppt/notesSlides/notesSlide18.xml><?xml version="1.0" encoding="utf-8"?>
+<p:notes xmlns:a="http://schemas.openxmlformats.org/drawingml/2006/main" xmlns:p="http://schemas.openxmlformats.org/presentationml/2006/main" xmlns:r="http://schemas.openxmlformats.org/officeDocument/2006/relationships">
+  <p:cSld>
+    <p:spTree>
+      <p:nvGrpSpPr>
+        <p:cNvPr id="1" name=""/>
+        <p:cNvGrpSpPr/>
+        <p:nvPr/>
+      </p:nvGrpSpPr>
+      <p:grpSpPr>
+        <a:xfrm>
+          <a:off x="0" y="0"/>
+          <a:ext cx="0" cy="0"/>
+          <a:chOff x="0" y="0"/>
+          <a:chExt cx="0" cy="0"/>
+        </a:xfrm>
+      </p:grpSpPr>
+      <p:sp>
+        <p:nvSpPr>
+          <p:cNvPr id="2" name="Slide Image Placeholder 1"/>
+          <p:cNvSpPr>
+            <a:spLocks noGrp="1"/>
+          </p:cNvSpPr>
+          <p:nvPr>
+            <p:ph type="sldImg" idx="2"/>
+          </p:nvPr>
+        </p:nvSpPr>
+        <p:spPr/>
+      </p:sp>
+      <p:sp>
+        <p:nvSpPr>
+          <p:cNvPr id="3" name="Notes Placeholder 2"/>
+          <p:cNvSpPr>
+            <a:spLocks noGrp="1"/>
+          </p:cNvSpPr>
+          <p:nvPr>
+            <p:ph type="body" idx="3" sz="quarter"/>
+          </p:nvPr>
+        </p:nvSpPr>
+        <p:spPr/>
+        <p:txBody>
+          <a:bodyPr/>
+          <a:lstStyle/>
+          <a:p>
+            <a:r>
               <a:t>Sluit hiermee af, en wijs vooruit: donderdagochtend draait de oefenronde. Dan weten ze binnen een dag of hun verandering iets deed.</a:t>
             </a:r>
           </a:p>
@@ -1251,13 +1346,13 @@
           <a:lstStyle/>
           <a:p>
             <a:r>
-              <a:t>Kort ophalen, niet opnieuw uitleggen. Ze hebben dit vorige week gedaan; het punt is dat ze zien dat het nu ergens voor dient.</a:t>
+              <a:t>Begin hier, en laat even bezinken hoe groot dit is. Twintigduizend beslissingen van dertig bots.</a:t>
             </a:r>
           </a:p>
           <a:p/>
           <a:p>
             <a:r>
-              <a:t>De kleurkeuze mag je hardop verantwoorden: ik heb het groen-rood van onze eigen huisstijl door een kleurenblindheidstest gehaald en het zakte — de twee liggen voor protanopie te dicht bij elkaar. Vandaar blauw. Dat is precies het soort controle dat zij in Deel 6 hebben geleerd.</a:t>
+              <a:t>De sprong die ze vandaag maken: tot nu toe was data iets wat ze kregen. Dit hebben ze zelf gegenereerd, door een bot te schrijven.</a:t>
             </a:r>
           </a:p>
         </p:txBody>
@@ -1327,19 +1422,13 @@
           <a:lstStyle/>
           <a:p>
             <a:r>
-              <a:t>Fold 65.9%, call 21.0%, raise 12.0%.</a:t>
+              <a:t>Kort ophalen, niet opnieuw uitleggen. Ze hebben dit vorige week gedaan; het punt is dat ze zien dat het nu ergens voor dient.</a:t>
             </a:r>
           </a:p>
           <a:p/>
           <a:p>
             <a:r>
-              <a:t>Vraag het eerst aan de zaal voor je het laat zien: hoeveel procent denken jullie? De meesten schatten veel te laag.</a:t>
-            </a:r>
-          </a:p>
-          <a:p/>
-          <a:p>
-            <a:r>
-              <a:t>En dan de vervolgvraag die de hele middag draagt: als twee op de drie beslissingen een fold is, wat betekent dat voor jouw bot? Agressie is goedkoop tegen een tafel die wegloopt.</a:t>
+              <a:t>De kleurkeuze mag je hardop verantwoorden: ik heb het groen-rood van onze eigen huisstijl door een kleurenblindheidstest gehaald en het zakte — de twee liggen voor protanopie te dicht bij elkaar. Vandaar blauw. Dat is precies het soort controle dat zij in Deel 6 hebben geleerd.</a:t>
             </a:r>
           </a:p>
         </p:txBody>
@@ -1409,13 +1498,19 @@
           <a:lstStyle/>
           <a:p>
             <a:r>
-              <a:t>De mediaan ligt op 72,3%. De bot die hier oranje is, zit op 75,6%.</a:t>
+              <a:t>Fold 65.9%, call 21.0%, raise 12.0%.</a:t>
             </a:r>
           </a:p>
           <a:p/>
           <a:p>
             <a:r>
-              <a:t>Laat ze zichzelf opzoeken — dat is de opdracht in 3.2. Wie boven de 80% zit doet nauwelijks mee; wie onder de 20% zit betaalt overal aan mee.</a:t>
+              <a:t>Vraag het eerst aan de zaal voor je het laat zien: hoeveel procent denken jullie? De meesten schatten veel te laag.</a:t>
+            </a:r>
+          </a:p>
+          <a:p/>
+          <a:p>
+            <a:r>
+              <a:t>En dan de vervolgvraag die de hele middag draagt: als twee op de drie beslissingen een fold is, wat betekent dat voor jouw bot? Agressie is goedkoop tegen een tafel die wegloopt.</a:t>
             </a:r>
           </a:p>
         </p:txBody>
@@ -1485,19 +1580,13 @@
           <a:lstStyle/>
           <a:p>
             <a:r>
-              <a:t>Dit is de statistiek die ik er zelf bij heb gezocht, en de uitkomst verraste me: een correlatie van +0,45 tussen fold-percentage en eindstand. In dít veld deden de defensievere bots het beter.</a:t>
+              <a:t>De mediaan ligt op 72,3%. De bot die hier oranje is, zit op 75,6%.</a:t>
             </a:r>
           </a:p>
           <a:p/>
           <a:p>
             <a:r>
-              <a:t>Belangrijk om erbij te zeggen: dat is geen algemene pokerwaarheid. Het zegt iets over dit veld — er zitten een paar bots in die alles callen, en die verliezen langzaam hun chips aan iedereen. Tegen een tafel vol defensieve bots zou de lijn andersom kunnen lopen.</a:t>
-            </a:r>
-          </a:p>
-          <a:p/>
-          <a:p>
-            <a:r>
-              <a:t>Goede vraag voor de zaal: is dit oorzaak of gevolg?</a:t>
+              <a:t>Laat ze zichzelf opzoeken — dat is de opdracht in 3.2. Wie boven de 80% zit doet nauwelijks mee; wie onder de 20% zit betaalt overal aan mee.</a:t>
             </a:r>
           </a:p>
         </p:txBody>
@@ -1567,19 +1656,19 @@
           <a:lstStyle/>
           <a:p>
             <a:r>
-              <a:t>Dit is mijn favoriete plaat van de middag. Niemand heeft zijn code gedeeld, en toch zie je precies waar de klas zijn grens legt.</a:t>
+              <a:t>Dit is de statistiek die ik er zelf bij heb gezocht, en de uitkomst verraste me: een correlatie van +0,45 tussen fold-percentage en eindstand. In dít veld deden de defensievere bots het beter.</a:t>
             </a:r>
           </a:p>
           <a:p/>
           <a:p>
             <a:r>
-              <a:t>Let op het patroon: de diagonaal (paren) is licht, de linkerbovenhoek (aas, heer) is licht, en rechtsonder wordt alles weggegooid. Dat is de winkans-tabel uit Werkcollege 5 — maar dan afgeleid uit gedrag in plaats van uit een simulatie.</a:t>
+              <a:t>Belangrijk om erbij te zeggen: dat is geen algemene pokerwaarheid. Het zegt iets over dit veld — er zitten een paar bots in die alles callen, en die verliezen langzaam hun chips aan iedereen. Tegen een tafel vol defensieve bots zou de lijn andersom kunnen lopen.</a:t>
             </a:r>
           </a:p>
           <a:p/>
           <a:p>
             <a:r>
-              <a:t>De kleur is één hue van licht naar donker, want dit is een oplopende schaal en geen set categorieën.</a:t>
+              <a:t>Goede vraag voor de zaal: is dit oorzaak of gevolg?</a:t>
             </a:r>
           </a:p>
         </p:txBody>
@@ -1649,19 +1738,19 @@
           <a:lstStyle/>
           <a:p>
             <a:r>
-              <a:t>Nu twee kleuren om een nulpunt heen, want winst heeft een richting.</a:t>
+              <a:t>Dit is mijn favoriete plaat van de middag. Niemand heeft zijn code gedeeld, en toch zie je precies waar de klas zijn grens legt.</a:t>
             </a:r>
           </a:p>
           <a:p/>
           <a:p>
             <a:r>
-              <a:t>A-A staat ver boven de rest; de schaal is op het 92e percentiel afgekapt, anders zou al het andere wit worden. Dat is een keuze die je hardop moet maken en niet stilletjes.</a:t>
+              <a:t>Let op het patroon: de diagonaal (paren) is licht, de linkerbovenhoek (aas, heer) is licht, en rechtsonder wordt alles weggegooid. Dat is de winkans-tabel uit Werkcollege 5 — maar dan afgeleid uit gedrag in plaats van uit een simulatie.</a:t>
             </a:r>
           </a:p>
           <a:p/>
           <a:p>
             <a:r>
-              <a:t>De vraag die telt: leg deze plaat naast de vorige. Waar is een vakje donkergroen in déze, en donkergroen in die? Dan gooit de klas iets weg waar geld in zit.</a:t>
+              <a:t>De kleur is één hue van licht naar donker, want dit is een oplopende schaal en geen set categorieën.</a:t>
             </a:r>
           </a:p>
         </p:txBody>
@@ -1731,13 +1820,19 @@
           <a:lstStyle/>
           <a:p>
             <a:r>
-              <a:t>Hier komen 3.3 en 3.4 samen, en dit is wat ik ze mee wil geven: data science levert zelden een antwoord, het levert een kandidaat.</a:t>
+              <a:t>Nu twee kleuren om een nulpunt heen, want winst heeft een richting.</a:t>
             </a:r>
           </a:p>
           <a:p/>
           <a:p>
             <a:r>
-              <a:t>Die tweede vraag is de eerlijke. Wie deze hand speelde was misschien juist de betere bot, en dan meet je de bot en niet de hand. Dat heet selectie-effect, en het is de reden dat je het op donderdag toetst in plaats van het te geloven.</a:t>
+              <a:t>A-A staat ver boven de rest; de schaal is op het 92e percentiel afgekapt, anders zou al het andere wit worden. Dat is een keuze die je hardop moet maken en niet stilletjes.</a:t>
+            </a:r>
+          </a:p>
+          <a:p/>
+          <a:p>
+            <a:r>
+              <a:t>De vraag die telt: leg deze plaat naast de vorige. Waar is een vakje donkergroen in déze, en donkergroen in die? Dan gooit de klas iets weg waar geld in zit.</a:t>
             </a:r>
           </a:p>
         </p:txBody>
@@ -1807,19 +1902,13 @@
           <a:lstStyle/>
           <a:p>
             <a:r>
-              <a:t>Hier staat Visual Maandag in één plaat: twintig grijze lijnen, twee uitgelicht, en een titel die iets beweert.</a:t>
+              <a:t>Hier komen 3.3 en 3.4 samen, en dit is wat ik ze mee wil geven: data science levert zelden een antwoord, het levert een kandidaat.</a:t>
             </a:r>
           </a:p>
           <a:p/>
           <a:p>
             <a:r>
-              <a:t>Deze bot eindigde in zijn beste simulatie op 3.520 chips en in zijn slechtste op 0. Zelfde code, zelfde drempels, andere kaarten.</a:t>
-            </a:r>
-          </a:p>
-          <a:p/>
-          <a:p>
-            <a:r>
-              <a:t>Laat ze dit zelf maken voor hun eigen bot — het is één groupby en een plot, en het is de meest persoonlijke grafiek van de middag.</a:t>
+              <a:t>Die tweede vraag is de eerlijke. Wie deze hand speelde was misschien juist de betere bot, en dan meet je de bot en niet de hand. Dat heet selectie-effect, en het is de reden dat je het op donderdag toetst in plaats van het te geloven.</a:t>
             </a:r>
           </a:p>
         </p:txBody>
@@ -5041,7 +5130,7 @@
               </a:defRPr>
             </a:pPr>
             <a:r>
-              <a:t>JOUW EIGEN SPEL</a:t>
+              <a:t>HET SNIJPUNT</a:t>
             </a:r>
           </a:p>
           <a:p>
@@ -5056,823 +5145,7 @@
               </a:defRPr>
             </a:pPr>
             <a:r>
-              <a:t>Dezelfde bot, twintig keer een ander verhaal</a:t>
-            </a:r>
-          </a:p>
-        </p:txBody>
-      </p:sp>
-      <p:pic>
-        <p:nvPicPr>
-          <p:cNvPr id="4" name="Picture 3" descr="wc8_stackverloop.png"/>
-          <p:cNvPicPr>
-            <a:picLocks noChangeAspect="1"/>
-          </p:cNvPicPr>
-          <p:nvPr/>
-        </p:nvPicPr>
-        <p:blipFill>
-          <a:blip r:embed="rId2"/>
-          <a:stretch>
-            <a:fillRect/>
-          </a:stretch>
-        </p:blipFill>
-        <p:spPr>
-          <a:xfrm>
-            <a:off x="1957224" y="1600200"/>
-            <a:ext cx="8277246" cy="4572000"/>
-          </a:xfrm>
-          <a:prstGeom prst="rect">
-            <a:avLst/>
-          </a:prstGeom>
-        </p:spPr>
-      </p:pic>
-    </p:spTree>
-  </p:cSld>
-  <p:clrMapOvr>
-    <a:masterClrMapping/>
-  </p:clrMapOvr>
-</p:sld>
-</file>
-
-<file path=ppt/slides/slide11.xml><?xml version="1.0" encoding="utf-8"?>
-<p:sld xmlns:a="http://schemas.openxmlformats.org/drawingml/2006/main" xmlns:p="http://schemas.openxmlformats.org/presentationml/2006/main" xmlns:r="http://schemas.openxmlformats.org/officeDocument/2006/relationships">
-  <p:cSld>
-    <p:spTree>
-      <p:nvGrpSpPr>
-        <p:cNvPr id="1" name=""/>
-        <p:cNvGrpSpPr/>
-        <p:nvPr/>
-      </p:nvGrpSpPr>
-      <p:grpSpPr/>
-      <p:sp>
-        <p:nvSpPr>
-          <p:cNvPr id="2" name="Rectangle 1"/>
-          <p:cNvSpPr/>
-          <p:nvPr/>
-        </p:nvSpPr>
-        <p:spPr>
-          <a:xfrm>
-            <a:off x="0" y="0"/>
-            <a:ext cx="12191695" cy="6858000"/>
-          </a:xfrm>
-          <a:prstGeom prst="rect">
-            <a:avLst/>
-          </a:prstGeom>
-          <a:solidFill>
-            <a:srgbClr val="F8F9FA"/>
-          </a:solidFill>
-          <a:ln>
-            <a:noFill/>
-          </a:ln>
-          <a:effectLst/>
-        </p:spPr>
-        <p:style>
-          <a:lnRef idx="1">
-            <a:schemeClr val="accent1"/>
-          </a:lnRef>
-          <a:fillRef idx="3">
-            <a:schemeClr val="accent1"/>
-          </a:fillRef>
-          <a:effectRef idx="2">
-            <a:schemeClr val="accent1"/>
-          </a:effectRef>
-          <a:fontRef idx="minor">
-            <a:schemeClr val="lt1"/>
-          </a:fontRef>
-        </p:style>
-        <p:txBody>
-          <a:bodyPr rtlCol="0" anchor="ctr"/>
-          <a:lstStyle/>
-          <a:p>
-            <a:pPr algn="ctr"/>
-          </a:p>
-        </p:txBody>
-      </p:sp>
-      <p:sp>
-        <p:nvSpPr>
-          <p:cNvPr id="3" name="TextBox 2"/>
-          <p:cNvSpPr txBox="1"/>
-          <p:nvPr/>
-        </p:nvSpPr>
-        <p:spPr>
-          <a:xfrm>
-            <a:off x="731520" y="384048"/>
-            <a:ext cx="10698480" cy="1005840"/>
-          </a:xfrm>
-          <a:prstGeom prst="rect">
-            <a:avLst/>
-          </a:prstGeom>
-          <a:noFill/>
-        </p:spPr>
-        <p:txBody>
-          <a:bodyPr wrap="square">
-            <a:spAutoFit/>
-          </a:bodyPr>
-          <a:lstStyle/>
-          <a:p>
-            <a:pPr>
-              <a:defRPr sz="1000" b="1">
-                <a:solidFill>
-                  <a:srgbClr val="1B4D3E"/>
-                </a:solidFill>
-              </a:defRPr>
-            </a:pPr>
-            <a:r>
-              <a:t>JOUW ACTIES</a:t>
-            </a:r>
-          </a:p>
-          <a:p>
-            <a:pPr>
-              <a:spcBef>
-                <a:spcPts val="400"/>
-              </a:spcBef>
-              <a:defRPr sz="2400" b="1">
-                <a:solidFill>
-                  <a:srgbClr val="121E31"/>
-                </a:solidFill>
-              </a:defRPr>
-            </a:pPr>
-            <a:r>
-              <a:t>Levert jouw raise meer op dan die van de klas?</a:t>
-            </a:r>
-          </a:p>
-        </p:txBody>
-      </p:sp>
-      <p:pic>
-        <p:nvPicPr>
-          <p:cNvPr id="4" name="Picture 3" descr="wc8_jij_tegenover_klas.png"/>
-          <p:cNvPicPr>
-            <a:picLocks noChangeAspect="1"/>
-          </p:cNvPicPr>
-          <p:nvPr/>
-        </p:nvPicPr>
-        <p:blipFill>
-          <a:blip r:embed="rId2"/>
-          <a:stretch>
-            <a:fillRect/>
-          </a:stretch>
-        </p:blipFill>
-        <p:spPr>
-          <a:xfrm>
-            <a:off x="1934404" y="1600200"/>
-            <a:ext cx="8322886" cy="4572000"/>
-          </a:xfrm>
-          <a:prstGeom prst="rect">
-            <a:avLst/>
-          </a:prstGeom>
-        </p:spPr>
-      </p:pic>
-    </p:spTree>
-  </p:cSld>
-  <p:clrMapOvr>
-    <a:masterClrMapping/>
-  </p:clrMapOvr>
-</p:sld>
-</file>
-
-<file path=ppt/slides/slide12.xml><?xml version="1.0" encoding="utf-8"?>
-<p:sld xmlns:a="http://schemas.openxmlformats.org/drawingml/2006/main" xmlns:p="http://schemas.openxmlformats.org/presentationml/2006/main" xmlns:r="http://schemas.openxmlformats.org/officeDocument/2006/relationships">
-  <p:cSld>
-    <p:spTree>
-      <p:nvGrpSpPr>
-        <p:cNvPr id="1" name=""/>
-        <p:cNvGrpSpPr/>
-        <p:nvPr/>
-      </p:nvGrpSpPr>
-      <p:grpSpPr/>
-      <p:sp>
-        <p:nvSpPr>
-          <p:cNvPr id="2" name="Rectangle 1"/>
-          <p:cNvSpPr/>
-          <p:nvPr/>
-        </p:nvSpPr>
-        <p:spPr>
-          <a:xfrm>
-            <a:off x="0" y="0"/>
-            <a:ext cx="12191695" cy="6858000"/>
-          </a:xfrm>
-          <a:prstGeom prst="rect">
-            <a:avLst/>
-          </a:prstGeom>
-          <a:solidFill>
-            <a:srgbClr val="F8F9FA"/>
-          </a:solidFill>
-          <a:ln>
-            <a:noFill/>
-          </a:ln>
-          <a:effectLst/>
-        </p:spPr>
-        <p:style>
-          <a:lnRef idx="1">
-            <a:schemeClr val="accent1"/>
-          </a:lnRef>
-          <a:fillRef idx="3">
-            <a:schemeClr val="accent1"/>
-          </a:fillRef>
-          <a:effectRef idx="2">
-            <a:schemeClr val="accent1"/>
-          </a:effectRef>
-          <a:fontRef idx="minor">
-            <a:schemeClr val="lt1"/>
-          </a:fontRef>
-        </p:style>
-        <p:txBody>
-          <a:bodyPr rtlCol="0" anchor="ctr"/>
-          <a:lstStyle/>
-          <a:p>
-            <a:pPr algn="ctr"/>
-          </a:p>
-        </p:txBody>
-      </p:sp>
-      <p:sp>
-        <p:nvSpPr>
-          <p:cNvPr id="3" name="TextBox 2"/>
-          <p:cNvSpPr txBox="1"/>
-          <p:nvPr/>
-        </p:nvSpPr>
-        <p:spPr>
-          <a:xfrm>
-            <a:off x="731520" y="384048"/>
-            <a:ext cx="10698480" cy="1005840"/>
-          </a:xfrm>
-          <a:prstGeom prst="rect">
-            <a:avLst/>
-          </a:prstGeom>
-          <a:noFill/>
-        </p:spPr>
-        <p:txBody>
-          <a:bodyPr wrap="square">
-            <a:spAutoFit/>
-          </a:bodyPr>
-          <a:lstStyle/>
-          <a:p>
-            <a:pPr>
-              <a:defRPr sz="1000" b="1">
-                <a:solidFill>
-                  <a:srgbClr val="1B4D3E"/>
-                </a:solidFill>
-              </a:defRPr>
-            </a:pPr>
-            <a:r>
-              <a:t>WAAR GING JE GELD HEEN?</a:t>
-            </a:r>
-          </a:p>
-          <a:p>
-            <a:pPr>
-              <a:spcBef>
-                <a:spcPts val="400"/>
-              </a:spcBef>
-              <a:defRPr sz="2400" b="1">
-                <a:solidFill>
-                  <a:srgbClr val="121E31"/>
-                </a:solidFill>
-              </a:defRPr>
-            </a:pPr>
-            <a:r>
-              <a:t>Niet het gemiddelde, maar het totaal</a:t>
-            </a:r>
-          </a:p>
-        </p:txBody>
-      </p:sp>
-      <p:pic>
-        <p:nvPicPr>
-          <p:cNvPr id="4" name="Picture 3" descr="wc8_totale_bijdrage.png"/>
-          <p:cNvPicPr>
-            <a:picLocks noChangeAspect="1"/>
-          </p:cNvPicPr>
-          <p:nvPr/>
-        </p:nvPicPr>
-        <p:blipFill>
-          <a:blip r:embed="rId2"/>
-          <a:stretch>
-            <a:fillRect/>
-          </a:stretch>
-        </p:blipFill>
-        <p:spPr>
-          <a:xfrm>
-            <a:off x="2261341" y="1600200"/>
-            <a:ext cx="7669013" cy="4572000"/>
-          </a:xfrm>
-          <a:prstGeom prst="rect">
-            <a:avLst/>
-          </a:prstGeom>
-        </p:spPr>
-      </p:pic>
-    </p:spTree>
-  </p:cSld>
-  <p:clrMapOvr>
-    <a:masterClrMapping/>
-  </p:clrMapOvr>
-</p:sld>
-</file>
-
-<file path=ppt/slides/slide13.xml><?xml version="1.0" encoding="utf-8"?>
-<p:sld xmlns:a="http://schemas.openxmlformats.org/drawingml/2006/main" xmlns:p="http://schemas.openxmlformats.org/presentationml/2006/main" xmlns:r="http://schemas.openxmlformats.org/officeDocument/2006/relationships">
-  <p:cSld>
-    <p:spTree>
-      <p:nvGrpSpPr>
-        <p:cNvPr id="1" name=""/>
-        <p:cNvGrpSpPr/>
-        <p:nvPr/>
-      </p:nvGrpSpPr>
-      <p:grpSpPr/>
-      <p:sp>
-        <p:nvSpPr>
-          <p:cNvPr id="2" name="Rectangle 1"/>
-          <p:cNvSpPr/>
-          <p:nvPr/>
-        </p:nvSpPr>
-        <p:spPr>
-          <a:xfrm>
-            <a:off x="0" y="0"/>
-            <a:ext cx="12191695" cy="6858000"/>
-          </a:xfrm>
-          <a:prstGeom prst="rect">
-            <a:avLst/>
-          </a:prstGeom>
-          <a:solidFill>
-            <a:srgbClr val="F8F9FA"/>
-          </a:solidFill>
-          <a:ln>
-            <a:noFill/>
-          </a:ln>
-          <a:effectLst/>
-        </p:spPr>
-        <p:style>
-          <a:lnRef idx="1">
-            <a:schemeClr val="accent1"/>
-          </a:lnRef>
-          <a:fillRef idx="3">
-            <a:schemeClr val="accent1"/>
-          </a:fillRef>
-          <a:effectRef idx="2">
-            <a:schemeClr val="accent1"/>
-          </a:effectRef>
-          <a:fontRef idx="minor">
-            <a:schemeClr val="lt1"/>
-          </a:fontRef>
-        </p:style>
-        <p:txBody>
-          <a:bodyPr rtlCol="0" anchor="ctr"/>
-          <a:lstStyle/>
-          <a:p>
-            <a:pPr algn="ctr"/>
-          </a:p>
-        </p:txBody>
-      </p:sp>
-      <p:sp>
-        <p:nvSpPr>
-          <p:cNvPr id="3" name="TextBox 2"/>
-          <p:cNvSpPr txBox="1"/>
-          <p:nvPr/>
-        </p:nvSpPr>
-        <p:spPr>
-          <a:xfrm>
-            <a:off x="731520" y="384048"/>
-            <a:ext cx="10698480" cy="1005840"/>
-          </a:xfrm>
-          <a:prstGeom prst="rect">
-            <a:avLst/>
-          </a:prstGeom>
-          <a:noFill/>
-        </p:spPr>
-        <p:txBody>
-          <a:bodyPr wrap="square">
-            <a:spAutoFit/>
-          </a:bodyPr>
-          <a:lstStyle/>
-          <a:p>
-            <a:pPr>
-              <a:defRPr sz="1000" b="1">
-                <a:solidFill>
-                  <a:srgbClr val="1B4D3E"/>
-                </a:solidFill>
-              </a:defRPr>
-            </a:pPr>
-            <a:r>
-              <a:t>3.5 · HOEVEEL IS TOEVAL?</a:t>
-            </a:r>
-          </a:p>
-          <a:p>
-            <a:pPr>
-              <a:spcBef>
-                <a:spcPts val="400"/>
-              </a:spcBef>
-              <a:defRPr sz="2400" b="1">
-                <a:solidFill>
-                  <a:srgbClr val="121E31"/>
-                </a:solidFill>
-              </a:defRPr>
-            </a:pPr>
-            <a:r>
-              <a:t>Hoe stevig is een plek in de top-5?</a:t>
-            </a:r>
-          </a:p>
-        </p:txBody>
-      </p:sp>
-      <p:pic>
-        <p:nvPicPr>
-          <p:cNvPr id="4" name="Picture 3" descr="wc8_spreiding.png"/>
-          <p:cNvPicPr>
-            <a:picLocks noChangeAspect="1"/>
-          </p:cNvPicPr>
-          <p:nvPr/>
-        </p:nvPicPr>
-        <p:blipFill>
-          <a:blip r:embed="rId2"/>
-          <a:stretch>
-            <a:fillRect/>
-          </a:stretch>
-        </p:blipFill>
-        <p:spPr>
-          <a:xfrm>
-            <a:off x="2064489" y="1600200"/>
-            <a:ext cx="8062717" cy="4572000"/>
-          </a:xfrm>
-          <a:prstGeom prst="rect">
-            <a:avLst/>
-          </a:prstGeom>
-        </p:spPr>
-      </p:pic>
-    </p:spTree>
-  </p:cSld>
-  <p:clrMapOvr>
-    <a:masterClrMapping/>
-  </p:clrMapOvr>
-</p:sld>
-</file>
-
-<file path=ppt/slides/slide14.xml><?xml version="1.0" encoding="utf-8"?>
-<p:sld xmlns:a="http://schemas.openxmlformats.org/drawingml/2006/main" xmlns:p="http://schemas.openxmlformats.org/presentationml/2006/main" xmlns:r="http://schemas.openxmlformats.org/officeDocument/2006/relationships">
-  <p:cSld>
-    <p:spTree>
-      <p:nvGrpSpPr>
-        <p:cNvPr id="1" name=""/>
-        <p:cNvGrpSpPr/>
-        <p:nvPr/>
-      </p:nvGrpSpPr>
-      <p:grpSpPr/>
-      <p:sp>
-        <p:nvSpPr>
-          <p:cNvPr id="2" name="Rectangle 1"/>
-          <p:cNvSpPr/>
-          <p:nvPr/>
-        </p:nvSpPr>
-        <p:spPr>
-          <a:xfrm>
-            <a:off x="0" y="0"/>
-            <a:ext cx="12191695" cy="6858000"/>
-          </a:xfrm>
-          <a:prstGeom prst="rect">
-            <a:avLst/>
-          </a:prstGeom>
-          <a:solidFill>
-            <a:srgbClr val="F8F9FA"/>
-          </a:solidFill>
-          <a:ln>
-            <a:noFill/>
-          </a:ln>
-          <a:effectLst/>
-        </p:spPr>
-        <p:style>
-          <a:lnRef idx="1">
-            <a:schemeClr val="accent1"/>
-          </a:lnRef>
-          <a:fillRef idx="3">
-            <a:schemeClr val="accent1"/>
-          </a:fillRef>
-          <a:effectRef idx="2">
-            <a:schemeClr val="accent1"/>
-          </a:effectRef>
-          <a:fontRef idx="minor">
-            <a:schemeClr val="lt1"/>
-          </a:fontRef>
-        </p:style>
-        <p:txBody>
-          <a:bodyPr rtlCol="0" anchor="ctr"/>
-          <a:lstStyle/>
-          <a:p>
-            <a:pPr algn="ctr"/>
-          </a:p>
-        </p:txBody>
-      </p:sp>
-      <p:sp>
-        <p:nvSpPr>
-          <p:cNvPr id="3" name="TextBox 2"/>
-          <p:cNvSpPr txBox="1"/>
-          <p:nvPr/>
-        </p:nvSpPr>
-        <p:spPr>
-          <a:xfrm>
-            <a:off x="731520" y="384048"/>
-            <a:ext cx="10698480" cy="1005840"/>
-          </a:xfrm>
-          <a:prstGeom prst="rect">
-            <a:avLst/>
-          </a:prstGeom>
-          <a:noFill/>
-        </p:spPr>
-        <p:txBody>
-          <a:bodyPr wrap="square">
-            <a:spAutoFit/>
-          </a:bodyPr>
-          <a:lstStyle/>
-          <a:p>
-            <a:pPr>
-              <a:defRPr sz="1000" b="1">
-                <a:solidFill>
-                  <a:srgbClr val="1B4D3E"/>
-                </a:solidFill>
-              </a:defRPr>
-            </a:pPr>
-            <a:r>
-              <a:t>EN DAARNA</a:t>
-            </a:r>
-          </a:p>
-          <a:p>
-            <a:pPr>
-              <a:spcBef>
-                <a:spcPts val="400"/>
-              </a:spcBef>
-              <a:defRPr sz="2400" b="1">
-                <a:solidFill>
-                  <a:srgbClr val="121E31"/>
-                </a:solidFill>
-              </a:defRPr>
-            </a:pPr>
-            <a:r>
-              <a:t>Waar kun je nog naar kijken?</a:t>
-            </a:r>
-          </a:p>
-        </p:txBody>
-      </p:sp>
-      <p:pic>
-        <p:nvPicPr>
-          <p:cNvPr id="4" name="Picture 3" descr="wc8_routes.png"/>
-          <p:cNvPicPr>
-            <a:picLocks noChangeAspect="1"/>
-          </p:cNvPicPr>
-          <p:nvPr/>
-        </p:nvPicPr>
-        <p:blipFill>
-          <a:blip r:embed="rId2"/>
-          <a:stretch>
-            <a:fillRect/>
-          </a:stretch>
-        </p:blipFill>
-        <p:spPr>
-          <a:xfrm>
-            <a:off x="1339756" y="1600200"/>
-            <a:ext cx="9512183" cy="4572000"/>
-          </a:xfrm>
-          <a:prstGeom prst="rect">
-            <a:avLst/>
-          </a:prstGeom>
-        </p:spPr>
-      </p:pic>
-    </p:spTree>
-  </p:cSld>
-  <p:clrMapOvr>
-    <a:masterClrMapping/>
-  </p:clrMapOvr>
-</p:sld>
-</file>
-
-<file path=ppt/slides/slide15.xml><?xml version="1.0" encoding="utf-8"?>
-<p:sld xmlns:a="http://schemas.openxmlformats.org/drawingml/2006/main" xmlns:p="http://schemas.openxmlformats.org/presentationml/2006/main" xmlns:r="http://schemas.openxmlformats.org/officeDocument/2006/relationships">
-  <p:cSld>
-    <p:spTree>
-      <p:nvGrpSpPr>
-        <p:cNvPr id="1" name=""/>
-        <p:cNvGrpSpPr/>
-        <p:nvPr/>
-      </p:nvGrpSpPr>
-      <p:grpSpPr/>
-      <p:sp>
-        <p:nvSpPr>
-          <p:cNvPr id="2" name="Rectangle 1"/>
-          <p:cNvSpPr/>
-          <p:nvPr/>
-        </p:nvSpPr>
-        <p:spPr>
-          <a:xfrm>
-            <a:off x="0" y="0"/>
-            <a:ext cx="12191695" cy="6858000"/>
-          </a:xfrm>
-          <a:prstGeom prst="rect">
-            <a:avLst/>
-          </a:prstGeom>
-          <a:solidFill>
-            <a:srgbClr val="F8F9FA"/>
-          </a:solidFill>
-          <a:ln>
-            <a:noFill/>
-          </a:ln>
-          <a:effectLst/>
-        </p:spPr>
-        <p:style>
-          <a:lnRef idx="1">
-            <a:schemeClr val="accent1"/>
-          </a:lnRef>
-          <a:fillRef idx="3">
-            <a:schemeClr val="accent1"/>
-          </a:fillRef>
-          <a:effectRef idx="2">
-            <a:schemeClr val="accent1"/>
-          </a:effectRef>
-          <a:fontRef idx="minor">
-            <a:schemeClr val="lt1"/>
-          </a:fontRef>
-        </p:style>
-        <p:txBody>
-          <a:bodyPr rtlCol="0" anchor="ctr"/>
-          <a:lstStyle/>
-          <a:p>
-            <a:pPr algn="ctr"/>
-          </a:p>
-        </p:txBody>
-      </p:sp>
-      <p:sp>
-        <p:nvSpPr>
-          <p:cNvPr id="3" name="TextBox 2"/>
-          <p:cNvSpPr txBox="1"/>
-          <p:nvPr/>
-        </p:nvSpPr>
-        <p:spPr>
-          <a:xfrm>
-            <a:off x="731520" y="384048"/>
-            <a:ext cx="10698480" cy="1005840"/>
-          </a:xfrm>
-          <a:prstGeom prst="rect">
-            <a:avLst/>
-          </a:prstGeom>
-          <a:noFill/>
-        </p:spPr>
-        <p:txBody>
-          <a:bodyPr wrap="square">
-            <a:spAutoFit/>
-          </a:bodyPr>
-          <a:lstStyle/>
-          <a:p>
-            <a:pPr>
-              <a:defRPr sz="1000" b="1">
-                <a:solidFill>
-                  <a:srgbClr val="1B4D3E"/>
-                </a:solidFill>
-              </a:defRPr>
-            </a:pPr>
-            <a:r>
-              <a:t>HOE VERZIN JE ZO'N VRAAG?</a:t>
-            </a:r>
-          </a:p>
-          <a:p>
-            <a:pPr>
-              <a:spcBef>
-                <a:spcPts val="400"/>
-              </a:spcBef>
-              <a:defRPr sz="2400" b="1">
-                <a:solidFill>
-                  <a:srgbClr val="121E31"/>
-                </a:solidFill>
-              </a:defRPr>
-            </a:pPr>
-            <a:r>
-              <a:t>Je leest hem af van je eigen bot</a:t>
-            </a:r>
-          </a:p>
-        </p:txBody>
-      </p:sp>
-      <p:pic>
-        <p:nvPicPr>
-          <p:cNvPr id="4" name="Picture 3" descr="wc8_regels.png"/>
-          <p:cNvPicPr>
-            <a:picLocks noChangeAspect="1"/>
-          </p:cNvPicPr>
-          <p:nvPr/>
-        </p:nvPicPr>
-        <p:blipFill>
-          <a:blip r:embed="rId2"/>
-          <a:stretch>
-            <a:fillRect/>
-          </a:stretch>
-        </p:blipFill>
-        <p:spPr>
-          <a:xfrm>
-            <a:off x="1660198" y="1600200"/>
-            <a:ext cx="8871299" cy="4572000"/>
-          </a:xfrm>
-          <a:prstGeom prst="rect">
-            <a:avLst/>
-          </a:prstGeom>
-        </p:spPr>
-      </p:pic>
-    </p:spTree>
-  </p:cSld>
-  <p:clrMapOvr>
-    <a:masterClrMapping/>
-  </p:clrMapOvr>
-</p:sld>
-</file>
-
-<file path=ppt/slides/slide16.xml><?xml version="1.0" encoding="utf-8"?>
-<p:sld xmlns:a="http://schemas.openxmlformats.org/drawingml/2006/main" xmlns:p="http://schemas.openxmlformats.org/presentationml/2006/main" xmlns:r="http://schemas.openxmlformats.org/officeDocument/2006/relationships">
-  <p:cSld>
-    <p:spTree>
-      <p:nvGrpSpPr>
-        <p:cNvPr id="1" name=""/>
-        <p:cNvGrpSpPr/>
-        <p:nvPr/>
-      </p:nvGrpSpPr>
-      <p:grpSpPr/>
-      <p:sp>
-        <p:nvSpPr>
-          <p:cNvPr id="2" name="Rectangle 1"/>
-          <p:cNvSpPr/>
-          <p:nvPr/>
-        </p:nvSpPr>
-        <p:spPr>
-          <a:xfrm>
-            <a:off x="0" y="0"/>
-            <a:ext cx="12191695" cy="6858000"/>
-          </a:xfrm>
-          <a:prstGeom prst="rect">
-            <a:avLst/>
-          </a:prstGeom>
-          <a:solidFill>
-            <a:srgbClr val="F8F9FA"/>
-          </a:solidFill>
-          <a:ln>
-            <a:noFill/>
-          </a:ln>
-          <a:effectLst/>
-        </p:spPr>
-        <p:style>
-          <a:lnRef idx="1">
-            <a:schemeClr val="accent1"/>
-          </a:lnRef>
-          <a:fillRef idx="3">
-            <a:schemeClr val="accent1"/>
-          </a:fillRef>
-          <a:effectRef idx="2">
-            <a:schemeClr val="accent1"/>
-          </a:effectRef>
-          <a:fontRef idx="minor">
-            <a:schemeClr val="lt1"/>
-          </a:fontRef>
-        </p:style>
-        <p:txBody>
-          <a:bodyPr rtlCol="0" anchor="ctr"/>
-          <a:lstStyle/>
-          <a:p>
-            <a:pPr algn="ctr"/>
-          </a:p>
-        </p:txBody>
-      </p:sp>
-      <p:sp>
-        <p:nvSpPr>
-          <p:cNvPr id="3" name="TextBox 2"/>
-          <p:cNvSpPr txBox="1"/>
-          <p:nvPr/>
-        </p:nvSpPr>
-        <p:spPr>
-          <a:xfrm>
-            <a:off x="731520" y="384048"/>
-            <a:ext cx="10698480" cy="1005840"/>
-          </a:xfrm>
-          <a:prstGeom prst="rect">
-            <a:avLst/>
-          </a:prstGeom>
-          <a:noFill/>
-        </p:spPr>
-        <p:txBody>
-          <a:bodyPr wrap="square">
-            <a:spAutoFit/>
-          </a:bodyPr>
-          <a:lstStyle/>
-          <a:p>
-            <a:pPr>
-              <a:defRPr sz="1000" b="1">
-                <a:solidFill>
-                  <a:srgbClr val="1B4D3E"/>
-                </a:solidFill>
-              </a:defRPr>
-            </a:pPr>
-            <a:r>
-              <a:t>SPOOR 2</a:t>
-            </a:r>
-          </a:p>
-          <a:p>
-            <a:pPr>
-              <a:spcBef>
-                <a:spcPts val="400"/>
-              </a:spcBef>
-              <a:defRPr sz="2400" b="1">
-                <a:solidFill>
-                  <a:srgbClr val="121E31"/>
-                </a:solidFill>
-              </a:defRPr>
-            </a:pPr>
-            <a:r>
-              <a:t>Laat je bot opschrijven wat hij doet</a:t>
+              <a:t>Weggegooid, en toch winstgevend</a:t>
             </a:r>
           </a:p>
         </p:txBody>
@@ -5948,169 +5221,112 @@
           <a:lstStyle/>
           <a:p>
             <a:pPr>
-              <a:defRPr sz="1500" b="1">
+              <a:spcBef>
+                <a:spcPts val="400"/>
+              </a:spcBef>
+              <a:defRPr sz="1400" b="0">
                 <a:solidFill>
                   <a:srgbClr val="121E31"/>
                 </a:solidFill>
+                <a:latin typeface="Consolas"/>
               </a:defRPr>
             </a:pPr>
             <a:r>
-              <a:t>Drie regels erbij, en je hebt data die niemand anders heeft:</a:t>
+              <a:t>2-2       97x gespeeld    64% gefold    gemiddeld +33 chips</a:t>
             </a:r>
           </a:p>
           <a:p>
             <a:pPr>
               <a:spcBef>
-                <a:spcPts val="1400"/>
+                <a:spcPts val="400"/>
+              </a:spcBef>
+              <a:defRPr sz="1400" b="0">
+                <a:solidFill>
+                  <a:srgbClr val="121E31"/>
+                </a:solidFill>
+                <a:latin typeface="Consolas"/>
+              </a:defRPr>
+            </a:pPr>
+            <a:r>
+              <a:t>Q-9      245x gespeeld    59% gefold    gemiddeld +16 chips</a:t>
+            </a:r>
+          </a:p>
+          <a:p>
+            <a:pPr>
+              <a:spcBef>
+                <a:spcPts val="400"/>
+              </a:spcBef>
+              <a:defRPr sz="1400" b="0">
+                <a:solidFill>
+                  <a:srgbClr val="121E31"/>
+                </a:solidFill>
+                <a:latin typeface="Consolas"/>
+              </a:defRPr>
+            </a:pPr>
+            <a:r>
+              <a:t>K-7      283x gespeeld    56% gefold    gemiddeld +14 chips</a:t>
+            </a:r>
+          </a:p>
+          <a:p>
+            <a:pPr>
+              <a:spcBef>
+                <a:spcPts val="400"/>
+              </a:spcBef>
+              <a:defRPr sz="1400" b="0">
+                <a:solidFill>
+                  <a:srgbClr val="121E31"/>
+                </a:solidFill>
+                <a:latin typeface="Consolas"/>
+              </a:defRPr>
+            </a:pPr>
+            <a:r>
+              <a:t>K-3      223x gespeeld    63% gefold    gemiddeld +12 chips</a:t>
+            </a:r>
+          </a:p>
+          <a:p>
+            <a:pPr>
+              <a:spcBef>
+                <a:spcPts val="400"/>
+              </a:spcBef>
+              <a:defRPr sz="1400" b="0">
+                <a:solidFill>
+                  <a:srgbClr val="121E31"/>
+                </a:solidFill>
+                <a:latin typeface="Consolas"/>
+              </a:defRPr>
+            </a:pPr>
+            <a:r>
+              <a:t>K-8      271x gespeeld    53% gefold    gemiddeld +8 chips</a:t>
+            </a:r>
+          </a:p>
+          <a:p>
+            <a:pPr>
+              <a:spcBef>
+                <a:spcPts val="1800"/>
+              </a:spcBef>
+              <a:defRPr sz="1400" b="1">
+                <a:solidFill>
+                  <a:srgbClr val="1B4D3E"/>
+                </a:solidFill>
+              </a:defRPr>
+            </a:pPr>
+            <a:r>
+              <a:t>Deze handen worden vaker gefold dan gespeeld, maar leveren geld op wanneer er wél mee gespeeld wordt.</a:t>
+            </a:r>
+          </a:p>
+          <a:p>
+            <a:pPr>
+              <a:spcBef>
+                <a:spcPts val="1200"/>
               </a:spcBef>
               <a:defRPr sz="1300" b="0">
                 <a:solidFill>
-                  <a:srgbClr val="121E31"/>
-                </a:solidFill>
-                <a:latin typeface="Consolas"/>
+                  <a:srgbClr val="505A64"/>
+                </a:solidFill>
               </a:defRPr>
             </a:pPr>
             <a:r>
-              <a:t>BESLISSINGEN = []</a:t>
-            </a:r>
-          </a:p>
-          <a:p>
-            <a:pPr>
-              <a:spcBef>
-                <a:spcPts val="200"/>
-              </a:spcBef>
-              <a:defRPr sz="1300" b="0">
-                <a:solidFill>
-                  <a:srgbClr val="121E31"/>
-                </a:solidFill>
-                <a:latin typeface="Consolas"/>
-              </a:defRPr>
-            </a:pPr>
-          </a:p>
-          <a:p>
-            <a:pPr>
-              <a:spcBef>
-                <a:spcPts val="200"/>
-              </a:spcBef>
-              <a:defRPr sz="1300" b="0">
-                <a:solidFill>
-                  <a:srgbClr val="505A64"/>
-                </a:solidFill>
-                <a:latin typeface="Consolas"/>
-              </a:defRPr>
-            </a:pPr>
-            <a:r>
-              <a:t>def kies_actie(hand, ..., ronde, pot, inzet_om_te_callen, ...):</a:t>
-            </a:r>
-          </a:p>
-          <a:p>
-            <a:pPr>
-              <a:spcBef>
-                <a:spcPts val="200"/>
-              </a:spcBef>
-              <a:defRPr sz="1300" b="0">
-                <a:solidFill>
-                  <a:srgbClr val="505A64"/>
-                </a:solidFill>
-                <a:latin typeface="Consolas"/>
-              </a:defRPr>
-            </a:pPr>
-            <a:r>
-              <a:t>    winkans = schat_winkans(...)</a:t>
-            </a:r>
-          </a:p>
-          <a:p>
-            <a:pPr>
-              <a:spcBef>
-                <a:spcPts val="200"/>
-              </a:spcBef>
-              <a:defRPr sz="1300" b="0">
-                <a:solidFill>
-                  <a:srgbClr val="505A64"/>
-                </a:solidFill>
-                <a:latin typeface="Consolas"/>
-              </a:defRPr>
-            </a:pPr>
-            <a:r>
-              <a:t>    ...</a:t>
-            </a:r>
-          </a:p>
-          <a:p>
-            <a:pPr>
-              <a:spcBef>
-                <a:spcPts val="200"/>
-              </a:spcBef>
-              <a:defRPr sz="1300" b="1">
-                <a:solidFill>
-                  <a:srgbClr val="1B4D3E"/>
-                </a:solidFill>
-                <a:latin typeface="Consolas"/>
-              </a:defRPr>
-            </a:pPr>
-            <a:r>
-              <a:t>    BESLISSINGEN.append({"ronde": ronde, "winkans": winkans,</a:t>
-            </a:r>
-          </a:p>
-          <a:p>
-            <a:pPr>
-              <a:spcBef>
-                <a:spcPts val="200"/>
-              </a:spcBef>
-              <a:defRPr sz="1300" b="1">
-                <a:solidFill>
-                  <a:srgbClr val="1B4D3E"/>
-                </a:solidFill>
-                <a:latin typeface="Consolas"/>
-              </a:defRPr>
-            </a:pPr>
-            <a:r>
-              <a:t>                         "pot": pot, "regel": "bluf", "actie": actie})</a:t>
-            </a:r>
-          </a:p>
-          <a:p>
-            <a:pPr>
-              <a:spcBef>
-                <a:spcPts val="200"/>
-              </a:spcBef>
-              <a:defRPr sz="1300" b="0">
-                <a:solidFill>
-                  <a:srgbClr val="505A64"/>
-                </a:solidFill>
-                <a:latin typeface="Consolas"/>
-              </a:defRPr>
-            </a:pPr>
-            <a:r>
-              <a:t>    return actie</a:t>
-            </a:r>
-          </a:p>
-          <a:p>
-            <a:pPr>
-              <a:spcBef>
-                <a:spcPts val="1600"/>
-              </a:spcBef>
-              <a:defRPr sz="1300" b="0">
-                <a:solidFill>
-                  <a:srgbClr val="121E31"/>
-                </a:solidFill>
-              </a:defRPr>
-            </a:pPr>
-            <a:r>
-              <a:t>Daarna speel_duel() draaien en pd.DataFrame(BESLISSINGEN) analyseren. Nu kun je wél zien wat je winkans per straat was, hoe vaak je bluf-regel vuurde, en welke van je vijf regels de beslissing nam.</a:t>
-            </a:r>
-          </a:p>
-          <a:p>
-            <a:pPr>
-              <a:spcBef>
-                <a:spcPts val="1000"/>
-              </a:spcBef>
-              <a:defRPr sz="1300" b="1">
-                <a:solidFill>
-                  <a:srgbClr val="B3261E"/>
-                </a:solidFill>
-              </a:defRPr>
-            </a:pPr>
-            <a:r>
-              <a:t>Let op: dit doe je LOKAAL. In je inzending hoort geen logboek — daar telt alleen wat kies_actie teruggeeft.</a:t>
+              <a:t>Is dat een kans, of kijk je naar de handen die toevallig goed afliepen? Dat is precies de vraag die je met deze data niet helemaal kunt beslechten.</a:t>
             </a:r>
           </a:p>
         </p:txBody>
@@ -6123,7 +5339,7 @@
 </p:sld>
 </file>
 
-<file path=ppt/slides/slide17.xml><?xml version="1.0" encoding="utf-8"?>
+<file path=ppt/slides/slide11.xml><?xml version="1.0" encoding="utf-8"?>
 <p:sld xmlns:a="http://schemas.openxmlformats.org/drawingml/2006/main" xmlns:p="http://schemas.openxmlformats.org/presentationml/2006/main" xmlns:r="http://schemas.openxmlformats.org/officeDocument/2006/relationships">
   <p:cSld>
     <p:spTree>
@@ -6207,7 +5423,7 @@
               </a:defRPr>
             </a:pPr>
             <a:r>
-              <a:t>SPOOR 3</a:t>
+              <a:t>JOUW EIGEN SPEL</a:t>
             </a:r>
           </a:p>
           <a:p>
@@ -6222,7 +5438,823 @@
               </a:defRPr>
             </a:pPr>
             <a:r>
-              <a:t>Meer weten over je hand — dat kan gewoon</a:t>
+              <a:t>Dezelfde bot, twintig keer een ander verhaal</a:t>
+            </a:r>
+          </a:p>
+        </p:txBody>
+      </p:sp>
+      <p:pic>
+        <p:nvPicPr>
+          <p:cNvPr id="4" name="Picture 3" descr="wc8_stackverloop.png"/>
+          <p:cNvPicPr>
+            <a:picLocks noChangeAspect="1"/>
+          </p:cNvPicPr>
+          <p:nvPr/>
+        </p:nvPicPr>
+        <p:blipFill>
+          <a:blip r:embed="rId2"/>
+          <a:stretch>
+            <a:fillRect/>
+          </a:stretch>
+        </p:blipFill>
+        <p:spPr>
+          <a:xfrm>
+            <a:off x="1957224" y="1600200"/>
+            <a:ext cx="8277246" cy="4572000"/>
+          </a:xfrm>
+          <a:prstGeom prst="rect">
+            <a:avLst/>
+          </a:prstGeom>
+        </p:spPr>
+      </p:pic>
+    </p:spTree>
+  </p:cSld>
+  <p:clrMapOvr>
+    <a:masterClrMapping/>
+  </p:clrMapOvr>
+</p:sld>
+</file>
+
+<file path=ppt/slides/slide12.xml><?xml version="1.0" encoding="utf-8"?>
+<p:sld xmlns:a="http://schemas.openxmlformats.org/drawingml/2006/main" xmlns:p="http://schemas.openxmlformats.org/presentationml/2006/main" xmlns:r="http://schemas.openxmlformats.org/officeDocument/2006/relationships">
+  <p:cSld>
+    <p:spTree>
+      <p:nvGrpSpPr>
+        <p:cNvPr id="1" name=""/>
+        <p:cNvGrpSpPr/>
+        <p:nvPr/>
+      </p:nvGrpSpPr>
+      <p:grpSpPr/>
+      <p:sp>
+        <p:nvSpPr>
+          <p:cNvPr id="2" name="Rectangle 1"/>
+          <p:cNvSpPr/>
+          <p:nvPr/>
+        </p:nvSpPr>
+        <p:spPr>
+          <a:xfrm>
+            <a:off x="0" y="0"/>
+            <a:ext cx="12191695" cy="6858000"/>
+          </a:xfrm>
+          <a:prstGeom prst="rect">
+            <a:avLst/>
+          </a:prstGeom>
+          <a:solidFill>
+            <a:srgbClr val="F8F9FA"/>
+          </a:solidFill>
+          <a:ln>
+            <a:noFill/>
+          </a:ln>
+          <a:effectLst/>
+        </p:spPr>
+        <p:style>
+          <a:lnRef idx="1">
+            <a:schemeClr val="accent1"/>
+          </a:lnRef>
+          <a:fillRef idx="3">
+            <a:schemeClr val="accent1"/>
+          </a:fillRef>
+          <a:effectRef idx="2">
+            <a:schemeClr val="accent1"/>
+          </a:effectRef>
+          <a:fontRef idx="minor">
+            <a:schemeClr val="lt1"/>
+          </a:fontRef>
+        </p:style>
+        <p:txBody>
+          <a:bodyPr rtlCol="0" anchor="ctr"/>
+          <a:lstStyle/>
+          <a:p>
+            <a:pPr algn="ctr"/>
+          </a:p>
+        </p:txBody>
+      </p:sp>
+      <p:sp>
+        <p:nvSpPr>
+          <p:cNvPr id="3" name="TextBox 2"/>
+          <p:cNvSpPr txBox="1"/>
+          <p:nvPr/>
+        </p:nvSpPr>
+        <p:spPr>
+          <a:xfrm>
+            <a:off x="731520" y="384048"/>
+            <a:ext cx="10698480" cy="1005840"/>
+          </a:xfrm>
+          <a:prstGeom prst="rect">
+            <a:avLst/>
+          </a:prstGeom>
+          <a:noFill/>
+        </p:spPr>
+        <p:txBody>
+          <a:bodyPr wrap="square">
+            <a:spAutoFit/>
+          </a:bodyPr>
+          <a:lstStyle/>
+          <a:p>
+            <a:pPr>
+              <a:defRPr sz="1000" b="1">
+                <a:solidFill>
+                  <a:srgbClr val="1B4D3E"/>
+                </a:solidFill>
+              </a:defRPr>
+            </a:pPr>
+            <a:r>
+              <a:t>JOUW ACTIES</a:t>
+            </a:r>
+          </a:p>
+          <a:p>
+            <a:pPr>
+              <a:spcBef>
+                <a:spcPts val="400"/>
+              </a:spcBef>
+              <a:defRPr sz="2400" b="1">
+                <a:solidFill>
+                  <a:srgbClr val="121E31"/>
+                </a:solidFill>
+              </a:defRPr>
+            </a:pPr>
+            <a:r>
+              <a:t>Levert jouw raise meer op dan die van de klas?</a:t>
+            </a:r>
+          </a:p>
+        </p:txBody>
+      </p:sp>
+      <p:pic>
+        <p:nvPicPr>
+          <p:cNvPr id="4" name="Picture 3" descr="wc8_jij_tegenover_klas.png"/>
+          <p:cNvPicPr>
+            <a:picLocks noChangeAspect="1"/>
+          </p:cNvPicPr>
+          <p:nvPr/>
+        </p:nvPicPr>
+        <p:blipFill>
+          <a:blip r:embed="rId2"/>
+          <a:stretch>
+            <a:fillRect/>
+          </a:stretch>
+        </p:blipFill>
+        <p:spPr>
+          <a:xfrm>
+            <a:off x="1934404" y="1600200"/>
+            <a:ext cx="8322886" cy="4572000"/>
+          </a:xfrm>
+          <a:prstGeom prst="rect">
+            <a:avLst/>
+          </a:prstGeom>
+        </p:spPr>
+      </p:pic>
+    </p:spTree>
+  </p:cSld>
+  <p:clrMapOvr>
+    <a:masterClrMapping/>
+  </p:clrMapOvr>
+</p:sld>
+</file>
+
+<file path=ppt/slides/slide13.xml><?xml version="1.0" encoding="utf-8"?>
+<p:sld xmlns:a="http://schemas.openxmlformats.org/drawingml/2006/main" xmlns:p="http://schemas.openxmlformats.org/presentationml/2006/main" xmlns:r="http://schemas.openxmlformats.org/officeDocument/2006/relationships">
+  <p:cSld>
+    <p:spTree>
+      <p:nvGrpSpPr>
+        <p:cNvPr id="1" name=""/>
+        <p:cNvGrpSpPr/>
+        <p:nvPr/>
+      </p:nvGrpSpPr>
+      <p:grpSpPr/>
+      <p:sp>
+        <p:nvSpPr>
+          <p:cNvPr id="2" name="Rectangle 1"/>
+          <p:cNvSpPr/>
+          <p:nvPr/>
+        </p:nvSpPr>
+        <p:spPr>
+          <a:xfrm>
+            <a:off x="0" y="0"/>
+            <a:ext cx="12191695" cy="6858000"/>
+          </a:xfrm>
+          <a:prstGeom prst="rect">
+            <a:avLst/>
+          </a:prstGeom>
+          <a:solidFill>
+            <a:srgbClr val="F8F9FA"/>
+          </a:solidFill>
+          <a:ln>
+            <a:noFill/>
+          </a:ln>
+          <a:effectLst/>
+        </p:spPr>
+        <p:style>
+          <a:lnRef idx="1">
+            <a:schemeClr val="accent1"/>
+          </a:lnRef>
+          <a:fillRef idx="3">
+            <a:schemeClr val="accent1"/>
+          </a:fillRef>
+          <a:effectRef idx="2">
+            <a:schemeClr val="accent1"/>
+          </a:effectRef>
+          <a:fontRef idx="minor">
+            <a:schemeClr val="lt1"/>
+          </a:fontRef>
+        </p:style>
+        <p:txBody>
+          <a:bodyPr rtlCol="0" anchor="ctr"/>
+          <a:lstStyle/>
+          <a:p>
+            <a:pPr algn="ctr"/>
+          </a:p>
+        </p:txBody>
+      </p:sp>
+      <p:sp>
+        <p:nvSpPr>
+          <p:cNvPr id="3" name="TextBox 2"/>
+          <p:cNvSpPr txBox="1"/>
+          <p:nvPr/>
+        </p:nvSpPr>
+        <p:spPr>
+          <a:xfrm>
+            <a:off x="731520" y="384048"/>
+            <a:ext cx="10698480" cy="1005840"/>
+          </a:xfrm>
+          <a:prstGeom prst="rect">
+            <a:avLst/>
+          </a:prstGeom>
+          <a:noFill/>
+        </p:spPr>
+        <p:txBody>
+          <a:bodyPr wrap="square">
+            <a:spAutoFit/>
+          </a:bodyPr>
+          <a:lstStyle/>
+          <a:p>
+            <a:pPr>
+              <a:defRPr sz="1000" b="1">
+                <a:solidFill>
+                  <a:srgbClr val="1B4D3E"/>
+                </a:solidFill>
+              </a:defRPr>
+            </a:pPr>
+            <a:r>
+              <a:t>WAAR GING JE GELD HEEN?</a:t>
+            </a:r>
+          </a:p>
+          <a:p>
+            <a:pPr>
+              <a:spcBef>
+                <a:spcPts val="400"/>
+              </a:spcBef>
+              <a:defRPr sz="2400" b="1">
+                <a:solidFill>
+                  <a:srgbClr val="121E31"/>
+                </a:solidFill>
+              </a:defRPr>
+            </a:pPr>
+            <a:r>
+              <a:t>Niet het gemiddelde, maar het totaal</a:t>
+            </a:r>
+          </a:p>
+        </p:txBody>
+      </p:sp>
+      <p:pic>
+        <p:nvPicPr>
+          <p:cNvPr id="4" name="Picture 3" descr="wc8_totale_bijdrage.png"/>
+          <p:cNvPicPr>
+            <a:picLocks noChangeAspect="1"/>
+          </p:cNvPicPr>
+          <p:nvPr/>
+        </p:nvPicPr>
+        <p:blipFill>
+          <a:blip r:embed="rId2"/>
+          <a:stretch>
+            <a:fillRect/>
+          </a:stretch>
+        </p:blipFill>
+        <p:spPr>
+          <a:xfrm>
+            <a:off x="2261341" y="1600200"/>
+            <a:ext cx="7669013" cy="4572000"/>
+          </a:xfrm>
+          <a:prstGeom prst="rect">
+            <a:avLst/>
+          </a:prstGeom>
+        </p:spPr>
+      </p:pic>
+    </p:spTree>
+  </p:cSld>
+  <p:clrMapOvr>
+    <a:masterClrMapping/>
+  </p:clrMapOvr>
+</p:sld>
+</file>
+
+<file path=ppt/slides/slide14.xml><?xml version="1.0" encoding="utf-8"?>
+<p:sld xmlns:a="http://schemas.openxmlformats.org/drawingml/2006/main" xmlns:p="http://schemas.openxmlformats.org/presentationml/2006/main" xmlns:r="http://schemas.openxmlformats.org/officeDocument/2006/relationships">
+  <p:cSld>
+    <p:spTree>
+      <p:nvGrpSpPr>
+        <p:cNvPr id="1" name=""/>
+        <p:cNvGrpSpPr/>
+        <p:nvPr/>
+      </p:nvGrpSpPr>
+      <p:grpSpPr/>
+      <p:sp>
+        <p:nvSpPr>
+          <p:cNvPr id="2" name="Rectangle 1"/>
+          <p:cNvSpPr/>
+          <p:nvPr/>
+        </p:nvSpPr>
+        <p:spPr>
+          <a:xfrm>
+            <a:off x="0" y="0"/>
+            <a:ext cx="12191695" cy="6858000"/>
+          </a:xfrm>
+          <a:prstGeom prst="rect">
+            <a:avLst/>
+          </a:prstGeom>
+          <a:solidFill>
+            <a:srgbClr val="F8F9FA"/>
+          </a:solidFill>
+          <a:ln>
+            <a:noFill/>
+          </a:ln>
+          <a:effectLst/>
+        </p:spPr>
+        <p:style>
+          <a:lnRef idx="1">
+            <a:schemeClr val="accent1"/>
+          </a:lnRef>
+          <a:fillRef idx="3">
+            <a:schemeClr val="accent1"/>
+          </a:fillRef>
+          <a:effectRef idx="2">
+            <a:schemeClr val="accent1"/>
+          </a:effectRef>
+          <a:fontRef idx="minor">
+            <a:schemeClr val="lt1"/>
+          </a:fontRef>
+        </p:style>
+        <p:txBody>
+          <a:bodyPr rtlCol="0" anchor="ctr"/>
+          <a:lstStyle/>
+          <a:p>
+            <a:pPr algn="ctr"/>
+          </a:p>
+        </p:txBody>
+      </p:sp>
+      <p:sp>
+        <p:nvSpPr>
+          <p:cNvPr id="3" name="TextBox 2"/>
+          <p:cNvSpPr txBox="1"/>
+          <p:nvPr/>
+        </p:nvSpPr>
+        <p:spPr>
+          <a:xfrm>
+            <a:off x="731520" y="384048"/>
+            <a:ext cx="10698480" cy="1005840"/>
+          </a:xfrm>
+          <a:prstGeom prst="rect">
+            <a:avLst/>
+          </a:prstGeom>
+          <a:noFill/>
+        </p:spPr>
+        <p:txBody>
+          <a:bodyPr wrap="square">
+            <a:spAutoFit/>
+          </a:bodyPr>
+          <a:lstStyle/>
+          <a:p>
+            <a:pPr>
+              <a:defRPr sz="1000" b="1">
+                <a:solidFill>
+                  <a:srgbClr val="1B4D3E"/>
+                </a:solidFill>
+              </a:defRPr>
+            </a:pPr>
+            <a:r>
+              <a:t>3.5 · HOEVEEL IS TOEVAL?</a:t>
+            </a:r>
+          </a:p>
+          <a:p>
+            <a:pPr>
+              <a:spcBef>
+                <a:spcPts val="400"/>
+              </a:spcBef>
+              <a:defRPr sz="2400" b="1">
+                <a:solidFill>
+                  <a:srgbClr val="121E31"/>
+                </a:solidFill>
+              </a:defRPr>
+            </a:pPr>
+            <a:r>
+              <a:t>Hoe stevig is een plek in de top-5?</a:t>
+            </a:r>
+          </a:p>
+        </p:txBody>
+      </p:sp>
+      <p:pic>
+        <p:nvPicPr>
+          <p:cNvPr id="4" name="Picture 3" descr="wc8_spreiding.png"/>
+          <p:cNvPicPr>
+            <a:picLocks noChangeAspect="1"/>
+          </p:cNvPicPr>
+          <p:nvPr/>
+        </p:nvPicPr>
+        <p:blipFill>
+          <a:blip r:embed="rId2"/>
+          <a:stretch>
+            <a:fillRect/>
+          </a:stretch>
+        </p:blipFill>
+        <p:spPr>
+          <a:xfrm>
+            <a:off x="2064489" y="1600200"/>
+            <a:ext cx="8062717" cy="4572000"/>
+          </a:xfrm>
+          <a:prstGeom prst="rect">
+            <a:avLst/>
+          </a:prstGeom>
+        </p:spPr>
+      </p:pic>
+    </p:spTree>
+  </p:cSld>
+  <p:clrMapOvr>
+    <a:masterClrMapping/>
+  </p:clrMapOvr>
+</p:sld>
+</file>
+
+<file path=ppt/slides/slide15.xml><?xml version="1.0" encoding="utf-8"?>
+<p:sld xmlns:a="http://schemas.openxmlformats.org/drawingml/2006/main" xmlns:p="http://schemas.openxmlformats.org/presentationml/2006/main" xmlns:r="http://schemas.openxmlformats.org/officeDocument/2006/relationships">
+  <p:cSld>
+    <p:spTree>
+      <p:nvGrpSpPr>
+        <p:cNvPr id="1" name=""/>
+        <p:cNvGrpSpPr/>
+        <p:nvPr/>
+      </p:nvGrpSpPr>
+      <p:grpSpPr/>
+      <p:sp>
+        <p:nvSpPr>
+          <p:cNvPr id="2" name="Rectangle 1"/>
+          <p:cNvSpPr/>
+          <p:nvPr/>
+        </p:nvSpPr>
+        <p:spPr>
+          <a:xfrm>
+            <a:off x="0" y="0"/>
+            <a:ext cx="12191695" cy="6858000"/>
+          </a:xfrm>
+          <a:prstGeom prst="rect">
+            <a:avLst/>
+          </a:prstGeom>
+          <a:solidFill>
+            <a:srgbClr val="F8F9FA"/>
+          </a:solidFill>
+          <a:ln>
+            <a:noFill/>
+          </a:ln>
+          <a:effectLst/>
+        </p:spPr>
+        <p:style>
+          <a:lnRef idx="1">
+            <a:schemeClr val="accent1"/>
+          </a:lnRef>
+          <a:fillRef idx="3">
+            <a:schemeClr val="accent1"/>
+          </a:fillRef>
+          <a:effectRef idx="2">
+            <a:schemeClr val="accent1"/>
+          </a:effectRef>
+          <a:fontRef idx="minor">
+            <a:schemeClr val="lt1"/>
+          </a:fontRef>
+        </p:style>
+        <p:txBody>
+          <a:bodyPr rtlCol="0" anchor="ctr"/>
+          <a:lstStyle/>
+          <a:p>
+            <a:pPr algn="ctr"/>
+          </a:p>
+        </p:txBody>
+      </p:sp>
+      <p:sp>
+        <p:nvSpPr>
+          <p:cNvPr id="3" name="TextBox 2"/>
+          <p:cNvSpPr txBox="1"/>
+          <p:nvPr/>
+        </p:nvSpPr>
+        <p:spPr>
+          <a:xfrm>
+            <a:off x="731520" y="384048"/>
+            <a:ext cx="10698480" cy="1005840"/>
+          </a:xfrm>
+          <a:prstGeom prst="rect">
+            <a:avLst/>
+          </a:prstGeom>
+          <a:noFill/>
+        </p:spPr>
+        <p:txBody>
+          <a:bodyPr wrap="square">
+            <a:spAutoFit/>
+          </a:bodyPr>
+          <a:lstStyle/>
+          <a:p>
+            <a:pPr>
+              <a:defRPr sz="1000" b="1">
+                <a:solidFill>
+                  <a:srgbClr val="1B4D3E"/>
+                </a:solidFill>
+              </a:defRPr>
+            </a:pPr>
+            <a:r>
+              <a:t>EN DAARNA</a:t>
+            </a:r>
+          </a:p>
+          <a:p>
+            <a:pPr>
+              <a:spcBef>
+                <a:spcPts val="400"/>
+              </a:spcBef>
+              <a:defRPr sz="2400" b="1">
+                <a:solidFill>
+                  <a:srgbClr val="121E31"/>
+                </a:solidFill>
+              </a:defRPr>
+            </a:pPr>
+            <a:r>
+              <a:t>Waar kun je nog naar kijken?</a:t>
+            </a:r>
+          </a:p>
+        </p:txBody>
+      </p:sp>
+      <p:pic>
+        <p:nvPicPr>
+          <p:cNvPr id="4" name="Picture 3" descr="wc8_routes.png"/>
+          <p:cNvPicPr>
+            <a:picLocks noChangeAspect="1"/>
+          </p:cNvPicPr>
+          <p:nvPr/>
+        </p:nvPicPr>
+        <p:blipFill>
+          <a:blip r:embed="rId2"/>
+          <a:stretch>
+            <a:fillRect/>
+          </a:stretch>
+        </p:blipFill>
+        <p:spPr>
+          <a:xfrm>
+            <a:off x="1339756" y="1600200"/>
+            <a:ext cx="9512183" cy="4572000"/>
+          </a:xfrm>
+          <a:prstGeom prst="rect">
+            <a:avLst/>
+          </a:prstGeom>
+        </p:spPr>
+      </p:pic>
+    </p:spTree>
+  </p:cSld>
+  <p:clrMapOvr>
+    <a:masterClrMapping/>
+  </p:clrMapOvr>
+</p:sld>
+</file>
+
+<file path=ppt/slides/slide16.xml><?xml version="1.0" encoding="utf-8"?>
+<p:sld xmlns:a="http://schemas.openxmlformats.org/drawingml/2006/main" xmlns:p="http://schemas.openxmlformats.org/presentationml/2006/main" xmlns:r="http://schemas.openxmlformats.org/officeDocument/2006/relationships">
+  <p:cSld>
+    <p:spTree>
+      <p:nvGrpSpPr>
+        <p:cNvPr id="1" name=""/>
+        <p:cNvGrpSpPr/>
+        <p:nvPr/>
+      </p:nvGrpSpPr>
+      <p:grpSpPr/>
+      <p:sp>
+        <p:nvSpPr>
+          <p:cNvPr id="2" name="Rectangle 1"/>
+          <p:cNvSpPr/>
+          <p:nvPr/>
+        </p:nvSpPr>
+        <p:spPr>
+          <a:xfrm>
+            <a:off x="0" y="0"/>
+            <a:ext cx="12191695" cy="6858000"/>
+          </a:xfrm>
+          <a:prstGeom prst="rect">
+            <a:avLst/>
+          </a:prstGeom>
+          <a:solidFill>
+            <a:srgbClr val="F8F9FA"/>
+          </a:solidFill>
+          <a:ln>
+            <a:noFill/>
+          </a:ln>
+          <a:effectLst/>
+        </p:spPr>
+        <p:style>
+          <a:lnRef idx="1">
+            <a:schemeClr val="accent1"/>
+          </a:lnRef>
+          <a:fillRef idx="3">
+            <a:schemeClr val="accent1"/>
+          </a:fillRef>
+          <a:effectRef idx="2">
+            <a:schemeClr val="accent1"/>
+          </a:effectRef>
+          <a:fontRef idx="minor">
+            <a:schemeClr val="lt1"/>
+          </a:fontRef>
+        </p:style>
+        <p:txBody>
+          <a:bodyPr rtlCol="0" anchor="ctr"/>
+          <a:lstStyle/>
+          <a:p>
+            <a:pPr algn="ctr"/>
+          </a:p>
+        </p:txBody>
+      </p:sp>
+      <p:sp>
+        <p:nvSpPr>
+          <p:cNvPr id="3" name="TextBox 2"/>
+          <p:cNvSpPr txBox="1"/>
+          <p:nvPr/>
+        </p:nvSpPr>
+        <p:spPr>
+          <a:xfrm>
+            <a:off x="731520" y="384048"/>
+            <a:ext cx="10698480" cy="1005840"/>
+          </a:xfrm>
+          <a:prstGeom prst="rect">
+            <a:avLst/>
+          </a:prstGeom>
+          <a:noFill/>
+        </p:spPr>
+        <p:txBody>
+          <a:bodyPr wrap="square">
+            <a:spAutoFit/>
+          </a:bodyPr>
+          <a:lstStyle/>
+          <a:p>
+            <a:pPr>
+              <a:defRPr sz="1000" b="1">
+                <a:solidFill>
+                  <a:srgbClr val="1B4D3E"/>
+                </a:solidFill>
+              </a:defRPr>
+            </a:pPr>
+            <a:r>
+              <a:t>HOE VERZIN JE ZO'N VRAAG?</a:t>
+            </a:r>
+          </a:p>
+          <a:p>
+            <a:pPr>
+              <a:spcBef>
+                <a:spcPts val="400"/>
+              </a:spcBef>
+              <a:defRPr sz="2400" b="1">
+                <a:solidFill>
+                  <a:srgbClr val="121E31"/>
+                </a:solidFill>
+              </a:defRPr>
+            </a:pPr>
+            <a:r>
+              <a:t>Je leest hem af van je eigen bot</a:t>
+            </a:r>
+          </a:p>
+        </p:txBody>
+      </p:sp>
+      <p:pic>
+        <p:nvPicPr>
+          <p:cNvPr id="4" name="Picture 3" descr="wc8_regels.png"/>
+          <p:cNvPicPr>
+            <a:picLocks noChangeAspect="1"/>
+          </p:cNvPicPr>
+          <p:nvPr/>
+        </p:nvPicPr>
+        <p:blipFill>
+          <a:blip r:embed="rId2"/>
+          <a:stretch>
+            <a:fillRect/>
+          </a:stretch>
+        </p:blipFill>
+        <p:spPr>
+          <a:xfrm>
+            <a:off x="1660198" y="1600200"/>
+            <a:ext cx="8871299" cy="4572000"/>
+          </a:xfrm>
+          <a:prstGeom prst="rect">
+            <a:avLst/>
+          </a:prstGeom>
+        </p:spPr>
+      </p:pic>
+    </p:spTree>
+  </p:cSld>
+  <p:clrMapOvr>
+    <a:masterClrMapping/>
+  </p:clrMapOvr>
+</p:sld>
+</file>
+
+<file path=ppt/slides/slide17.xml><?xml version="1.0" encoding="utf-8"?>
+<p:sld xmlns:a="http://schemas.openxmlformats.org/drawingml/2006/main" xmlns:p="http://schemas.openxmlformats.org/presentationml/2006/main" xmlns:r="http://schemas.openxmlformats.org/officeDocument/2006/relationships">
+  <p:cSld>
+    <p:spTree>
+      <p:nvGrpSpPr>
+        <p:cNvPr id="1" name=""/>
+        <p:cNvGrpSpPr/>
+        <p:nvPr/>
+      </p:nvGrpSpPr>
+      <p:grpSpPr/>
+      <p:sp>
+        <p:nvSpPr>
+          <p:cNvPr id="2" name="Rectangle 1"/>
+          <p:cNvSpPr/>
+          <p:nvPr/>
+        </p:nvSpPr>
+        <p:spPr>
+          <a:xfrm>
+            <a:off x="0" y="0"/>
+            <a:ext cx="12191695" cy="6858000"/>
+          </a:xfrm>
+          <a:prstGeom prst="rect">
+            <a:avLst/>
+          </a:prstGeom>
+          <a:solidFill>
+            <a:srgbClr val="F8F9FA"/>
+          </a:solidFill>
+          <a:ln>
+            <a:noFill/>
+          </a:ln>
+          <a:effectLst/>
+        </p:spPr>
+        <p:style>
+          <a:lnRef idx="1">
+            <a:schemeClr val="accent1"/>
+          </a:lnRef>
+          <a:fillRef idx="3">
+            <a:schemeClr val="accent1"/>
+          </a:fillRef>
+          <a:effectRef idx="2">
+            <a:schemeClr val="accent1"/>
+          </a:effectRef>
+          <a:fontRef idx="minor">
+            <a:schemeClr val="lt1"/>
+          </a:fontRef>
+        </p:style>
+        <p:txBody>
+          <a:bodyPr rtlCol="0" anchor="ctr"/>
+          <a:lstStyle/>
+          <a:p>
+            <a:pPr algn="ctr"/>
+          </a:p>
+        </p:txBody>
+      </p:sp>
+      <p:sp>
+        <p:nvSpPr>
+          <p:cNvPr id="3" name="TextBox 2"/>
+          <p:cNvSpPr txBox="1"/>
+          <p:nvPr/>
+        </p:nvSpPr>
+        <p:spPr>
+          <a:xfrm>
+            <a:off x="731520" y="384048"/>
+            <a:ext cx="10698480" cy="1005840"/>
+          </a:xfrm>
+          <a:prstGeom prst="rect">
+            <a:avLst/>
+          </a:prstGeom>
+          <a:noFill/>
+        </p:spPr>
+        <p:txBody>
+          <a:bodyPr wrap="square">
+            <a:spAutoFit/>
+          </a:bodyPr>
+          <a:lstStyle/>
+          <a:p>
+            <a:pPr>
+              <a:defRPr sz="1000" b="1">
+                <a:solidFill>
+                  <a:srgbClr val="1B4D3E"/>
+                </a:solidFill>
+              </a:defRPr>
+            </a:pPr>
+            <a:r>
+              <a:t>SPOOR 2</a:t>
+            </a:r>
+          </a:p>
+          <a:p>
+            <a:pPr>
+              <a:spcBef>
+                <a:spcPts val="400"/>
+              </a:spcBef>
+              <a:defRPr sz="2400" b="1">
+                <a:solidFill>
+                  <a:srgbClr val="121E31"/>
+                </a:solidFill>
+              </a:defRPr>
+            </a:pPr>
+            <a:r>
+              <a:t>Laat je bot opschrijven wat hij doet</a:t>
             </a:r>
           </a:p>
         </p:txBody>
@@ -6298,107 +6330,169 @@
           <a:lstStyle/>
           <a:p>
             <a:pPr>
-              <a:defRPr sz="1400" b="1">
-                <a:solidFill>
-                  <a:srgbClr val="1B4D3E"/>
-                </a:solidFill>
-                <a:latin typeface="Consolas"/>
+              <a:defRPr sz="1500" b="1">
+                <a:solidFill>
+                  <a:srgbClr val="121E31"/>
+                </a:solidFill>
               </a:defRPr>
             </a:pPr>
             <a:r>
-              <a:t>schat_winkans(hand_met_kleur, bord=bord, tegenstanders=n)</a:t>
+              <a:t>Drie regels erbij, en je hebt data die niemand anders heeft:</a:t>
             </a:r>
           </a:p>
           <a:p>
             <a:pPr>
               <a:spcBef>
-                <a:spcPts val="600"/>
+                <a:spcPts val="1400"/>
               </a:spcBef>
               <a:defRPr sz="1300" b="0">
                 <a:solidFill>
                   <a:srgbClr val="121E31"/>
                 </a:solidFill>
+                <a:latin typeface="Consolas"/>
               </a:defRPr>
             </a:pPr>
             <a:r>
-              <a:t>De winkans verandert enorm met het bord en met het aantal tegenstanders. Dezelfde A-K: 38,5% preflop, 75,5% na de ene flop, 22,3% na de andere.</a:t>
+              <a:t>BESLISSINGEN = []</a:t>
             </a:r>
           </a:p>
           <a:p>
             <a:pPr>
               <a:spcBef>
-                <a:spcPts val="1800"/>
+                <a:spcPts val="200"/>
               </a:spcBef>
-              <a:defRPr sz="1400" b="1">
-                <a:solidFill>
-                  <a:srgbClr val="1B4D3E"/>
+              <a:defRPr sz="1300" b="0">
+                <a:solidFill>
+                  <a:srgbClr val="121E31"/>
                 </a:solidFill>
                 <a:latin typeface="Consolas"/>
               </a:defRPr>
             </a:pPr>
-            <a:r>
-              <a:t>beschrijf_hand(hand_met_kleur, bord)</a:t>
-            </a:r>
           </a:p>
           <a:p>
             <a:pPr>
               <a:spcBef>
-                <a:spcPts val="600"/>
+                <a:spcPts val="200"/>
               </a:spcBef>
               <a:defRPr sz="1300" b="0">
                 <a:solidFill>
-                  <a:srgbClr val="121E31"/>
-                </a:solidFill>
+                  <a:srgbClr val="505A64"/>
+                </a:solidFill>
+                <a:latin typeface="Consolas"/>
               </a:defRPr>
             </a:pPr>
             <a:r>
-              <a:t>Geeft terug wat je wérkelijk hebt: 'one pair', 'three of a kind', 'flush'. Daarmee kun je regels schrijven op handsóórt in plaats van op een percentage.</a:t>
+              <a:t>def kies_actie(hand, ..., ronde, pot, inzet_om_te_callen, ...):</a:t>
             </a:r>
           </a:p>
           <a:p>
             <a:pPr>
               <a:spcBef>
-                <a:spcPts val="1800"/>
+                <a:spcPts val="200"/>
               </a:spcBef>
-              <a:defRPr sz="1400" b="1">
-                <a:solidFill>
-                  <a:srgbClr val="1B4D3E"/>
+              <a:defRPr sz="1300" b="0">
+                <a:solidFill>
+                  <a:srgbClr val="505A64"/>
                 </a:solidFill>
                 <a:latin typeface="Consolas"/>
               </a:defRPr>
             </a:pPr>
             <a:r>
-              <a:t>vergelijk_handen(jouw_hand, andere_hand, bord)</a:t>
+              <a:t>    winkans = schat_winkans(...)</a:t>
             </a:r>
           </a:p>
           <a:p>
             <a:pPr>
               <a:spcBef>
-                <a:spcPts val="600"/>
+                <a:spcPts val="200"/>
               </a:spcBef>
               <a:defRPr sz="1300" b="0">
                 <a:solidFill>
-                  <a:srgbClr val="121E31"/>
-                </a:solidFill>
+                  <a:srgbClr val="505A64"/>
+                </a:solidFill>
+                <a:latin typeface="Consolas"/>
               </a:defRPr>
             </a:pPr>
             <a:r>
-              <a:t>Wie wint deze showdown? Zelfde evaluatie als het toernooi, dus inclusief kickers.</a:t>
+              <a:t>    ...</a:t>
             </a:r>
           </a:p>
           <a:p>
             <a:pPr>
               <a:spcBef>
-                <a:spcPts val="1800"/>
+                <a:spcPts val="200"/>
               </a:spcBef>
               <a:defRPr sz="1300" b="1">
                 <a:solidFill>
+                  <a:srgbClr val="1B4D3E"/>
+                </a:solidFill>
+                <a:latin typeface="Consolas"/>
+              </a:defRPr>
+            </a:pPr>
+            <a:r>
+              <a:t>    BESLISSINGEN.append({"ronde": ronde, "winkans": winkans,</a:t>
+            </a:r>
+          </a:p>
+          <a:p>
+            <a:pPr>
+              <a:spcBef>
+                <a:spcPts val="200"/>
+              </a:spcBef>
+              <a:defRPr sz="1300" b="1">
+                <a:solidFill>
+                  <a:srgbClr val="1B4D3E"/>
+                </a:solidFill>
+                <a:latin typeface="Consolas"/>
+              </a:defRPr>
+            </a:pPr>
+            <a:r>
+              <a:t>                         "pot": pot, "regel": "bluf", "actie": actie})</a:t>
+            </a:r>
+          </a:p>
+          <a:p>
+            <a:pPr>
+              <a:spcBef>
+                <a:spcPts val="200"/>
+              </a:spcBef>
+              <a:defRPr sz="1300" b="0">
+                <a:solidFill>
                   <a:srgbClr val="505A64"/>
                 </a:solidFill>
+                <a:latin typeface="Consolas"/>
               </a:defRPr>
             </a:pPr>
             <a:r>
-              <a:t>Alle drie staan in _hulpfuncties_week3.py. Je kent ze uit Werkcollege 5, en in week 5 heeft bijna niemand ze nog gebruikt.</a:t>
+              <a:t>    return actie</a:t>
+            </a:r>
+          </a:p>
+          <a:p>
+            <a:pPr>
+              <a:spcBef>
+                <a:spcPts val="1600"/>
+              </a:spcBef>
+              <a:defRPr sz="1300" b="0">
+                <a:solidFill>
+                  <a:srgbClr val="121E31"/>
+                </a:solidFill>
+              </a:defRPr>
+            </a:pPr>
+            <a:r>
+              <a:t>Daarna speel_duel() draaien en pd.DataFrame(BESLISSINGEN) analyseren. Nu kun je wél zien wat je winkans per straat was, hoe vaak je bluf-regel vuurde, en welke van je vijf regels de beslissing nam.</a:t>
+            </a:r>
+          </a:p>
+          <a:p>
+            <a:pPr>
+              <a:spcBef>
+                <a:spcPts val="1000"/>
+              </a:spcBef>
+              <a:defRPr sz="1300" b="1">
+                <a:solidFill>
+                  <a:srgbClr val="B3261E"/>
+                </a:solidFill>
+              </a:defRPr>
+            </a:pPr>
+            <a:r>
+              <a:t>Let op: dit doe je LOKAAL. In je inzending hoort geen logboek — daar telt alleen wat kies_actie teruggeeft.</a:t>
             </a:r>
           </a:p>
         </p:txBody>
@@ -6495,7 +6589,7 @@
               </a:defRPr>
             </a:pPr>
             <a:r>
-              <a:t>EN NU JIJ</a:t>
+              <a:t>SPOOR 3</a:t>
             </a:r>
           </a:p>
           <a:p>
@@ -6510,7 +6604,7 @@
               </a:defRPr>
             </a:pPr>
             <a:r>
-              <a:t>Verander één ding, en schrijf op waarom</a:t>
+              <a:t>Meer weten over je hand — dat kan gewoon</a:t>
             </a:r>
           </a:p>
         </p:txBody>
@@ -6586,44 +6680,15 @@
           <a:lstStyle/>
           <a:p>
             <a:pPr>
-              <a:defRPr sz="1800" b="1">
+              <a:defRPr sz="1400" b="1">
                 <a:solidFill>
                   <a:srgbClr val="1B4D3E"/>
                 </a:solidFill>
+                <a:latin typeface="Consolas"/>
               </a:defRPr>
             </a:pPr>
             <a:r>
-              <a:t>Eén ding. Niet drie.</a:t>
-            </a:r>
-          </a:p>
-          <a:p>
-            <a:pPr>
-              <a:spcBef>
-                <a:spcPts val="1000"/>
-              </a:spcBef>
-              <a:defRPr sz="1400" b="0">
-                <a:solidFill>
-                  <a:srgbClr val="121E31"/>
-                </a:solidFill>
-              </a:defRPr>
-            </a:pPr>
-            <a:r>
-              <a:t>Verander je er drie tegelijk en je bot wordt beter, dan weet je donderdag nog steeds niet welke van de drie het deed.</a:t>
-            </a:r>
-          </a:p>
-          <a:p>
-            <a:pPr>
-              <a:spcBef>
-                <a:spcPts val="1800"/>
-              </a:spcBef>
-              <a:defRPr sz="1500" b="1">
-                <a:solidFill>
-                  <a:srgbClr val="121E31"/>
-                </a:solidFill>
-              </a:defRPr>
-            </a:pPr>
-            <a:r>
-              <a:t>Kandidaten uit vanmiddag:</a:t>
+              <a:t>schat_winkans(hand_met_kleur, bord=bord, tegenstanders=n)</a:t>
             </a:r>
           </a:p>
           <a:p>
@@ -6631,63 +6696,14 @@
               <a:spcBef>
                 <a:spcPts val="600"/>
               </a:spcBef>
-              <a:defRPr sz="1400" b="0">
+              <a:defRPr sz="1300" b="0">
                 <a:solidFill>
                   <a:srgbClr val="121E31"/>
                 </a:solidFill>
-                <a:latin typeface="Consolas"/>
               </a:defRPr>
             </a:pPr>
             <a:r>
-              <a:t>een van je drempels — STERK, MEEDOEN, ZWAK</a:t>
-            </a:r>
-          </a:p>
-          <a:p>
-            <a:pPr>
-              <a:spcBef>
-                <a:spcPts val="400"/>
-              </a:spcBef>
-              <a:defRPr sz="1400" b="0">
-                <a:solidFill>
-                  <a:srgbClr val="121E31"/>
-                </a:solidFill>
-                <a:latin typeface="Consolas"/>
-              </a:defRPr>
-            </a:pPr>
-            <a:r>
-              <a:t>TEGENSTANDERS, want dat verschuift je hele schaal</a:t>
-            </a:r>
-          </a:p>
-          <a:p>
-            <a:pPr>
-              <a:spcBef>
-                <a:spcPts val="400"/>
-              </a:spcBef>
-              <a:defRPr sz="1400" b="0">
-                <a:solidFill>
-                  <a:srgbClr val="121E31"/>
-                </a:solidFill>
-                <a:latin typeface="Consolas"/>
-              </a:defRPr>
-            </a:pPr>
-            <a:r>
-              <a:t>de volgorde van je regels</a:t>
-            </a:r>
-          </a:p>
-          <a:p>
-            <a:pPr>
-              <a:spcBef>
-                <a:spcPts val="400"/>
-              </a:spcBef>
-              <a:defRPr sz="1400" b="0">
-                <a:solidFill>
-                  <a:srgbClr val="121E31"/>
-                </a:solidFill>
-                <a:latin typeface="Consolas"/>
-              </a:defRPr>
-            </a:pPr>
-            <a:r>
-              <a:t>een hand uit het snijpunt niet meer wegfolden</a:t>
+              <a:t>De winkans verandert enorm met het bord en met het aantal tegenstanders. Dezelfde A-K: 38,5% preflop, 75,5% na de ene flop, 22,3% na de andere.</a:t>
             </a:r>
           </a:p>
           <a:p>
@@ -6697,12 +6713,74 @@
               </a:spcBef>
               <a:defRPr sz="1400" b="1">
                 <a:solidFill>
-                  <a:srgbClr val="B3261E"/>
-                </a:solidFill>
+                  <a:srgbClr val="1B4D3E"/>
+                </a:solidFill>
+                <a:latin typeface="Consolas"/>
               </a:defRPr>
             </a:pPr>
             <a:r>
-              <a:t>Schrijf in een comment op WAT je veranderde en WELK getal van vanmiddag die keuze onderbouwt. Dat is ook je antwoord bij de overhoring van volgende week.</a:t>
+              <a:t>beschrijf_hand(hand_met_kleur, bord)</a:t>
+            </a:r>
+          </a:p>
+          <a:p>
+            <a:pPr>
+              <a:spcBef>
+                <a:spcPts val="600"/>
+              </a:spcBef>
+              <a:defRPr sz="1300" b="0">
+                <a:solidFill>
+                  <a:srgbClr val="121E31"/>
+                </a:solidFill>
+              </a:defRPr>
+            </a:pPr>
+            <a:r>
+              <a:t>Geeft terug wat je wérkelijk hebt: 'one pair', 'three of a kind', 'flush'. Daarmee kun je regels schrijven op handsóórt in plaats van op een percentage.</a:t>
+            </a:r>
+          </a:p>
+          <a:p>
+            <a:pPr>
+              <a:spcBef>
+                <a:spcPts val="1800"/>
+              </a:spcBef>
+              <a:defRPr sz="1400" b="1">
+                <a:solidFill>
+                  <a:srgbClr val="1B4D3E"/>
+                </a:solidFill>
+                <a:latin typeface="Consolas"/>
+              </a:defRPr>
+            </a:pPr>
+            <a:r>
+              <a:t>vergelijk_handen(jouw_hand, andere_hand, bord)</a:t>
+            </a:r>
+          </a:p>
+          <a:p>
+            <a:pPr>
+              <a:spcBef>
+                <a:spcPts val="600"/>
+              </a:spcBef>
+              <a:defRPr sz="1300" b="0">
+                <a:solidFill>
+                  <a:srgbClr val="121E31"/>
+                </a:solidFill>
+              </a:defRPr>
+            </a:pPr>
+            <a:r>
+              <a:t>Wie wint deze showdown? Zelfde evaluatie als het toernooi, dus inclusief kickers.</a:t>
+            </a:r>
+          </a:p>
+          <a:p>
+            <a:pPr>
+              <a:spcBef>
+                <a:spcPts val="1800"/>
+              </a:spcBef>
+              <a:defRPr sz="1300" b="1">
+                <a:solidFill>
+                  <a:srgbClr val="505A64"/>
+                </a:solidFill>
+              </a:defRPr>
+            </a:pPr>
+            <a:r>
+              <a:t>Alle drie staan in _hulpfuncties_week3.py. Je kent ze uit Werkcollege 5, en in week 5 heeft bijna niemand ze nog gebruikt.</a:t>
             </a:r>
           </a:p>
         </p:txBody>
@@ -6715,7 +6793,7 @@
 </p:sld>
 </file>
 
-<file path=ppt/slides/slide2.xml><?xml version="1.0" encoding="utf-8"?>
+<file path=ppt/slides/slide19.xml><?xml version="1.0" encoding="utf-8"?>
 <p:sld xmlns:a="http://schemas.openxmlformats.org/drawingml/2006/main" xmlns:p="http://schemas.openxmlformats.org/presentationml/2006/main" xmlns:r="http://schemas.openxmlformats.org/officeDocument/2006/relationships">
   <p:cSld>
     <p:spTree>
@@ -6799,7 +6877,7 @@
               </a:defRPr>
             </a:pPr>
             <a:r>
-              <a:t>DE DATASET</a:t>
+              <a:t>EN NU JIJ</a:t>
             </a:r>
           </a:p>
           <a:p>
@@ -6814,7 +6892,7 @@
               </a:defRPr>
             </a:pPr>
             <a:r>
-              <a:t>Wat je vandaag in handen hebt</a:t>
+              <a:t>Verander één ding, en schrijf op waarom</a:t>
             </a:r>
           </a:p>
         </p:txBody>
@@ -6890,14 +6968,14 @@
           <a:lstStyle/>
           <a:p>
             <a:pPr>
-              <a:defRPr sz="2000" b="1">
+              <a:defRPr sz="1800" b="1">
                 <a:solidFill>
                   <a:srgbClr val="1B4D3E"/>
                 </a:solidFill>
               </a:defRPr>
             </a:pPr>
             <a:r>
-              <a:t>30 bots  ·  20 simulaties  ·  24.000 regels</a:t>
+              <a:t>Eén ding. Niet drie.</a:t>
             </a:r>
           </a:p>
           <a:p>
@@ -6912,37 +6990,7 @@
               </a:defRPr>
             </a:pPr>
             <a:r>
-              <a:t>Daarvan 20.912 regels waarin een bot écht aan zet kwam.</a:t>
-            </a:r>
-          </a:p>
-          <a:p>
-            <a:pPr>
-              <a:spcBef>
-                <a:spcPts val="800"/>
-              </a:spcBef>
-              <a:defRPr sz="1400" b="0">
-                <a:solidFill>
-                  <a:srgbClr val="121E31"/>
-                </a:solidFill>
-              </a:defRPr>
-            </a:pPr>
-            <a:r>
-              <a:t>Per regel: welke bot, welke simulatie, welke hand, welke twee kaarten, welke actie, en zijn stack daarna.</a:t>
-            </a:r>
-          </a:p>
-          <a:p>
-            <a:pPr>
-              <a:spcBef>
-                <a:spcPts val="800"/>
-              </a:spcBef>
-              <a:defRPr sz="1400" b="0">
-                <a:solidFill>
-                  <a:srgbClr val="121E31"/>
-                </a:solidFill>
-              </a:defRPr>
-            </a:pPr>
-            <a:r>
-              <a:t>Die laatste twee samen geven je wat elke hand opleverde — en daarmee kun je alles hieronder uitrekenen.</a:t>
+              <a:t>Verander je er drie tegelijk en je bot wordt beter, dan weet je donderdag nog steeds niet welke van de drie het deed.</a:t>
             </a:r>
           </a:p>
           <a:p>
@@ -6952,12 +7000,91 @@
               </a:spcBef>
               <a:defRPr sz="1500" b="1">
                 <a:solidFill>
+                  <a:srgbClr val="121E31"/>
+                </a:solidFill>
+              </a:defRPr>
+            </a:pPr>
+            <a:r>
+              <a:t>Kandidaten uit vanmiddag:</a:t>
+            </a:r>
+          </a:p>
+          <a:p>
+            <a:pPr>
+              <a:spcBef>
+                <a:spcPts val="600"/>
+              </a:spcBef>
+              <a:defRPr sz="1400" b="0">
+                <a:solidFill>
+                  <a:srgbClr val="121E31"/>
+                </a:solidFill>
+                <a:latin typeface="Consolas"/>
+              </a:defRPr>
+            </a:pPr>
+            <a:r>
+              <a:t>een van je drempels — STERK, MEEDOEN, ZWAK</a:t>
+            </a:r>
+          </a:p>
+          <a:p>
+            <a:pPr>
+              <a:spcBef>
+                <a:spcPts val="400"/>
+              </a:spcBef>
+              <a:defRPr sz="1400" b="0">
+                <a:solidFill>
+                  <a:srgbClr val="121E31"/>
+                </a:solidFill>
+                <a:latin typeface="Consolas"/>
+              </a:defRPr>
+            </a:pPr>
+            <a:r>
+              <a:t>TEGENSTANDERS, want dat verschuift je hele schaal</a:t>
+            </a:r>
+          </a:p>
+          <a:p>
+            <a:pPr>
+              <a:spcBef>
+                <a:spcPts val="400"/>
+              </a:spcBef>
+              <a:defRPr sz="1400" b="0">
+                <a:solidFill>
+                  <a:srgbClr val="121E31"/>
+                </a:solidFill>
+                <a:latin typeface="Consolas"/>
+              </a:defRPr>
+            </a:pPr>
+            <a:r>
+              <a:t>de volgorde van je regels</a:t>
+            </a:r>
+          </a:p>
+          <a:p>
+            <a:pPr>
+              <a:spcBef>
+                <a:spcPts val="400"/>
+              </a:spcBef>
+              <a:defRPr sz="1400" b="0">
+                <a:solidFill>
+                  <a:srgbClr val="121E31"/>
+                </a:solidFill>
+                <a:latin typeface="Consolas"/>
+              </a:defRPr>
+            </a:pPr>
+            <a:r>
+              <a:t>een hand uit het snijpunt niet meer wegfolden</a:t>
+            </a:r>
+          </a:p>
+          <a:p>
+            <a:pPr>
+              <a:spcBef>
+                <a:spcPts val="1800"/>
+              </a:spcBef>
+              <a:defRPr sz="1400" b="1">
+                <a:solidFill>
                   <a:srgbClr val="B3261E"/>
                 </a:solidFill>
               </a:defRPr>
             </a:pPr>
             <a:r>
-              <a:t>Dit is geen oefendataset. Dit heeft de klas vanmorgen zelf gespeeld.</a:t>
+              <a:t>Schrijf in een comment op WAT je veranderde en WELK getal van vanmiddag die keuze onderbouwt. Dat is ook je antwoord bij de overhoring van volgende week.</a:t>
             </a:r>
           </a:p>
         </p:txBody>
@@ -6970,7 +7097,7 @@
 </p:sld>
 </file>
 
-<file path=ppt/slides/slide3.xml><?xml version="1.0" encoding="utf-8"?>
+<file path=ppt/slides/slide2.xml><?xml version="1.0" encoding="utf-8"?>
 <p:sld xmlns:a="http://schemas.openxmlformats.org/drawingml/2006/main" xmlns:p="http://schemas.openxmlformats.org/presentationml/2006/main" xmlns:r="http://schemas.openxmlformats.org/officeDocument/2006/relationships">
   <p:cSld>
     <p:spTree>
@@ -7054,7 +7181,7 @@
               </a:defRPr>
             </a:pPr>
             <a:r>
-              <a:t>TERUG NAAR VISUAL MAANDAG</a:t>
+              <a:t>DE UITSLAG</a:t>
             </a:r>
           </a:p>
           <a:p>
@@ -7069,7 +7196,143 @@
               </a:defRPr>
             </a:pPr>
             <a:r>
-              <a:t>Vijf dingen die je vandaag meteen nodig hebt</a:t>
+              <a:t>Wie pakt er een bonuspunt?</a:t>
+            </a:r>
+          </a:p>
+        </p:txBody>
+      </p:sp>
+      <p:pic>
+        <p:nvPicPr>
+          <p:cNvPr id="4" name="Picture 3" descr="wc8_uitslag.png"/>
+          <p:cNvPicPr>
+            <a:picLocks noChangeAspect="1"/>
+          </p:cNvPicPr>
+          <p:nvPr/>
+        </p:nvPicPr>
+        <p:blipFill>
+          <a:blip r:embed="rId2"/>
+          <a:stretch>
+            <a:fillRect/>
+          </a:stretch>
+        </p:blipFill>
+        <p:spPr>
+          <a:xfrm>
+            <a:off x="2233812" y="1600200"/>
+            <a:ext cx="7724071" cy="4572000"/>
+          </a:xfrm>
+          <a:prstGeom prst="rect">
+            <a:avLst/>
+          </a:prstGeom>
+        </p:spPr>
+      </p:pic>
+    </p:spTree>
+  </p:cSld>
+  <p:clrMapOvr>
+    <a:masterClrMapping/>
+  </p:clrMapOvr>
+</p:sld>
+</file>
+
+<file path=ppt/slides/slide3.xml><?xml version="1.0" encoding="utf-8"?>
+<p:sld xmlns:a="http://schemas.openxmlformats.org/drawingml/2006/main" xmlns:p="http://schemas.openxmlformats.org/presentationml/2006/main" xmlns:r="http://schemas.openxmlformats.org/officeDocument/2006/relationships">
+  <p:cSld>
+    <p:spTree>
+      <p:nvGrpSpPr>
+        <p:cNvPr id="1" name=""/>
+        <p:cNvGrpSpPr/>
+        <p:nvPr/>
+      </p:nvGrpSpPr>
+      <p:grpSpPr/>
+      <p:sp>
+        <p:nvSpPr>
+          <p:cNvPr id="2" name="Rectangle 1"/>
+          <p:cNvSpPr/>
+          <p:nvPr/>
+        </p:nvSpPr>
+        <p:spPr>
+          <a:xfrm>
+            <a:off x="0" y="0"/>
+            <a:ext cx="12191695" cy="6858000"/>
+          </a:xfrm>
+          <a:prstGeom prst="rect">
+            <a:avLst/>
+          </a:prstGeom>
+          <a:solidFill>
+            <a:srgbClr val="F8F9FA"/>
+          </a:solidFill>
+          <a:ln>
+            <a:noFill/>
+          </a:ln>
+          <a:effectLst/>
+        </p:spPr>
+        <p:style>
+          <a:lnRef idx="1">
+            <a:schemeClr val="accent1"/>
+          </a:lnRef>
+          <a:fillRef idx="3">
+            <a:schemeClr val="accent1"/>
+          </a:fillRef>
+          <a:effectRef idx="2">
+            <a:schemeClr val="accent1"/>
+          </a:effectRef>
+          <a:fontRef idx="minor">
+            <a:schemeClr val="lt1"/>
+          </a:fontRef>
+        </p:style>
+        <p:txBody>
+          <a:bodyPr rtlCol="0" anchor="ctr"/>
+          <a:lstStyle/>
+          <a:p>
+            <a:pPr algn="ctr"/>
+          </a:p>
+        </p:txBody>
+      </p:sp>
+      <p:sp>
+        <p:nvSpPr>
+          <p:cNvPr id="3" name="TextBox 2"/>
+          <p:cNvSpPr txBox="1"/>
+          <p:nvPr/>
+        </p:nvSpPr>
+        <p:spPr>
+          <a:xfrm>
+            <a:off x="731520" y="384048"/>
+            <a:ext cx="10698480" cy="1005840"/>
+          </a:xfrm>
+          <a:prstGeom prst="rect">
+            <a:avLst/>
+          </a:prstGeom>
+          <a:noFill/>
+        </p:spPr>
+        <p:txBody>
+          <a:bodyPr wrap="square">
+            <a:spAutoFit/>
+          </a:bodyPr>
+          <a:lstStyle/>
+          <a:p>
+            <a:pPr>
+              <a:defRPr sz="1000" b="1">
+                <a:solidFill>
+                  <a:srgbClr val="1B4D3E"/>
+                </a:solidFill>
+              </a:defRPr>
+            </a:pPr>
+            <a:r>
+              <a:t>DE DATASET</a:t>
+            </a:r>
+          </a:p>
+          <a:p>
+            <a:pPr>
+              <a:spcBef>
+                <a:spcPts val="400"/>
+              </a:spcBef>
+              <a:defRPr sz="2400" b="1">
+                <a:solidFill>
+                  <a:srgbClr val="121E31"/>
+                </a:solidFill>
+              </a:defRPr>
+            </a:pPr>
+            <a:r>
+              <a:t>Wat je vandaag in handen hebt</a:t>
             </a:r>
           </a:p>
         </p:txBody>
@@ -7145,109 +7408,74 @@
           <a:lstStyle/>
           <a:p>
             <a:pPr>
-              <a:defRPr sz="1500" b="0">
-                <a:solidFill>
-                  <a:srgbClr val="121E31"/>
-                </a:solidFill>
-                <a:latin typeface="Consolas"/>
+              <a:defRPr sz="2000" b="1">
+                <a:solidFill>
+                  <a:srgbClr val="1B4D3E"/>
+                </a:solidFill>
               </a:defRPr>
             </a:pPr>
             <a:r>
-              <a:t>1.  filteren        dertig bots in één plot is spaghetti</a:t>
+              <a:t>30 bots  ·  20 simulaties  ·  24.000 regels</a:t>
             </a:r>
           </a:p>
           <a:p>
             <a:pPr>
               <a:spcBef>
-                <a:spcPts val="600"/>
+                <a:spcPts val="1000"/>
               </a:spcBef>
-              <a:defRPr sz="1500" b="0">
+              <a:defRPr sz="1400" b="0">
                 <a:solidFill>
                   <a:srgbClr val="121E31"/>
                 </a:solidFill>
-                <a:latin typeface="Consolas"/>
               </a:defRPr>
             </a:pPr>
             <a:r>
-              <a:t>2.  uitlichten      jouw bot in kleur, de rest grijs</a:t>
+              <a:t>Daarvan 20.912 regels waarin een bot écht aan zet kwam.</a:t>
             </a:r>
           </a:p>
           <a:p>
             <a:pPr>
               <a:spcBef>
-                <a:spcPts val="600"/>
+                <a:spcPts val="800"/>
+              </a:spcBef>
+              <a:defRPr sz="1400" b="0">
+                <a:solidFill>
+                  <a:srgbClr val="121E31"/>
+                </a:solidFill>
+              </a:defRPr>
+            </a:pPr>
+            <a:r>
+              <a:t>Per regel: welke bot, welke simulatie, welke hand, welke twee kaarten, welke actie, en zijn stack daarna.</a:t>
+            </a:r>
+          </a:p>
+          <a:p>
+            <a:pPr>
+              <a:spcBef>
+                <a:spcPts val="800"/>
+              </a:spcBef>
+              <a:defRPr sz="1400" b="0">
+                <a:solidFill>
+                  <a:srgbClr val="121E31"/>
+                </a:solidFill>
+              </a:defRPr>
+            </a:pPr>
+            <a:r>
+              <a:t>Die laatste twee samen geven je wat elke hand opleverde — en daarmee kun je alles hieronder uitrekenen.</a:t>
+            </a:r>
+          </a:p>
+          <a:p>
+            <a:pPr>
+              <a:spcBef>
+                <a:spcPts val="1800"/>
               </a:spcBef>
               <a:defRPr sz="1500" b="1">
                 <a:solidFill>
-                  <a:srgbClr val="1B4D3E"/>
-                </a:solidFill>
-                <a:latin typeface="Consolas"/>
+                  <a:srgbClr val="B3261E"/>
+                </a:solidFill>
               </a:defRPr>
             </a:pPr>
             <a:r>
-              <a:t>3.  actietitel      beweer iets, benoem niet alleen</a:t>
-            </a:r>
-          </a:p>
-          <a:p>
-            <a:pPr>
-              <a:spcBef>
-                <a:spcPts val="600"/>
-              </a:spcBef>
-              <a:defRPr sz="1500" b="0">
-                <a:solidFill>
-                  <a:srgbClr val="121E31"/>
-                </a:solidFill>
-                <a:latin typeface="Consolas"/>
-              </a:defRPr>
-            </a:pPr>
-            <a:r>
-              <a:t>4.  annoteren       waar gebeurt het? zet er een streep bij</a:t>
-            </a:r>
-          </a:p>
-          <a:p>
-            <a:pPr>
-              <a:spcBef>
-                <a:spcPts val="600"/>
-              </a:spcBef>
-              <a:defRPr sz="1500" b="0">
-                <a:solidFill>
-                  <a:srgbClr val="121E31"/>
-                </a:solidFill>
-                <a:latin typeface="Consolas"/>
-              </a:defRPr>
-            </a:pPr>
-            <a:r>
-              <a:t>5.  contrast-check  leest je kleur ook voor de rest van de klas?</a:t>
-            </a:r>
-          </a:p>
-          <a:p>
-            <a:pPr>
-              <a:spcBef>
-                <a:spcPts val="2000"/>
-              </a:spcBef>
-              <a:defRPr sz="1300" b="0">
-                <a:solidFill>
-                  <a:srgbClr val="505A64"/>
-                </a:solidFill>
-              </a:defRPr>
-            </a:pPr>
-            <a:r>
-              <a:t>Alles wat hierna komt is daarop gebouwd. De kleurschalen lopen van blauw naar groen en niet van rood naar groen, omdat rood en groen voor een deel van je klasgenoten bijna dezelfde kleur zijn.</a:t>
-            </a:r>
-          </a:p>
-          <a:p>
-            <a:pPr>
-              <a:spcBef>
-                <a:spcPts val="1200"/>
-              </a:spcBef>
-              <a:defRPr sz="1400" b="1">
-                <a:solidFill>
-                  <a:srgbClr val="121E31"/>
-                </a:solidFill>
-              </a:defRPr>
-            </a:pPr>
-            <a:r>
-              <a:t>Dat is geen detail. Dat is Werkcollege 6, Deel 6 — nu op jullie eigen data.</a:t>
+              <a:t>Dit is geen oefendataset. Dit heeft de klas vanmorgen zelf gespeeld.</a:t>
             </a:r>
           </a:p>
         </p:txBody>
@@ -7344,7 +7572,7 @@
               </a:defRPr>
             </a:pPr>
             <a:r>
-              <a:t>3.2 · DE KLAS</a:t>
+              <a:t>TERUG NAAR VISUAL MAANDAG</a:t>
             </a:r>
           </a:p>
           <a:p>
@@ -7359,687 +7587,7 @@
               </a:defRPr>
             </a:pPr>
             <a:r>
-              <a:t>Twee op de drie beslissingen is een fold</a:t>
-            </a:r>
-          </a:p>
-        </p:txBody>
-      </p:sp>
-      <p:pic>
-        <p:nvPicPr>
-          <p:cNvPr id="4" name="Picture 3" descr="wc8_acties.png"/>
-          <p:cNvPicPr>
-            <a:picLocks noChangeAspect="1"/>
-          </p:cNvPicPr>
-          <p:nvPr/>
-        </p:nvPicPr>
-        <p:blipFill>
-          <a:blip r:embed="rId2"/>
-          <a:stretch>
-            <a:fillRect/>
-          </a:stretch>
-        </p:blipFill>
-        <p:spPr>
-          <a:xfrm>
-            <a:off x="901873" y="1600200"/>
-            <a:ext cx="10387949" cy="4572000"/>
-          </a:xfrm>
-          <a:prstGeom prst="rect">
-            <a:avLst/>
-          </a:prstGeom>
-        </p:spPr>
-      </p:pic>
-    </p:spTree>
-  </p:cSld>
-  <p:clrMapOvr>
-    <a:masterClrMapping/>
-  </p:clrMapOvr>
-</p:sld>
-</file>
-
-<file path=ppt/slides/slide5.xml><?xml version="1.0" encoding="utf-8"?>
-<p:sld xmlns:a="http://schemas.openxmlformats.org/drawingml/2006/main" xmlns:p="http://schemas.openxmlformats.org/presentationml/2006/main" xmlns:r="http://schemas.openxmlformats.org/officeDocument/2006/relationships">
-  <p:cSld>
-    <p:spTree>
-      <p:nvGrpSpPr>
-        <p:cNvPr id="1" name=""/>
-        <p:cNvGrpSpPr/>
-        <p:nvPr/>
-      </p:nvGrpSpPr>
-      <p:grpSpPr/>
-      <p:sp>
-        <p:nvSpPr>
-          <p:cNvPr id="2" name="Rectangle 1"/>
-          <p:cNvSpPr/>
-          <p:nvPr/>
-        </p:nvSpPr>
-        <p:spPr>
-          <a:xfrm>
-            <a:off x="0" y="0"/>
-            <a:ext cx="12191695" cy="6858000"/>
-          </a:xfrm>
-          <a:prstGeom prst="rect">
-            <a:avLst/>
-          </a:prstGeom>
-          <a:solidFill>
-            <a:srgbClr val="F8F9FA"/>
-          </a:solidFill>
-          <a:ln>
-            <a:noFill/>
-          </a:ln>
-          <a:effectLst/>
-        </p:spPr>
-        <p:style>
-          <a:lnRef idx="1">
-            <a:schemeClr val="accent1"/>
-          </a:lnRef>
-          <a:fillRef idx="3">
-            <a:schemeClr val="accent1"/>
-          </a:fillRef>
-          <a:effectRef idx="2">
-            <a:schemeClr val="accent1"/>
-          </a:effectRef>
-          <a:fontRef idx="minor">
-            <a:schemeClr val="lt1"/>
-          </a:fontRef>
-        </p:style>
-        <p:txBody>
-          <a:bodyPr rtlCol="0" anchor="ctr"/>
-          <a:lstStyle/>
-          <a:p>
-            <a:pPr algn="ctr"/>
-          </a:p>
-        </p:txBody>
-      </p:sp>
-      <p:sp>
-        <p:nvSpPr>
-          <p:cNvPr id="3" name="TextBox 2"/>
-          <p:cNvSpPr txBox="1"/>
-          <p:nvPr/>
-        </p:nvSpPr>
-        <p:spPr>
-          <a:xfrm>
-            <a:off x="731520" y="384048"/>
-            <a:ext cx="10698480" cy="1005840"/>
-          </a:xfrm>
-          <a:prstGeom prst="rect">
-            <a:avLst/>
-          </a:prstGeom>
-          <a:noFill/>
-        </p:spPr>
-        <p:txBody>
-          <a:bodyPr wrap="square">
-            <a:spAutoFit/>
-          </a:bodyPr>
-          <a:lstStyle/>
-          <a:p>
-            <a:pPr>
-              <a:defRPr sz="1000" b="1">
-                <a:solidFill>
-                  <a:srgbClr val="1B4D3E"/>
-                </a:solidFill>
-              </a:defRPr>
-            </a:pPr>
-            <a:r>
-              <a:t>3.2 · EN JIJ?</a:t>
-            </a:r>
-          </a:p>
-          <a:p>
-            <a:pPr>
-              <a:spcBef>
-                <a:spcPts val="400"/>
-              </a:spcBef>
-              <a:defRPr sz="2400" b="1">
-                <a:solidFill>
-                  <a:srgbClr val="121E31"/>
-                </a:solidFill>
-              </a:defRPr>
-            </a:pPr>
-            <a:r>
-              <a:t>Waar sta jij in die verdeling?</a:t>
-            </a:r>
-          </a:p>
-        </p:txBody>
-      </p:sp>
-      <p:pic>
-        <p:nvPicPr>
-          <p:cNvPr id="4" name="Picture 3" descr="wc8_foldverdeling.png"/>
-          <p:cNvPicPr>
-            <a:picLocks noChangeAspect="1"/>
-          </p:cNvPicPr>
-          <p:nvPr/>
-        </p:nvPicPr>
-        <p:blipFill>
-          <a:blip r:embed="rId2"/>
-          <a:stretch>
-            <a:fillRect/>
-          </a:stretch>
-        </p:blipFill>
-        <p:spPr>
-          <a:xfrm>
-            <a:off x="1848403" y="1600200"/>
-            <a:ext cx="8494889" cy="4572000"/>
-          </a:xfrm>
-          <a:prstGeom prst="rect">
-            <a:avLst/>
-          </a:prstGeom>
-        </p:spPr>
-      </p:pic>
-    </p:spTree>
-  </p:cSld>
-  <p:clrMapOvr>
-    <a:masterClrMapping/>
-  </p:clrMapOvr>
-</p:sld>
-</file>
-
-<file path=ppt/slides/slide6.xml><?xml version="1.0" encoding="utf-8"?>
-<p:sld xmlns:a="http://schemas.openxmlformats.org/drawingml/2006/main" xmlns:p="http://schemas.openxmlformats.org/presentationml/2006/main" xmlns:r="http://schemas.openxmlformats.org/officeDocument/2006/relationships">
-  <p:cSld>
-    <p:spTree>
-      <p:nvGrpSpPr>
-        <p:cNvPr id="1" name=""/>
-        <p:cNvGrpSpPr/>
-        <p:nvPr/>
-      </p:nvGrpSpPr>
-      <p:grpSpPr/>
-      <p:sp>
-        <p:nvSpPr>
-          <p:cNvPr id="2" name="Rectangle 1"/>
-          <p:cNvSpPr/>
-          <p:nvPr/>
-        </p:nvSpPr>
-        <p:spPr>
-          <a:xfrm>
-            <a:off x="0" y="0"/>
-            <a:ext cx="12191695" cy="6858000"/>
-          </a:xfrm>
-          <a:prstGeom prst="rect">
-            <a:avLst/>
-          </a:prstGeom>
-          <a:solidFill>
-            <a:srgbClr val="F8F9FA"/>
-          </a:solidFill>
-          <a:ln>
-            <a:noFill/>
-          </a:ln>
-          <a:effectLst/>
-        </p:spPr>
-        <p:style>
-          <a:lnRef idx="1">
-            <a:schemeClr val="accent1"/>
-          </a:lnRef>
-          <a:fillRef idx="3">
-            <a:schemeClr val="accent1"/>
-          </a:fillRef>
-          <a:effectRef idx="2">
-            <a:schemeClr val="accent1"/>
-          </a:effectRef>
-          <a:fontRef idx="minor">
-            <a:schemeClr val="lt1"/>
-          </a:fontRef>
-        </p:style>
-        <p:txBody>
-          <a:bodyPr rtlCol="0" anchor="ctr"/>
-          <a:lstStyle/>
-          <a:p>
-            <a:pPr algn="ctr"/>
-          </a:p>
-        </p:txBody>
-      </p:sp>
-      <p:sp>
-        <p:nvSpPr>
-          <p:cNvPr id="3" name="TextBox 2"/>
-          <p:cNvSpPr txBox="1"/>
-          <p:nvPr/>
-        </p:nvSpPr>
-        <p:spPr>
-          <a:xfrm>
-            <a:off x="731520" y="384048"/>
-            <a:ext cx="10698480" cy="1005840"/>
-          </a:xfrm>
-          <a:prstGeom prst="rect">
-            <a:avLst/>
-          </a:prstGeom>
-          <a:noFill/>
-        </p:spPr>
-        <p:txBody>
-          <a:bodyPr wrap="square">
-            <a:spAutoFit/>
-          </a:bodyPr>
-          <a:lstStyle/>
-          <a:p>
-            <a:pPr>
-              <a:defRPr sz="1000" b="1">
-                <a:solidFill>
-                  <a:srgbClr val="1B4D3E"/>
-                </a:solidFill>
-              </a:defRPr>
-            </a:pPr>
-            <a:r>
-              <a:t>DE VERRASSING</a:t>
-            </a:r>
-          </a:p>
-          <a:p>
-            <a:pPr>
-              <a:spcBef>
-                <a:spcPts val="400"/>
-              </a:spcBef>
-              <a:defRPr sz="2400" b="1">
-                <a:solidFill>
-                  <a:srgbClr val="121E31"/>
-                </a:solidFill>
-              </a:defRPr>
-            </a:pPr>
-            <a:r>
-              <a:t>Defensief spelen wérkt hier   ·   r = +0,45</a:t>
-            </a:r>
-          </a:p>
-        </p:txBody>
-      </p:sp>
-      <p:pic>
-        <p:nvPicPr>
-          <p:cNvPr id="4" name="Picture 3" descr="wc8_fold_vs_eindstand.png"/>
-          <p:cNvPicPr>
-            <a:picLocks noChangeAspect="1"/>
-          </p:cNvPicPr>
-          <p:nvPr/>
-        </p:nvPicPr>
-        <p:blipFill>
-          <a:blip r:embed="rId2"/>
-          <a:stretch>
-            <a:fillRect/>
-          </a:stretch>
-        </p:blipFill>
-        <p:spPr>
-          <a:xfrm>
-            <a:off x="1999178" y="1600200"/>
-            <a:ext cx="8193338" cy="4572000"/>
-          </a:xfrm>
-          <a:prstGeom prst="rect">
-            <a:avLst/>
-          </a:prstGeom>
-        </p:spPr>
-      </p:pic>
-    </p:spTree>
-  </p:cSld>
-  <p:clrMapOvr>
-    <a:masterClrMapping/>
-  </p:clrMapOvr>
-</p:sld>
-</file>
-
-<file path=ppt/slides/slide7.xml><?xml version="1.0" encoding="utf-8"?>
-<p:sld xmlns:a="http://schemas.openxmlformats.org/drawingml/2006/main" xmlns:p="http://schemas.openxmlformats.org/presentationml/2006/main" xmlns:r="http://schemas.openxmlformats.org/officeDocument/2006/relationships">
-  <p:cSld>
-    <p:spTree>
-      <p:nvGrpSpPr>
-        <p:cNvPr id="1" name=""/>
-        <p:cNvGrpSpPr/>
-        <p:nvPr/>
-      </p:nvGrpSpPr>
-      <p:grpSpPr/>
-      <p:sp>
-        <p:nvSpPr>
-          <p:cNvPr id="2" name="Rectangle 1"/>
-          <p:cNvSpPr/>
-          <p:nvPr/>
-        </p:nvSpPr>
-        <p:spPr>
-          <a:xfrm>
-            <a:off x="0" y="0"/>
-            <a:ext cx="12191695" cy="6858000"/>
-          </a:xfrm>
-          <a:prstGeom prst="rect">
-            <a:avLst/>
-          </a:prstGeom>
-          <a:solidFill>
-            <a:srgbClr val="F8F9FA"/>
-          </a:solidFill>
-          <a:ln>
-            <a:noFill/>
-          </a:ln>
-          <a:effectLst/>
-        </p:spPr>
-        <p:style>
-          <a:lnRef idx="1">
-            <a:schemeClr val="accent1"/>
-          </a:lnRef>
-          <a:fillRef idx="3">
-            <a:schemeClr val="accent1"/>
-          </a:fillRef>
-          <a:effectRef idx="2">
-            <a:schemeClr val="accent1"/>
-          </a:effectRef>
-          <a:fontRef idx="minor">
-            <a:schemeClr val="lt1"/>
-          </a:fontRef>
-        </p:style>
-        <p:txBody>
-          <a:bodyPr rtlCol="0" anchor="ctr"/>
-          <a:lstStyle/>
-          <a:p>
-            <a:pPr algn="ctr"/>
-          </a:p>
-        </p:txBody>
-      </p:sp>
-      <p:sp>
-        <p:nvSpPr>
-          <p:cNvPr id="3" name="TextBox 2"/>
-          <p:cNvSpPr txBox="1"/>
-          <p:nvPr/>
-        </p:nvSpPr>
-        <p:spPr>
-          <a:xfrm>
-            <a:off x="731520" y="384048"/>
-            <a:ext cx="10698480" cy="1005840"/>
-          </a:xfrm>
-          <a:prstGeom prst="rect">
-            <a:avLst/>
-          </a:prstGeom>
-          <a:noFill/>
-        </p:spPr>
-        <p:txBody>
-          <a:bodyPr wrap="square">
-            <a:spAutoFit/>
-          </a:bodyPr>
-          <a:lstStyle/>
-          <a:p>
-            <a:pPr>
-              <a:defRPr sz="1000" b="1">
-                <a:solidFill>
-                  <a:srgbClr val="1B4D3E"/>
-                </a:solidFill>
-              </a:defRPr>
-            </a:pPr>
-            <a:r>
-              <a:t>3.3 · GEDRAG LEZEN</a:t>
-            </a:r>
-          </a:p>
-          <a:p>
-            <a:pPr>
-              <a:spcBef>
-                <a:spcPts val="400"/>
-              </a:spcBef>
-              <a:defRPr sz="2400" b="1">
-                <a:solidFill>
-                  <a:srgbClr val="121E31"/>
-                </a:solidFill>
-              </a:defRPr>
-            </a:pPr>
-            <a:r>
-              <a:t>De drempels van de klas, zonder één regel code te zien</a:t>
-            </a:r>
-          </a:p>
-        </p:txBody>
-      </p:sp>
-      <p:pic>
-        <p:nvPicPr>
-          <p:cNvPr id="4" name="Picture 3" descr="wc8_matrix_fold.png"/>
-          <p:cNvPicPr>
-            <a:picLocks noChangeAspect="1"/>
-          </p:cNvPicPr>
-          <p:nvPr/>
-        </p:nvPicPr>
-        <p:blipFill>
-          <a:blip r:embed="rId2"/>
-          <a:stretch>
-            <a:fillRect/>
-          </a:stretch>
-        </p:blipFill>
-        <p:spPr>
-          <a:xfrm>
-            <a:off x="2855625" y="1600200"/>
-            <a:ext cx="6480444" cy="4572000"/>
-          </a:xfrm>
-          <a:prstGeom prst="rect">
-            <a:avLst/>
-          </a:prstGeom>
-        </p:spPr>
-      </p:pic>
-    </p:spTree>
-  </p:cSld>
-  <p:clrMapOvr>
-    <a:masterClrMapping/>
-  </p:clrMapOvr>
-</p:sld>
-</file>
-
-<file path=ppt/slides/slide8.xml><?xml version="1.0" encoding="utf-8"?>
-<p:sld xmlns:a="http://schemas.openxmlformats.org/drawingml/2006/main" xmlns:p="http://schemas.openxmlformats.org/presentationml/2006/main" xmlns:r="http://schemas.openxmlformats.org/officeDocument/2006/relationships">
-  <p:cSld>
-    <p:spTree>
-      <p:nvGrpSpPr>
-        <p:cNvPr id="1" name=""/>
-        <p:cNvGrpSpPr/>
-        <p:nvPr/>
-      </p:nvGrpSpPr>
-      <p:grpSpPr/>
-      <p:sp>
-        <p:nvSpPr>
-          <p:cNvPr id="2" name="Rectangle 1"/>
-          <p:cNvSpPr/>
-          <p:nvPr/>
-        </p:nvSpPr>
-        <p:spPr>
-          <a:xfrm>
-            <a:off x="0" y="0"/>
-            <a:ext cx="12191695" cy="6858000"/>
-          </a:xfrm>
-          <a:prstGeom prst="rect">
-            <a:avLst/>
-          </a:prstGeom>
-          <a:solidFill>
-            <a:srgbClr val="F8F9FA"/>
-          </a:solidFill>
-          <a:ln>
-            <a:noFill/>
-          </a:ln>
-          <a:effectLst/>
-        </p:spPr>
-        <p:style>
-          <a:lnRef idx="1">
-            <a:schemeClr val="accent1"/>
-          </a:lnRef>
-          <a:fillRef idx="3">
-            <a:schemeClr val="accent1"/>
-          </a:fillRef>
-          <a:effectRef idx="2">
-            <a:schemeClr val="accent1"/>
-          </a:effectRef>
-          <a:fontRef idx="minor">
-            <a:schemeClr val="lt1"/>
-          </a:fontRef>
-        </p:style>
-        <p:txBody>
-          <a:bodyPr rtlCol="0" anchor="ctr"/>
-          <a:lstStyle/>
-          <a:p>
-            <a:pPr algn="ctr"/>
-          </a:p>
-        </p:txBody>
-      </p:sp>
-      <p:sp>
-        <p:nvSpPr>
-          <p:cNvPr id="3" name="TextBox 2"/>
-          <p:cNvSpPr txBox="1"/>
-          <p:nvPr/>
-        </p:nvSpPr>
-        <p:spPr>
-          <a:xfrm>
-            <a:off x="731520" y="384048"/>
-            <a:ext cx="10698480" cy="1005840"/>
-          </a:xfrm>
-          <a:prstGeom prst="rect">
-            <a:avLst/>
-          </a:prstGeom>
-          <a:noFill/>
-        </p:spPr>
-        <p:txBody>
-          <a:bodyPr wrap="square">
-            <a:spAutoFit/>
-          </a:bodyPr>
-          <a:lstStyle/>
-          <a:p>
-            <a:pPr>
-              <a:defRPr sz="1000" b="1">
-                <a:solidFill>
-                  <a:srgbClr val="1B4D3E"/>
-                </a:solidFill>
-              </a:defRPr>
-            </a:pPr>
-            <a:r>
-              <a:t>3.4 · EN WAT LEVERDE OP?</a:t>
-            </a:r>
-          </a:p>
-          <a:p>
-            <a:pPr>
-              <a:spcBef>
-                <a:spcPts val="400"/>
-              </a:spcBef>
-              <a:defRPr sz="2400" b="1">
-                <a:solidFill>
-                  <a:srgbClr val="121E31"/>
-                </a:solidFill>
-              </a:defRPr>
-            </a:pPr>
-            <a:r>
-              <a:t>Dezelfde 91 handen, nu op geld</a:t>
-            </a:r>
-          </a:p>
-        </p:txBody>
-      </p:sp>
-      <p:pic>
-        <p:nvPicPr>
-          <p:cNvPr id="4" name="Picture 3" descr="wc8_matrix_winst.png"/>
-          <p:cNvPicPr>
-            <a:picLocks noChangeAspect="1"/>
-          </p:cNvPicPr>
-          <p:nvPr/>
-        </p:nvPicPr>
-        <p:blipFill>
-          <a:blip r:embed="rId2"/>
-          <a:stretch>
-            <a:fillRect/>
-          </a:stretch>
-        </p:blipFill>
-        <p:spPr>
-          <a:xfrm>
-            <a:off x="3657698" y="1600200"/>
-            <a:ext cx="4876299" cy="4572000"/>
-          </a:xfrm>
-          <a:prstGeom prst="rect">
-            <a:avLst/>
-          </a:prstGeom>
-        </p:spPr>
-      </p:pic>
-    </p:spTree>
-  </p:cSld>
-  <p:clrMapOvr>
-    <a:masterClrMapping/>
-  </p:clrMapOvr>
-</p:sld>
-</file>
-
-<file path=ppt/slides/slide9.xml><?xml version="1.0" encoding="utf-8"?>
-<p:sld xmlns:a="http://schemas.openxmlformats.org/drawingml/2006/main" xmlns:p="http://schemas.openxmlformats.org/presentationml/2006/main" xmlns:r="http://schemas.openxmlformats.org/officeDocument/2006/relationships">
-  <p:cSld>
-    <p:spTree>
-      <p:nvGrpSpPr>
-        <p:cNvPr id="1" name=""/>
-        <p:cNvGrpSpPr/>
-        <p:nvPr/>
-      </p:nvGrpSpPr>
-      <p:grpSpPr/>
-      <p:sp>
-        <p:nvSpPr>
-          <p:cNvPr id="2" name="Rectangle 1"/>
-          <p:cNvSpPr/>
-          <p:nvPr/>
-        </p:nvSpPr>
-        <p:spPr>
-          <a:xfrm>
-            <a:off x="0" y="0"/>
-            <a:ext cx="12191695" cy="6858000"/>
-          </a:xfrm>
-          <a:prstGeom prst="rect">
-            <a:avLst/>
-          </a:prstGeom>
-          <a:solidFill>
-            <a:srgbClr val="F8F9FA"/>
-          </a:solidFill>
-          <a:ln>
-            <a:noFill/>
-          </a:ln>
-          <a:effectLst/>
-        </p:spPr>
-        <p:style>
-          <a:lnRef idx="1">
-            <a:schemeClr val="accent1"/>
-          </a:lnRef>
-          <a:fillRef idx="3">
-            <a:schemeClr val="accent1"/>
-          </a:fillRef>
-          <a:effectRef idx="2">
-            <a:schemeClr val="accent1"/>
-          </a:effectRef>
-          <a:fontRef idx="minor">
-            <a:schemeClr val="lt1"/>
-          </a:fontRef>
-        </p:style>
-        <p:txBody>
-          <a:bodyPr rtlCol="0" anchor="ctr"/>
-          <a:lstStyle/>
-          <a:p>
-            <a:pPr algn="ctr"/>
-          </a:p>
-        </p:txBody>
-      </p:sp>
-      <p:sp>
-        <p:nvSpPr>
-          <p:cNvPr id="3" name="TextBox 2"/>
-          <p:cNvSpPr txBox="1"/>
-          <p:nvPr/>
-        </p:nvSpPr>
-        <p:spPr>
-          <a:xfrm>
-            <a:off x="731520" y="384048"/>
-            <a:ext cx="10698480" cy="1005840"/>
-          </a:xfrm>
-          <a:prstGeom prst="rect">
-            <a:avLst/>
-          </a:prstGeom>
-          <a:noFill/>
-        </p:spPr>
-        <p:txBody>
-          <a:bodyPr wrap="square">
-            <a:spAutoFit/>
-          </a:bodyPr>
-          <a:lstStyle/>
-          <a:p>
-            <a:pPr>
-              <a:defRPr sz="1000" b="1">
-                <a:solidFill>
-                  <a:srgbClr val="1B4D3E"/>
-                </a:solidFill>
-              </a:defRPr>
-            </a:pPr>
-            <a:r>
-              <a:t>HET SNIJPUNT</a:t>
-            </a:r>
-          </a:p>
-          <a:p>
-            <a:pPr>
-              <a:spcBef>
-                <a:spcPts val="400"/>
-              </a:spcBef>
-              <a:defRPr sz="2400" b="1">
-                <a:solidFill>
-                  <a:srgbClr val="121E31"/>
-                </a:solidFill>
-              </a:defRPr>
-            </a:pPr>
-            <a:r>
-              <a:t>Weggegooid, en toch winstgevend</a:t>
+              <a:t>Vijf dingen die je vandaag meteen nodig hebt</a:t>
             </a:r>
           </a:p>
         </p:txBody>
@@ -8115,10 +7663,23 @@
           <a:lstStyle/>
           <a:p>
             <a:pPr>
+              <a:defRPr sz="1500" b="0">
+                <a:solidFill>
+                  <a:srgbClr val="121E31"/>
+                </a:solidFill>
+                <a:latin typeface="Consolas"/>
+              </a:defRPr>
+            </a:pPr>
+            <a:r>
+              <a:t>1.  filteren        dertig bots in één plot is spaghetti</a:t>
+            </a:r>
+          </a:p>
+          <a:p>
+            <a:pPr>
               <a:spcBef>
-                <a:spcPts val="400"/>
+                <a:spcPts val="600"/>
               </a:spcBef>
-              <a:defRPr sz="1400" b="0">
+              <a:defRPr sz="1500" b="0">
                 <a:solidFill>
                   <a:srgbClr val="121E31"/>
                 </a:solidFill>
@@ -8126,7 +7687,182 @@
               </a:defRPr>
             </a:pPr>
             <a:r>
-              <a:t>2-2       97x gespeeld    64% gefold    gemiddeld +33 chips</a:t>
+              <a:t>2.  uitlichten      jouw bot in kleur, de rest grijs</a:t>
+            </a:r>
+          </a:p>
+          <a:p>
+            <a:pPr>
+              <a:spcBef>
+                <a:spcPts val="600"/>
+              </a:spcBef>
+              <a:defRPr sz="1500" b="1">
+                <a:solidFill>
+                  <a:srgbClr val="1B4D3E"/>
+                </a:solidFill>
+                <a:latin typeface="Consolas"/>
+              </a:defRPr>
+            </a:pPr>
+            <a:r>
+              <a:t>3.  actietitel      beweer iets, benoem niet alleen</a:t>
+            </a:r>
+          </a:p>
+          <a:p>
+            <a:pPr>
+              <a:spcBef>
+                <a:spcPts val="600"/>
+              </a:spcBef>
+              <a:defRPr sz="1500" b="0">
+                <a:solidFill>
+                  <a:srgbClr val="121E31"/>
+                </a:solidFill>
+                <a:latin typeface="Consolas"/>
+              </a:defRPr>
+            </a:pPr>
+            <a:r>
+              <a:t>4.  annoteren       waar gebeurt het? zet er een streep bij</a:t>
+            </a:r>
+          </a:p>
+          <a:p>
+            <a:pPr>
+              <a:spcBef>
+                <a:spcPts val="600"/>
+              </a:spcBef>
+              <a:defRPr sz="1500" b="0">
+                <a:solidFill>
+                  <a:srgbClr val="121E31"/>
+                </a:solidFill>
+                <a:latin typeface="Consolas"/>
+              </a:defRPr>
+            </a:pPr>
+            <a:r>
+              <a:t>5.  contrast-check  leest je kleur ook voor de rest van de klas?</a:t>
+            </a:r>
+          </a:p>
+          <a:p>
+            <a:pPr>
+              <a:spcBef>
+                <a:spcPts val="2000"/>
+              </a:spcBef>
+              <a:defRPr sz="1300" b="0">
+                <a:solidFill>
+                  <a:srgbClr val="505A64"/>
+                </a:solidFill>
+              </a:defRPr>
+            </a:pPr>
+            <a:r>
+              <a:t>Alles wat hierna komt is daarop gebouwd. De kleurschalen lopen van blauw naar groen en niet van rood naar groen, omdat rood en groen voor een deel van je klasgenoten bijna dezelfde kleur zijn.</a:t>
+            </a:r>
+          </a:p>
+          <a:p>
+            <a:pPr>
+              <a:spcBef>
+                <a:spcPts val="1200"/>
+              </a:spcBef>
+              <a:defRPr sz="1400" b="1">
+                <a:solidFill>
+                  <a:srgbClr val="121E31"/>
+                </a:solidFill>
+              </a:defRPr>
+            </a:pPr>
+            <a:r>
+              <a:t>Dat is geen detail. Dat is Werkcollege 6, Deel 6 — nu op jullie eigen data.</a:t>
+            </a:r>
+          </a:p>
+        </p:txBody>
+      </p:sp>
+    </p:spTree>
+  </p:cSld>
+  <p:clrMapOvr>
+    <a:masterClrMapping/>
+  </p:clrMapOvr>
+</p:sld>
+</file>
+
+<file path=ppt/slides/slide5.xml><?xml version="1.0" encoding="utf-8"?>
+<p:sld xmlns:a="http://schemas.openxmlformats.org/drawingml/2006/main" xmlns:p="http://schemas.openxmlformats.org/presentationml/2006/main" xmlns:r="http://schemas.openxmlformats.org/officeDocument/2006/relationships">
+  <p:cSld>
+    <p:spTree>
+      <p:nvGrpSpPr>
+        <p:cNvPr id="1" name=""/>
+        <p:cNvGrpSpPr/>
+        <p:nvPr/>
+      </p:nvGrpSpPr>
+      <p:grpSpPr/>
+      <p:sp>
+        <p:nvSpPr>
+          <p:cNvPr id="2" name="Rectangle 1"/>
+          <p:cNvSpPr/>
+          <p:nvPr/>
+        </p:nvSpPr>
+        <p:spPr>
+          <a:xfrm>
+            <a:off x="0" y="0"/>
+            <a:ext cx="12191695" cy="6858000"/>
+          </a:xfrm>
+          <a:prstGeom prst="rect">
+            <a:avLst/>
+          </a:prstGeom>
+          <a:solidFill>
+            <a:srgbClr val="F8F9FA"/>
+          </a:solidFill>
+          <a:ln>
+            <a:noFill/>
+          </a:ln>
+          <a:effectLst/>
+        </p:spPr>
+        <p:style>
+          <a:lnRef idx="1">
+            <a:schemeClr val="accent1"/>
+          </a:lnRef>
+          <a:fillRef idx="3">
+            <a:schemeClr val="accent1"/>
+          </a:fillRef>
+          <a:effectRef idx="2">
+            <a:schemeClr val="accent1"/>
+          </a:effectRef>
+          <a:fontRef idx="minor">
+            <a:schemeClr val="lt1"/>
+          </a:fontRef>
+        </p:style>
+        <p:txBody>
+          <a:bodyPr rtlCol="0" anchor="ctr"/>
+          <a:lstStyle/>
+          <a:p>
+            <a:pPr algn="ctr"/>
+          </a:p>
+        </p:txBody>
+      </p:sp>
+      <p:sp>
+        <p:nvSpPr>
+          <p:cNvPr id="3" name="TextBox 2"/>
+          <p:cNvSpPr txBox="1"/>
+          <p:nvPr/>
+        </p:nvSpPr>
+        <p:spPr>
+          <a:xfrm>
+            <a:off x="731520" y="384048"/>
+            <a:ext cx="10698480" cy="1005840"/>
+          </a:xfrm>
+          <a:prstGeom prst="rect">
+            <a:avLst/>
+          </a:prstGeom>
+          <a:noFill/>
+        </p:spPr>
+        <p:txBody>
+          <a:bodyPr wrap="square">
+            <a:spAutoFit/>
+          </a:bodyPr>
+          <a:lstStyle/>
+          <a:p>
+            <a:pPr>
+              <a:defRPr sz="1000" b="1">
+                <a:solidFill>
+                  <a:srgbClr val="1B4D3E"/>
+                </a:solidFill>
+              </a:defRPr>
+            </a:pPr>
+            <a:r>
+              <a:t>3.2 · DE KLAS</a:t>
             </a:r>
           </a:p>
           <a:p>
@@ -8134,15 +7870,135 @@
               <a:spcBef>
                 <a:spcPts val="400"/>
               </a:spcBef>
-              <a:defRPr sz="1400" b="0">
+              <a:defRPr sz="2400" b="1">
                 <a:solidFill>
                   <a:srgbClr val="121E31"/>
                 </a:solidFill>
-                <a:latin typeface="Consolas"/>
               </a:defRPr>
             </a:pPr>
             <a:r>
-              <a:t>Q-9      245x gespeeld    59% gefold    gemiddeld +16 chips</a:t>
+              <a:t>Twee op de drie beslissingen is een fold</a:t>
+            </a:r>
+          </a:p>
+        </p:txBody>
+      </p:sp>
+      <p:pic>
+        <p:nvPicPr>
+          <p:cNvPr id="4" name="Picture 3" descr="wc8_acties.png"/>
+          <p:cNvPicPr>
+            <a:picLocks noChangeAspect="1"/>
+          </p:cNvPicPr>
+          <p:nvPr/>
+        </p:nvPicPr>
+        <p:blipFill>
+          <a:blip r:embed="rId2"/>
+          <a:stretch>
+            <a:fillRect/>
+          </a:stretch>
+        </p:blipFill>
+        <p:spPr>
+          <a:xfrm>
+            <a:off x="901873" y="1600200"/>
+            <a:ext cx="10387949" cy="4572000"/>
+          </a:xfrm>
+          <a:prstGeom prst="rect">
+            <a:avLst/>
+          </a:prstGeom>
+        </p:spPr>
+      </p:pic>
+    </p:spTree>
+  </p:cSld>
+  <p:clrMapOvr>
+    <a:masterClrMapping/>
+  </p:clrMapOvr>
+</p:sld>
+</file>
+
+<file path=ppt/slides/slide6.xml><?xml version="1.0" encoding="utf-8"?>
+<p:sld xmlns:a="http://schemas.openxmlformats.org/drawingml/2006/main" xmlns:p="http://schemas.openxmlformats.org/presentationml/2006/main" xmlns:r="http://schemas.openxmlformats.org/officeDocument/2006/relationships">
+  <p:cSld>
+    <p:spTree>
+      <p:nvGrpSpPr>
+        <p:cNvPr id="1" name=""/>
+        <p:cNvGrpSpPr/>
+        <p:nvPr/>
+      </p:nvGrpSpPr>
+      <p:grpSpPr/>
+      <p:sp>
+        <p:nvSpPr>
+          <p:cNvPr id="2" name="Rectangle 1"/>
+          <p:cNvSpPr/>
+          <p:nvPr/>
+        </p:nvSpPr>
+        <p:spPr>
+          <a:xfrm>
+            <a:off x="0" y="0"/>
+            <a:ext cx="12191695" cy="6858000"/>
+          </a:xfrm>
+          <a:prstGeom prst="rect">
+            <a:avLst/>
+          </a:prstGeom>
+          <a:solidFill>
+            <a:srgbClr val="F8F9FA"/>
+          </a:solidFill>
+          <a:ln>
+            <a:noFill/>
+          </a:ln>
+          <a:effectLst/>
+        </p:spPr>
+        <p:style>
+          <a:lnRef idx="1">
+            <a:schemeClr val="accent1"/>
+          </a:lnRef>
+          <a:fillRef idx="3">
+            <a:schemeClr val="accent1"/>
+          </a:fillRef>
+          <a:effectRef idx="2">
+            <a:schemeClr val="accent1"/>
+          </a:effectRef>
+          <a:fontRef idx="minor">
+            <a:schemeClr val="lt1"/>
+          </a:fontRef>
+        </p:style>
+        <p:txBody>
+          <a:bodyPr rtlCol="0" anchor="ctr"/>
+          <a:lstStyle/>
+          <a:p>
+            <a:pPr algn="ctr"/>
+          </a:p>
+        </p:txBody>
+      </p:sp>
+      <p:sp>
+        <p:nvSpPr>
+          <p:cNvPr id="3" name="TextBox 2"/>
+          <p:cNvSpPr txBox="1"/>
+          <p:nvPr/>
+        </p:nvSpPr>
+        <p:spPr>
+          <a:xfrm>
+            <a:off x="731520" y="384048"/>
+            <a:ext cx="10698480" cy="1005840"/>
+          </a:xfrm>
+          <a:prstGeom prst="rect">
+            <a:avLst/>
+          </a:prstGeom>
+          <a:noFill/>
+        </p:spPr>
+        <p:txBody>
+          <a:bodyPr wrap="square">
+            <a:spAutoFit/>
+          </a:bodyPr>
+          <a:lstStyle/>
+          <a:p>
+            <a:pPr>
+              <a:defRPr sz="1000" b="1">
+                <a:solidFill>
+                  <a:srgbClr val="1B4D3E"/>
+                </a:solidFill>
+              </a:defRPr>
+            </a:pPr>
+            <a:r>
+              <a:t>3.2 · EN JIJ?</a:t>
             </a:r>
           </a:p>
           <a:p>
@@ -8150,15 +8006,135 @@
               <a:spcBef>
                 <a:spcPts val="400"/>
               </a:spcBef>
-              <a:defRPr sz="1400" b="0">
+              <a:defRPr sz="2400" b="1">
                 <a:solidFill>
                   <a:srgbClr val="121E31"/>
                 </a:solidFill>
-                <a:latin typeface="Consolas"/>
               </a:defRPr>
             </a:pPr>
             <a:r>
-              <a:t>K-7      283x gespeeld    56% gefold    gemiddeld +14 chips</a:t>
+              <a:t>Waar sta jij in die verdeling?</a:t>
+            </a:r>
+          </a:p>
+        </p:txBody>
+      </p:sp>
+      <p:pic>
+        <p:nvPicPr>
+          <p:cNvPr id="4" name="Picture 3" descr="wc8_foldverdeling.png"/>
+          <p:cNvPicPr>
+            <a:picLocks noChangeAspect="1"/>
+          </p:cNvPicPr>
+          <p:nvPr/>
+        </p:nvPicPr>
+        <p:blipFill>
+          <a:blip r:embed="rId2"/>
+          <a:stretch>
+            <a:fillRect/>
+          </a:stretch>
+        </p:blipFill>
+        <p:spPr>
+          <a:xfrm>
+            <a:off x="1848403" y="1600200"/>
+            <a:ext cx="8494889" cy="4572000"/>
+          </a:xfrm>
+          <a:prstGeom prst="rect">
+            <a:avLst/>
+          </a:prstGeom>
+        </p:spPr>
+      </p:pic>
+    </p:spTree>
+  </p:cSld>
+  <p:clrMapOvr>
+    <a:masterClrMapping/>
+  </p:clrMapOvr>
+</p:sld>
+</file>
+
+<file path=ppt/slides/slide7.xml><?xml version="1.0" encoding="utf-8"?>
+<p:sld xmlns:a="http://schemas.openxmlformats.org/drawingml/2006/main" xmlns:p="http://schemas.openxmlformats.org/presentationml/2006/main" xmlns:r="http://schemas.openxmlformats.org/officeDocument/2006/relationships">
+  <p:cSld>
+    <p:spTree>
+      <p:nvGrpSpPr>
+        <p:cNvPr id="1" name=""/>
+        <p:cNvGrpSpPr/>
+        <p:nvPr/>
+      </p:nvGrpSpPr>
+      <p:grpSpPr/>
+      <p:sp>
+        <p:nvSpPr>
+          <p:cNvPr id="2" name="Rectangle 1"/>
+          <p:cNvSpPr/>
+          <p:nvPr/>
+        </p:nvSpPr>
+        <p:spPr>
+          <a:xfrm>
+            <a:off x="0" y="0"/>
+            <a:ext cx="12191695" cy="6858000"/>
+          </a:xfrm>
+          <a:prstGeom prst="rect">
+            <a:avLst/>
+          </a:prstGeom>
+          <a:solidFill>
+            <a:srgbClr val="F8F9FA"/>
+          </a:solidFill>
+          <a:ln>
+            <a:noFill/>
+          </a:ln>
+          <a:effectLst/>
+        </p:spPr>
+        <p:style>
+          <a:lnRef idx="1">
+            <a:schemeClr val="accent1"/>
+          </a:lnRef>
+          <a:fillRef idx="3">
+            <a:schemeClr val="accent1"/>
+          </a:fillRef>
+          <a:effectRef idx="2">
+            <a:schemeClr val="accent1"/>
+          </a:effectRef>
+          <a:fontRef idx="minor">
+            <a:schemeClr val="lt1"/>
+          </a:fontRef>
+        </p:style>
+        <p:txBody>
+          <a:bodyPr rtlCol="0" anchor="ctr"/>
+          <a:lstStyle/>
+          <a:p>
+            <a:pPr algn="ctr"/>
+          </a:p>
+        </p:txBody>
+      </p:sp>
+      <p:sp>
+        <p:nvSpPr>
+          <p:cNvPr id="3" name="TextBox 2"/>
+          <p:cNvSpPr txBox="1"/>
+          <p:nvPr/>
+        </p:nvSpPr>
+        <p:spPr>
+          <a:xfrm>
+            <a:off x="731520" y="384048"/>
+            <a:ext cx="10698480" cy="1005840"/>
+          </a:xfrm>
+          <a:prstGeom prst="rect">
+            <a:avLst/>
+          </a:prstGeom>
+          <a:noFill/>
+        </p:spPr>
+        <p:txBody>
+          <a:bodyPr wrap="square">
+            <a:spAutoFit/>
+          </a:bodyPr>
+          <a:lstStyle/>
+          <a:p>
+            <a:pPr>
+              <a:defRPr sz="1000" b="1">
+                <a:solidFill>
+                  <a:srgbClr val="1B4D3E"/>
+                </a:solidFill>
+              </a:defRPr>
+            </a:pPr>
+            <a:r>
+              <a:t>DE VERRASSING</a:t>
             </a:r>
           </a:p>
           <a:p>
@@ -8166,15 +8142,135 @@
               <a:spcBef>
                 <a:spcPts val="400"/>
               </a:spcBef>
-              <a:defRPr sz="1400" b="0">
+              <a:defRPr sz="2400" b="1">
                 <a:solidFill>
                   <a:srgbClr val="121E31"/>
                 </a:solidFill>
-                <a:latin typeface="Consolas"/>
               </a:defRPr>
             </a:pPr>
             <a:r>
-              <a:t>K-3      223x gespeeld    63% gefold    gemiddeld +12 chips</a:t>
+              <a:t>Defensief spelen wérkt hier   ·   r = +0,45</a:t>
+            </a:r>
+          </a:p>
+        </p:txBody>
+      </p:sp>
+      <p:pic>
+        <p:nvPicPr>
+          <p:cNvPr id="4" name="Picture 3" descr="wc8_fold_vs_eindstand.png"/>
+          <p:cNvPicPr>
+            <a:picLocks noChangeAspect="1"/>
+          </p:cNvPicPr>
+          <p:nvPr/>
+        </p:nvPicPr>
+        <p:blipFill>
+          <a:blip r:embed="rId2"/>
+          <a:stretch>
+            <a:fillRect/>
+          </a:stretch>
+        </p:blipFill>
+        <p:spPr>
+          <a:xfrm>
+            <a:off x="1999178" y="1600200"/>
+            <a:ext cx="8193338" cy="4572000"/>
+          </a:xfrm>
+          <a:prstGeom prst="rect">
+            <a:avLst/>
+          </a:prstGeom>
+        </p:spPr>
+      </p:pic>
+    </p:spTree>
+  </p:cSld>
+  <p:clrMapOvr>
+    <a:masterClrMapping/>
+  </p:clrMapOvr>
+</p:sld>
+</file>
+
+<file path=ppt/slides/slide8.xml><?xml version="1.0" encoding="utf-8"?>
+<p:sld xmlns:a="http://schemas.openxmlformats.org/drawingml/2006/main" xmlns:p="http://schemas.openxmlformats.org/presentationml/2006/main" xmlns:r="http://schemas.openxmlformats.org/officeDocument/2006/relationships">
+  <p:cSld>
+    <p:spTree>
+      <p:nvGrpSpPr>
+        <p:cNvPr id="1" name=""/>
+        <p:cNvGrpSpPr/>
+        <p:nvPr/>
+      </p:nvGrpSpPr>
+      <p:grpSpPr/>
+      <p:sp>
+        <p:nvSpPr>
+          <p:cNvPr id="2" name="Rectangle 1"/>
+          <p:cNvSpPr/>
+          <p:nvPr/>
+        </p:nvSpPr>
+        <p:spPr>
+          <a:xfrm>
+            <a:off x="0" y="0"/>
+            <a:ext cx="12191695" cy="6858000"/>
+          </a:xfrm>
+          <a:prstGeom prst="rect">
+            <a:avLst/>
+          </a:prstGeom>
+          <a:solidFill>
+            <a:srgbClr val="F8F9FA"/>
+          </a:solidFill>
+          <a:ln>
+            <a:noFill/>
+          </a:ln>
+          <a:effectLst/>
+        </p:spPr>
+        <p:style>
+          <a:lnRef idx="1">
+            <a:schemeClr val="accent1"/>
+          </a:lnRef>
+          <a:fillRef idx="3">
+            <a:schemeClr val="accent1"/>
+          </a:fillRef>
+          <a:effectRef idx="2">
+            <a:schemeClr val="accent1"/>
+          </a:effectRef>
+          <a:fontRef idx="minor">
+            <a:schemeClr val="lt1"/>
+          </a:fontRef>
+        </p:style>
+        <p:txBody>
+          <a:bodyPr rtlCol="0" anchor="ctr"/>
+          <a:lstStyle/>
+          <a:p>
+            <a:pPr algn="ctr"/>
+          </a:p>
+        </p:txBody>
+      </p:sp>
+      <p:sp>
+        <p:nvSpPr>
+          <p:cNvPr id="3" name="TextBox 2"/>
+          <p:cNvSpPr txBox="1"/>
+          <p:nvPr/>
+        </p:nvSpPr>
+        <p:spPr>
+          <a:xfrm>
+            <a:off x="731520" y="384048"/>
+            <a:ext cx="10698480" cy="1005840"/>
+          </a:xfrm>
+          <a:prstGeom prst="rect">
+            <a:avLst/>
+          </a:prstGeom>
+          <a:noFill/>
+        </p:spPr>
+        <p:txBody>
+          <a:bodyPr wrap="square">
+            <a:spAutoFit/>
+          </a:bodyPr>
+          <a:lstStyle/>
+          <a:p>
+            <a:pPr>
+              <a:defRPr sz="1000" b="1">
+                <a:solidFill>
+                  <a:srgbClr val="1B4D3E"/>
+                </a:solidFill>
+              </a:defRPr>
+            </a:pPr>
+            <a:r>
+              <a:t>3.3 · GEDRAG LEZEN</a:t>
             </a:r>
           </a:p>
           <a:p>
@@ -8182,49 +8278,178 @@
               <a:spcBef>
                 <a:spcPts val="400"/>
               </a:spcBef>
-              <a:defRPr sz="1400" b="0">
+              <a:defRPr sz="2400" b="1">
                 <a:solidFill>
                   <a:srgbClr val="121E31"/>
                 </a:solidFill>
-                <a:latin typeface="Consolas"/>
               </a:defRPr>
             </a:pPr>
             <a:r>
-              <a:t>K-8      271x gespeeld    53% gefold    gemiddeld +8 chips</a:t>
+              <a:t>De drempels van de klas, zonder één regel code te zien</a:t>
+            </a:r>
+          </a:p>
+        </p:txBody>
+      </p:sp>
+      <p:pic>
+        <p:nvPicPr>
+          <p:cNvPr id="4" name="Picture 3" descr="wc8_matrix_fold.png"/>
+          <p:cNvPicPr>
+            <a:picLocks noChangeAspect="1"/>
+          </p:cNvPicPr>
+          <p:nvPr/>
+        </p:nvPicPr>
+        <p:blipFill>
+          <a:blip r:embed="rId2"/>
+          <a:stretch>
+            <a:fillRect/>
+          </a:stretch>
+        </p:blipFill>
+        <p:spPr>
+          <a:xfrm>
+            <a:off x="2855625" y="1600200"/>
+            <a:ext cx="6480444" cy="4572000"/>
+          </a:xfrm>
+          <a:prstGeom prst="rect">
+            <a:avLst/>
+          </a:prstGeom>
+        </p:spPr>
+      </p:pic>
+    </p:spTree>
+  </p:cSld>
+  <p:clrMapOvr>
+    <a:masterClrMapping/>
+  </p:clrMapOvr>
+</p:sld>
+</file>
+
+<file path=ppt/slides/slide9.xml><?xml version="1.0" encoding="utf-8"?>
+<p:sld xmlns:a="http://schemas.openxmlformats.org/drawingml/2006/main" xmlns:p="http://schemas.openxmlformats.org/presentationml/2006/main" xmlns:r="http://schemas.openxmlformats.org/officeDocument/2006/relationships">
+  <p:cSld>
+    <p:spTree>
+      <p:nvGrpSpPr>
+        <p:cNvPr id="1" name=""/>
+        <p:cNvGrpSpPr/>
+        <p:nvPr/>
+      </p:nvGrpSpPr>
+      <p:grpSpPr/>
+      <p:sp>
+        <p:nvSpPr>
+          <p:cNvPr id="2" name="Rectangle 1"/>
+          <p:cNvSpPr/>
+          <p:nvPr/>
+        </p:nvSpPr>
+        <p:spPr>
+          <a:xfrm>
+            <a:off x="0" y="0"/>
+            <a:ext cx="12191695" cy="6858000"/>
+          </a:xfrm>
+          <a:prstGeom prst="rect">
+            <a:avLst/>
+          </a:prstGeom>
+          <a:solidFill>
+            <a:srgbClr val="F8F9FA"/>
+          </a:solidFill>
+          <a:ln>
+            <a:noFill/>
+          </a:ln>
+          <a:effectLst/>
+        </p:spPr>
+        <p:style>
+          <a:lnRef idx="1">
+            <a:schemeClr val="accent1"/>
+          </a:lnRef>
+          <a:fillRef idx="3">
+            <a:schemeClr val="accent1"/>
+          </a:fillRef>
+          <a:effectRef idx="2">
+            <a:schemeClr val="accent1"/>
+          </a:effectRef>
+          <a:fontRef idx="minor">
+            <a:schemeClr val="lt1"/>
+          </a:fontRef>
+        </p:style>
+        <p:txBody>
+          <a:bodyPr rtlCol="0" anchor="ctr"/>
+          <a:lstStyle/>
+          <a:p>
+            <a:pPr algn="ctr"/>
+          </a:p>
+        </p:txBody>
+      </p:sp>
+      <p:sp>
+        <p:nvSpPr>
+          <p:cNvPr id="3" name="TextBox 2"/>
+          <p:cNvSpPr txBox="1"/>
+          <p:nvPr/>
+        </p:nvSpPr>
+        <p:spPr>
+          <a:xfrm>
+            <a:off x="731520" y="384048"/>
+            <a:ext cx="10698480" cy="1005840"/>
+          </a:xfrm>
+          <a:prstGeom prst="rect">
+            <a:avLst/>
+          </a:prstGeom>
+          <a:noFill/>
+        </p:spPr>
+        <p:txBody>
+          <a:bodyPr wrap="square">
+            <a:spAutoFit/>
+          </a:bodyPr>
+          <a:lstStyle/>
+          <a:p>
+            <a:pPr>
+              <a:defRPr sz="1000" b="1">
+                <a:solidFill>
+                  <a:srgbClr val="1B4D3E"/>
+                </a:solidFill>
+              </a:defRPr>
+            </a:pPr>
+            <a:r>
+              <a:t>3.4 · EN WAT LEVERDE OP?</a:t>
             </a:r>
           </a:p>
           <a:p>
             <a:pPr>
               <a:spcBef>
-                <a:spcPts val="1800"/>
+                <a:spcPts val="400"/>
               </a:spcBef>
-              <a:defRPr sz="1400" b="1">
-                <a:solidFill>
-                  <a:srgbClr val="1B4D3E"/>
+              <a:defRPr sz="2400" b="1">
+                <a:solidFill>
+                  <a:srgbClr val="121E31"/>
                 </a:solidFill>
               </a:defRPr>
             </a:pPr>
             <a:r>
-              <a:t>Deze handen worden vaker gefold dan gespeeld, maar leveren geld op wanneer er wél mee gespeeld wordt.</a:t>
-            </a:r>
-          </a:p>
-          <a:p>
-            <a:pPr>
-              <a:spcBef>
-                <a:spcPts val="1200"/>
-              </a:spcBef>
-              <a:defRPr sz="1300" b="0">
-                <a:solidFill>
-                  <a:srgbClr val="505A64"/>
-                </a:solidFill>
-              </a:defRPr>
-            </a:pPr>
-            <a:r>
-              <a:t>Is dat een kans, of kijk je naar de handen die toevallig goed afliepen? Dat is precies de vraag die je met deze data niet helemaal kunt beslechten.</a:t>
-            </a:r>
-          </a:p>
-        </p:txBody>
-      </p:sp>
+              <a:t>Dezelfde 91 handen, nu op geld</a:t>
+            </a:r>
+          </a:p>
+        </p:txBody>
+      </p:sp>
+      <p:pic>
+        <p:nvPicPr>
+          <p:cNvPr id="4" name="Picture 3" descr="wc8_matrix_winst.png"/>
+          <p:cNvPicPr>
+            <a:picLocks noChangeAspect="1"/>
+          </p:cNvPicPr>
+          <p:nvPr/>
+        </p:nvPicPr>
+        <p:blipFill>
+          <a:blip r:embed="rId2"/>
+          <a:stretch>
+            <a:fillRect/>
+          </a:stretch>
+        </p:blipFill>
+        <p:spPr>
+          <a:xfrm>
+            <a:off x="3657698" y="1600200"/>
+            <a:ext cx="4876299" cy="4572000"/>
+          </a:xfrm>
+          <a:prstGeom prst="rect">
+            <a:avLst/>
+          </a:prstGeom>
+        </p:spPr>
+      </p:pic>
     </p:spTree>
   </p:cSld>
   <p:clrMapOvr>

--- a/powerpoints/Data_Science_Werkcollege8.pptx
+++ b/powerpoints/Data_Science_Werkcollege8.pptx
@@ -24,6 +24,10 @@
     <p:sldId id="272" r:id="rId24"/>
     <p:sldId id="273" r:id="rId25"/>
     <p:sldId id="274" r:id="rId26"/>
+    <p:sldId id="275" r:id="rId27"/>
+    <p:sldId id="276" r:id="rId28"/>
+    <p:sldId id="277" r:id="rId29"/>
+    <p:sldId id="278" r:id="rId30"/>
   </p:sldIdLst>
   <p:sldSz cx="12191695" cy="6858000" type="screen4x3"/>
   <p:notesSz cx="6858000" cy="9144000"/>
@@ -608,19 +612,19 @@
           <a:lstStyle/>
           <a:p>
             <a:r>
-              <a:t>Hier staat Visual Maandag in één plaat: twintig grijze lijnen, twee uitgelicht, en een titel die iets beweert.</a:t>
+              <a:t>Dit is de statistiek die ik er zelf bij heb gezocht, en de uitkomst verraste me: een correlatie van +0,45 tussen fold-percentage en eindstand. In dít veld deden de defensievere bots het beter.</a:t>
             </a:r>
           </a:p>
           <a:p/>
           <a:p>
             <a:r>
-              <a:t>Deze bot eindigde in zijn beste simulatie op 3.520 chips en in zijn slechtste op 0. Zelfde code, zelfde drempels, andere kaarten.</a:t>
+              <a:t>Belangrijk om erbij te zeggen: dat is geen algemene pokerwaarheid. Het zegt iets over dit veld — er zitten een paar bots in die alles callen, en die verliezen langzaam hun chips aan iedereen. Tegen een tafel vol defensieve bots zou de lijn andersom kunnen lopen.</a:t>
             </a:r>
           </a:p>
           <a:p/>
           <a:p>
             <a:r>
-              <a:t>Laat ze dit zelf maken voor hun eigen bot — het is één groupby en een plot, en het is de meest persoonlijke grafiek van de middag.</a:t>
+              <a:t>Goede vraag voor de zaal: is dit oorzaak of gevolg?</a:t>
             </a:r>
           </a:p>
         </p:txBody>
@@ -690,19 +694,19 @@
           <a:lstStyle/>
           <a:p>
             <a:r>
-              <a:t>Dit is de grafiek die het dichtst bij 'wat moet ik veranderen' komt. Per actiesoort: wat leverde die jou op, en wat leverde die de rest op?</a:t>
+              <a:t>Dit is mijn favoriete plaat van de middag. Niemand heeft zijn code gedeeld, en toch zie je precies waar de klas zijn grens legt.</a:t>
             </a:r>
           </a:p>
           <a:p/>
           <a:p>
             <a:r>
-              <a:t>Let op de n= achter elk getal, en maak daar een punt van. In dit voorbeeld verliest de grote raise 84 chips per hand terwijl de klas er 175 mee wint — maar over zeven handen. Dat is geen conclusie, dat is een aanwijzing waar je verder moet kijken.</a:t>
+              <a:t>Let op het patroon: de diagonaal (paren) is licht, de linkerbovenhoek (aas, heer) is licht, en rechtsonder wordt alles weggegooid. Dat is de winkans-tabel uit Werkcollege 5 — maar dan afgeleid uit gedrag in plaats van uit een simulatie.</a:t>
             </a:r>
           </a:p>
           <a:p/>
           <a:p>
             <a:r>
-              <a:t>Wie hier een echt verschil ziet bij een actie die hij vaak doet, heeft zijn verandering voor Deel 4 gevonden.</a:t>
+              <a:t>De kleur is één hue van licht naar donker, want dit is een oplopende schaal en geen set categorieën.</a:t>
             </a:r>
           </a:p>
         </p:txBody>
@@ -772,19 +776,19 @@
           <a:lstStyle/>
           <a:p>
             <a:r>
-              <a:t>Een gemiddelde verstopt hoe vaak iets voorkwam. Hier staat de optelsom: welke handen hebben jou over het hele toernooi het meeste gekost, en welke het meeste opgeleverd.</a:t>
+              <a:t>Nu twee kleuren om een nulpunt heen, want winst heeft een richting.</a:t>
             </a:r>
           </a:p>
           <a:p/>
           <a:p>
             <a:r>
-              <a:t>In dit voorbeeld is K-10 de duurste hand (-1.010 chips over 10 handen) en A-K de beste (+2.000 over 9).</a:t>
+              <a:t>A-A staat ver boven de rest; de schaal is op het 92e percentiel afgekapt, anders zou al het andere wit worden. Dat is een keuze die je hardop moet maken en niet stilletjes.</a:t>
             </a:r>
           </a:p>
           <a:p/>
           <a:p>
             <a:r>
-              <a:t>De vraag die ze zichzelf moeten stellen: speel ik die duurste hand eigenlijk wel bewust, of valt hij per ongeluk binnen een van mijn drempels?</a:t>
+              <a:t>De vraag die telt: leg deze plaat naast de vorige. Waar is een vakje donkergroen in déze, en donkergroen in die? Dan gooit de klas iets weg waar geld in zit.</a:t>
             </a:r>
           </a:p>
         </p:txBody>
@@ -854,19 +858,13 @@
           <a:lstStyle/>
           <a:p>
             <a:r>
-              <a:t>De beste bot haalde gemiddeld 1.690 chips, met een standaarddeviatie van 1.067. De nummer twee zit op 1.666.</a:t>
+              <a:t>Hier komen 3.3 en 3.4 samen, en dit is wat ik ze mee wil geven: data science levert zelden een antwoord, het levert een kandidaat.</a:t>
             </a:r>
           </a:p>
           <a:p/>
           <a:p>
             <a:r>
-              <a:t>Het verschil tussen nummer 1 en nummer 2 is kleiner dan de spreiding binnen één bot. Laat dat even staan.</a:t>
-            </a:r>
-          </a:p>
-          <a:p/>
-          <a:p>
-            <a:r>
-              <a:t>Daarom loopt de bonus over twee toernooien, en daarom is 'ik ben gezakt van plek 3 naar plek 9' geen bewijs dat je bot slechter is geworden.</a:t>
+              <a:t>Die tweede vraag is de eerlijke. Wie deze hand speelde was misschien juist de betere bot, en dan meet je de bot en niet de hand. Dat heet selectie-effect, en het is de reden dat je het op donderdag toetst in plaats van het te geloven.</a:t>
             </a:r>
           </a:p>
         </p:txBody>
@@ -936,19 +934,19 @@
           <a:lstStyle/>
           <a:p>
             <a:r>
-              <a:t>Dit is het antwoord op 'ik ben klaar, wat nu'. Drie sporen, en het middelste is het belangrijkste en het minst voor de hand liggende.</a:t>
+              <a:t>Hier staat Visual Maandag in één plaat: twintig grijze lijnen, twee uitgelicht, en een titel die iets beweert.</a:t>
             </a:r>
           </a:p>
           <a:p/>
           <a:p>
             <a:r>
-              <a:t>Neem even de tijd voor die rode regel onderin. Het logboek heeft ÉÉN regel per hand, met alleen de eerste actie van die hand. Alles wat per ronde, per pot of per tegenstander speelt staat er dus niet in. Dat is geen omissie maar een ontwerpkeuze: een regel per beslissing zou het logboek vijf keer zo groot maken.</a:t>
+              <a:t>Deze bot eindigde in zijn beste simulatie op 3.520 chips en in zijn slechtste op 0. Zelfde code, zelfde drempels, andere kaarten.</a:t>
             </a:r>
           </a:p>
           <a:p/>
           <a:p>
             <a:r>
-              <a:t>Wie dáár iets over wil weten, moet zijn bot het zelf laten opschrijven. Dat is de volgende dia.</a:t>
+              <a:t>Laat ze dit zelf maken voor hun eigen bot — het is één groupby en een plot, en het is de meest persoonlijke grafiek van de middag.</a:t>
             </a:r>
           </a:p>
         </p:txBody>
@@ -1018,25 +1016,19 @@
           <a:lstStyle/>
           <a:p>
             <a:r>
-              <a:t>Dit is de dia waar ik de meeste waarde van verwacht, want 'bedenk een analyse' is een opdracht waar de meesten op vastlopen.</a:t>
+              <a:t>Dit is de grafiek die het dichtst bij 'wat moet ik veranderen' komt. Per actiesoort: wat leverde die jou op, en wat leverde die de rest op?</a:t>
             </a:r>
           </a:p>
           <a:p/>
           <a:p>
             <a:r>
-              <a:t>Het punt: je verzint niets. Je hebt in Werkcollege 7 vijf regels geschreven, en in elke regel staat een getal dat je op gevoel hebt gekozen — 150, STERK, MEEDOEN, ZWAK. Elk van die getallen is een hypothese. Stel over elk dezelfde twee vragen: hoe vaak vuurt deze regel, en wat levert hij op als hij vuurt?</a:t>
+              <a:t>Let op de n= achter elk getal, en maak daar een punt van. In dit voorbeeld verliest de grote raise 84 chips per hand terwijl de klas er 175 mee wint — maar over zeven handen. Dat is geen conclusie, dat is een aanwijzing waar je verder moet kijken.</a:t>
             </a:r>
           </a:p>
           <a:p/>
           <a:p>
             <a:r>
-              <a:t>Loop ze samen langs en laat ze bij hun eigen bot kijken. Wie een regel heeft die nooit vuurt, heeft dode code — en dat is op zichzelf al een bevinding.</a:t>
-            </a:r>
-          </a:p>
-          <a:p/>
-          <a:p>
-            <a:r>
-              <a:t>De kleur rechts zegt waar het antwoord vandaan komt, en sluit aan op de vorige dia: blauw is het logboek, oranje moet je zelf laten opschrijven.</a:t>
+              <a:t>Wie hier een echt verschil ziet bij een actie die hij vaak doet, heeft zijn verandering voor Deel 4 gevonden.</a:t>
             </a:r>
           </a:p>
         </p:txBody>
@@ -1106,19 +1098,19 @@
           <a:lstStyle/>
           <a:p>
             <a:r>
-              <a:t>Dit is de meest waardevolle dia van het hele slot, en de makkelijkste om over te slaan.</a:t>
+              <a:t>Een gemiddelde verstopt hoe vaak iets voorkwam. Hier staat de optelsom: welke handen hebben jou over het hele toernooi het meeste gekost, en welke het meeste opgeleverd.</a:t>
             </a:r>
           </a:p>
           <a:p/>
           <a:p>
             <a:r>
-              <a:t>Het idee is simpel: je bot weet op het moment van beslissen alles — de ronde, de pot, zijn winkans, welke regel er vuurde. Die kennis gooit hij nu weg. Eén append per beslissing en je houdt hem vast.</a:t>
+              <a:t>In dit voorbeeld is K-10 de duurste hand (-1.010 chips over 10 handen) en A-K de beste (+2.000 over 9).</a:t>
             </a:r>
           </a:p>
           <a:p/>
           <a:p>
             <a:r>
-              <a:t>Koppel het aan de vijf-regelstructuur uit Werkcollege 7: door 'regel' mee te loggen kun je achteraf per regel uitrekenen wat hij opleverde. Dan weet je welke van je vijf regels het werk doet en welke er alleen maar staat.</a:t>
+              <a:t>De vraag die ze zichzelf moeten stellen: speel ik die duurste hand eigenlijk wel bewust, of valt hij per ongeluk binnen een van mijn drempels?</a:t>
             </a:r>
           </a:p>
         </p:txBody>
@@ -1188,19 +1180,19 @@
           <a:lstStyle/>
           <a:p>
             <a:r>
-              <a:t>Sluit hiermee af als er tijd over is. Het punt: ze denken dat ze alleen een percentage hebben, terwijl beschrijf_hand() ze de handsóórt geeft.</a:t>
+              <a:t>De beste bot haalde gemiddeld 1.690 chips, met een standaarddeviatie van 1.067. De nummer twee zit op 1.666.</a:t>
             </a:r>
           </a:p>
           <a:p/>
           <a:p>
             <a:r>
-              <a:t>Een regel als 'bij three of a kind of beter ga ik door, wat de winkans ook zegt' is voor sommigen begrijpelijker dan drempels, en het is een volwaardige strategie.</a:t>
+              <a:t>Het verschil tussen nummer 1 en nummer 2 is kleiner dan de spreiding binnen één bot. Laat dat even staan.</a:t>
             </a:r>
           </a:p>
           <a:p/>
           <a:p>
             <a:r>
-              <a:t>vergelijk_handen is vooral nuttig om te begrijpen waarom je een hand verloor die je dacht te winnen — kickers.</a:t>
+              <a:t>Daarom loopt de bonus over twee toernooien, en daarom is 'ik ben gezakt van plek 3 naar plek 9' geen bewijs dat je bot slechter is geworden.</a:t>
             </a:r>
           </a:p>
         </p:txBody>
@@ -1270,13 +1262,107 @@
           <a:lstStyle/>
           <a:p>
             <a:r>
-              <a:t>Sluit hiermee af, en wijs vooruit: donderdagochtend draait de oefenronde. Dan weten ze binnen een dag of hun verandering iets deed.</a:t>
+              <a:t>Dit is het antwoord op 'ik ben klaar, wat nu'. Drie sporen, en het middelste is het belangrijkste en het minst voor de hand liggende.</a:t>
             </a:r>
           </a:p>
           <a:p/>
           <a:p>
             <a:r>
-              <a:t>Dat is de hele cyclus die dit vak wil laten zien: meten, concluderen, aanpassen, opnieuw meten. Niet één keer een analyse maken en hopen.</a:t>
+              <a:t>Neem even de tijd voor die rode regel onderin. Het logboek heeft ÉÉN regel per hand, met alleen de eerste actie van die hand. Alles wat per ronde, per pot of per tegenstander speelt staat er dus niet in. Dat is geen omissie maar een ontwerpkeuze: een regel per beslissing zou het logboek vijf keer zo groot maken.</a:t>
+            </a:r>
+          </a:p>
+          <a:p/>
+          <a:p>
+            <a:r>
+              <a:t>Wie dáár iets over wil weten, moet zijn bot het zelf laten opschrijven. Dat is de volgende dia.</a:t>
+            </a:r>
+          </a:p>
+        </p:txBody>
+      </p:sp>
+      <p:sp>
+        <p:nvSpPr>
+          <p:cNvPr id="4" name="Slide Number Placeholder 3"/>
+          <p:cNvSpPr>
+            <a:spLocks noGrp="1"/>
+          </p:cNvSpPr>
+          <p:nvPr>
+            <p:ph type="sldNum" idx="5" sz="quarter"/>
+          </p:nvPr>
+        </p:nvSpPr>
+        <p:spPr/>
+      </p:sp>
+    </p:spTree>
+  </p:cSld>
+  <p:clrMapOvr>
+    <a:masterClrMapping/>
+  </p:clrMapOvr>
+</p:notes>
+</file>
+
+<file path=ppt/notesSlides/notesSlide19.xml><?xml version="1.0" encoding="utf-8"?>
+<p:notes xmlns:a="http://schemas.openxmlformats.org/drawingml/2006/main" xmlns:p="http://schemas.openxmlformats.org/presentationml/2006/main" xmlns:r="http://schemas.openxmlformats.org/officeDocument/2006/relationships">
+  <p:cSld>
+    <p:spTree>
+      <p:nvGrpSpPr>
+        <p:cNvPr id="1" name=""/>
+        <p:cNvGrpSpPr/>
+        <p:nvPr/>
+      </p:nvGrpSpPr>
+      <p:grpSpPr>
+        <a:xfrm>
+          <a:off x="0" y="0"/>
+          <a:ext cx="0" cy="0"/>
+          <a:chOff x="0" y="0"/>
+          <a:chExt cx="0" cy="0"/>
+        </a:xfrm>
+      </p:grpSpPr>
+      <p:sp>
+        <p:nvSpPr>
+          <p:cNvPr id="2" name="Slide Image Placeholder 1"/>
+          <p:cNvSpPr>
+            <a:spLocks noGrp="1"/>
+          </p:cNvSpPr>
+          <p:nvPr>
+            <p:ph type="sldImg" idx="2"/>
+          </p:nvPr>
+        </p:nvSpPr>
+        <p:spPr/>
+      </p:sp>
+      <p:sp>
+        <p:nvSpPr>
+          <p:cNvPr id="3" name="Notes Placeholder 2"/>
+          <p:cNvSpPr>
+            <a:spLocks noGrp="1"/>
+          </p:cNvSpPr>
+          <p:nvPr>
+            <p:ph type="body" idx="3" sz="quarter"/>
+          </p:nvPr>
+        </p:nvSpPr>
+        <p:spPr/>
+        <p:txBody>
+          <a:bodyPr/>
+          <a:lstStyle/>
+          <a:p>
+            <a:r>
+              <a:t>Dit is de dia waar ik de meeste waarde van verwacht, want 'bedenk een analyse' is een opdracht waar de meesten op vastlopen.</a:t>
+            </a:r>
+          </a:p>
+          <a:p/>
+          <a:p>
+            <a:r>
+              <a:t>Het punt: je verzint niets. Je hebt in Werkcollege 7 vijf regels geschreven, en in elke regel staat een getal dat je op gevoel hebt gekozen — 150, STERK, MEEDOEN, ZWAK. Elk van die getallen is een hypothese. Stel over elk dezelfde twee vragen: hoe vaak vuurt deze regel, en wat levert hij op als hij vuurt?</a:t>
+            </a:r>
+          </a:p>
+          <a:p/>
+          <a:p>
+            <a:r>
+              <a:t>Loop ze samen langs en laat ze bij hun eigen bot kijken. Wie een regel heeft die nooit vuurt, heeft dode code — en dat is op zichzelf al een bevinding.</a:t>
+            </a:r>
+          </a:p>
+          <a:p/>
+          <a:p>
+            <a:r>
+              <a:t>De kleur rechts zegt waar het antwoord vandaan komt, en sluit aan op de vorige dia: blauw is het logboek, oranje moet je zelf laten opschrijven.</a:t>
             </a:r>
           </a:p>
         </p:txBody>
@@ -1346,13 +1432,259 @@
           <a:lstStyle/>
           <a:p>
             <a:r>
-              <a:t>Begin hier, en laat even bezinken hoe groot dit is. Twintigduizend beslissingen van dertig bots.</a:t>
+              <a:t>Dit is het hele bouwpakket: 30 bots. 20 simulaties. 24.000 regels. waarvan 20.912 met een echte beslissing.</a:t>
             </a:r>
           </a:p>
           <a:p/>
           <a:p>
             <a:r>
-              <a:t>De sprong die ze vandaag maken: tot nu toe was data iets wat ze kregen. Dit hebben ze zelf gegenereerd, door een bot te schrijven.</a:t>
+              <a:t>Acht kolommen, en geen daarvan zegt wat je wilt weten. Er staat geen winst in, geen handsoort, geen fold-percentage. Dat moet je allemaal zelf maken — en dat is precies het onderwerp van het hoorcollege van deze week.</a:t>
+            </a:r>
+          </a:p>
+          <a:p/>
+          <a:p>
+            <a:r>
+              <a:t>Laat ze even kijken naar de kolom `actie`: dat is de EERSTE actie van die hand, niet alle vier de straten. En `aan_zet` vertelt of de bot überhaupt aan de beurt kwam.</a:t>
+            </a:r>
+          </a:p>
+        </p:txBody>
+      </p:sp>
+      <p:sp>
+        <p:nvSpPr>
+          <p:cNvPr id="4" name="Slide Number Placeholder 3"/>
+          <p:cNvSpPr>
+            <a:spLocks noGrp="1"/>
+          </p:cNvSpPr>
+          <p:nvPr>
+            <p:ph type="sldNum" idx="5" sz="quarter"/>
+          </p:nvPr>
+        </p:nvSpPr>
+        <p:spPr/>
+      </p:sp>
+    </p:spTree>
+  </p:cSld>
+  <p:clrMapOvr>
+    <a:masterClrMapping/>
+  </p:clrMapOvr>
+</p:notes>
+</file>
+
+<file path=ppt/notesSlides/notesSlide20.xml><?xml version="1.0" encoding="utf-8"?>
+<p:notes xmlns:a="http://schemas.openxmlformats.org/drawingml/2006/main" xmlns:p="http://schemas.openxmlformats.org/presentationml/2006/main" xmlns:r="http://schemas.openxmlformats.org/officeDocument/2006/relationships">
+  <p:cSld>
+    <p:spTree>
+      <p:nvGrpSpPr>
+        <p:cNvPr id="1" name=""/>
+        <p:cNvGrpSpPr/>
+        <p:nvPr/>
+      </p:nvGrpSpPr>
+      <p:grpSpPr>
+        <a:xfrm>
+          <a:off x="0" y="0"/>
+          <a:ext cx="0" cy="0"/>
+          <a:chOff x="0" y="0"/>
+          <a:chExt cx="0" cy="0"/>
+        </a:xfrm>
+      </p:grpSpPr>
+      <p:sp>
+        <p:nvSpPr>
+          <p:cNvPr id="2" name="Slide Image Placeholder 1"/>
+          <p:cNvSpPr>
+            <a:spLocks noGrp="1"/>
+          </p:cNvSpPr>
+          <p:nvPr>
+            <p:ph type="sldImg" idx="2"/>
+          </p:nvPr>
+        </p:nvSpPr>
+        <p:spPr/>
+      </p:sp>
+      <p:sp>
+        <p:nvSpPr>
+          <p:cNvPr id="3" name="Notes Placeholder 2"/>
+          <p:cNvSpPr>
+            <a:spLocks noGrp="1"/>
+          </p:cNvSpPr>
+          <p:nvPr>
+            <p:ph type="body" idx="3" sz="quarter"/>
+          </p:nvPr>
+        </p:nvSpPr>
+        <p:spPr/>
+        <p:txBody>
+          <a:bodyPr/>
+          <a:lstStyle/>
+          <a:p>
+            <a:r>
+              <a:t>Dit is de meest waardevolle dia van het hele slot, en de makkelijkste om over te slaan.</a:t>
+            </a:r>
+          </a:p>
+          <a:p/>
+          <a:p>
+            <a:r>
+              <a:t>Het idee is simpel: je bot weet op het moment van beslissen alles — de ronde, de pot, zijn winkans, welke regel er vuurde. Die kennis gooit hij nu weg. Eén append per beslissing en je houdt hem vast.</a:t>
+            </a:r>
+          </a:p>
+          <a:p/>
+          <a:p>
+            <a:r>
+              <a:t>Koppel het aan de vijf-regelstructuur uit Werkcollege 7: door 'regel' mee te loggen kun je achteraf per regel uitrekenen wat hij opleverde. Dan weet je welke van je vijf regels het werk doet en welke er alleen maar staat.</a:t>
+            </a:r>
+          </a:p>
+        </p:txBody>
+      </p:sp>
+      <p:sp>
+        <p:nvSpPr>
+          <p:cNvPr id="4" name="Slide Number Placeholder 3"/>
+          <p:cNvSpPr>
+            <a:spLocks noGrp="1"/>
+          </p:cNvSpPr>
+          <p:nvPr>
+            <p:ph type="sldNum" idx="5" sz="quarter"/>
+          </p:nvPr>
+        </p:nvSpPr>
+        <p:spPr/>
+      </p:sp>
+    </p:spTree>
+  </p:cSld>
+  <p:clrMapOvr>
+    <a:masterClrMapping/>
+  </p:clrMapOvr>
+</p:notes>
+</file>
+
+<file path=ppt/notesSlides/notesSlide21.xml><?xml version="1.0" encoding="utf-8"?>
+<p:notes xmlns:a="http://schemas.openxmlformats.org/drawingml/2006/main" xmlns:p="http://schemas.openxmlformats.org/presentationml/2006/main" xmlns:r="http://schemas.openxmlformats.org/officeDocument/2006/relationships">
+  <p:cSld>
+    <p:spTree>
+      <p:nvGrpSpPr>
+        <p:cNvPr id="1" name=""/>
+        <p:cNvGrpSpPr/>
+        <p:nvPr/>
+      </p:nvGrpSpPr>
+      <p:grpSpPr>
+        <a:xfrm>
+          <a:off x="0" y="0"/>
+          <a:ext cx="0" cy="0"/>
+          <a:chOff x="0" y="0"/>
+          <a:chExt cx="0" cy="0"/>
+        </a:xfrm>
+      </p:grpSpPr>
+      <p:sp>
+        <p:nvSpPr>
+          <p:cNvPr id="2" name="Slide Image Placeholder 1"/>
+          <p:cNvSpPr>
+            <a:spLocks noGrp="1"/>
+          </p:cNvSpPr>
+          <p:nvPr>
+            <p:ph type="sldImg" idx="2"/>
+          </p:nvPr>
+        </p:nvSpPr>
+        <p:spPr/>
+      </p:sp>
+      <p:sp>
+        <p:nvSpPr>
+          <p:cNvPr id="3" name="Notes Placeholder 2"/>
+          <p:cNvSpPr>
+            <a:spLocks noGrp="1"/>
+          </p:cNvSpPr>
+          <p:nvPr>
+            <p:ph type="body" idx="3" sz="quarter"/>
+          </p:nvPr>
+        </p:nvSpPr>
+        <p:spPr/>
+        <p:txBody>
+          <a:bodyPr/>
+          <a:lstStyle/>
+          <a:p>
+            <a:r>
+              <a:t>Sluit hiermee af als er tijd over is. Het punt: ze denken dat ze alleen een percentage hebben, terwijl beschrijf_hand() ze de handsóórt geeft.</a:t>
+            </a:r>
+          </a:p>
+          <a:p/>
+          <a:p>
+            <a:r>
+              <a:t>Een regel als 'bij three of a kind of beter ga ik door, wat de winkans ook zegt' is voor sommigen begrijpelijker dan drempels, en het is een volwaardige strategie.</a:t>
+            </a:r>
+          </a:p>
+          <a:p/>
+          <a:p>
+            <a:r>
+              <a:t>vergelijk_handen is vooral nuttig om te begrijpen waarom je een hand verloor die je dacht te winnen — kickers.</a:t>
+            </a:r>
+          </a:p>
+        </p:txBody>
+      </p:sp>
+      <p:sp>
+        <p:nvSpPr>
+          <p:cNvPr id="4" name="Slide Number Placeholder 3"/>
+          <p:cNvSpPr>
+            <a:spLocks noGrp="1"/>
+          </p:cNvSpPr>
+          <p:nvPr>
+            <p:ph type="sldNum" idx="5" sz="quarter"/>
+          </p:nvPr>
+        </p:nvSpPr>
+        <p:spPr/>
+      </p:sp>
+    </p:spTree>
+  </p:cSld>
+  <p:clrMapOvr>
+    <a:masterClrMapping/>
+  </p:clrMapOvr>
+</p:notes>
+</file>
+
+<file path=ppt/notesSlides/notesSlide22.xml><?xml version="1.0" encoding="utf-8"?>
+<p:notes xmlns:a="http://schemas.openxmlformats.org/drawingml/2006/main" xmlns:p="http://schemas.openxmlformats.org/presentationml/2006/main" xmlns:r="http://schemas.openxmlformats.org/officeDocument/2006/relationships">
+  <p:cSld>
+    <p:spTree>
+      <p:nvGrpSpPr>
+        <p:cNvPr id="1" name=""/>
+        <p:cNvGrpSpPr/>
+        <p:nvPr/>
+      </p:nvGrpSpPr>
+      <p:grpSpPr>
+        <a:xfrm>
+          <a:off x="0" y="0"/>
+          <a:ext cx="0" cy="0"/>
+          <a:chOff x="0" y="0"/>
+          <a:chExt cx="0" cy="0"/>
+        </a:xfrm>
+      </p:grpSpPr>
+      <p:sp>
+        <p:nvSpPr>
+          <p:cNvPr id="2" name="Slide Image Placeholder 1"/>
+          <p:cNvSpPr>
+            <a:spLocks noGrp="1"/>
+          </p:cNvSpPr>
+          <p:nvPr>
+            <p:ph type="sldImg" idx="2"/>
+          </p:nvPr>
+        </p:nvSpPr>
+        <p:spPr/>
+      </p:sp>
+      <p:sp>
+        <p:nvSpPr>
+          <p:cNvPr id="3" name="Notes Placeholder 2"/>
+          <p:cNvSpPr>
+            <a:spLocks noGrp="1"/>
+          </p:cNvSpPr>
+          <p:nvPr>
+            <p:ph type="body" idx="3" sz="quarter"/>
+          </p:nvPr>
+        </p:nvSpPr>
+        <p:spPr/>
+        <p:txBody>
+          <a:bodyPr/>
+          <a:lstStyle/>
+          <a:p>
+            <a:r>
+              <a:t>Sluit hiermee af, en wijs vooruit: donderdagochtend draait de oefenronde. Dan weten ze binnen een dag of hun verandering iets deed.</a:t>
+            </a:r>
+          </a:p>
+          <a:p/>
+          <a:p>
+            <a:r>
+              <a:t>Dat is de hele cyclus die dit vak wil laten zien: meten, concluderen, aanpassen, opnieuw meten. Niet één keer een analyse maken en hopen.</a:t>
             </a:r>
           </a:p>
         </p:txBody>
@@ -1422,13 +1754,19 @@
           <a:lstStyle/>
           <a:p>
             <a:r>
-              <a:t>Kort ophalen, niet opnieuw uitleggen. Ze hebben dit vorige week gedaan; het punt is dat ze zien dat het nu ergens voor dient.</a:t>
+              <a:t>Links de kolom die je krijgt, rechts de kolom die je maakt. Zelfde data, en pas rechts zie je wannéér het gebeurde.</a:t>
             </a:r>
           </a:p>
           <a:p/>
           <a:p>
             <a:r>
-              <a:t>De kleurkeuze mag je hardop verantwoorden: ik heb het groen-rood van onze eigen huisstijl door een kleurenblindheidstest gehaald en het zakte — de twee liggen voor protanopie te dicht bij elkaar. Vandaar blauw. Dat is precies het soort controle dat zij in Deel 6 hebben geleerd.</a:t>
+              <a:t>Dit is letterlijk het laadpaal-voorbeeld uit het hoorcollege: een meterstand is een stand, het verbruik is de stroom, en `.diff()` is de brug ertussen. De knik links op hand 19 is rechts een balk met een getal erop.</a:t>
+            </a:r>
+          </a:p>
+          <a:p/>
+          <a:p>
+            <a:r>
+              <a:t>Vraag aan de zaal welke van de twee je nodig hebt om te beslissen wat je aan je bot verandert. Het antwoord is rechts — de stand vertelt je alleen waar je uitkwam.</a:t>
             </a:r>
           </a:p>
         </p:txBody>
@@ -1498,19 +1836,19 @@
           <a:lstStyle/>
           <a:p>
             <a:r>
-              <a:t>Fold 65.9%, call 21.0%, raise 12.0%.</a:t>
+              <a:t>Deze drie staan al op je hoorcollege-dia's met de laadpaal, het gebouw en het HR-voorbeeld erbij. Hier zijn ze op hun eigen toernooi.</a:t>
             </a:r>
           </a:p>
           <a:p/>
           <a:p>
             <a:r>
-              <a:t>Vraag het eerst aan de zaal voor je het laat zien: hoeveel procent denken jullie? De meesten schatten veel te laag.</a:t>
+              <a:t>Het verschil tussen de eerste twee is waard om even bij stil te staan: diff gaat van stand naar stroom, cumsum gaat de andere kant op. transform is de vreemde eend — die verandert de lengte niet, hij zet een groepswaarde naast elke rij.</a:t>
             </a:r>
           </a:p>
           <a:p/>
           <a:p>
             <a:r>
-              <a:t>En dan de vervolgvraag die de hele middag draagt: als twee op de drie beslissingen een fold is, wat betekent dat voor jouw bot? Agressie is goedkoop tegen een tafel die wegloopt.</a:t>
+              <a:t>De waarschuwing onderaan is de fout die ze echt gaan maken. Laat hem een keer zien zonder groupby als je tijd hebt; het is een sprong van duizend chips die er als data uitziet.</a:t>
             </a:r>
           </a:p>
         </p:txBody>
@@ -1580,13 +1918,19 @@
           <a:lstStyle/>
           <a:p>
             <a:r>
-              <a:t>De mediaan ligt op 72,3%. De bot die hier oranje is, zit op 75,6%.</a:t>
+              <a:t>De hele middag in één plaat. Links wat er in het logboek staat, midden wat je daaruit bouwt, rechts wat je er dan mee kunt zien.</a:t>
             </a:r>
           </a:p>
           <a:p/>
           <a:p>
             <a:r>
-              <a:t>Laat ze zichzelf opzoeken — dat is de opdracht in 3.2. Wie boven de 80% zit doet nauwelijks mee; wie onder de 20% zit betaalt overal aan mee.</a:t>
+              <a:t>Let op de kleuren in de middelste kolom. Oranje zijn de drie bewerkingen uit het hoorcollege. Grijs is wat je zelf bedenkt — hand_naam bestaat nergens, die heb ik verzonnen omdat A-K en K-A dezelfde hand zijn. En blauw is winkans: die haal je niet uit de data maar uit een functie, en dat is ook feature engineering.</a:t>
+            </a:r>
+          </a:p>
+          <a:p/>
+          <a:p>
+            <a:r>
+              <a:t>Dat is de boodschap: een feature is niet per se een berekening op je eigen kolommen. Iets van buiten erbij halen telt net zo goed.</a:t>
             </a:r>
           </a:p>
         </p:txBody>
@@ -1656,19 +2000,19 @@
           <a:lstStyle/>
           <a:p>
             <a:r>
-              <a:t>Dit is de statistiek die ik er zelf bij heb gezocht, en de uitkomst verraste me: een correlatie van +0,45 tussen fold-percentage en eindstand. In dít veld deden de defensievere bots het beter.</a:t>
+              <a:t>Sluit het blok hiermee af, en laat ze er echt één bedenken — dat is beter dan een vierde voorbeeld van mij.</a:t>
             </a:r>
           </a:p>
           <a:p/>
           <a:p>
             <a:r>
-              <a:t>Belangrijk om erbij te zeggen: dat is geen algemene pokerwaarheid. Het zegt iets over dit veld — er zitten een paar bots in die alles callen, en die verliezen langzaam hun chips aan iedereen. Tegen een tafel vol defensieve bots zou de lijn andersom kunnen lopen.</a:t>
+              <a:t>Die derde is de mooiste omdat hij over volgorde gaat: shift() en cumsum() over een gesorteerde groep. Ze hebben shift in Werkcollege 6, Deel 7 gehad.</a:t>
             </a:r>
           </a:p>
           <a:p/>
           <a:p>
             <a:r>
-              <a:t>Goede vraag voor de zaal: is dit oorzaak of gevolg?</a:t>
+              <a:t>En het is een eerlijke opening naar de eindopdracht: dit is precies wat je in een echte dataset ook doet. Niemand geeft je de kolom die je nodig hebt.</a:t>
             </a:r>
           </a:p>
         </p:txBody>
@@ -1738,19 +2082,13 @@
           <a:lstStyle/>
           <a:p>
             <a:r>
-              <a:t>Dit is mijn favoriete plaat van de middag. Niemand heeft zijn code gedeeld, en toch zie je precies waar de klas zijn grens legt.</a:t>
+              <a:t>Kort ophalen, niet opnieuw uitleggen. Ze hebben dit vorige week gedaan; het punt is dat ze zien dat het nu ergens voor dient.</a:t>
             </a:r>
           </a:p>
           <a:p/>
           <a:p>
             <a:r>
-              <a:t>Let op het patroon: de diagonaal (paren) is licht, de linkerbovenhoek (aas, heer) is licht, en rechtsonder wordt alles weggegooid. Dat is de winkans-tabel uit Werkcollege 5 — maar dan afgeleid uit gedrag in plaats van uit een simulatie.</a:t>
-            </a:r>
-          </a:p>
-          <a:p/>
-          <a:p>
-            <a:r>
-              <a:t>De kleur is één hue van licht naar donker, want dit is een oplopende schaal en geen set categorieën.</a:t>
+              <a:t>De kleurkeuze mag je hardop verantwoorden: ik heb het groen-rood van onze eigen huisstijl door een kleurenblindheidstest gehaald en het zakte — de twee liggen voor protanopie te dicht bij elkaar. Vandaar blauw. Dat is precies het soort controle dat zij in Deel 6 hebben geleerd.</a:t>
             </a:r>
           </a:p>
         </p:txBody>
@@ -1820,19 +2158,19 @@
           <a:lstStyle/>
           <a:p>
             <a:r>
-              <a:t>Nu twee kleuren om een nulpunt heen, want winst heeft een richting.</a:t>
+              <a:t>Fold 65.9%, call 21.0%, raise 12.0%.</a:t>
             </a:r>
           </a:p>
           <a:p/>
           <a:p>
             <a:r>
-              <a:t>A-A staat ver boven de rest; de schaal is op het 92e percentiel afgekapt, anders zou al het andere wit worden. Dat is een keuze die je hardop moet maken en niet stilletjes.</a:t>
+              <a:t>Vraag het eerst aan de zaal voor je het laat zien: hoeveel procent denken jullie? De meesten schatten veel te laag.</a:t>
             </a:r>
           </a:p>
           <a:p/>
           <a:p>
             <a:r>
-              <a:t>De vraag die telt: leg deze plaat naast de vorige. Waar is een vakje donkergroen in déze, en donkergroen in die? Dan gooit de klas iets weg waar geld in zit.</a:t>
+              <a:t>En dan de vervolgvraag die de hele middag draagt: als twee op de drie beslissingen een fold is, wat betekent dat voor jouw bot? Agressie is goedkoop tegen een tafel die wegloopt.</a:t>
             </a:r>
           </a:p>
         </p:txBody>
@@ -1902,13 +2240,13 @@
           <a:lstStyle/>
           <a:p>
             <a:r>
-              <a:t>Hier komen 3.3 en 3.4 samen, en dit is wat ik ze mee wil geven: data science levert zelden een antwoord, het levert een kandidaat.</a:t>
+              <a:t>De mediaan ligt op 72,3%. De bot die hier oranje is, zit op 75,6%.</a:t>
             </a:r>
           </a:p>
           <a:p/>
           <a:p>
             <a:r>
-              <a:t>Die tweede vraag is de eerlijke. Wie deze hand speelde was misschien juist de betere bot, en dan meet je de bot en niet de hand. Dat heet selectie-effect, en het is de reden dat je het op donderdag toetst in plaats van het te geloven.</a:t>
+              <a:t>Laat ze zichzelf opzoeken — dat is de opdracht in 3.2. Wie boven de 80% zit doet nauwelijks mee; wie onder de 20% zit betaalt overal aan mee.</a:t>
             </a:r>
           </a:p>
         </p:txBody>
@@ -5130,7 +5468,7 @@
               </a:defRPr>
             </a:pPr>
             <a:r>
-              <a:t>HET SNIJPUNT</a:t>
+              <a:t>3.2 · EN JIJ?</a:t>
             </a:r>
           </a:p>
           <a:p>
@@ -5145,192 +5483,35 @@
               </a:defRPr>
             </a:pPr>
             <a:r>
-              <a:t>Weggegooid, en toch winstgevend</a:t>
-            </a:r>
-          </a:p>
-        </p:txBody>
-      </p:sp>
-      <p:sp>
-        <p:nvSpPr>
-          <p:cNvPr id="4" name="Rounded Rectangle 3"/>
-          <p:cNvSpPr/>
+              <a:t>Waar sta jij in die verdeling?</a:t>
+            </a:r>
+          </a:p>
+        </p:txBody>
+      </p:sp>
+      <p:pic>
+        <p:nvPicPr>
+          <p:cNvPr id="4" name="Picture 3" descr="wc8_foldverdeling.png"/>
+          <p:cNvPicPr>
+            <a:picLocks noChangeAspect="1"/>
+          </p:cNvPicPr>
           <p:nvPr/>
-        </p:nvSpPr>
-        <p:spPr>
-          <a:xfrm>
-            <a:off x="731520" y="1600200"/>
-            <a:ext cx="10698480" cy="4480560"/>
-          </a:xfrm>
-          <a:prstGeom prst="roundRect">
-            <a:avLst>
-              <a:gd name="adj" fmla="val 3000"/>
-            </a:avLst>
-          </a:prstGeom>
-          <a:solidFill>
-            <a:srgbClr val="FFFFFF"/>
-          </a:solidFill>
-          <a:ln w="9525">
-            <a:solidFill>
-              <a:srgbClr val="DCE1E6"/>
-            </a:solidFill>
-          </a:ln>
-          <a:effectLst/>
-        </p:spPr>
-        <p:style>
-          <a:lnRef idx="1">
-            <a:schemeClr val="accent1"/>
-          </a:lnRef>
-          <a:fillRef idx="3">
-            <a:schemeClr val="accent1"/>
-          </a:fillRef>
-          <a:effectRef idx="2">
-            <a:schemeClr val="accent1"/>
-          </a:effectRef>
-          <a:fontRef idx="minor">
-            <a:schemeClr val="lt1"/>
-          </a:fontRef>
-        </p:style>
-        <p:txBody>
-          <a:bodyPr rtlCol="0" anchor="ctr"/>
-          <a:lstStyle/>
-          <a:p>
-            <a:pPr algn="ctr"/>
-          </a:p>
-        </p:txBody>
-      </p:sp>
-      <p:sp>
-        <p:nvSpPr>
-          <p:cNvPr id="5" name="TextBox 4"/>
-          <p:cNvSpPr txBox="1"/>
-          <p:nvPr/>
-        </p:nvSpPr>
-        <p:spPr>
-          <a:xfrm>
-            <a:off x="1143000" y="1920240"/>
-            <a:ext cx="9875520" cy="3840480"/>
+        </p:nvPicPr>
+        <p:blipFill>
+          <a:blip r:embed="rId2"/>
+          <a:stretch>
+            <a:fillRect/>
+          </a:stretch>
+        </p:blipFill>
+        <p:spPr>
+          <a:xfrm>
+            <a:off x="1848403" y="1600200"/>
+            <a:ext cx="8494889" cy="4572000"/>
           </a:xfrm>
           <a:prstGeom prst="rect">
             <a:avLst/>
           </a:prstGeom>
-          <a:noFill/>
-        </p:spPr>
-        <p:txBody>
-          <a:bodyPr wrap="square">
-            <a:spAutoFit/>
-          </a:bodyPr>
-          <a:lstStyle/>
-          <a:p>
-            <a:pPr>
-              <a:spcBef>
-                <a:spcPts val="400"/>
-              </a:spcBef>
-              <a:defRPr sz="1400" b="0">
-                <a:solidFill>
-                  <a:srgbClr val="121E31"/>
-                </a:solidFill>
-                <a:latin typeface="Consolas"/>
-              </a:defRPr>
-            </a:pPr>
-            <a:r>
-              <a:t>2-2       97x gespeeld    64% gefold    gemiddeld +33 chips</a:t>
-            </a:r>
-          </a:p>
-          <a:p>
-            <a:pPr>
-              <a:spcBef>
-                <a:spcPts val="400"/>
-              </a:spcBef>
-              <a:defRPr sz="1400" b="0">
-                <a:solidFill>
-                  <a:srgbClr val="121E31"/>
-                </a:solidFill>
-                <a:latin typeface="Consolas"/>
-              </a:defRPr>
-            </a:pPr>
-            <a:r>
-              <a:t>Q-9      245x gespeeld    59% gefold    gemiddeld +16 chips</a:t>
-            </a:r>
-          </a:p>
-          <a:p>
-            <a:pPr>
-              <a:spcBef>
-                <a:spcPts val="400"/>
-              </a:spcBef>
-              <a:defRPr sz="1400" b="0">
-                <a:solidFill>
-                  <a:srgbClr val="121E31"/>
-                </a:solidFill>
-                <a:latin typeface="Consolas"/>
-              </a:defRPr>
-            </a:pPr>
-            <a:r>
-              <a:t>K-7      283x gespeeld    56% gefold    gemiddeld +14 chips</a:t>
-            </a:r>
-          </a:p>
-          <a:p>
-            <a:pPr>
-              <a:spcBef>
-                <a:spcPts val="400"/>
-              </a:spcBef>
-              <a:defRPr sz="1400" b="0">
-                <a:solidFill>
-                  <a:srgbClr val="121E31"/>
-                </a:solidFill>
-                <a:latin typeface="Consolas"/>
-              </a:defRPr>
-            </a:pPr>
-            <a:r>
-              <a:t>K-3      223x gespeeld    63% gefold    gemiddeld +12 chips</a:t>
-            </a:r>
-          </a:p>
-          <a:p>
-            <a:pPr>
-              <a:spcBef>
-                <a:spcPts val="400"/>
-              </a:spcBef>
-              <a:defRPr sz="1400" b="0">
-                <a:solidFill>
-                  <a:srgbClr val="121E31"/>
-                </a:solidFill>
-                <a:latin typeface="Consolas"/>
-              </a:defRPr>
-            </a:pPr>
-            <a:r>
-              <a:t>K-8      271x gespeeld    53% gefold    gemiddeld +8 chips</a:t>
-            </a:r>
-          </a:p>
-          <a:p>
-            <a:pPr>
-              <a:spcBef>
-                <a:spcPts val="1800"/>
-              </a:spcBef>
-              <a:defRPr sz="1400" b="1">
-                <a:solidFill>
-                  <a:srgbClr val="1B4D3E"/>
-                </a:solidFill>
-              </a:defRPr>
-            </a:pPr>
-            <a:r>
-              <a:t>Deze handen worden vaker gefold dan gespeeld, maar leveren geld op wanneer er wél mee gespeeld wordt.</a:t>
-            </a:r>
-          </a:p>
-          <a:p>
-            <a:pPr>
-              <a:spcBef>
-                <a:spcPts val="1200"/>
-              </a:spcBef>
-              <a:defRPr sz="1300" b="0">
-                <a:solidFill>
-                  <a:srgbClr val="505A64"/>
-                </a:solidFill>
-              </a:defRPr>
-            </a:pPr>
-            <a:r>
-              <a:t>Is dat een kans, of kijk je naar de handen die toevallig goed afliepen? Dat is precies de vraag die je met deze data niet helemaal kunt beslechten.</a:t>
-            </a:r>
-          </a:p>
-        </p:txBody>
-      </p:sp>
+        </p:spPr>
+      </p:pic>
     </p:spTree>
   </p:cSld>
   <p:clrMapOvr>
@@ -5423,7 +5604,7 @@
               </a:defRPr>
             </a:pPr>
             <a:r>
-              <a:t>JOUW EIGEN SPEL</a:t>
+              <a:t>DE VERRASSING</a:t>
             </a:r>
           </a:p>
           <a:p>
@@ -5438,14 +5619,14 @@
               </a:defRPr>
             </a:pPr>
             <a:r>
-              <a:t>Dezelfde bot, twintig keer een ander verhaal</a:t>
+              <a:t>Defensief spelen wérkt hier   ·   r = +0,45</a:t>
             </a:r>
           </a:p>
         </p:txBody>
       </p:sp>
       <p:pic>
         <p:nvPicPr>
-          <p:cNvPr id="4" name="Picture 3" descr="wc8_stackverloop.png"/>
+          <p:cNvPr id="4" name="Picture 3" descr="wc8_fold_vs_eindstand.png"/>
           <p:cNvPicPr>
             <a:picLocks noChangeAspect="1"/>
           </p:cNvPicPr>
@@ -5459,8 +5640,8 @@
         </p:blipFill>
         <p:spPr>
           <a:xfrm>
-            <a:off x="1957224" y="1600200"/>
-            <a:ext cx="8277246" cy="4572000"/>
+            <a:off x="1999178" y="1600200"/>
+            <a:ext cx="8193338" cy="4572000"/>
           </a:xfrm>
           <a:prstGeom prst="rect">
             <a:avLst/>
@@ -5559,7 +5740,7 @@
               </a:defRPr>
             </a:pPr>
             <a:r>
-              <a:t>JOUW ACTIES</a:t>
+              <a:t>3.3 · GEDRAG LEZEN</a:t>
             </a:r>
           </a:p>
           <a:p>
@@ -5574,14 +5755,14 @@
               </a:defRPr>
             </a:pPr>
             <a:r>
-              <a:t>Levert jouw raise meer op dan die van de klas?</a:t>
+              <a:t>De drempels van de klas, zonder één regel code te zien</a:t>
             </a:r>
           </a:p>
         </p:txBody>
       </p:sp>
       <p:pic>
         <p:nvPicPr>
-          <p:cNvPr id="4" name="Picture 3" descr="wc8_jij_tegenover_klas.png"/>
+          <p:cNvPr id="4" name="Picture 3" descr="wc8_matrix_fold.png"/>
           <p:cNvPicPr>
             <a:picLocks noChangeAspect="1"/>
           </p:cNvPicPr>
@@ -5595,8 +5776,8 @@
         </p:blipFill>
         <p:spPr>
           <a:xfrm>
-            <a:off x="1934404" y="1600200"/>
-            <a:ext cx="8322886" cy="4572000"/>
+            <a:off x="2855625" y="1600200"/>
+            <a:ext cx="6480444" cy="4572000"/>
           </a:xfrm>
           <a:prstGeom prst="rect">
             <a:avLst/>
@@ -5695,7 +5876,7 @@
               </a:defRPr>
             </a:pPr>
             <a:r>
-              <a:t>WAAR GING JE GELD HEEN?</a:t>
+              <a:t>3.4 · EN WAT LEVERDE OP?</a:t>
             </a:r>
           </a:p>
           <a:p>
@@ -5710,14 +5891,14 @@
               </a:defRPr>
             </a:pPr>
             <a:r>
-              <a:t>Niet het gemiddelde, maar het totaal</a:t>
+              <a:t>Dezelfde 91 handen, nu op geld</a:t>
             </a:r>
           </a:p>
         </p:txBody>
       </p:sp>
       <p:pic>
         <p:nvPicPr>
-          <p:cNvPr id="4" name="Picture 3" descr="wc8_totale_bijdrage.png"/>
+          <p:cNvPr id="4" name="Picture 3" descr="wc8_matrix_winst.png"/>
           <p:cNvPicPr>
             <a:picLocks noChangeAspect="1"/>
           </p:cNvPicPr>
@@ -5731,8 +5912,8 @@
         </p:blipFill>
         <p:spPr>
           <a:xfrm>
-            <a:off x="2261341" y="1600200"/>
-            <a:ext cx="7669013" cy="4572000"/>
+            <a:off x="3657698" y="1600200"/>
+            <a:ext cx="4876299" cy="4572000"/>
           </a:xfrm>
           <a:prstGeom prst="rect">
             <a:avLst/>
@@ -5831,7 +6012,7 @@
               </a:defRPr>
             </a:pPr>
             <a:r>
-              <a:t>3.5 · HOEVEEL IS TOEVAL?</a:t>
+              <a:t>HET SNIJPUNT</a:t>
             </a:r>
           </a:p>
           <a:p>
@@ -5846,35 +6027,192 @@
               </a:defRPr>
             </a:pPr>
             <a:r>
-              <a:t>Hoe stevig is een plek in de top-5?</a:t>
-            </a:r>
-          </a:p>
-        </p:txBody>
-      </p:sp>
-      <p:pic>
-        <p:nvPicPr>
-          <p:cNvPr id="4" name="Picture 3" descr="wc8_spreiding.png"/>
-          <p:cNvPicPr>
-            <a:picLocks noChangeAspect="1"/>
-          </p:cNvPicPr>
+              <a:t>Weggegooid, en toch winstgevend</a:t>
+            </a:r>
+          </a:p>
+        </p:txBody>
+      </p:sp>
+      <p:sp>
+        <p:nvSpPr>
+          <p:cNvPr id="4" name="Rounded Rectangle 3"/>
+          <p:cNvSpPr/>
           <p:nvPr/>
-        </p:nvPicPr>
-        <p:blipFill>
-          <a:blip r:embed="rId2"/>
-          <a:stretch>
-            <a:fillRect/>
-          </a:stretch>
-        </p:blipFill>
-        <p:spPr>
-          <a:xfrm>
-            <a:off x="2064489" y="1600200"/>
-            <a:ext cx="8062717" cy="4572000"/>
+        </p:nvSpPr>
+        <p:spPr>
+          <a:xfrm>
+            <a:off x="731520" y="1600200"/>
+            <a:ext cx="10698480" cy="4480560"/>
+          </a:xfrm>
+          <a:prstGeom prst="roundRect">
+            <a:avLst>
+              <a:gd name="adj" fmla="val 3000"/>
+            </a:avLst>
+          </a:prstGeom>
+          <a:solidFill>
+            <a:srgbClr val="FFFFFF"/>
+          </a:solidFill>
+          <a:ln w="9525">
+            <a:solidFill>
+              <a:srgbClr val="DCE1E6"/>
+            </a:solidFill>
+          </a:ln>
+          <a:effectLst/>
+        </p:spPr>
+        <p:style>
+          <a:lnRef idx="1">
+            <a:schemeClr val="accent1"/>
+          </a:lnRef>
+          <a:fillRef idx="3">
+            <a:schemeClr val="accent1"/>
+          </a:fillRef>
+          <a:effectRef idx="2">
+            <a:schemeClr val="accent1"/>
+          </a:effectRef>
+          <a:fontRef idx="minor">
+            <a:schemeClr val="lt1"/>
+          </a:fontRef>
+        </p:style>
+        <p:txBody>
+          <a:bodyPr rtlCol="0" anchor="ctr"/>
+          <a:lstStyle/>
+          <a:p>
+            <a:pPr algn="ctr"/>
+          </a:p>
+        </p:txBody>
+      </p:sp>
+      <p:sp>
+        <p:nvSpPr>
+          <p:cNvPr id="5" name="TextBox 4"/>
+          <p:cNvSpPr txBox="1"/>
+          <p:nvPr/>
+        </p:nvSpPr>
+        <p:spPr>
+          <a:xfrm>
+            <a:off x="1143000" y="1920240"/>
+            <a:ext cx="9875520" cy="3840480"/>
           </a:xfrm>
           <a:prstGeom prst="rect">
             <a:avLst/>
           </a:prstGeom>
-        </p:spPr>
-      </p:pic>
+          <a:noFill/>
+        </p:spPr>
+        <p:txBody>
+          <a:bodyPr wrap="square">
+            <a:spAutoFit/>
+          </a:bodyPr>
+          <a:lstStyle/>
+          <a:p>
+            <a:pPr>
+              <a:spcBef>
+                <a:spcPts val="400"/>
+              </a:spcBef>
+              <a:defRPr sz="1400" b="0">
+                <a:solidFill>
+                  <a:srgbClr val="121E31"/>
+                </a:solidFill>
+                <a:latin typeface="Consolas"/>
+              </a:defRPr>
+            </a:pPr>
+            <a:r>
+              <a:t>2-2       97x gespeeld    64% gefold    gemiddeld +33 chips</a:t>
+            </a:r>
+          </a:p>
+          <a:p>
+            <a:pPr>
+              <a:spcBef>
+                <a:spcPts val="400"/>
+              </a:spcBef>
+              <a:defRPr sz="1400" b="0">
+                <a:solidFill>
+                  <a:srgbClr val="121E31"/>
+                </a:solidFill>
+                <a:latin typeface="Consolas"/>
+              </a:defRPr>
+            </a:pPr>
+            <a:r>
+              <a:t>Q-9      245x gespeeld    59% gefold    gemiddeld +16 chips</a:t>
+            </a:r>
+          </a:p>
+          <a:p>
+            <a:pPr>
+              <a:spcBef>
+                <a:spcPts val="400"/>
+              </a:spcBef>
+              <a:defRPr sz="1400" b="0">
+                <a:solidFill>
+                  <a:srgbClr val="121E31"/>
+                </a:solidFill>
+                <a:latin typeface="Consolas"/>
+              </a:defRPr>
+            </a:pPr>
+            <a:r>
+              <a:t>K-7      283x gespeeld    56% gefold    gemiddeld +14 chips</a:t>
+            </a:r>
+          </a:p>
+          <a:p>
+            <a:pPr>
+              <a:spcBef>
+                <a:spcPts val="400"/>
+              </a:spcBef>
+              <a:defRPr sz="1400" b="0">
+                <a:solidFill>
+                  <a:srgbClr val="121E31"/>
+                </a:solidFill>
+                <a:latin typeface="Consolas"/>
+              </a:defRPr>
+            </a:pPr>
+            <a:r>
+              <a:t>K-3      223x gespeeld    63% gefold    gemiddeld +12 chips</a:t>
+            </a:r>
+          </a:p>
+          <a:p>
+            <a:pPr>
+              <a:spcBef>
+                <a:spcPts val="400"/>
+              </a:spcBef>
+              <a:defRPr sz="1400" b="0">
+                <a:solidFill>
+                  <a:srgbClr val="121E31"/>
+                </a:solidFill>
+                <a:latin typeface="Consolas"/>
+              </a:defRPr>
+            </a:pPr>
+            <a:r>
+              <a:t>K-8      271x gespeeld    53% gefold    gemiddeld +8 chips</a:t>
+            </a:r>
+          </a:p>
+          <a:p>
+            <a:pPr>
+              <a:spcBef>
+                <a:spcPts val="1800"/>
+              </a:spcBef>
+              <a:defRPr sz="1400" b="1">
+                <a:solidFill>
+                  <a:srgbClr val="1B4D3E"/>
+                </a:solidFill>
+              </a:defRPr>
+            </a:pPr>
+            <a:r>
+              <a:t>Deze handen worden vaker gefold dan gespeeld, maar leveren geld op wanneer er wél mee gespeeld wordt.</a:t>
+            </a:r>
+          </a:p>
+          <a:p>
+            <a:pPr>
+              <a:spcBef>
+                <a:spcPts val="1200"/>
+              </a:spcBef>
+              <a:defRPr sz="1300" b="0">
+                <a:solidFill>
+                  <a:srgbClr val="505A64"/>
+                </a:solidFill>
+              </a:defRPr>
+            </a:pPr>
+            <a:r>
+              <a:t>Is dat een kans, of kijk je naar de handen die toevallig goed afliepen? Dat is precies de vraag die je met deze data niet helemaal kunt beslechten.</a:t>
+            </a:r>
+          </a:p>
+        </p:txBody>
+      </p:sp>
     </p:spTree>
   </p:cSld>
   <p:clrMapOvr>
@@ -5967,7 +6305,7 @@
               </a:defRPr>
             </a:pPr>
             <a:r>
-              <a:t>EN DAARNA</a:t>
+              <a:t>JOUW EIGEN SPEL</a:t>
             </a:r>
           </a:p>
           <a:p>
@@ -5982,14 +6320,14 @@
               </a:defRPr>
             </a:pPr>
             <a:r>
-              <a:t>Waar kun je nog naar kijken?</a:t>
+              <a:t>Dezelfde bot, twintig keer een ander verhaal</a:t>
             </a:r>
           </a:p>
         </p:txBody>
       </p:sp>
       <p:pic>
         <p:nvPicPr>
-          <p:cNvPr id="4" name="Picture 3" descr="wc8_routes.png"/>
+          <p:cNvPr id="4" name="Picture 3" descr="wc8_stackverloop.png"/>
           <p:cNvPicPr>
             <a:picLocks noChangeAspect="1"/>
           </p:cNvPicPr>
@@ -6003,8 +6341,8 @@
         </p:blipFill>
         <p:spPr>
           <a:xfrm>
-            <a:off x="1339756" y="1600200"/>
-            <a:ext cx="9512183" cy="4572000"/>
+            <a:off x="1957224" y="1600200"/>
+            <a:ext cx="8277246" cy="4572000"/>
           </a:xfrm>
           <a:prstGeom prst="rect">
             <a:avLst/>
@@ -6103,7 +6441,7 @@
               </a:defRPr>
             </a:pPr>
             <a:r>
-              <a:t>HOE VERZIN JE ZO'N VRAAG?</a:t>
+              <a:t>JOUW ACTIES</a:t>
             </a:r>
           </a:p>
           <a:p>
@@ -6118,14 +6456,14 @@
               </a:defRPr>
             </a:pPr>
             <a:r>
-              <a:t>Je leest hem af van je eigen bot</a:t>
+              <a:t>Levert jouw raise meer op dan die van de klas?</a:t>
             </a:r>
           </a:p>
         </p:txBody>
       </p:sp>
       <p:pic>
         <p:nvPicPr>
-          <p:cNvPr id="4" name="Picture 3" descr="wc8_regels.png"/>
+          <p:cNvPr id="4" name="Picture 3" descr="wc8_jij_tegenover_klas.png"/>
           <p:cNvPicPr>
             <a:picLocks noChangeAspect="1"/>
           </p:cNvPicPr>
@@ -6139,8 +6477,8 @@
         </p:blipFill>
         <p:spPr>
           <a:xfrm>
-            <a:off x="1660198" y="1600200"/>
-            <a:ext cx="8871299" cy="4572000"/>
+            <a:off x="1934404" y="1600200"/>
+            <a:ext cx="8322886" cy="4572000"/>
           </a:xfrm>
           <a:prstGeom prst="rect">
             <a:avLst/>
@@ -6239,7 +6577,7 @@
               </a:defRPr>
             </a:pPr>
             <a:r>
-              <a:t>SPOOR 2</a:t>
+              <a:t>WAAR GING JE GELD HEEN?</a:t>
             </a:r>
           </a:p>
           <a:p>
@@ -6254,249 +6592,35 @@
               </a:defRPr>
             </a:pPr>
             <a:r>
-              <a:t>Laat je bot opschrijven wat hij doet</a:t>
-            </a:r>
-          </a:p>
-        </p:txBody>
-      </p:sp>
-      <p:sp>
-        <p:nvSpPr>
-          <p:cNvPr id="4" name="Rounded Rectangle 3"/>
-          <p:cNvSpPr/>
+              <a:t>Niet het gemiddelde, maar het totaal</a:t>
+            </a:r>
+          </a:p>
+        </p:txBody>
+      </p:sp>
+      <p:pic>
+        <p:nvPicPr>
+          <p:cNvPr id="4" name="Picture 3" descr="wc8_totale_bijdrage.png"/>
+          <p:cNvPicPr>
+            <a:picLocks noChangeAspect="1"/>
+          </p:cNvPicPr>
           <p:nvPr/>
-        </p:nvSpPr>
-        <p:spPr>
-          <a:xfrm>
-            <a:off x="731520" y="1600200"/>
-            <a:ext cx="10698480" cy="4480560"/>
-          </a:xfrm>
-          <a:prstGeom prst="roundRect">
-            <a:avLst>
-              <a:gd name="adj" fmla="val 3000"/>
-            </a:avLst>
-          </a:prstGeom>
-          <a:solidFill>
-            <a:srgbClr val="FFFFFF"/>
-          </a:solidFill>
-          <a:ln w="9525">
-            <a:solidFill>
-              <a:srgbClr val="DCE1E6"/>
-            </a:solidFill>
-          </a:ln>
-          <a:effectLst/>
-        </p:spPr>
-        <p:style>
-          <a:lnRef idx="1">
-            <a:schemeClr val="accent1"/>
-          </a:lnRef>
-          <a:fillRef idx="3">
-            <a:schemeClr val="accent1"/>
-          </a:fillRef>
-          <a:effectRef idx="2">
-            <a:schemeClr val="accent1"/>
-          </a:effectRef>
-          <a:fontRef idx="minor">
-            <a:schemeClr val="lt1"/>
-          </a:fontRef>
-        </p:style>
-        <p:txBody>
-          <a:bodyPr rtlCol="0" anchor="ctr"/>
-          <a:lstStyle/>
-          <a:p>
-            <a:pPr algn="ctr"/>
-          </a:p>
-        </p:txBody>
-      </p:sp>
-      <p:sp>
-        <p:nvSpPr>
-          <p:cNvPr id="5" name="TextBox 4"/>
-          <p:cNvSpPr txBox="1"/>
-          <p:nvPr/>
-        </p:nvSpPr>
-        <p:spPr>
-          <a:xfrm>
-            <a:off x="1143000" y="1920240"/>
-            <a:ext cx="9875520" cy="3840480"/>
+        </p:nvPicPr>
+        <p:blipFill>
+          <a:blip r:embed="rId2"/>
+          <a:stretch>
+            <a:fillRect/>
+          </a:stretch>
+        </p:blipFill>
+        <p:spPr>
+          <a:xfrm>
+            <a:off x="2261341" y="1600200"/>
+            <a:ext cx="7669013" cy="4572000"/>
           </a:xfrm>
           <a:prstGeom prst="rect">
             <a:avLst/>
           </a:prstGeom>
-          <a:noFill/>
-        </p:spPr>
-        <p:txBody>
-          <a:bodyPr wrap="square">
-            <a:spAutoFit/>
-          </a:bodyPr>
-          <a:lstStyle/>
-          <a:p>
-            <a:pPr>
-              <a:defRPr sz="1500" b="1">
-                <a:solidFill>
-                  <a:srgbClr val="121E31"/>
-                </a:solidFill>
-              </a:defRPr>
-            </a:pPr>
-            <a:r>
-              <a:t>Drie regels erbij, en je hebt data die niemand anders heeft:</a:t>
-            </a:r>
-          </a:p>
-          <a:p>
-            <a:pPr>
-              <a:spcBef>
-                <a:spcPts val="1400"/>
-              </a:spcBef>
-              <a:defRPr sz="1300" b="0">
-                <a:solidFill>
-                  <a:srgbClr val="121E31"/>
-                </a:solidFill>
-                <a:latin typeface="Consolas"/>
-              </a:defRPr>
-            </a:pPr>
-            <a:r>
-              <a:t>BESLISSINGEN = []</a:t>
-            </a:r>
-          </a:p>
-          <a:p>
-            <a:pPr>
-              <a:spcBef>
-                <a:spcPts val="200"/>
-              </a:spcBef>
-              <a:defRPr sz="1300" b="0">
-                <a:solidFill>
-                  <a:srgbClr val="121E31"/>
-                </a:solidFill>
-                <a:latin typeface="Consolas"/>
-              </a:defRPr>
-            </a:pPr>
-          </a:p>
-          <a:p>
-            <a:pPr>
-              <a:spcBef>
-                <a:spcPts val="200"/>
-              </a:spcBef>
-              <a:defRPr sz="1300" b="0">
-                <a:solidFill>
-                  <a:srgbClr val="505A64"/>
-                </a:solidFill>
-                <a:latin typeface="Consolas"/>
-              </a:defRPr>
-            </a:pPr>
-            <a:r>
-              <a:t>def kies_actie(hand, ..., ronde, pot, inzet_om_te_callen, ...):</a:t>
-            </a:r>
-          </a:p>
-          <a:p>
-            <a:pPr>
-              <a:spcBef>
-                <a:spcPts val="200"/>
-              </a:spcBef>
-              <a:defRPr sz="1300" b="0">
-                <a:solidFill>
-                  <a:srgbClr val="505A64"/>
-                </a:solidFill>
-                <a:latin typeface="Consolas"/>
-              </a:defRPr>
-            </a:pPr>
-            <a:r>
-              <a:t>    winkans = schat_winkans(...)</a:t>
-            </a:r>
-          </a:p>
-          <a:p>
-            <a:pPr>
-              <a:spcBef>
-                <a:spcPts val="200"/>
-              </a:spcBef>
-              <a:defRPr sz="1300" b="0">
-                <a:solidFill>
-                  <a:srgbClr val="505A64"/>
-                </a:solidFill>
-                <a:latin typeface="Consolas"/>
-              </a:defRPr>
-            </a:pPr>
-            <a:r>
-              <a:t>    ...</a:t>
-            </a:r>
-          </a:p>
-          <a:p>
-            <a:pPr>
-              <a:spcBef>
-                <a:spcPts val="200"/>
-              </a:spcBef>
-              <a:defRPr sz="1300" b="1">
-                <a:solidFill>
-                  <a:srgbClr val="1B4D3E"/>
-                </a:solidFill>
-                <a:latin typeface="Consolas"/>
-              </a:defRPr>
-            </a:pPr>
-            <a:r>
-              <a:t>    BESLISSINGEN.append({"ronde": ronde, "winkans": winkans,</a:t>
-            </a:r>
-          </a:p>
-          <a:p>
-            <a:pPr>
-              <a:spcBef>
-                <a:spcPts val="200"/>
-              </a:spcBef>
-              <a:defRPr sz="1300" b="1">
-                <a:solidFill>
-                  <a:srgbClr val="1B4D3E"/>
-                </a:solidFill>
-                <a:latin typeface="Consolas"/>
-              </a:defRPr>
-            </a:pPr>
-            <a:r>
-              <a:t>                         "pot": pot, "regel": "bluf", "actie": actie})</a:t>
-            </a:r>
-          </a:p>
-          <a:p>
-            <a:pPr>
-              <a:spcBef>
-                <a:spcPts val="200"/>
-              </a:spcBef>
-              <a:defRPr sz="1300" b="0">
-                <a:solidFill>
-                  <a:srgbClr val="505A64"/>
-                </a:solidFill>
-                <a:latin typeface="Consolas"/>
-              </a:defRPr>
-            </a:pPr>
-            <a:r>
-              <a:t>    return actie</a:t>
-            </a:r>
-          </a:p>
-          <a:p>
-            <a:pPr>
-              <a:spcBef>
-                <a:spcPts val="1600"/>
-              </a:spcBef>
-              <a:defRPr sz="1300" b="0">
-                <a:solidFill>
-                  <a:srgbClr val="121E31"/>
-                </a:solidFill>
-              </a:defRPr>
-            </a:pPr>
-            <a:r>
-              <a:t>Daarna speel_duel() draaien en pd.DataFrame(BESLISSINGEN) analyseren. Nu kun je wél zien wat je winkans per straat was, hoe vaak je bluf-regel vuurde, en welke van je vijf regels de beslissing nam.</a:t>
-            </a:r>
-          </a:p>
-          <a:p>
-            <a:pPr>
-              <a:spcBef>
-                <a:spcPts val="1000"/>
-              </a:spcBef>
-              <a:defRPr sz="1300" b="1">
-                <a:solidFill>
-                  <a:srgbClr val="B3261E"/>
-                </a:solidFill>
-              </a:defRPr>
-            </a:pPr>
-            <a:r>
-              <a:t>Let op: dit doe je LOKAAL. In je inzending hoort geen logboek — daar telt alleen wat kies_actie teruggeeft.</a:t>
-            </a:r>
-          </a:p>
-        </p:txBody>
-      </p:sp>
+        </p:spPr>
+      </p:pic>
     </p:spTree>
   </p:cSld>
   <p:clrMapOvr>
@@ -6589,7 +6713,7 @@
               </a:defRPr>
             </a:pPr>
             <a:r>
-              <a:t>SPOOR 3</a:t>
+              <a:t>3.5 · HOEVEEL IS TOEVAL?</a:t>
             </a:r>
           </a:p>
           <a:p>
@@ -6604,187 +6728,35 @@
               </a:defRPr>
             </a:pPr>
             <a:r>
-              <a:t>Meer weten over je hand — dat kan gewoon</a:t>
-            </a:r>
-          </a:p>
-        </p:txBody>
-      </p:sp>
-      <p:sp>
-        <p:nvSpPr>
-          <p:cNvPr id="4" name="Rounded Rectangle 3"/>
-          <p:cNvSpPr/>
+              <a:t>Hoe stevig is een plek in de top-5?</a:t>
+            </a:r>
+          </a:p>
+        </p:txBody>
+      </p:sp>
+      <p:pic>
+        <p:nvPicPr>
+          <p:cNvPr id="4" name="Picture 3" descr="wc8_spreiding.png"/>
+          <p:cNvPicPr>
+            <a:picLocks noChangeAspect="1"/>
+          </p:cNvPicPr>
           <p:nvPr/>
-        </p:nvSpPr>
-        <p:spPr>
-          <a:xfrm>
-            <a:off x="731520" y="1600200"/>
-            <a:ext cx="10698480" cy="4480560"/>
-          </a:xfrm>
-          <a:prstGeom prst="roundRect">
-            <a:avLst>
-              <a:gd name="adj" fmla="val 3000"/>
-            </a:avLst>
-          </a:prstGeom>
-          <a:solidFill>
-            <a:srgbClr val="FFFFFF"/>
-          </a:solidFill>
-          <a:ln w="9525">
-            <a:solidFill>
-              <a:srgbClr val="DCE1E6"/>
-            </a:solidFill>
-          </a:ln>
-          <a:effectLst/>
-        </p:spPr>
-        <p:style>
-          <a:lnRef idx="1">
-            <a:schemeClr val="accent1"/>
-          </a:lnRef>
-          <a:fillRef idx="3">
-            <a:schemeClr val="accent1"/>
-          </a:fillRef>
-          <a:effectRef idx="2">
-            <a:schemeClr val="accent1"/>
-          </a:effectRef>
-          <a:fontRef idx="minor">
-            <a:schemeClr val="lt1"/>
-          </a:fontRef>
-        </p:style>
-        <p:txBody>
-          <a:bodyPr rtlCol="0" anchor="ctr"/>
-          <a:lstStyle/>
-          <a:p>
-            <a:pPr algn="ctr"/>
-          </a:p>
-        </p:txBody>
-      </p:sp>
-      <p:sp>
-        <p:nvSpPr>
-          <p:cNvPr id="5" name="TextBox 4"/>
-          <p:cNvSpPr txBox="1"/>
-          <p:nvPr/>
-        </p:nvSpPr>
-        <p:spPr>
-          <a:xfrm>
-            <a:off x="1143000" y="1920240"/>
-            <a:ext cx="9875520" cy="3840480"/>
+        </p:nvPicPr>
+        <p:blipFill>
+          <a:blip r:embed="rId2"/>
+          <a:stretch>
+            <a:fillRect/>
+          </a:stretch>
+        </p:blipFill>
+        <p:spPr>
+          <a:xfrm>
+            <a:off x="2064489" y="1600200"/>
+            <a:ext cx="8062717" cy="4572000"/>
           </a:xfrm>
           <a:prstGeom prst="rect">
             <a:avLst/>
           </a:prstGeom>
-          <a:noFill/>
-        </p:spPr>
-        <p:txBody>
-          <a:bodyPr wrap="square">
-            <a:spAutoFit/>
-          </a:bodyPr>
-          <a:lstStyle/>
-          <a:p>
-            <a:pPr>
-              <a:defRPr sz="1400" b="1">
-                <a:solidFill>
-                  <a:srgbClr val="1B4D3E"/>
-                </a:solidFill>
-                <a:latin typeface="Consolas"/>
-              </a:defRPr>
-            </a:pPr>
-            <a:r>
-              <a:t>schat_winkans(hand_met_kleur, bord=bord, tegenstanders=n)</a:t>
-            </a:r>
-          </a:p>
-          <a:p>
-            <a:pPr>
-              <a:spcBef>
-                <a:spcPts val="600"/>
-              </a:spcBef>
-              <a:defRPr sz="1300" b="0">
-                <a:solidFill>
-                  <a:srgbClr val="121E31"/>
-                </a:solidFill>
-              </a:defRPr>
-            </a:pPr>
-            <a:r>
-              <a:t>De winkans verandert enorm met het bord en met het aantal tegenstanders. Dezelfde A-K: 38,5% preflop, 75,5% na de ene flop, 22,3% na de andere.</a:t>
-            </a:r>
-          </a:p>
-          <a:p>
-            <a:pPr>
-              <a:spcBef>
-                <a:spcPts val="1800"/>
-              </a:spcBef>
-              <a:defRPr sz="1400" b="1">
-                <a:solidFill>
-                  <a:srgbClr val="1B4D3E"/>
-                </a:solidFill>
-                <a:latin typeface="Consolas"/>
-              </a:defRPr>
-            </a:pPr>
-            <a:r>
-              <a:t>beschrijf_hand(hand_met_kleur, bord)</a:t>
-            </a:r>
-          </a:p>
-          <a:p>
-            <a:pPr>
-              <a:spcBef>
-                <a:spcPts val="600"/>
-              </a:spcBef>
-              <a:defRPr sz="1300" b="0">
-                <a:solidFill>
-                  <a:srgbClr val="121E31"/>
-                </a:solidFill>
-              </a:defRPr>
-            </a:pPr>
-            <a:r>
-              <a:t>Geeft terug wat je wérkelijk hebt: 'one pair', 'three of a kind', 'flush'. Daarmee kun je regels schrijven op handsóórt in plaats van op een percentage.</a:t>
-            </a:r>
-          </a:p>
-          <a:p>
-            <a:pPr>
-              <a:spcBef>
-                <a:spcPts val="1800"/>
-              </a:spcBef>
-              <a:defRPr sz="1400" b="1">
-                <a:solidFill>
-                  <a:srgbClr val="1B4D3E"/>
-                </a:solidFill>
-                <a:latin typeface="Consolas"/>
-              </a:defRPr>
-            </a:pPr>
-            <a:r>
-              <a:t>vergelijk_handen(jouw_hand, andere_hand, bord)</a:t>
-            </a:r>
-          </a:p>
-          <a:p>
-            <a:pPr>
-              <a:spcBef>
-                <a:spcPts val="600"/>
-              </a:spcBef>
-              <a:defRPr sz="1300" b="0">
-                <a:solidFill>
-                  <a:srgbClr val="121E31"/>
-                </a:solidFill>
-              </a:defRPr>
-            </a:pPr>
-            <a:r>
-              <a:t>Wie wint deze showdown? Zelfde evaluatie als het toernooi, dus inclusief kickers.</a:t>
-            </a:r>
-          </a:p>
-          <a:p>
-            <a:pPr>
-              <a:spcBef>
-                <a:spcPts val="1800"/>
-              </a:spcBef>
-              <a:defRPr sz="1300" b="1">
-                <a:solidFill>
-                  <a:srgbClr val="505A64"/>
-                </a:solidFill>
-              </a:defRPr>
-            </a:pPr>
-            <a:r>
-              <a:t>Alle drie staan in _hulpfuncties_week3.py. Je kent ze uit Werkcollege 5, en in week 5 heeft bijna niemand ze nog gebruikt.</a:t>
-            </a:r>
-          </a:p>
-        </p:txBody>
-      </p:sp>
+        </p:spPr>
+      </p:pic>
     </p:spTree>
   </p:cSld>
   <p:clrMapOvr>
@@ -6877,7 +6849,7 @@
               </a:defRPr>
             </a:pPr>
             <a:r>
-              <a:t>EN NU JIJ</a:t>
+              <a:t>EN DAARNA</a:t>
             </a:r>
           </a:p>
           <a:p>
@@ -6892,203 +6864,35 @@
               </a:defRPr>
             </a:pPr>
             <a:r>
-              <a:t>Verander één ding, en schrijf op waarom</a:t>
-            </a:r>
-          </a:p>
-        </p:txBody>
-      </p:sp>
-      <p:sp>
-        <p:nvSpPr>
-          <p:cNvPr id="4" name="Rounded Rectangle 3"/>
-          <p:cNvSpPr/>
+              <a:t>Waar kun je nog naar kijken?</a:t>
+            </a:r>
+          </a:p>
+        </p:txBody>
+      </p:sp>
+      <p:pic>
+        <p:nvPicPr>
+          <p:cNvPr id="4" name="Picture 3" descr="wc8_routes.png"/>
+          <p:cNvPicPr>
+            <a:picLocks noChangeAspect="1"/>
+          </p:cNvPicPr>
           <p:nvPr/>
-        </p:nvSpPr>
-        <p:spPr>
-          <a:xfrm>
-            <a:off x="731520" y="1600200"/>
-            <a:ext cx="10698480" cy="4480560"/>
-          </a:xfrm>
-          <a:prstGeom prst="roundRect">
-            <a:avLst>
-              <a:gd name="adj" fmla="val 3000"/>
-            </a:avLst>
-          </a:prstGeom>
-          <a:solidFill>
-            <a:srgbClr val="FFFFFF"/>
-          </a:solidFill>
-          <a:ln w="9525">
-            <a:solidFill>
-              <a:srgbClr val="DCE1E6"/>
-            </a:solidFill>
-          </a:ln>
-          <a:effectLst/>
-        </p:spPr>
-        <p:style>
-          <a:lnRef idx="1">
-            <a:schemeClr val="accent1"/>
-          </a:lnRef>
-          <a:fillRef idx="3">
-            <a:schemeClr val="accent1"/>
-          </a:fillRef>
-          <a:effectRef idx="2">
-            <a:schemeClr val="accent1"/>
-          </a:effectRef>
-          <a:fontRef idx="minor">
-            <a:schemeClr val="lt1"/>
-          </a:fontRef>
-        </p:style>
-        <p:txBody>
-          <a:bodyPr rtlCol="0" anchor="ctr"/>
-          <a:lstStyle/>
-          <a:p>
-            <a:pPr algn="ctr"/>
-          </a:p>
-        </p:txBody>
-      </p:sp>
-      <p:sp>
-        <p:nvSpPr>
-          <p:cNvPr id="5" name="TextBox 4"/>
-          <p:cNvSpPr txBox="1"/>
-          <p:nvPr/>
-        </p:nvSpPr>
-        <p:spPr>
-          <a:xfrm>
-            <a:off x="1143000" y="1920240"/>
-            <a:ext cx="9875520" cy="3840480"/>
+        </p:nvPicPr>
+        <p:blipFill>
+          <a:blip r:embed="rId2"/>
+          <a:stretch>
+            <a:fillRect/>
+          </a:stretch>
+        </p:blipFill>
+        <p:spPr>
+          <a:xfrm>
+            <a:off x="1339756" y="1600200"/>
+            <a:ext cx="9512183" cy="4572000"/>
           </a:xfrm>
           <a:prstGeom prst="rect">
             <a:avLst/>
           </a:prstGeom>
-          <a:noFill/>
-        </p:spPr>
-        <p:txBody>
-          <a:bodyPr wrap="square">
-            <a:spAutoFit/>
-          </a:bodyPr>
-          <a:lstStyle/>
-          <a:p>
-            <a:pPr>
-              <a:defRPr sz="1800" b="1">
-                <a:solidFill>
-                  <a:srgbClr val="1B4D3E"/>
-                </a:solidFill>
-              </a:defRPr>
-            </a:pPr>
-            <a:r>
-              <a:t>Eén ding. Niet drie.</a:t>
-            </a:r>
-          </a:p>
-          <a:p>
-            <a:pPr>
-              <a:spcBef>
-                <a:spcPts val="1000"/>
-              </a:spcBef>
-              <a:defRPr sz="1400" b="0">
-                <a:solidFill>
-                  <a:srgbClr val="121E31"/>
-                </a:solidFill>
-              </a:defRPr>
-            </a:pPr>
-            <a:r>
-              <a:t>Verander je er drie tegelijk en je bot wordt beter, dan weet je donderdag nog steeds niet welke van de drie het deed.</a:t>
-            </a:r>
-          </a:p>
-          <a:p>
-            <a:pPr>
-              <a:spcBef>
-                <a:spcPts val="1800"/>
-              </a:spcBef>
-              <a:defRPr sz="1500" b="1">
-                <a:solidFill>
-                  <a:srgbClr val="121E31"/>
-                </a:solidFill>
-              </a:defRPr>
-            </a:pPr>
-            <a:r>
-              <a:t>Kandidaten uit vanmiddag:</a:t>
-            </a:r>
-          </a:p>
-          <a:p>
-            <a:pPr>
-              <a:spcBef>
-                <a:spcPts val="600"/>
-              </a:spcBef>
-              <a:defRPr sz="1400" b="0">
-                <a:solidFill>
-                  <a:srgbClr val="121E31"/>
-                </a:solidFill>
-                <a:latin typeface="Consolas"/>
-              </a:defRPr>
-            </a:pPr>
-            <a:r>
-              <a:t>een van je drempels — STERK, MEEDOEN, ZWAK</a:t>
-            </a:r>
-          </a:p>
-          <a:p>
-            <a:pPr>
-              <a:spcBef>
-                <a:spcPts val="400"/>
-              </a:spcBef>
-              <a:defRPr sz="1400" b="0">
-                <a:solidFill>
-                  <a:srgbClr val="121E31"/>
-                </a:solidFill>
-                <a:latin typeface="Consolas"/>
-              </a:defRPr>
-            </a:pPr>
-            <a:r>
-              <a:t>TEGENSTANDERS, want dat verschuift je hele schaal</a:t>
-            </a:r>
-          </a:p>
-          <a:p>
-            <a:pPr>
-              <a:spcBef>
-                <a:spcPts val="400"/>
-              </a:spcBef>
-              <a:defRPr sz="1400" b="0">
-                <a:solidFill>
-                  <a:srgbClr val="121E31"/>
-                </a:solidFill>
-                <a:latin typeface="Consolas"/>
-              </a:defRPr>
-            </a:pPr>
-            <a:r>
-              <a:t>de volgorde van je regels</a:t>
-            </a:r>
-          </a:p>
-          <a:p>
-            <a:pPr>
-              <a:spcBef>
-                <a:spcPts val="400"/>
-              </a:spcBef>
-              <a:defRPr sz="1400" b="0">
-                <a:solidFill>
-                  <a:srgbClr val="121E31"/>
-                </a:solidFill>
-                <a:latin typeface="Consolas"/>
-              </a:defRPr>
-            </a:pPr>
-            <a:r>
-              <a:t>een hand uit het snijpunt niet meer wegfolden</a:t>
-            </a:r>
-          </a:p>
-          <a:p>
-            <a:pPr>
-              <a:spcBef>
-                <a:spcPts val="1800"/>
-              </a:spcBef>
-              <a:defRPr sz="1400" b="1">
-                <a:solidFill>
-                  <a:srgbClr val="B3261E"/>
-                </a:solidFill>
-              </a:defRPr>
-            </a:pPr>
-            <a:r>
-              <a:t>Schrijf in een comment op WAT je veranderde en WELK getal van vanmiddag die keuze onderbouwt. Dat is ook je antwoord bij de overhoring van volgende week.</a:t>
-            </a:r>
-          </a:p>
-        </p:txBody>
-      </p:sp>
+        </p:spPr>
+      </p:pic>
     </p:spTree>
   </p:cSld>
   <p:clrMapOvr>
@@ -7233,7 +7037,7 @@
 </p:sld>
 </file>
 
-<file path=ppt/slides/slide3.xml><?xml version="1.0" encoding="utf-8"?>
+<file path=ppt/slides/slide20.xml><?xml version="1.0" encoding="utf-8"?>
 <p:sld xmlns:a="http://schemas.openxmlformats.org/drawingml/2006/main" xmlns:p="http://schemas.openxmlformats.org/presentationml/2006/main" xmlns:r="http://schemas.openxmlformats.org/officeDocument/2006/relationships">
   <p:cSld>
     <p:spTree>
@@ -7317,7 +7121,7 @@
               </a:defRPr>
             </a:pPr>
             <a:r>
-              <a:t>DE DATASET</a:t>
+              <a:t>HOE VERZIN JE ZO'N VRAAG?</a:t>
             </a:r>
           </a:p>
           <a:p>
@@ -7332,7 +7136,143 @@
               </a:defRPr>
             </a:pPr>
             <a:r>
-              <a:t>Wat je vandaag in handen hebt</a:t>
+              <a:t>Je leest hem af van je eigen bot</a:t>
+            </a:r>
+          </a:p>
+        </p:txBody>
+      </p:sp>
+      <p:pic>
+        <p:nvPicPr>
+          <p:cNvPr id="4" name="Picture 3" descr="wc8_regels.png"/>
+          <p:cNvPicPr>
+            <a:picLocks noChangeAspect="1"/>
+          </p:cNvPicPr>
+          <p:nvPr/>
+        </p:nvPicPr>
+        <p:blipFill>
+          <a:blip r:embed="rId2"/>
+          <a:stretch>
+            <a:fillRect/>
+          </a:stretch>
+        </p:blipFill>
+        <p:spPr>
+          <a:xfrm>
+            <a:off x="1660198" y="1600200"/>
+            <a:ext cx="8871299" cy="4572000"/>
+          </a:xfrm>
+          <a:prstGeom prst="rect">
+            <a:avLst/>
+          </a:prstGeom>
+        </p:spPr>
+      </p:pic>
+    </p:spTree>
+  </p:cSld>
+  <p:clrMapOvr>
+    <a:masterClrMapping/>
+  </p:clrMapOvr>
+</p:sld>
+</file>
+
+<file path=ppt/slides/slide21.xml><?xml version="1.0" encoding="utf-8"?>
+<p:sld xmlns:a="http://schemas.openxmlformats.org/drawingml/2006/main" xmlns:p="http://schemas.openxmlformats.org/presentationml/2006/main" xmlns:r="http://schemas.openxmlformats.org/officeDocument/2006/relationships">
+  <p:cSld>
+    <p:spTree>
+      <p:nvGrpSpPr>
+        <p:cNvPr id="1" name=""/>
+        <p:cNvGrpSpPr/>
+        <p:nvPr/>
+      </p:nvGrpSpPr>
+      <p:grpSpPr/>
+      <p:sp>
+        <p:nvSpPr>
+          <p:cNvPr id="2" name="Rectangle 1"/>
+          <p:cNvSpPr/>
+          <p:nvPr/>
+        </p:nvSpPr>
+        <p:spPr>
+          <a:xfrm>
+            <a:off x="0" y="0"/>
+            <a:ext cx="12191695" cy="6858000"/>
+          </a:xfrm>
+          <a:prstGeom prst="rect">
+            <a:avLst/>
+          </a:prstGeom>
+          <a:solidFill>
+            <a:srgbClr val="F8F9FA"/>
+          </a:solidFill>
+          <a:ln>
+            <a:noFill/>
+          </a:ln>
+          <a:effectLst/>
+        </p:spPr>
+        <p:style>
+          <a:lnRef idx="1">
+            <a:schemeClr val="accent1"/>
+          </a:lnRef>
+          <a:fillRef idx="3">
+            <a:schemeClr val="accent1"/>
+          </a:fillRef>
+          <a:effectRef idx="2">
+            <a:schemeClr val="accent1"/>
+          </a:effectRef>
+          <a:fontRef idx="minor">
+            <a:schemeClr val="lt1"/>
+          </a:fontRef>
+        </p:style>
+        <p:txBody>
+          <a:bodyPr rtlCol="0" anchor="ctr"/>
+          <a:lstStyle/>
+          <a:p>
+            <a:pPr algn="ctr"/>
+          </a:p>
+        </p:txBody>
+      </p:sp>
+      <p:sp>
+        <p:nvSpPr>
+          <p:cNvPr id="3" name="TextBox 2"/>
+          <p:cNvSpPr txBox="1"/>
+          <p:nvPr/>
+        </p:nvSpPr>
+        <p:spPr>
+          <a:xfrm>
+            <a:off x="731520" y="384048"/>
+            <a:ext cx="10698480" cy="1005840"/>
+          </a:xfrm>
+          <a:prstGeom prst="rect">
+            <a:avLst/>
+          </a:prstGeom>
+          <a:noFill/>
+        </p:spPr>
+        <p:txBody>
+          <a:bodyPr wrap="square">
+            <a:spAutoFit/>
+          </a:bodyPr>
+          <a:lstStyle/>
+          <a:p>
+            <a:pPr>
+              <a:defRPr sz="1000" b="1">
+                <a:solidFill>
+                  <a:srgbClr val="1B4D3E"/>
+                </a:solidFill>
+              </a:defRPr>
+            </a:pPr>
+            <a:r>
+              <a:t>SPOOR 2</a:t>
+            </a:r>
+          </a:p>
+          <a:p>
+            <a:pPr>
+              <a:spcBef>
+                <a:spcPts val="400"/>
+              </a:spcBef>
+              <a:defRPr sz="2400" b="1">
+                <a:solidFill>
+                  <a:srgbClr val="121E31"/>
+                </a:solidFill>
+              </a:defRPr>
+            </a:pPr>
+            <a:r>
+              <a:t>Laat je bot opschrijven wat hij doet</a:t>
             </a:r>
           </a:p>
         </p:txBody>
@@ -7408,14 +7348,652 @@
           <a:lstStyle/>
           <a:p>
             <a:pPr>
-              <a:defRPr sz="2000" b="1">
+              <a:defRPr sz="1500" b="1">
+                <a:solidFill>
+                  <a:srgbClr val="121E31"/>
+                </a:solidFill>
+              </a:defRPr>
+            </a:pPr>
+            <a:r>
+              <a:t>Drie regels erbij, en je hebt data die niemand anders heeft:</a:t>
+            </a:r>
+          </a:p>
+          <a:p>
+            <a:pPr>
+              <a:spcBef>
+                <a:spcPts val="1400"/>
+              </a:spcBef>
+              <a:defRPr sz="1300" b="0">
+                <a:solidFill>
+                  <a:srgbClr val="121E31"/>
+                </a:solidFill>
+                <a:latin typeface="Consolas"/>
+              </a:defRPr>
+            </a:pPr>
+            <a:r>
+              <a:t>BESLISSINGEN = []</a:t>
+            </a:r>
+          </a:p>
+          <a:p>
+            <a:pPr>
+              <a:spcBef>
+                <a:spcPts val="200"/>
+              </a:spcBef>
+              <a:defRPr sz="1300" b="0">
+                <a:solidFill>
+                  <a:srgbClr val="121E31"/>
+                </a:solidFill>
+                <a:latin typeface="Consolas"/>
+              </a:defRPr>
+            </a:pPr>
+          </a:p>
+          <a:p>
+            <a:pPr>
+              <a:spcBef>
+                <a:spcPts val="200"/>
+              </a:spcBef>
+              <a:defRPr sz="1300" b="0">
+                <a:solidFill>
+                  <a:srgbClr val="505A64"/>
+                </a:solidFill>
+                <a:latin typeface="Consolas"/>
+              </a:defRPr>
+            </a:pPr>
+            <a:r>
+              <a:t>def kies_actie(hand, ..., ronde, pot, inzet_om_te_callen, ...):</a:t>
+            </a:r>
+          </a:p>
+          <a:p>
+            <a:pPr>
+              <a:spcBef>
+                <a:spcPts val="200"/>
+              </a:spcBef>
+              <a:defRPr sz="1300" b="0">
+                <a:solidFill>
+                  <a:srgbClr val="505A64"/>
+                </a:solidFill>
+                <a:latin typeface="Consolas"/>
+              </a:defRPr>
+            </a:pPr>
+            <a:r>
+              <a:t>    winkans = schat_winkans(...)</a:t>
+            </a:r>
+          </a:p>
+          <a:p>
+            <a:pPr>
+              <a:spcBef>
+                <a:spcPts val="200"/>
+              </a:spcBef>
+              <a:defRPr sz="1300" b="0">
+                <a:solidFill>
+                  <a:srgbClr val="505A64"/>
+                </a:solidFill>
+                <a:latin typeface="Consolas"/>
+              </a:defRPr>
+            </a:pPr>
+            <a:r>
+              <a:t>    ...</a:t>
+            </a:r>
+          </a:p>
+          <a:p>
+            <a:pPr>
+              <a:spcBef>
+                <a:spcPts val="200"/>
+              </a:spcBef>
+              <a:defRPr sz="1300" b="1">
                 <a:solidFill>
                   <a:srgbClr val="1B4D3E"/>
                 </a:solidFill>
-              </a:defRPr>
-            </a:pPr>
-            <a:r>
-              <a:t>30 bots  ·  20 simulaties  ·  24.000 regels</a:t>
+                <a:latin typeface="Consolas"/>
+              </a:defRPr>
+            </a:pPr>
+            <a:r>
+              <a:t>    BESLISSINGEN.append({"ronde": ronde, "winkans": winkans,</a:t>
+            </a:r>
+          </a:p>
+          <a:p>
+            <a:pPr>
+              <a:spcBef>
+                <a:spcPts val="200"/>
+              </a:spcBef>
+              <a:defRPr sz="1300" b="1">
+                <a:solidFill>
+                  <a:srgbClr val="1B4D3E"/>
+                </a:solidFill>
+                <a:latin typeface="Consolas"/>
+              </a:defRPr>
+            </a:pPr>
+            <a:r>
+              <a:t>                         "pot": pot, "regel": "bluf", "actie": actie})</a:t>
+            </a:r>
+          </a:p>
+          <a:p>
+            <a:pPr>
+              <a:spcBef>
+                <a:spcPts val="200"/>
+              </a:spcBef>
+              <a:defRPr sz="1300" b="0">
+                <a:solidFill>
+                  <a:srgbClr val="505A64"/>
+                </a:solidFill>
+                <a:latin typeface="Consolas"/>
+              </a:defRPr>
+            </a:pPr>
+            <a:r>
+              <a:t>    return actie</a:t>
+            </a:r>
+          </a:p>
+          <a:p>
+            <a:pPr>
+              <a:spcBef>
+                <a:spcPts val="1600"/>
+              </a:spcBef>
+              <a:defRPr sz="1300" b="0">
+                <a:solidFill>
+                  <a:srgbClr val="121E31"/>
+                </a:solidFill>
+              </a:defRPr>
+            </a:pPr>
+            <a:r>
+              <a:t>Daarna speel_duel() draaien en pd.DataFrame(BESLISSINGEN) analyseren. Nu kun je wél zien wat je winkans per straat was, hoe vaak je bluf-regel vuurde, en welke van je vijf regels de beslissing nam.</a:t>
+            </a:r>
+          </a:p>
+          <a:p>
+            <a:pPr>
+              <a:spcBef>
+                <a:spcPts val="1000"/>
+              </a:spcBef>
+              <a:defRPr sz="1300" b="1">
+                <a:solidFill>
+                  <a:srgbClr val="B3261E"/>
+                </a:solidFill>
+              </a:defRPr>
+            </a:pPr>
+            <a:r>
+              <a:t>Let op: dit doe je LOKAAL. In je inzending hoort geen logboek — daar telt alleen wat kies_actie teruggeeft.</a:t>
+            </a:r>
+          </a:p>
+        </p:txBody>
+      </p:sp>
+    </p:spTree>
+  </p:cSld>
+  <p:clrMapOvr>
+    <a:masterClrMapping/>
+  </p:clrMapOvr>
+</p:sld>
+</file>
+
+<file path=ppt/slides/slide22.xml><?xml version="1.0" encoding="utf-8"?>
+<p:sld xmlns:a="http://schemas.openxmlformats.org/drawingml/2006/main" xmlns:p="http://schemas.openxmlformats.org/presentationml/2006/main" xmlns:r="http://schemas.openxmlformats.org/officeDocument/2006/relationships">
+  <p:cSld>
+    <p:spTree>
+      <p:nvGrpSpPr>
+        <p:cNvPr id="1" name=""/>
+        <p:cNvGrpSpPr/>
+        <p:nvPr/>
+      </p:nvGrpSpPr>
+      <p:grpSpPr/>
+      <p:sp>
+        <p:nvSpPr>
+          <p:cNvPr id="2" name="Rectangle 1"/>
+          <p:cNvSpPr/>
+          <p:nvPr/>
+        </p:nvSpPr>
+        <p:spPr>
+          <a:xfrm>
+            <a:off x="0" y="0"/>
+            <a:ext cx="12191695" cy="6858000"/>
+          </a:xfrm>
+          <a:prstGeom prst="rect">
+            <a:avLst/>
+          </a:prstGeom>
+          <a:solidFill>
+            <a:srgbClr val="F8F9FA"/>
+          </a:solidFill>
+          <a:ln>
+            <a:noFill/>
+          </a:ln>
+          <a:effectLst/>
+        </p:spPr>
+        <p:style>
+          <a:lnRef idx="1">
+            <a:schemeClr val="accent1"/>
+          </a:lnRef>
+          <a:fillRef idx="3">
+            <a:schemeClr val="accent1"/>
+          </a:fillRef>
+          <a:effectRef idx="2">
+            <a:schemeClr val="accent1"/>
+          </a:effectRef>
+          <a:fontRef idx="minor">
+            <a:schemeClr val="lt1"/>
+          </a:fontRef>
+        </p:style>
+        <p:txBody>
+          <a:bodyPr rtlCol="0" anchor="ctr"/>
+          <a:lstStyle/>
+          <a:p>
+            <a:pPr algn="ctr"/>
+          </a:p>
+        </p:txBody>
+      </p:sp>
+      <p:sp>
+        <p:nvSpPr>
+          <p:cNvPr id="3" name="TextBox 2"/>
+          <p:cNvSpPr txBox="1"/>
+          <p:nvPr/>
+        </p:nvSpPr>
+        <p:spPr>
+          <a:xfrm>
+            <a:off x="731520" y="384048"/>
+            <a:ext cx="10698480" cy="1005840"/>
+          </a:xfrm>
+          <a:prstGeom prst="rect">
+            <a:avLst/>
+          </a:prstGeom>
+          <a:noFill/>
+        </p:spPr>
+        <p:txBody>
+          <a:bodyPr wrap="square">
+            <a:spAutoFit/>
+          </a:bodyPr>
+          <a:lstStyle/>
+          <a:p>
+            <a:pPr>
+              <a:defRPr sz="1000" b="1">
+                <a:solidFill>
+                  <a:srgbClr val="1B4D3E"/>
+                </a:solidFill>
+              </a:defRPr>
+            </a:pPr>
+            <a:r>
+              <a:t>SPOOR 3</a:t>
+            </a:r>
+          </a:p>
+          <a:p>
+            <a:pPr>
+              <a:spcBef>
+                <a:spcPts val="400"/>
+              </a:spcBef>
+              <a:defRPr sz="2400" b="1">
+                <a:solidFill>
+                  <a:srgbClr val="121E31"/>
+                </a:solidFill>
+              </a:defRPr>
+            </a:pPr>
+            <a:r>
+              <a:t>Meer weten over je hand — dat kan gewoon</a:t>
+            </a:r>
+          </a:p>
+        </p:txBody>
+      </p:sp>
+      <p:sp>
+        <p:nvSpPr>
+          <p:cNvPr id="4" name="Rounded Rectangle 3"/>
+          <p:cNvSpPr/>
+          <p:nvPr/>
+        </p:nvSpPr>
+        <p:spPr>
+          <a:xfrm>
+            <a:off x="731520" y="1600200"/>
+            <a:ext cx="10698480" cy="4480560"/>
+          </a:xfrm>
+          <a:prstGeom prst="roundRect">
+            <a:avLst>
+              <a:gd name="adj" fmla="val 3000"/>
+            </a:avLst>
+          </a:prstGeom>
+          <a:solidFill>
+            <a:srgbClr val="FFFFFF"/>
+          </a:solidFill>
+          <a:ln w="9525">
+            <a:solidFill>
+              <a:srgbClr val="DCE1E6"/>
+            </a:solidFill>
+          </a:ln>
+          <a:effectLst/>
+        </p:spPr>
+        <p:style>
+          <a:lnRef idx="1">
+            <a:schemeClr val="accent1"/>
+          </a:lnRef>
+          <a:fillRef idx="3">
+            <a:schemeClr val="accent1"/>
+          </a:fillRef>
+          <a:effectRef idx="2">
+            <a:schemeClr val="accent1"/>
+          </a:effectRef>
+          <a:fontRef idx="minor">
+            <a:schemeClr val="lt1"/>
+          </a:fontRef>
+        </p:style>
+        <p:txBody>
+          <a:bodyPr rtlCol="0" anchor="ctr"/>
+          <a:lstStyle/>
+          <a:p>
+            <a:pPr algn="ctr"/>
+          </a:p>
+        </p:txBody>
+      </p:sp>
+      <p:sp>
+        <p:nvSpPr>
+          <p:cNvPr id="5" name="TextBox 4"/>
+          <p:cNvSpPr txBox="1"/>
+          <p:nvPr/>
+        </p:nvSpPr>
+        <p:spPr>
+          <a:xfrm>
+            <a:off x="1143000" y="1920240"/>
+            <a:ext cx="9875520" cy="3840480"/>
+          </a:xfrm>
+          <a:prstGeom prst="rect">
+            <a:avLst/>
+          </a:prstGeom>
+          <a:noFill/>
+        </p:spPr>
+        <p:txBody>
+          <a:bodyPr wrap="square">
+            <a:spAutoFit/>
+          </a:bodyPr>
+          <a:lstStyle/>
+          <a:p>
+            <a:pPr>
+              <a:defRPr sz="1400" b="1">
+                <a:solidFill>
+                  <a:srgbClr val="1B4D3E"/>
+                </a:solidFill>
+                <a:latin typeface="Consolas"/>
+              </a:defRPr>
+            </a:pPr>
+            <a:r>
+              <a:t>schat_winkans(hand_met_kleur, bord=bord, tegenstanders=n)</a:t>
+            </a:r>
+          </a:p>
+          <a:p>
+            <a:pPr>
+              <a:spcBef>
+                <a:spcPts val="600"/>
+              </a:spcBef>
+              <a:defRPr sz="1300" b="0">
+                <a:solidFill>
+                  <a:srgbClr val="121E31"/>
+                </a:solidFill>
+              </a:defRPr>
+            </a:pPr>
+            <a:r>
+              <a:t>De winkans verandert enorm met het bord en met het aantal tegenstanders. Dezelfde A-K: 38,5% preflop, 75,5% na de ene flop, 22,3% na de andere.</a:t>
+            </a:r>
+          </a:p>
+          <a:p>
+            <a:pPr>
+              <a:spcBef>
+                <a:spcPts val="1800"/>
+              </a:spcBef>
+              <a:defRPr sz="1400" b="1">
+                <a:solidFill>
+                  <a:srgbClr val="1B4D3E"/>
+                </a:solidFill>
+                <a:latin typeface="Consolas"/>
+              </a:defRPr>
+            </a:pPr>
+            <a:r>
+              <a:t>beschrijf_hand(hand_met_kleur, bord)</a:t>
+            </a:r>
+          </a:p>
+          <a:p>
+            <a:pPr>
+              <a:spcBef>
+                <a:spcPts val="600"/>
+              </a:spcBef>
+              <a:defRPr sz="1300" b="0">
+                <a:solidFill>
+                  <a:srgbClr val="121E31"/>
+                </a:solidFill>
+              </a:defRPr>
+            </a:pPr>
+            <a:r>
+              <a:t>Geeft terug wat je wérkelijk hebt: 'one pair', 'three of a kind', 'flush'. Daarmee kun je regels schrijven op handsóórt in plaats van op een percentage.</a:t>
+            </a:r>
+          </a:p>
+          <a:p>
+            <a:pPr>
+              <a:spcBef>
+                <a:spcPts val="1800"/>
+              </a:spcBef>
+              <a:defRPr sz="1400" b="1">
+                <a:solidFill>
+                  <a:srgbClr val="1B4D3E"/>
+                </a:solidFill>
+                <a:latin typeface="Consolas"/>
+              </a:defRPr>
+            </a:pPr>
+            <a:r>
+              <a:t>vergelijk_handen(jouw_hand, andere_hand, bord)</a:t>
+            </a:r>
+          </a:p>
+          <a:p>
+            <a:pPr>
+              <a:spcBef>
+                <a:spcPts val="600"/>
+              </a:spcBef>
+              <a:defRPr sz="1300" b="0">
+                <a:solidFill>
+                  <a:srgbClr val="121E31"/>
+                </a:solidFill>
+              </a:defRPr>
+            </a:pPr>
+            <a:r>
+              <a:t>Wie wint deze showdown? Zelfde evaluatie als het toernooi, dus inclusief kickers.</a:t>
+            </a:r>
+          </a:p>
+          <a:p>
+            <a:pPr>
+              <a:spcBef>
+                <a:spcPts val="1800"/>
+              </a:spcBef>
+              <a:defRPr sz="1300" b="1">
+                <a:solidFill>
+                  <a:srgbClr val="505A64"/>
+                </a:solidFill>
+              </a:defRPr>
+            </a:pPr>
+            <a:r>
+              <a:t>Alle drie staan in _hulpfuncties_week3.py. Je kent ze uit Werkcollege 5, en in week 5 heeft bijna niemand ze nog gebruikt.</a:t>
+            </a:r>
+          </a:p>
+        </p:txBody>
+      </p:sp>
+    </p:spTree>
+  </p:cSld>
+  <p:clrMapOvr>
+    <a:masterClrMapping/>
+  </p:clrMapOvr>
+</p:sld>
+</file>
+
+<file path=ppt/slides/slide23.xml><?xml version="1.0" encoding="utf-8"?>
+<p:sld xmlns:a="http://schemas.openxmlformats.org/drawingml/2006/main" xmlns:p="http://schemas.openxmlformats.org/presentationml/2006/main" xmlns:r="http://schemas.openxmlformats.org/officeDocument/2006/relationships">
+  <p:cSld>
+    <p:spTree>
+      <p:nvGrpSpPr>
+        <p:cNvPr id="1" name=""/>
+        <p:cNvGrpSpPr/>
+        <p:nvPr/>
+      </p:nvGrpSpPr>
+      <p:grpSpPr/>
+      <p:sp>
+        <p:nvSpPr>
+          <p:cNvPr id="2" name="Rectangle 1"/>
+          <p:cNvSpPr/>
+          <p:nvPr/>
+        </p:nvSpPr>
+        <p:spPr>
+          <a:xfrm>
+            <a:off x="0" y="0"/>
+            <a:ext cx="12191695" cy="6858000"/>
+          </a:xfrm>
+          <a:prstGeom prst="rect">
+            <a:avLst/>
+          </a:prstGeom>
+          <a:solidFill>
+            <a:srgbClr val="F8F9FA"/>
+          </a:solidFill>
+          <a:ln>
+            <a:noFill/>
+          </a:ln>
+          <a:effectLst/>
+        </p:spPr>
+        <p:style>
+          <a:lnRef idx="1">
+            <a:schemeClr val="accent1"/>
+          </a:lnRef>
+          <a:fillRef idx="3">
+            <a:schemeClr val="accent1"/>
+          </a:fillRef>
+          <a:effectRef idx="2">
+            <a:schemeClr val="accent1"/>
+          </a:effectRef>
+          <a:fontRef idx="minor">
+            <a:schemeClr val="lt1"/>
+          </a:fontRef>
+        </p:style>
+        <p:txBody>
+          <a:bodyPr rtlCol="0" anchor="ctr"/>
+          <a:lstStyle/>
+          <a:p>
+            <a:pPr algn="ctr"/>
+          </a:p>
+        </p:txBody>
+      </p:sp>
+      <p:sp>
+        <p:nvSpPr>
+          <p:cNvPr id="3" name="TextBox 2"/>
+          <p:cNvSpPr txBox="1"/>
+          <p:nvPr/>
+        </p:nvSpPr>
+        <p:spPr>
+          <a:xfrm>
+            <a:off x="731520" y="384048"/>
+            <a:ext cx="10698480" cy="1005840"/>
+          </a:xfrm>
+          <a:prstGeom prst="rect">
+            <a:avLst/>
+          </a:prstGeom>
+          <a:noFill/>
+        </p:spPr>
+        <p:txBody>
+          <a:bodyPr wrap="square">
+            <a:spAutoFit/>
+          </a:bodyPr>
+          <a:lstStyle/>
+          <a:p>
+            <a:pPr>
+              <a:defRPr sz="1000" b="1">
+                <a:solidFill>
+                  <a:srgbClr val="1B4D3E"/>
+                </a:solidFill>
+              </a:defRPr>
+            </a:pPr>
+            <a:r>
+              <a:t>EN NU JIJ</a:t>
+            </a:r>
+          </a:p>
+          <a:p>
+            <a:pPr>
+              <a:spcBef>
+                <a:spcPts val="400"/>
+              </a:spcBef>
+              <a:defRPr sz="2400" b="1">
+                <a:solidFill>
+                  <a:srgbClr val="121E31"/>
+                </a:solidFill>
+              </a:defRPr>
+            </a:pPr>
+            <a:r>
+              <a:t>Verander één ding, en schrijf op waarom</a:t>
+            </a:r>
+          </a:p>
+        </p:txBody>
+      </p:sp>
+      <p:sp>
+        <p:nvSpPr>
+          <p:cNvPr id="4" name="Rounded Rectangle 3"/>
+          <p:cNvSpPr/>
+          <p:nvPr/>
+        </p:nvSpPr>
+        <p:spPr>
+          <a:xfrm>
+            <a:off x="731520" y="1600200"/>
+            <a:ext cx="10698480" cy="4480560"/>
+          </a:xfrm>
+          <a:prstGeom prst="roundRect">
+            <a:avLst>
+              <a:gd name="adj" fmla="val 3000"/>
+            </a:avLst>
+          </a:prstGeom>
+          <a:solidFill>
+            <a:srgbClr val="FFFFFF"/>
+          </a:solidFill>
+          <a:ln w="9525">
+            <a:solidFill>
+              <a:srgbClr val="DCE1E6"/>
+            </a:solidFill>
+          </a:ln>
+          <a:effectLst/>
+        </p:spPr>
+        <p:style>
+          <a:lnRef idx="1">
+            <a:schemeClr val="accent1"/>
+          </a:lnRef>
+          <a:fillRef idx="3">
+            <a:schemeClr val="accent1"/>
+          </a:fillRef>
+          <a:effectRef idx="2">
+            <a:schemeClr val="accent1"/>
+          </a:effectRef>
+          <a:fontRef idx="minor">
+            <a:schemeClr val="lt1"/>
+          </a:fontRef>
+        </p:style>
+        <p:txBody>
+          <a:bodyPr rtlCol="0" anchor="ctr"/>
+          <a:lstStyle/>
+          <a:p>
+            <a:pPr algn="ctr"/>
+          </a:p>
+        </p:txBody>
+      </p:sp>
+      <p:sp>
+        <p:nvSpPr>
+          <p:cNvPr id="5" name="TextBox 4"/>
+          <p:cNvSpPr txBox="1"/>
+          <p:nvPr/>
+        </p:nvSpPr>
+        <p:spPr>
+          <a:xfrm>
+            <a:off x="1143000" y="1920240"/>
+            <a:ext cx="9875520" cy="3840480"/>
+          </a:xfrm>
+          <a:prstGeom prst="rect">
+            <a:avLst/>
+          </a:prstGeom>
+          <a:noFill/>
+        </p:spPr>
+        <p:txBody>
+          <a:bodyPr wrap="square">
+            <a:spAutoFit/>
+          </a:bodyPr>
+          <a:lstStyle/>
+          <a:p>
+            <a:pPr>
+              <a:defRPr sz="1800" b="1">
+                <a:solidFill>
+                  <a:srgbClr val="1B4D3E"/>
+                </a:solidFill>
+              </a:defRPr>
+            </a:pPr>
+            <a:r>
+              <a:t>Eén ding. Niet drie.</a:t>
             </a:r>
           </a:p>
           <a:p>
@@ -7430,37 +8008,7 @@
               </a:defRPr>
             </a:pPr>
             <a:r>
-              <a:t>Daarvan 20.912 regels waarin een bot écht aan zet kwam.</a:t>
-            </a:r>
-          </a:p>
-          <a:p>
-            <a:pPr>
-              <a:spcBef>
-                <a:spcPts val="800"/>
-              </a:spcBef>
-              <a:defRPr sz="1400" b="0">
-                <a:solidFill>
-                  <a:srgbClr val="121E31"/>
-                </a:solidFill>
-              </a:defRPr>
-            </a:pPr>
-            <a:r>
-              <a:t>Per regel: welke bot, welke simulatie, welke hand, welke twee kaarten, welke actie, en zijn stack daarna.</a:t>
-            </a:r>
-          </a:p>
-          <a:p>
-            <a:pPr>
-              <a:spcBef>
-                <a:spcPts val="800"/>
-              </a:spcBef>
-              <a:defRPr sz="1400" b="0">
-                <a:solidFill>
-                  <a:srgbClr val="121E31"/>
-                </a:solidFill>
-              </a:defRPr>
-            </a:pPr>
-            <a:r>
-              <a:t>Die laatste twee samen geven je wat elke hand opleverde — en daarmee kun je alles hieronder uitrekenen.</a:t>
+              <a:t>Verander je er drie tegelijk en je bot wordt beter, dan weet je donderdag nog steeds niet welke van de drie het deed.</a:t>
             </a:r>
           </a:p>
           <a:p>
@@ -7470,16 +8018,231 @@
               </a:spcBef>
               <a:defRPr sz="1500" b="1">
                 <a:solidFill>
+                  <a:srgbClr val="121E31"/>
+                </a:solidFill>
+              </a:defRPr>
+            </a:pPr>
+            <a:r>
+              <a:t>Kandidaten uit vanmiddag:</a:t>
+            </a:r>
+          </a:p>
+          <a:p>
+            <a:pPr>
+              <a:spcBef>
+                <a:spcPts val="600"/>
+              </a:spcBef>
+              <a:defRPr sz="1400" b="0">
+                <a:solidFill>
+                  <a:srgbClr val="121E31"/>
+                </a:solidFill>
+                <a:latin typeface="Consolas"/>
+              </a:defRPr>
+            </a:pPr>
+            <a:r>
+              <a:t>een van je drempels — STERK, MEEDOEN, ZWAK</a:t>
+            </a:r>
+          </a:p>
+          <a:p>
+            <a:pPr>
+              <a:spcBef>
+                <a:spcPts val="400"/>
+              </a:spcBef>
+              <a:defRPr sz="1400" b="0">
+                <a:solidFill>
+                  <a:srgbClr val="121E31"/>
+                </a:solidFill>
+                <a:latin typeface="Consolas"/>
+              </a:defRPr>
+            </a:pPr>
+            <a:r>
+              <a:t>TEGENSTANDERS, want dat verschuift je hele schaal</a:t>
+            </a:r>
+          </a:p>
+          <a:p>
+            <a:pPr>
+              <a:spcBef>
+                <a:spcPts val="400"/>
+              </a:spcBef>
+              <a:defRPr sz="1400" b="0">
+                <a:solidFill>
+                  <a:srgbClr val="121E31"/>
+                </a:solidFill>
+                <a:latin typeface="Consolas"/>
+              </a:defRPr>
+            </a:pPr>
+            <a:r>
+              <a:t>de volgorde van je regels</a:t>
+            </a:r>
+          </a:p>
+          <a:p>
+            <a:pPr>
+              <a:spcBef>
+                <a:spcPts val="400"/>
+              </a:spcBef>
+              <a:defRPr sz="1400" b="0">
+                <a:solidFill>
+                  <a:srgbClr val="121E31"/>
+                </a:solidFill>
+                <a:latin typeface="Consolas"/>
+              </a:defRPr>
+            </a:pPr>
+            <a:r>
+              <a:t>een hand uit het snijpunt niet meer wegfolden</a:t>
+            </a:r>
+          </a:p>
+          <a:p>
+            <a:pPr>
+              <a:spcBef>
+                <a:spcPts val="1800"/>
+              </a:spcBef>
+              <a:defRPr sz="1400" b="1">
+                <a:solidFill>
                   <a:srgbClr val="B3261E"/>
                 </a:solidFill>
               </a:defRPr>
             </a:pPr>
             <a:r>
-              <a:t>Dit is geen oefendataset. Dit heeft de klas vanmorgen zelf gespeeld.</a:t>
-            </a:r>
-          </a:p>
-        </p:txBody>
-      </p:sp>
+              <a:t>Schrijf in een comment op WAT je veranderde en WELK getal van vanmiddag die keuze onderbouwt. Dat is ook je antwoord bij de overhoring van volgende week.</a:t>
+            </a:r>
+          </a:p>
+        </p:txBody>
+      </p:sp>
+    </p:spTree>
+  </p:cSld>
+  <p:clrMapOvr>
+    <a:masterClrMapping/>
+  </p:clrMapOvr>
+</p:sld>
+</file>
+
+<file path=ppt/slides/slide3.xml><?xml version="1.0" encoding="utf-8"?>
+<p:sld xmlns:a="http://schemas.openxmlformats.org/drawingml/2006/main" xmlns:p="http://schemas.openxmlformats.org/presentationml/2006/main" xmlns:r="http://schemas.openxmlformats.org/officeDocument/2006/relationships">
+  <p:cSld>
+    <p:spTree>
+      <p:nvGrpSpPr>
+        <p:cNvPr id="1" name=""/>
+        <p:cNvGrpSpPr/>
+        <p:nvPr/>
+      </p:nvGrpSpPr>
+      <p:grpSpPr/>
+      <p:sp>
+        <p:nvSpPr>
+          <p:cNvPr id="2" name="Rectangle 1"/>
+          <p:cNvSpPr/>
+          <p:nvPr/>
+        </p:nvSpPr>
+        <p:spPr>
+          <a:xfrm>
+            <a:off x="0" y="0"/>
+            <a:ext cx="12191695" cy="6858000"/>
+          </a:xfrm>
+          <a:prstGeom prst="rect">
+            <a:avLst/>
+          </a:prstGeom>
+          <a:solidFill>
+            <a:srgbClr val="F8F9FA"/>
+          </a:solidFill>
+          <a:ln>
+            <a:noFill/>
+          </a:ln>
+          <a:effectLst/>
+        </p:spPr>
+        <p:style>
+          <a:lnRef idx="1">
+            <a:schemeClr val="accent1"/>
+          </a:lnRef>
+          <a:fillRef idx="3">
+            <a:schemeClr val="accent1"/>
+          </a:fillRef>
+          <a:effectRef idx="2">
+            <a:schemeClr val="accent1"/>
+          </a:effectRef>
+          <a:fontRef idx="minor">
+            <a:schemeClr val="lt1"/>
+          </a:fontRef>
+        </p:style>
+        <p:txBody>
+          <a:bodyPr rtlCol="0" anchor="ctr"/>
+          <a:lstStyle/>
+          <a:p>
+            <a:pPr algn="ctr"/>
+          </a:p>
+        </p:txBody>
+      </p:sp>
+      <p:sp>
+        <p:nvSpPr>
+          <p:cNvPr id="3" name="TextBox 2"/>
+          <p:cNvSpPr txBox="1"/>
+          <p:nvPr/>
+        </p:nvSpPr>
+        <p:spPr>
+          <a:xfrm>
+            <a:off x="731520" y="384048"/>
+            <a:ext cx="10698480" cy="1005840"/>
+          </a:xfrm>
+          <a:prstGeom prst="rect">
+            <a:avLst/>
+          </a:prstGeom>
+          <a:noFill/>
+        </p:spPr>
+        <p:txBody>
+          <a:bodyPr wrap="square">
+            <a:spAutoFit/>
+          </a:bodyPr>
+          <a:lstStyle/>
+          <a:p>
+            <a:pPr>
+              <a:defRPr sz="1000" b="1">
+                <a:solidFill>
+                  <a:srgbClr val="1B4D3E"/>
+                </a:solidFill>
+              </a:defRPr>
+            </a:pPr>
+            <a:r>
+              <a:t>DE RUWE DATA</a:t>
+            </a:r>
+          </a:p>
+          <a:p>
+            <a:pPr>
+              <a:spcBef>
+                <a:spcPts val="400"/>
+              </a:spcBef>
+              <a:defRPr sz="2400" b="1">
+                <a:solidFill>
+                  <a:srgbClr val="121E31"/>
+                </a:solidFill>
+              </a:defRPr>
+            </a:pPr>
+            <a:r>
+              <a:t>Eén regel per bot per hand</a:t>
+            </a:r>
+          </a:p>
+        </p:txBody>
+      </p:sp>
+      <p:pic>
+        <p:nvPicPr>
+          <p:cNvPr id="4" name="Picture 3" descr="wc8_ruwe_data.png"/>
+          <p:cNvPicPr>
+            <a:picLocks noChangeAspect="1"/>
+          </p:cNvPicPr>
+          <p:nvPr/>
+        </p:nvPicPr>
+        <p:blipFill>
+          <a:blip r:embed="rId2"/>
+          <a:stretch>
+            <a:fillRect/>
+          </a:stretch>
+        </p:blipFill>
+        <p:spPr>
+          <a:xfrm>
+            <a:off x="655167" y="1600200"/>
+            <a:ext cx="10881360" cy="4500244"/>
+          </a:xfrm>
+          <a:prstGeom prst="rect">
+            <a:avLst/>
+          </a:prstGeom>
+        </p:spPr>
+      </p:pic>
     </p:spTree>
   </p:cSld>
   <p:clrMapOvr>
@@ -7572,7 +8335,7 @@
               </a:defRPr>
             </a:pPr>
             <a:r>
-              <a:t>TERUG NAAR VISUAL MAANDAG</a:t>
+              <a:t>STAND OF STROOM</a:t>
             </a:r>
           </a:p>
           <a:p>
@@ -7587,189 +8350,35 @@
               </a:defRPr>
             </a:pPr>
             <a:r>
-              <a:t>Vijf dingen die je vandaag meteen nodig hebt</a:t>
-            </a:r>
-          </a:p>
-        </p:txBody>
-      </p:sp>
-      <p:sp>
-        <p:nvSpPr>
-          <p:cNvPr id="4" name="Rounded Rectangle 3"/>
-          <p:cNvSpPr/>
+              <a:t>Dezelfde bot, dezelfde handen</a:t>
+            </a:r>
+          </a:p>
+        </p:txBody>
+      </p:sp>
+      <p:pic>
+        <p:nvPicPr>
+          <p:cNvPr id="4" name="Picture 3" descr="wc8_stand_stroom.png"/>
+          <p:cNvPicPr>
+            <a:picLocks noChangeAspect="1"/>
+          </p:cNvPicPr>
           <p:nvPr/>
-        </p:nvSpPr>
-        <p:spPr>
-          <a:xfrm>
-            <a:off x="731520" y="1600200"/>
-            <a:ext cx="10698480" cy="4480560"/>
-          </a:xfrm>
-          <a:prstGeom prst="roundRect">
-            <a:avLst>
-              <a:gd name="adj" fmla="val 3000"/>
-            </a:avLst>
-          </a:prstGeom>
-          <a:solidFill>
-            <a:srgbClr val="FFFFFF"/>
-          </a:solidFill>
-          <a:ln w="9525">
-            <a:solidFill>
-              <a:srgbClr val="DCE1E6"/>
-            </a:solidFill>
-          </a:ln>
-          <a:effectLst/>
-        </p:spPr>
-        <p:style>
-          <a:lnRef idx="1">
-            <a:schemeClr val="accent1"/>
-          </a:lnRef>
-          <a:fillRef idx="3">
-            <a:schemeClr val="accent1"/>
-          </a:fillRef>
-          <a:effectRef idx="2">
-            <a:schemeClr val="accent1"/>
-          </a:effectRef>
-          <a:fontRef idx="minor">
-            <a:schemeClr val="lt1"/>
-          </a:fontRef>
-        </p:style>
-        <p:txBody>
-          <a:bodyPr rtlCol="0" anchor="ctr"/>
-          <a:lstStyle/>
-          <a:p>
-            <a:pPr algn="ctr"/>
-          </a:p>
-        </p:txBody>
-      </p:sp>
-      <p:sp>
-        <p:nvSpPr>
-          <p:cNvPr id="5" name="TextBox 4"/>
-          <p:cNvSpPr txBox="1"/>
-          <p:nvPr/>
-        </p:nvSpPr>
-        <p:spPr>
-          <a:xfrm>
-            <a:off x="1143000" y="1920240"/>
-            <a:ext cx="9875520" cy="3840480"/>
+        </p:nvPicPr>
+        <p:blipFill>
+          <a:blip r:embed="rId2"/>
+          <a:stretch>
+            <a:fillRect/>
+          </a:stretch>
+        </p:blipFill>
+        <p:spPr>
+          <a:xfrm>
+            <a:off x="655167" y="1600200"/>
+            <a:ext cx="10881360" cy="4520922"/>
           </a:xfrm>
           <a:prstGeom prst="rect">
             <a:avLst/>
           </a:prstGeom>
-          <a:noFill/>
-        </p:spPr>
-        <p:txBody>
-          <a:bodyPr wrap="square">
-            <a:spAutoFit/>
-          </a:bodyPr>
-          <a:lstStyle/>
-          <a:p>
-            <a:pPr>
-              <a:defRPr sz="1500" b="0">
-                <a:solidFill>
-                  <a:srgbClr val="121E31"/>
-                </a:solidFill>
-                <a:latin typeface="Consolas"/>
-              </a:defRPr>
-            </a:pPr>
-            <a:r>
-              <a:t>1.  filteren        dertig bots in één plot is spaghetti</a:t>
-            </a:r>
-          </a:p>
-          <a:p>
-            <a:pPr>
-              <a:spcBef>
-                <a:spcPts val="600"/>
-              </a:spcBef>
-              <a:defRPr sz="1500" b="0">
-                <a:solidFill>
-                  <a:srgbClr val="121E31"/>
-                </a:solidFill>
-                <a:latin typeface="Consolas"/>
-              </a:defRPr>
-            </a:pPr>
-            <a:r>
-              <a:t>2.  uitlichten      jouw bot in kleur, de rest grijs</a:t>
-            </a:r>
-          </a:p>
-          <a:p>
-            <a:pPr>
-              <a:spcBef>
-                <a:spcPts val="600"/>
-              </a:spcBef>
-              <a:defRPr sz="1500" b="1">
-                <a:solidFill>
-                  <a:srgbClr val="1B4D3E"/>
-                </a:solidFill>
-                <a:latin typeface="Consolas"/>
-              </a:defRPr>
-            </a:pPr>
-            <a:r>
-              <a:t>3.  actietitel      beweer iets, benoem niet alleen</a:t>
-            </a:r>
-          </a:p>
-          <a:p>
-            <a:pPr>
-              <a:spcBef>
-                <a:spcPts val="600"/>
-              </a:spcBef>
-              <a:defRPr sz="1500" b="0">
-                <a:solidFill>
-                  <a:srgbClr val="121E31"/>
-                </a:solidFill>
-                <a:latin typeface="Consolas"/>
-              </a:defRPr>
-            </a:pPr>
-            <a:r>
-              <a:t>4.  annoteren       waar gebeurt het? zet er een streep bij</a:t>
-            </a:r>
-          </a:p>
-          <a:p>
-            <a:pPr>
-              <a:spcBef>
-                <a:spcPts val="600"/>
-              </a:spcBef>
-              <a:defRPr sz="1500" b="0">
-                <a:solidFill>
-                  <a:srgbClr val="121E31"/>
-                </a:solidFill>
-                <a:latin typeface="Consolas"/>
-              </a:defRPr>
-            </a:pPr>
-            <a:r>
-              <a:t>5.  contrast-check  leest je kleur ook voor de rest van de klas?</a:t>
-            </a:r>
-          </a:p>
-          <a:p>
-            <a:pPr>
-              <a:spcBef>
-                <a:spcPts val="2000"/>
-              </a:spcBef>
-              <a:defRPr sz="1300" b="0">
-                <a:solidFill>
-                  <a:srgbClr val="505A64"/>
-                </a:solidFill>
-              </a:defRPr>
-            </a:pPr>
-            <a:r>
-              <a:t>Alles wat hierna komt is daarop gebouwd. De kleurschalen lopen van blauw naar groen en niet van rood naar groen, omdat rood en groen voor een deel van je klasgenoten bijna dezelfde kleur zijn.</a:t>
-            </a:r>
-          </a:p>
-          <a:p>
-            <a:pPr>
-              <a:spcBef>
-                <a:spcPts val="1200"/>
-              </a:spcBef>
-              <a:defRPr sz="1400" b="1">
-                <a:solidFill>
-                  <a:srgbClr val="121E31"/>
-                </a:solidFill>
-              </a:defRPr>
-            </a:pPr>
-            <a:r>
-              <a:t>Dat is geen detail. Dat is Werkcollege 6, Deel 6 — nu op jullie eigen data.</a:t>
-            </a:r>
-          </a:p>
-        </p:txBody>
-      </p:sp>
+        </p:spPr>
+      </p:pic>
     </p:spTree>
   </p:cSld>
   <p:clrMapOvr>
@@ -7862,7 +8471,7 @@
               </a:defRPr>
             </a:pPr>
             <a:r>
-              <a:t>3.2 · DE KLAS</a:t>
+              <a:t>DE DRIE BEWERKINGEN</a:t>
             </a:r>
           </a:p>
           <a:p>
@@ -7877,35 +8486,202 @@
               </a:defRPr>
             </a:pPr>
             <a:r>
-              <a:t>Twee op de drie beslissingen is een fold</a:t>
-            </a:r>
-          </a:p>
-        </p:txBody>
-      </p:sp>
-      <p:pic>
-        <p:nvPicPr>
-          <p:cNvPr id="4" name="Picture 3" descr="wc8_acties.png"/>
-          <p:cNvPicPr>
-            <a:picLocks noChangeAspect="1"/>
-          </p:cNvPicPr>
+              <a:t>Uit het hoorcollege, op jullie toernooi</a:t>
+            </a:r>
+          </a:p>
+        </p:txBody>
+      </p:sp>
+      <p:sp>
+        <p:nvSpPr>
+          <p:cNvPr id="4" name="Rounded Rectangle 3"/>
+          <p:cNvSpPr/>
           <p:nvPr/>
-        </p:nvPicPr>
-        <p:blipFill>
-          <a:blip r:embed="rId2"/>
-          <a:stretch>
-            <a:fillRect/>
-          </a:stretch>
-        </p:blipFill>
-        <p:spPr>
-          <a:xfrm>
-            <a:off x="901873" y="1600200"/>
-            <a:ext cx="10387949" cy="4572000"/>
+        </p:nvSpPr>
+        <p:spPr>
+          <a:xfrm>
+            <a:off x="731520" y="1600200"/>
+            <a:ext cx="10698480" cy="4480560"/>
+          </a:xfrm>
+          <a:prstGeom prst="roundRect">
+            <a:avLst>
+              <a:gd name="adj" fmla="val 3000"/>
+            </a:avLst>
+          </a:prstGeom>
+          <a:solidFill>
+            <a:srgbClr val="FFFFFF"/>
+          </a:solidFill>
+          <a:ln w="9525">
+            <a:solidFill>
+              <a:srgbClr val="DCE1E6"/>
+            </a:solidFill>
+          </a:ln>
+          <a:effectLst/>
+        </p:spPr>
+        <p:style>
+          <a:lnRef idx="1">
+            <a:schemeClr val="accent1"/>
+          </a:lnRef>
+          <a:fillRef idx="3">
+            <a:schemeClr val="accent1"/>
+          </a:fillRef>
+          <a:effectRef idx="2">
+            <a:schemeClr val="accent1"/>
+          </a:effectRef>
+          <a:fontRef idx="minor">
+            <a:schemeClr val="lt1"/>
+          </a:fontRef>
+        </p:style>
+        <p:txBody>
+          <a:bodyPr rtlCol="0" anchor="ctr"/>
+          <a:lstStyle/>
+          <a:p>
+            <a:pPr algn="ctr"/>
+          </a:p>
+        </p:txBody>
+      </p:sp>
+      <p:sp>
+        <p:nvSpPr>
+          <p:cNvPr id="5" name="TextBox 4"/>
+          <p:cNvSpPr txBox="1"/>
+          <p:nvPr/>
+        </p:nvSpPr>
+        <p:spPr>
+          <a:xfrm>
+            <a:off x="1143000" y="1920240"/>
+            <a:ext cx="9875520" cy="3840480"/>
           </a:xfrm>
           <a:prstGeom prst="rect">
             <a:avLst/>
           </a:prstGeom>
-        </p:spPr>
-      </p:pic>
+          <a:noFill/>
+        </p:spPr>
+        <p:txBody>
+          <a:bodyPr wrap="square">
+            <a:spAutoFit/>
+          </a:bodyPr>
+          <a:lstStyle/>
+          <a:p>
+            <a:pPr>
+              <a:defRPr sz="1300" b="1">
+                <a:solidFill>
+                  <a:srgbClr val="121E31"/>
+                </a:solidFill>
+                <a:latin typeface="Consolas"/>
+              </a:defRPr>
+            </a:pPr>
+            <a:r>
+              <a:t>df["winst"]    = df.groupby(["bot_naam", "simulatie"])["stack"].diff()</a:t>
+            </a:r>
+          </a:p>
+          <a:p>
+            <a:pPr>
+              <a:spcBef>
+                <a:spcPts val="300"/>
+              </a:spcBef>
+              <a:defRPr sz="1200" b="0">
+                <a:solidFill>
+                  <a:srgbClr val="505A64"/>
+                </a:solidFill>
+              </a:defRPr>
+            </a:pPr>
+            <a:r>
+              <a:t>de laadpaal — van stand naar stroom</a:t>
+            </a:r>
+          </a:p>
+          <a:p>
+            <a:pPr>
+              <a:spcBef>
+                <a:spcPts val="1600"/>
+              </a:spcBef>
+              <a:defRPr sz="1300" b="1">
+                <a:solidFill>
+                  <a:srgbClr val="121E31"/>
+                </a:solidFill>
+                <a:latin typeface="Consolas"/>
+              </a:defRPr>
+            </a:pPr>
+            <a:r>
+              <a:t>df["totaal"]   = df.groupby("bot_naam")["winst"].cumsum()</a:t>
+            </a:r>
+          </a:p>
+          <a:p>
+            <a:pPr>
+              <a:spcBef>
+                <a:spcPts val="300"/>
+              </a:spcBef>
+              <a:defRPr sz="1200" b="0">
+                <a:solidFill>
+                  <a:srgbClr val="505A64"/>
+                </a:solidFill>
+              </a:defRPr>
+            </a:pPr>
+            <a:r>
+              <a:t>het gebouw — van losse gebeurtenissen naar een stand</a:t>
+            </a:r>
+          </a:p>
+          <a:p>
+            <a:pPr>
+              <a:spcBef>
+                <a:spcPts val="1600"/>
+              </a:spcBef>
+              <a:defRPr sz="1300" b="1">
+                <a:solidFill>
+                  <a:srgbClr val="121E31"/>
+                </a:solidFill>
+                <a:latin typeface="Consolas"/>
+              </a:defRPr>
+            </a:pPr>
+            <a:r>
+              <a:t>df["tafelgem"] = df.groupby("tafel")["stack"].transform("mean")</a:t>
+            </a:r>
+          </a:p>
+          <a:p>
+            <a:pPr>
+              <a:spcBef>
+                <a:spcPts val="300"/>
+              </a:spcBef>
+              <a:defRPr sz="1200" b="0">
+                <a:solidFill>
+                  <a:srgbClr val="505A64"/>
+                </a:solidFill>
+              </a:defRPr>
+            </a:pPr>
+            <a:r>
+              <a:t>het HR-voorbeeld — het groepsgemiddelde naast elke rij</a:t>
+            </a:r>
+          </a:p>
+          <a:p>
+            <a:pPr>
+              <a:spcBef>
+                <a:spcPts val="2000"/>
+              </a:spcBef>
+              <a:defRPr sz="1500" b="1">
+                <a:solidFill>
+                  <a:srgbClr val="1B4D3E"/>
+                </a:solidFill>
+              </a:defRPr>
+            </a:pPr>
+            <a:r>
+              <a:t>Drie regels, drie nieuwe kolommen. Geen ervan stond in de data die je kreeg.</a:t>
+            </a:r>
+          </a:p>
+          <a:p>
+            <a:pPr>
+              <a:spcBef>
+                <a:spcPts val="1400"/>
+              </a:spcBef>
+              <a:defRPr sz="1300" b="1">
+                <a:solidFill>
+                  <a:srgbClr val="B3261E"/>
+                </a:solidFill>
+              </a:defRPr>
+            </a:pPr>
+            <a:r>
+              <a:t>En die groupby is geen detail: zonder die trek je de eerste hand van de ene bot af van de laatste van de andere, en dan staat er een sprong van duizend chips die niemand gespeeld heeft.</a:t>
+            </a:r>
+          </a:p>
+        </p:txBody>
+      </p:sp>
     </p:spTree>
   </p:cSld>
   <p:clrMapOvr>
@@ -7998,7 +8774,7 @@
               </a:defRPr>
             </a:pPr>
             <a:r>
-              <a:t>3.2 · EN JIJ?</a:t>
+              <a:t>VAN KOLOM NAAR INZICHT</a:t>
             </a:r>
           </a:p>
           <a:p>
@@ -8013,14 +8789,14 @@
               </a:defRPr>
             </a:pPr>
             <a:r>
-              <a:t>Waar sta jij in die verdeling?</a:t>
+              <a:t>Wat je krijgt, wat je maakt, wat je dan ziet</a:t>
             </a:r>
           </a:p>
         </p:txBody>
       </p:sp>
       <p:pic>
         <p:nvPicPr>
-          <p:cNvPr id="4" name="Picture 3" descr="wc8_foldverdeling.png"/>
+          <p:cNvPr id="4" name="Picture 3" descr="wc8_features.png"/>
           <p:cNvPicPr>
             <a:picLocks noChangeAspect="1"/>
           </p:cNvPicPr>
@@ -8034,8 +8810,8 @@
         </p:blipFill>
         <p:spPr>
           <a:xfrm>
-            <a:off x="1848403" y="1600200"/>
-            <a:ext cx="8494889" cy="4572000"/>
+            <a:off x="1429254" y="1600200"/>
+            <a:ext cx="9333186" cy="4572000"/>
           </a:xfrm>
           <a:prstGeom prst="rect">
             <a:avLst/>
@@ -8134,7 +8910,7 @@
               </a:defRPr>
             </a:pPr>
             <a:r>
-              <a:t>DE VERRASSING</a:t>
+              <a:t>ZELF EEN FEATURE BEDENKEN</a:t>
             </a:r>
           </a:p>
           <a:p>
@@ -8149,35 +8925,187 @@
               </a:defRPr>
             </a:pPr>
             <a:r>
-              <a:t>Defensief spelen wérkt hier   ·   r = +0,45</a:t>
-            </a:r>
-          </a:p>
-        </p:txBody>
-      </p:sp>
-      <p:pic>
-        <p:nvPicPr>
-          <p:cNvPr id="4" name="Picture 3" descr="wc8_fold_vs_eindstand.png"/>
-          <p:cNvPicPr>
-            <a:picLocks noChangeAspect="1"/>
-          </p:cNvPicPr>
+              <a:t>Wat zou jij erbij maken?</a:t>
+            </a:r>
+          </a:p>
+        </p:txBody>
+      </p:sp>
+      <p:sp>
+        <p:nvSpPr>
+          <p:cNvPr id="4" name="Rounded Rectangle 3"/>
+          <p:cNvSpPr/>
           <p:nvPr/>
-        </p:nvPicPr>
-        <p:blipFill>
-          <a:blip r:embed="rId2"/>
-          <a:stretch>
-            <a:fillRect/>
-          </a:stretch>
-        </p:blipFill>
-        <p:spPr>
-          <a:xfrm>
-            <a:off x="1999178" y="1600200"/>
-            <a:ext cx="8193338" cy="4572000"/>
+        </p:nvSpPr>
+        <p:spPr>
+          <a:xfrm>
+            <a:off x="731520" y="1600200"/>
+            <a:ext cx="10698480" cy="4480560"/>
+          </a:xfrm>
+          <a:prstGeom prst="roundRect">
+            <a:avLst>
+              <a:gd name="adj" fmla="val 3000"/>
+            </a:avLst>
+          </a:prstGeom>
+          <a:solidFill>
+            <a:srgbClr val="FFFFFF"/>
+          </a:solidFill>
+          <a:ln w="9525">
+            <a:solidFill>
+              <a:srgbClr val="DCE1E6"/>
+            </a:solidFill>
+          </a:ln>
+          <a:effectLst/>
+        </p:spPr>
+        <p:style>
+          <a:lnRef idx="1">
+            <a:schemeClr val="accent1"/>
+          </a:lnRef>
+          <a:fillRef idx="3">
+            <a:schemeClr val="accent1"/>
+          </a:fillRef>
+          <a:effectRef idx="2">
+            <a:schemeClr val="accent1"/>
+          </a:effectRef>
+          <a:fontRef idx="minor">
+            <a:schemeClr val="lt1"/>
+          </a:fontRef>
+        </p:style>
+        <p:txBody>
+          <a:bodyPr rtlCol="0" anchor="ctr"/>
+          <a:lstStyle/>
+          <a:p>
+            <a:pPr algn="ctr"/>
+          </a:p>
+        </p:txBody>
+      </p:sp>
+      <p:sp>
+        <p:nvSpPr>
+          <p:cNvPr id="5" name="TextBox 4"/>
+          <p:cNvSpPr txBox="1"/>
+          <p:nvPr/>
+        </p:nvSpPr>
+        <p:spPr>
+          <a:xfrm>
+            <a:off x="1143000" y="1920240"/>
+            <a:ext cx="9875520" cy="3840480"/>
           </a:xfrm>
           <a:prstGeom prst="rect">
             <a:avLst/>
           </a:prstGeom>
-        </p:spPr>
-      </p:pic>
+          <a:noFill/>
+        </p:spPr>
+        <p:txBody>
+          <a:bodyPr wrap="square">
+            <a:spAutoFit/>
+          </a:bodyPr>
+          <a:lstStyle/>
+          <a:p>
+            <a:pPr>
+              <a:defRPr sz="1600" b="1">
+                <a:solidFill>
+                  <a:srgbClr val="121E31"/>
+                </a:solidFill>
+              </a:defRPr>
+            </a:pPr>
+            <a:r>
+              <a:t>Een goede feature beantwoordt een vraag die in de ruwe kolommen niet te zien is.</a:t>
+            </a:r>
+          </a:p>
+          <a:p>
+            <a:pPr>
+              <a:spcBef>
+                <a:spcPts val="1800"/>
+              </a:spcBef>
+              <a:defRPr sz="1400" b="1">
+                <a:solidFill>
+                  <a:srgbClr val="1B4D3E"/>
+                </a:solidFill>
+              </a:defRPr>
+            </a:pPr>
+            <a:r>
+              <a:t>Drie die ik niet gemaakt heb, en die wel kunnen:</a:t>
+            </a:r>
+          </a:p>
+          <a:p>
+            <a:pPr>
+              <a:spcBef>
+                <a:spcPts val="800"/>
+              </a:spcBef>
+              <a:defRPr sz="1300" b="0">
+                <a:solidFill>
+                  <a:srgbClr val="121E31"/>
+                </a:solidFill>
+                <a:latin typeface="Consolas"/>
+              </a:defRPr>
+            </a:pPr>
+            <a:r>
+              <a:t>hoeveelste_hand_van_de_simulatie   speel je anders als je bijna klaar bent?</a:t>
+            </a:r>
+          </a:p>
+          <a:p>
+            <a:pPr>
+              <a:spcBef>
+                <a:spcPts val="400"/>
+              </a:spcBef>
+              <a:defRPr sz="1300" b="0">
+                <a:solidFill>
+                  <a:srgbClr val="121E31"/>
+                </a:solidFill>
+                <a:latin typeface="Consolas"/>
+              </a:defRPr>
+            </a:pPr>
+            <a:r>
+              <a:t>stack_t.o.v._tafelgemiddelde      ben je de grote of de kleine stapel?</a:t>
+            </a:r>
+          </a:p>
+          <a:p>
+            <a:pPr>
+              <a:spcBef>
+                <a:spcPts val="400"/>
+              </a:spcBef>
+              <a:defRPr sz="1300" b="0">
+                <a:solidFill>
+                  <a:srgbClr val="121E31"/>
+                </a:solidFill>
+                <a:latin typeface="Consolas"/>
+              </a:defRPr>
+            </a:pPr>
+            <a:r>
+              <a:t>handen_sinds_je_laatste_winst     zit je in een reeks verliezen?</a:t>
+            </a:r>
+          </a:p>
+          <a:p>
+            <a:pPr>
+              <a:spcBef>
+                <a:spcPts val="1800"/>
+              </a:spcBef>
+              <a:defRPr sz="1400" b="0">
+                <a:solidFill>
+                  <a:srgbClr val="121E31"/>
+                </a:solidFill>
+              </a:defRPr>
+            </a:pPr>
+            <a:r>
+              <a:t>Die laatste is de interessantste: hij bestaat niet in de data, hij gaat over de vólgorde. En juist daar is pandas goed in.</a:t>
+            </a:r>
+          </a:p>
+          <a:p>
+            <a:pPr>
+              <a:spcBef>
+                <a:spcPts val="1200"/>
+              </a:spcBef>
+              <a:defRPr sz="1400" b="1">
+                <a:solidFill>
+                  <a:srgbClr val="1B4D3E"/>
+                </a:solidFill>
+              </a:defRPr>
+            </a:pPr>
+            <a:r>
+              <a:t>Bedenk er één, maak hem, en kijk of hij samenhangt met je winst. Dat is een compleet data science-onderzoekje in twintig regels.</a:t>
+            </a:r>
+          </a:p>
+        </p:txBody>
+      </p:sp>
     </p:spTree>
   </p:cSld>
   <p:clrMapOvr>
@@ -8270,7 +9198,7 @@
               </a:defRPr>
             </a:pPr>
             <a:r>
-              <a:t>3.3 · GEDRAG LEZEN</a:t>
+              <a:t>TERUG NAAR VISUAL MAANDAG</a:t>
             </a:r>
           </a:p>
           <a:p>
@@ -8285,35 +9213,189 @@
               </a:defRPr>
             </a:pPr>
             <a:r>
-              <a:t>De drempels van de klas, zonder één regel code te zien</a:t>
-            </a:r>
-          </a:p>
-        </p:txBody>
-      </p:sp>
-      <p:pic>
-        <p:nvPicPr>
-          <p:cNvPr id="4" name="Picture 3" descr="wc8_matrix_fold.png"/>
-          <p:cNvPicPr>
-            <a:picLocks noChangeAspect="1"/>
-          </p:cNvPicPr>
+              <a:t>Vijf dingen die je vandaag meteen nodig hebt</a:t>
+            </a:r>
+          </a:p>
+        </p:txBody>
+      </p:sp>
+      <p:sp>
+        <p:nvSpPr>
+          <p:cNvPr id="4" name="Rounded Rectangle 3"/>
+          <p:cNvSpPr/>
           <p:nvPr/>
-        </p:nvPicPr>
-        <p:blipFill>
-          <a:blip r:embed="rId2"/>
-          <a:stretch>
-            <a:fillRect/>
-          </a:stretch>
-        </p:blipFill>
-        <p:spPr>
-          <a:xfrm>
-            <a:off x="2855625" y="1600200"/>
-            <a:ext cx="6480444" cy="4572000"/>
+        </p:nvSpPr>
+        <p:spPr>
+          <a:xfrm>
+            <a:off x="731520" y="1600200"/>
+            <a:ext cx="10698480" cy="4480560"/>
+          </a:xfrm>
+          <a:prstGeom prst="roundRect">
+            <a:avLst>
+              <a:gd name="adj" fmla="val 3000"/>
+            </a:avLst>
+          </a:prstGeom>
+          <a:solidFill>
+            <a:srgbClr val="FFFFFF"/>
+          </a:solidFill>
+          <a:ln w="9525">
+            <a:solidFill>
+              <a:srgbClr val="DCE1E6"/>
+            </a:solidFill>
+          </a:ln>
+          <a:effectLst/>
+        </p:spPr>
+        <p:style>
+          <a:lnRef idx="1">
+            <a:schemeClr val="accent1"/>
+          </a:lnRef>
+          <a:fillRef idx="3">
+            <a:schemeClr val="accent1"/>
+          </a:fillRef>
+          <a:effectRef idx="2">
+            <a:schemeClr val="accent1"/>
+          </a:effectRef>
+          <a:fontRef idx="minor">
+            <a:schemeClr val="lt1"/>
+          </a:fontRef>
+        </p:style>
+        <p:txBody>
+          <a:bodyPr rtlCol="0" anchor="ctr"/>
+          <a:lstStyle/>
+          <a:p>
+            <a:pPr algn="ctr"/>
+          </a:p>
+        </p:txBody>
+      </p:sp>
+      <p:sp>
+        <p:nvSpPr>
+          <p:cNvPr id="5" name="TextBox 4"/>
+          <p:cNvSpPr txBox="1"/>
+          <p:nvPr/>
+        </p:nvSpPr>
+        <p:spPr>
+          <a:xfrm>
+            <a:off x="1143000" y="1920240"/>
+            <a:ext cx="9875520" cy="3840480"/>
           </a:xfrm>
           <a:prstGeom prst="rect">
             <a:avLst/>
           </a:prstGeom>
-        </p:spPr>
-      </p:pic>
+          <a:noFill/>
+        </p:spPr>
+        <p:txBody>
+          <a:bodyPr wrap="square">
+            <a:spAutoFit/>
+          </a:bodyPr>
+          <a:lstStyle/>
+          <a:p>
+            <a:pPr>
+              <a:defRPr sz="1500" b="0">
+                <a:solidFill>
+                  <a:srgbClr val="121E31"/>
+                </a:solidFill>
+                <a:latin typeface="Consolas"/>
+              </a:defRPr>
+            </a:pPr>
+            <a:r>
+              <a:t>1.  filteren        dertig bots in één plot is spaghetti</a:t>
+            </a:r>
+          </a:p>
+          <a:p>
+            <a:pPr>
+              <a:spcBef>
+                <a:spcPts val="600"/>
+              </a:spcBef>
+              <a:defRPr sz="1500" b="0">
+                <a:solidFill>
+                  <a:srgbClr val="121E31"/>
+                </a:solidFill>
+                <a:latin typeface="Consolas"/>
+              </a:defRPr>
+            </a:pPr>
+            <a:r>
+              <a:t>2.  uitlichten      jouw bot in kleur, de rest grijs</a:t>
+            </a:r>
+          </a:p>
+          <a:p>
+            <a:pPr>
+              <a:spcBef>
+                <a:spcPts val="600"/>
+              </a:spcBef>
+              <a:defRPr sz="1500" b="1">
+                <a:solidFill>
+                  <a:srgbClr val="1B4D3E"/>
+                </a:solidFill>
+                <a:latin typeface="Consolas"/>
+              </a:defRPr>
+            </a:pPr>
+            <a:r>
+              <a:t>3.  actietitel      beweer iets, benoem niet alleen</a:t>
+            </a:r>
+          </a:p>
+          <a:p>
+            <a:pPr>
+              <a:spcBef>
+                <a:spcPts val="600"/>
+              </a:spcBef>
+              <a:defRPr sz="1500" b="0">
+                <a:solidFill>
+                  <a:srgbClr val="121E31"/>
+                </a:solidFill>
+                <a:latin typeface="Consolas"/>
+              </a:defRPr>
+            </a:pPr>
+            <a:r>
+              <a:t>4.  annoteren       waar gebeurt het? zet er een streep bij</a:t>
+            </a:r>
+          </a:p>
+          <a:p>
+            <a:pPr>
+              <a:spcBef>
+                <a:spcPts val="600"/>
+              </a:spcBef>
+              <a:defRPr sz="1500" b="0">
+                <a:solidFill>
+                  <a:srgbClr val="121E31"/>
+                </a:solidFill>
+                <a:latin typeface="Consolas"/>
+              </a:defRPr>
+            </a:pPr>
+            <a:r>
+              <a:t>5.  contrast-check  leest je kleur ook voor de rest van de klas?</a:t>
+            </a:r>
+          </a:p>
+          <a:p>
+            <a:pPr>
+              <a:spcBef>
+                <a:spcPts val="2000"/>
+              </a:spcBef>
+              <a:defRPr sz="1300" b="0">
+                <a:solidFill>
+                  <a:srgbClr val="505A64"/>
+                </a:solidFill>
+              </a:defRPr>
+            </a:pPr>
+            <a:r>
+              <a:t>Alles wat hierna komt is daarop gebouwd. De kleurschalen lopen van blauw naar groen en niet van rood naar groen, omdat rood en groen voor een deel van je klasgenoten bijna dezelfde kleur zijn.</a:t>
+            </a:r>
+          </a:p>
+          <a:p>
+            <a:pPr>
+              <a:spcBef>
+                <a:spcPts val="1200"/>
+              </a:spcBef>
+              <a:defRPr sz="1400" b="1">
+                <a:solidFill>
+                  <a:srgbClr val="121E31"/>
+                </a:solidFill>
+              </a:defRPr>
+            </a:pPr>
+            <a:r>
+              <a:t>Dat is geen detail. Dat is Werkcollege 6, Deel 6 — nu op jullie eigen data.</a:t>
+            </a:r>
+          </a:p>
+        </p:txBody>
+      </p:sp>
     </p:spTree>
   </p:cSld>
   <p:clrMapOvr>
@@ -8406,7 +9488,7 @@
               </a:defRPr>
             </a:pPr>
             <a:r>
-              <a:t>3.4 · EN WAT LEVERDE OP?</a:t>
+              <a:t>3.2 · DE KLAS</a:t>
             </a:r>
           </a:p>
           <a:p>
@@ -8421,14 +9503,14 @@
               </a:defRPr>
             </a:pPr>
             <a:r>
-              <a:t>Dezelfde 91 handen, nu op geld</a:t>
+              <a:t>Twee op de drie beslissingen is een fold</a:t>
             </a:r>
           </a:p>
         </p:txBody>
       </p:sp>
       <p:pic>
         <p:nvPicPr>
-          <p:cNvPr id="4" name="Picture 3" descr="wc8_matrix_winst.png"/>
+          <p:cNvPr id="4" name="Picture 3" descr="wc8_acties.png"/>
           <p:cNvPicPr>
             <a:picLocks noChangeAspect="1"/>
           </p:cNvPicPr>
@@ -8442,8 +9524,8 @@
         </p:blipFill>
         <p:spPr>
           <a:xfrm>
-            <a:off x="3657698" y="1600200"/>
-            <a:ext cx="4876299" cy="4572000"/>
+            <a:off x="901873" y="1600200"/>
+            <a:ext cx="10387949" cy="4572000"/>
           </a:xfrm>
           <a:prstGeom prst="rect">
             <a:avLst/>

--- a/powerpoints/Data_Science_Werkcollege8.pptx
+++ b/powerpoints/Data_Science_Werkcollege8.pptx
@@ -612,19 +612,19 @@
           <a:lstStyle/>
           <a:p>
             <a:r>
-              <a:t>Dit is de statistiek die ik er zelf bij heb gezocht, en de uitkomst verraste me: een correlatie van +0,45 tussen fold-percentage en eindstand. In dít veld deden de defensievere bots het beter.</a:t>
+              <a:t>Elke punt is een bot: hoe vaak hij foldde tegen waar hij eindigde. De correlatie is -0,15 — hoe vaak je foldt zegt weinig over waar je eindigt.</a:t>
             </a:r>
           </a:p>
           <a:p/>
           <a:p>
             <a:r>
-              <a:t>Belangrijk om erbij te zeggen: dat is geen algemene pokerwaarheid. Het zegt iets over dit veld — er zitten een paar bots in die alles callen, en die verliezen langzaam hun chips aan iedereen. Tegen een tafel vol defensieve bots zou de lijn andersom kunnen lopen.</a:t>
+              <a:t>Belangrijk: hier staan alleen de studenten in, niet de vijf referentiebots en de testbot. Die spelen wel mee aan tafel en beïnvloeden de chips, maar het zijn geen klasgenoten — en ze vertekenen dit beeld flink. Met hen erbij kwam dezelfde berekening op +0,27 uit in plaats van -0,15, puur omdat de testbot nooit foldt en één referentiebot bijna altijd.</a:t>
             </a:r>
           </a:p>
           <a:p/>
           <a:p>
             <a:r>
-              <a:t>Goede vraag voor de zaal: is dit oorzaak of gevolg?</a:t>
+              <a:t>Goede vraag voor de zaal, ongeacht welke kant de lijn op wijst: is dit oorzaak of gevolg? Een bot die vaker meedoet wint niet vanzelf meer — misschien zijn het gewoon de betere bots die het zich kunnen veroorloven om vaker mee te doen.</a:t>
             </a:r>
           </a:p>
         </p:txBody>
@@ -940,7 +940,7 @@
           <a:p/>
           <a:p>
             <a:r>
-              <a:t>Deze bot eindigde in zijn beste simulatie op 3.520 chips en in zijn slechtste op 0. Zelfde code, zelfde drempels, andere kaarten.</a:t>
+              <a:t>Deze bot eindigde in zijn beste simulatie op 3.810 chips en in zijn slechtste op 0. Zelfde code, zelfde drempels, andere kaarten.</a:t>
             </a:r>
           </a:p>
           <a:p/>
@@ -1104,7 +1104,7 @@
           <a:p/>
           <a:p>
             <a:r>
-              <a:t>In dit voorbeeld is K-10 de duurste hand (-1.010 chips over 10 handen) en A-K de beste (+2.000 over 9).</a:t>
+              <a:t>In dit voorbeeld is A-5 de duurste hand (-1.500 chips over 14 handen) en A-K de beste (+2.050 over 12).</a:t>
             </a:r>
           </a:p>
           <a:p/>
@@ -1180,7 +1180,7 @@
           <a:lstStyle/>
           <a:p>
             <a:r>
-              <a:t>De beste bot haalde gemiddeld 1.690 chips, met een standaarddeviatie van 1.067. De nummer twee zit op 1.666.</a:t>
+              <a:t>De beste bot haalde gemiddeld 1.835 chips, met een standaarddeviatie van 1.345. De nummer twee zit op 1.538.</a:t>
             </a:r>
           </a:p>
           <a:p/>
@@ -1432,7 +1432,7 @@
           <a:lstStyle/>
           <a:p>
             <a:r>
-              <a:t>Dit is het hele bouwpakket: 30 bots. 20 simulaties. 24.000 regels. waarvan 20.912 met een echte beslissing.</a:t>
+              <a:t>Dit is het hele bouwpakket: 22 bots. 20 simulaties. 28.000 regels. waarvan 18.189 met een echte beslissing.</a:t>
             </a:r>
           </a:p>
           <a:p/>
@@ -2158,7 +2158,7 @@
           <a:lstStyle/>
           <a:p>
             <a:r>
-              <a:t>Fold 65.9%, call 21.0%, raise 12.0%.</a:t>
+              <a:t>Fold 67.6%, call 17.6%, raise 12.1%.</a:t>
             </a:r>
           </a:p>
           <a:p/>
@@ -2240,7 +2240,7 @@
           <a:lstStyle/>
           <a:p>
             <a:r>
-              <a:t>De mediaan ligt op 72,3%. De bot die hier oranje is, zit op 75,6%.</a:t>
+              <a:t>De mediaan ligt op 72,3%. De bot die hier oranje is, zit op 74,0%.</a:t>
             </a:r>
           </a:p>
           <a:p/>
@@ -5356,7 +5356,7 @@
               </a:defRPr>
             </a:pPr>
             <a:r>
-              <a:t>20.912 beslissingen van 30 bots. vanmorgen gespeeld</a:t>
+              <a:t>18.189 beslissingen van 22 bots. vanmorgen gespeeld</a:t>
             </a:r>
           </a:p>
           <a:p>
@@ -5504,8 +5504,8 @@
         </p:blipFill>
         <p:spPr>
           <a:xfrm>
-            <a:off x="1848403" y="1600200"/>
-            <a:ext cx="8494889" cy="4572000"/>
+            <a:off x="1899203" y="1600200"/>
+            <a:ext cx="8393289" cy="4572000"/>
           </a:xfrm>
           <a:prstGeom prst="rect">
             <a:avLst/>
@@ -5604,7 +5604,7 @@
               </a:defRPr>
             </a:pPr>
             <a:r>
-              <a:t>DE VERRASSING</a:t>
+              <a:t>HET VERBAND</a:t>
             </a:r>
           </a:p>
           <a:p>
@@ -5619,7 +5619,7 @@
               </a:defRPr>
             </a:pPr>
             <a:r>
-              <a:t>Defensief spelen wérkt hier   ·   r = +0,45</a:t>
+              <a:t>Er is nauwelijks verband   ·   r = -0,15</a:t>
             </a:r>
           </a:p>
         </p:txBody>
@@ -6114,7 +6114,7 @@
               </a:defRPr>
             </a:pPr>
             <a:r>
-              <a:t>2-2       97x gespeeld    64% gefold    gemiddeld +33 chips</a:t>
+              <a:t>10-9     230x gespeeld    60% gefold    gemiddeld +22 chips</a:t>
             </a:r>
           </a:p>
           <a:p>
@@ -6130,7 +6130,7 @@
               </a:defRPr>
             </a:pPr>
             <a:r>
-              <a:t>Q-9      245x gespeeld    59% gefold    gemiddeld +16 chips</a:t>
+              <a:t>K-8      259x gespeeld    56% gefold    gemiddeld +18 chips</a:t>
             </a:r>
           </a:p>
           <a:p>
@@ -6146,7 +6146,7 @@
               </a:defRPr>
             </a:pPr>
             <a:r>
-              <a:t>K-7      283x gespeeld    56% gefold    gemiddeld +14 chips</a:t>
+              <a:t>6-6       90x gespeeld    51% gefold    gemiddeld +14 chips</a:t>
             </a:r>
           </a:p>
           <a:p>
@@ -6162,7 +6162,7 @@
               </a:defRPr>
             </a:pPr>
             <a:r>
-              <a:t>K-3      223x gespeeld    63% gefold    gemiddeld +12 chips</a:t>
+              <a:t>A-8      200x gespeeld    52% gefold    gemiddeld +14 chips</a:t>
             </a:r>
           </a:p>
           <a:p>
@@ -6178,7 +6178,7 @@
               </a:defRPr>
             </a:pPr>
             <a:r>
-              <a:t>K-8      271x gespeeld    53% gefold    gemiddeld +8 chips</a:t>
+              <a:t>K-7      221x gespeeld    61% gefold    gemiddeld +13 chips</a:t>
             </a:r>
           </a:p>
           <a:p>
@@ -6477,8 +6477,8 @@
         </p:blipFill>
         <p:spPr>
           <a:xfrm>
-            <a:off x="1934404" y="1600200"/>
-            <a:ext cx="8322886" cy="4572000"/>
+            <a:off x="1995137" y="1600200"/>
+            <a:ext cx="8201420" cy="4572000"/>
           </a:xfrm>
           <a:prstGeom prst="rect">
             <a:avLst/>
@@ -6613,8 +6613,8 @@
         </p:blipFill>
         <p:spPr>
           <a:xfrm>
-            <a:off x="2261341" y="1600200"/>
-            <a:ext cx="7669013" cy="4572000"/>
+            <a:off x="2169441" y="1600200"/>
+            <a:ext cx="7852812" cy="4572000"/>
           </a:xfrm>
           <a:prstGeom prst="rect">
             <a:avLst/>
@@ -7021,8 +7021,8 @@
         </p:blipFill>
         <p:spPr>
           <a:xfrm>
-            <a:off x="2233812" y="1600200"/>
-            <a:ext cx="7724071" cy="4572000"/>
+            <a:off x="2044310" y="1600200"/>
+            <a:ext cx="8103074" cy="4572000"/>
           </a:xfrm>
           <a:prstGeom prst="rect">
             <a:avLst/>
